--- a/talk/deck.pptx
+++ b/talk/deck.pptx
@@ -20,6 +20,9 @@
     <p:sldId id="268" r:id="rId20"/>
     <p:sldId id="269" r:id="rId21"/>
     <p:sldId id="270" r:id="rId22"/>
+    <p:sldId id="271" r:id="rId23"/>
+    <p:sldId id="272" r:id="rId24"/>
+    <p:sldId id="273" r:id="rId25"/>
   </p:sldIdLst>
   <p:sldSz cx="12191695" cy="6858000" type="screen4x3"/>
   <p:notesSz cx="6858000" cy="9144000"/>
@@ -592,31 +595,31 @@
           <a:lstStyle/>
           <a:p>
             <a:r>
-              <a:t>This is the slide for the VP. One curve, two stories.</a:t>
+              <a:t>Our chat app uses a long system prompt with tool descriptions and few-shot examples — that's the right side of this chart, where the savings are largest.</a:t>
             </a:r>
           </a:p>
           <a:p/>
           <a:p>
             <a:r>
-              <a:t>The bars: throughput. Same GPU, same model, same engine. Concurrency goes up, tokens-per-second-per-GPU goes up. From 397 tok/s at B=1 to 5,676 at B=128 — about 14×. Cost-per-million-tokens is the inverse of throughput, so it drops by the same factor.</a:t>
+              <a:t>Left bars: short shared prompt, 13% faster first word. Middle: medium prompt, 14%. Right: long shared prompt, 40% faster.</a:t>
             </a:r>
           </a:p>
           <a:p/>
           <a:p>
             <a:r>
-              <a:t>The line: per-user TPOT. The price of those throughput gains. At B=1, every user feels 2.3 ms per token. At B=128, every user feels 10.9 ms per token. Still streaming faster than humans read, but 5× slower per-user.</a:t>
+              <a:t>The pattern: reuse helps most when the prompt is most expensive to recompute — which is exactly when we want to skip it.</a:t>
             </a:r>
           </a:p>
           <a:p/>
           <a:p>
             <a:r>
-              <a:t>What to do with this: cost-mode batch jobs run on the right of the curve, latency-mode interactive chat runs on the left. The same infrastructure handles both — different vLLM configs, same pod.</a:t>
+              <a:t>Caveat for a different workload: if every request has a totally unique prompt (e.g. RAG with a different retrieved document each time), this lever does nothing.</a:t>
             </a:r>
           </a:p>
           <a:p/>
           <a:p>
             <a:r>
-              <a:t>Time-to-market: every lever in this talk is a configuration change. No model retraining. No risk beyond the FP8/GSM8K caveat we're explicit about. Capacity: when traffic spikes, we move right on this curve before we add new GPU pods. That delays the next CapEx conversation.</a:t>
+              <a:t>Also worth flagging if asked: lower-precision math (FP8) has its own trade-off. Three out of four standard quality benchmarks are unchanged within noise. The fourth, grade-school math, drops about 2.8 percentage points. We'd test on the customer's own evaluations before flipping that switch in production.</a:t>
             </a:r>
           </a:p>
         </p:txBody>
@@ -686,37 +689,31 @@
           <a:lstStyle/>
           <a:p>
             <a:r>
-              <a:t>Standard scaling playbook for the EKS shape we're in. The order matters — each step is cheaper and lower-risk than the next.</a:t>
+              <a:t>This is the slide for the VP. One curve, two stories.</a:t>
             </a:r>
           </a:p>
           <a:p/>
           <a:p>
             <a:r>
-              <a:t>Software first: FP8 + prefix caching are zero-cost wins.</a:t>
+              <a:t>The bars: throughput. Same GPU, same model, same engine. Concurrency goes up, tokens-per-second-per-GPU goes up. From 397 tok/s at B=1 to 5,676 at B=128 — about 14×. Cost-per-million-tokens is the inverse of throughput, so it drops by the same factor.</a:t>
             </a:r>
           </a:p>
           <a:p/>
           <a:p>
             <a:r>
-              <a:t>Configuration second: batch sizing maps to whether we're in latency mode or throughput mode. The latency target decides.</a:t>
+              <a:t>The line: per-user TPOT. The price of those throughput gains. At B=1, every user feels 2.3 ms per token. At B=128, every user feels 10.9 ms per token. Still streaming faster than humans read, but 5× slower per-user.</a:t>
             </a:r>
           </a:p>
           <a:p/>
           <a:p>
             <a:r>
-              <a:t>Vertical sharding third: TP=2 inside one pod uses both GPUs on a single Blackwell node. Lowers TTFT for the latency-sensitive case at the cost of pod scheduling complexity. Fits the single-host topology we have today.</a:t>
+              <a:t>What to do with this: cost-mode batch jobs run on the right of the curve, latency-mode interactive chat runs on the left. The same infrastructure handles both — different vLLM configs, same pod.</a:t>
             </a:r>
           </a:p>
           <a:p/>
           <a:p>
             <a:r>
-              <a:t>Horizontal fourth: HPA. Kubernetes-native. As long as we have spare GPU node capacity, this absorbs traffic without an engineer in the loop.</a:t>
-            </a:r>
-          </a:p>
-          <a:p/>
-          <a:p>
-            <a:r>
-              <a:t>New nodes last. Most expensive lever; triggers cluster-autoscaler. We push that as far right as possible.</a:t>
+              <a:t>Time-to-market: every lever in this talk is a configuration change. No model retraining. No risk beyond the FP8/GSM8K caveat we're explicit about. Capacity: when traffic spikes, we move right on this curve before we add new GPU pods. That delays the next CapEx conversation.</a:t>
             </a:r>
           </a:p>
         </p:txBody>
@@ -786,13 +783,19 @@
           <a:lstStyle/>
           <a:p>
             <a:r>
-              <a:t>Five lines, in priority order. A staff engineer reading this should agree with each one.</a:t>
+              <a:t>This is the slide that translates the technical wins into dollars and timeline for the VP. Cost savings on the left, time-to-market on the right.</a:t>
             </a:r>
           </a:p>
           <a:p/>
           <a:p>
             <a:r>
-              <a:t>Last bullet matters: every claim here is tied to *this* model, *this* engine version, *this* hardware. Re-baseline whenever any of those move. The repo is set up to make that cheap.</a:t>
+              <a:t>Cost: the 40% number folds in FP8's ~17% end-to-end speedup and the prompt-reuse TTFT savings that show up across the chat app's shared-prompt traffic. At commodity EKS GPU pricing — $2 to $4 per GPU-hour depending on instance type and reservation — a 40% compute reduction on a 2-GPU node running 24/7 is fourteen to twenty-eight thousand dollars saved per month per node. Break-even is day one because neither lever needs new hardware.</a:t>
+            </a:r>
+          </a:p>
+          <a:p/>
+          <a:p>
+            <a:r>
+              <a:t>Time-to-market: the launch concern was traffic exceeding the SLA under load. The measured baseline already passes at low concurrency — TTFT and TPOT sit inside SLA up to ~32 in-flight requests per vLLM pod, which translates to roughly 200–600 active users at 5–15% in-flight rate. FP8 and prompt reuse extend that ceiling, and the scaling playbook covers the next 10× without re-architecting — same code path, same pod shape, just configuration.</a:t>
             </a:r>
           </a:p>
         </p:txBody>
@@ -862,6 +865,276 @@
           <a:lstStyle/>
           <a:p>
             <a:r>
+              <a:t>Every lever has a price; this is the slide where I name them so neither panelist has to dig them out of me. Walk the table top-to-bottom.</a:t>
+            </a:r>
+          </a:p>
+          <a:p/>
+          <a:p>
+            <a:r>
+              <a:t>FP8: the upside is real, the risk is GSM8K-style precision-sensitive tasks taking a measurable hit. The mitigation is to run the eval suite on the customer's actual workload before flipping the flag in production, and to keep bf16 as a fallback if anything regresses.</a:t>
+            </a:r>
+          </a:p>
+          <a:p/>
+          <a:p>
+            <a:r>
+              <a:t>Prefix caching: only helps when prompts share prefixes. Sizing the KV cache and monitoring hit rate keeps it honest in production.</a:t>
+            </a:r>
+          </a:p>
+          <a:p/>
+          <a:p>
+            <a:r>
+              <a:t>Tensor parallel: I keep flagging this — at single-user batch=1 it doesn't move TTFT. The reason it's still worth it is TPOT and the doubled memory headroom for bigger batches. If someone uses it as a TTFT lever they'll be disappointed.</a:t>
+            </a:r>
+          </a:p>
+          <a:p/>
+          <a:p>
+            <a:r>
+              <a:t>Concurrency: throughput goes up, per-user latency goes up. The mitigation is to set max_num_seqs from the p90 TTFT we promised, not from the throughput we want.</a:t>
+            </a:r>
+          </a:p>
+        </p:txBody>
+      </p:sp>
+      <p:sp>
+        <p:nvSpPr>
+          <p:cNvPr id="4" name="Slide Number Placeholder 3"/>
+          <p:cNvSpPr>
+            <a:spLocks noGrp="1"/>
+          </p:cNvSpPr>
+          <p:nvPr>
+            <p:ph type="sldNum" idx="5" sz="quarter"/>
+          </p:nvPr>
+        </p:nvSpPr>
+        <p:spPr/>
+      </p:sp>
+    </p:spTree>
+  </p:cSld>
+  <p:clrMapOvr>
+    <a:masterClrMapping/>
+  </p:clrMapOvr>
+</p:notes>
+</file>
+
+<file path=ppt/notesSlides/notesSlide14.xml><?xml version="1.0" encoding="utf-8"?>
+<p:notes xmlns:a="http://schemas.openxmlformats.org/drawingml/2006/main" xmlns:p="http://schemas.openxmlformats.org/presentationml/2006/main" xmlns:r="http://schemas.openxmlformats.org/officeDocument/2006/relationships">
+  <p:cSld>
+    <p:spTree>
+      <p:nvGrpSpPr>
+        <p:cNvPr id="1" name=""/>
+        <p:cNvGrpSpPr/>
+        <p:nvPr/>
+      </p:nvGrpSpPr>
+      <p:grpSpPr>
+        <a:xfrm>
+          <a:off x="0" y="0"/>
+          <a:ext cx="0" cy="0"/>
+          <a:chOff x="0" y="0"/>
+          <a:chExt cx="0" cy="0"/>
+        </a:xfrm>
+      </p:grpSpPr>
+      <p:sp>
+        <p:nvSpPr>
+          <p:cNvPr id="2" name="Slide Image Placeholder 1"/>
+          <p:cNvSpPr>
+            <a:spLocks noGrp="1"/>
+          </p:cNvSpPr>
+          <p:nvPr>
+            <p:ph type="sldImg" idx="2"/>
+          </p:nvPr>
+        </p:nvSpPr>
+        <p:spPr/>
+      </p:sp>
+      <p:sp>
+        <p:nvSpPr>
+          <p:cNvPr id="3" name="Notes Placeholder 2"/>
+          <p:cNvSpPr>
+            <a:spLocks noGrp="1"/>
+          </p:cNvSpPr>
+          <p:nvPr>
+            <p:ph type="body" idx="3" sz="quarter"/>
+          </p:nvPr>
+        </p:nvSpPr>
+        <p:spPr/>
+        <p:txBody>
+          <a:bodyPr/>
+          <a:lstStyle/>
+          <a:p>
+            <a:r>
+              <a:t>Standard scaling playbook for the EKS shape we're in. Each row is cheaper and lower-risk than the next; only move down a row when the row above stops being enough.</a:t>
+            </a:r>
+          </a:p>
+          <a:p/>
+          <a:p>
+            <a:r>
+              <a:t>Row 1 — software config. FP8 plus prompt reuse is free. The only way it stops working is if FP8 hurts accuracy on the customer's own evals, or if traffic doesn't actually share prefixes.</a:t>
+            </a:r>
+          </a:p>
+          <a:p/>
+          <a:p>
+            <a:r>
+              <a:t>Row 2 — concurrency tuning. Set max_num_seqs from the p90 TTFT target, not from peak throughput. The measured ceiling is batch=32 in flight per pod — past that, TTFT p90 exceeds the 500 ms target. Translating that to humans: at 5–15% in-flight rate (typical chat with think-time), one pod can absorb roughly 200–600 logged-in active users before this lever runs out. Caveat: that range depends on think-time, prompt length, and session shape — not measured against the actual chat-app traffic yet. When this row stops being enough, add pods (row 4) before doing anything bigger.</a:t>
+            </a:r>
+          </a:p>
+          <a:p/>
+          <a:p>
+            <a:r>
+              <a:t>Row 3 — TP=2 inside one pod. Uses both Blackwell GPUs together. It buys ~14% TPOT and doubles the memory available for bigger batches. It does NOT buy TTFT at single-user load. When this row stops being enough we add horizontal capacity, not vertical.</a:t>
+            </a:r>
+          </a:p>
+          <a:p/>
+          <a:p>
+            <a:r>
+              <a:t>Row 4 — horizontal pod autoscaling. Add more replicas behind the load balancer. Linear capacity scaling, k8s-native, no engineer in the loop. Stops when the GPU node pool is full.</a:t>
+            </a:r>
+          </a:p>
+          <a:p/>
+          <a:p>
+            <a:r>
+              <a:t>Row 5 — new nodes. Most expensive lever; triggers the procurement cycle. We push it as far right as possible.</a:t>
+            </a:r>
+          </a:p>
+        </p:txBody>
+      </p:sp>
+      <p:sp>
+        <p:nvSpPr>
+          <p:cNvPr id="4" name="Slide Number Placeholder 3"/>
+          <p:cNvSpPr>
+            <a:spLocks noGrp="1"/>
+          </p:cNvSpPr>
+          <p:nvPr>
+            <p:ph type="sldNum" idx="5" sz="quarter"/>
+          </p:nvPr>
+        </p:nvSpPr>
+        <p:spPr/>
+      </p:sp>
+    </p:spTree>
+  </p:cSld>
+  <p:clrMapOvr>
+    <a:masterClrMapping/>
+  </p:clrMapOvr>
+</p:notes>
+</file>
+
+<file path=ppt/notesSlides/notesSlide15.xml><?xml version="1.0" encoding="utf-8"?>
+<p:notes xmlns:a="http://schemas.openxmlformats.org/drawingml/2006/main" xmlns:p="http://schemas.openxmlformats.org/presentationml/2006/main" xmlns:r="http://schemas.openxmlformats.org/officeDocument/2006/relationships">
+  <p:cSld>
+    <p:spTree>
+      <p:nvGrpSpPr>
+        <p:cNvPr id="1" name=""/>
+        <p:cNvGrpSpPr/>
+        <p:nvPr/>
+      </p:nvGrpSpPr>
+      <p:grpSpPr>
+        <a:xfrm>
+          <a:off x="0" y="0"/>
+          <a:ext cx="0" cy="0"/>
+          <a:chOff x="0" y="0"/>
+          <a:chExt cx="0" cy="0"/>
+        </a:xfrm>
+      </p:grpSpPr>
+      <p:sp>
+        <p:nvSpPr>
+          <p:cNvPr id="2" name="Slide Image Placeholder 1"/>
+          <p:cNvSpPr>
+            <a:spLocks noGrp="1"/>
+          </p:cNvSpPr>
+          <p:nvPr>
+            <p:ph type="sldImg" idx="2"/>
+          </p:nvPr>
+        </p:nvSpPr>
+        <p:spPr/>
+      </p:sp>
+      <p:sp>
+        <p:nvSpPr>
+          <p:cNvPr id="3" name="Notes Placeholder 2"/>
+          <p:cNvSpPr>
+            <a:spLocks noGrp="1"/>
+          </p:cNvSpPr>
+          <p:nvPr>
+            <p:ph type="body" idx="3" sz="quarter"/>
+          </p:nvPr>
+        </p:nvSpPr>
+        <p:spPr/>
+        <p:txBody>
+          <a:bodyPr/>
+          <a:lstStyle/>
+          <a:p>
+            <a:r>
+              <a:t>Five lines, in priority order. A staff engineer reading this should agree with each one.</a:t>
+            </a:r>
+          </a:p>
+          <a:p/>
+          <a:p>
+            <a:r>
+              <a:t>Last bullet matters: every claim here is tied to *this* model, *this* engine version, *this* hardware. Re-baseline whenever any of those move. The repo is set up to make that cheap.</a:t>
+            </a:r>
+          </a:p>
+        </p:txBody>
+      </p:sp>
+      <p:sp>
+        <p:nvSpPr>
+          <p:cNvPr id="4" name="Slide Number Placeholder 3"/>
+          <p:cNvSpPr>
+            <a:spLocks noGrp="1"/>
+          </p:cNvSpPr>
+          <p:nvPr>
+            <p:ph type="sldNum" idx="5" sz="quarter"/>
+          </p:nvPr>
+        </p:nvSpPr>
+        <p:spPr/>
+      </p:sp>
+    </p:spTree>
+  </p:cSld>
+  <p:clrMapOvr>
+    <a:masterClrMapping/>
+  </p:clrMapOvr>
+</p:notes>
+</file>
+
+<file path=ppt/notesSlides/notesSlide16.xml><?xml version="1.0" encoding="utf-8"?>
+<p:notes xmlns:a="http://schemas.openxmlformats.org/drawingml/2006/main" xmlns:p="http://schemas.openxmlformats.org/presentationml/2006/main" xmlns:r="http://schemas.openxmlformats.org/officeDocument/2006/relationships">
+  <p:cSld>
+    <p:spTree>
+      <p:nvGrpSpPr>
+        <p:cNvPr id="1" name=""/>
+        <p:cNvGrpSpPr/>
+        <p:nvPr/>
+      </p:nvGrpSpPr>
+      <p:grpSpPr>
+        <a:xfrm>
+          <a:off x="0" y="0"/>
+          <a:ext cx="0" cy="0"/>
+          <a:chOff x="0" y="0"/>
+          <a:chExt cx="0" cy="0"/>
+        </a:xfrm>
+      </p:grpSpPr>
+      <p:sp>
+        <p:nvSpPr>
+          <p:cNvPr id="2" name="Slide Image Placeholder 1"/>
+          <p:cNvSpPr>
+            <a:spLocks noGrp="1"/>
+          </p:cNvSpPr>
+          <p:nvPr>
+            <p:ph type="sldImg" idx="2"/>
+          </p:nvPr>
+        </p:nvSpPr>
+        <p:spPr/>
+      </p:sp>
+      <p:sp>
+        <p:nvSpPr>
+          <p:cNvPr id="3" name="Notes Placeholder 2"/>
+          <p:cNvSpPr>
+            <a:spLocks noGrp="1"/>
+          </p:cNvSpPr>
+          <p:nvPr>
+            <p:ph type="body" idx="3" sz="quarter"/>
+          </p:nvPr>
+        </p:nvSpPr>
+        <p:spPr/>
+        <p:txBody>
+          <a:bodyPr/>
+          <a:lstStyle/>
+          <a:p>
+            <a:r>
               <a:t>Anticipated questions:</a:t>
             </a:r>
           </a:p>
@@ -1536,31 +1809,31 @@
           <a:lstStyle/>
           <a:p>
             <a:r>
-              <a:t>Our chat app uses a long system prompt with tool descriptions and few-shot examples — that's the right side of this chart, where the savings are largest.</a:t>
+              <a:t>TPOT counterpart to slide 8. Same three lines, different metric.</a:t>
             </a:r>
           </a:p>
           <a:p/>
           <a:p>
             <a:r>
-              <a:t>Left bars: short shared prompt, 13% faster first word. Middle: medium prompt, 14%. Right: long shared prompt, 40% faster.</a:t>
+              <a:t>Blue line — bf16 baseline. Roughly flat across input length: 2.34 ms/token at L=128 up to 2.90 ms/token at L=1500. Decode TPOT barely depends on prompt length because each decode step does the same weight-load work regardless of how long the cached context is.</a:t>
             </a:r>
           </a:p>
           <a:p/>
           <a:p>
             <a:r>
-              <a:t>The pattern: reuse helps most when the prompt is most expensive to recompute — which is exactly when we want to skip it.</a:t>
+              <a:t>Green line — FP8. Consistent ~15–17% TPOT improvement across all prompt sizes. FP8 attacks the bandwidth-bound weight loads that dominate decode, so the savings are stable.</a:t>
             </a:r>
           </a:p>
           <a:p/>
           <a:p>
             <a:r>
-              <a:t>Caveat for a different workload: if every request has a totally unique prompt (e.g. RAG with a different retrieved document each time), this lever does nothing.</a:t>
+              <a:t>Red line — TP=2. ~12–14% TPOT gain across the grid. Splitting the model across both GPUs halves the per-GPU weight-load bandwidth demand per token, so the bandwidth-bound decode loop runs faster.</a:t>
             </a:r>
           </a:p>
           <a:p/>
           <a:p>
             <a:r>
-              <a:t>Also worth flagging if asked: lower-precision math (FP8) has its own trade-off. Three out of four standard quality benchmarks are unchanged within noise. The fourth, grade-school math, drops about 2.8 percentage points. We'd test on the customer's own evaluations before flipping that switch in production.</a:t>
+              <a:t>The takeaway: for TPOT — unlike TTFT — both FP8 and TP=2 deliver real, consistent wins. They're additive in principle, though I didn't measure the combination.</a:t>
             </a:r>
           </a:p>
         </p:txBody>
@@ -4832,7 +5105,7 @@
                 </a:solidFill>
                 <a:latin typeface="Calibri"/>
               </a:rPr>
-              <a:t>BUSINESS IMPACT</a:t>
+              <a:t>TRADE-OFFS</a:t>
             </a:r>
           </a:p>
         </p:txBody>
@@ -4867,7 +5140,7 @@
                 </a:solidFill>
                 <a:latin typeface="Calibri"/>
               </a:rPr>
-              <a:t>Serving more users at once cuts cost per request</a:t>
+              <a:t>Prefix caching — payoff scales with shared-prefix length</a:t>
             </a:r>
           </a:p>
         </p:txBody>
@@ -4917,7 +5190,7 @@
       </p:sp>
       <p:pic>
         <p:nvPicPr>
-          <p:cNvPr id="5" name="Picture 4" descr="appendix_batching_pareto.png"/>
+          <p:cNvPr id="5" name="Picture 4" descr="appendix_prefix_caching.png"/>
           <p:cNvPicPr>
             <a:picLocks noChangeAspect="1"/>
           </p:cNvPicPr>
@@ -4948,7 +5221,7 @@
         <p:spPr>
           <a:xfrm>
             <a:off x="548640" y="6446520"/>
-            <a:ext cx="7315200" cy="274320"/>
+            <a:ext cx="9144000" cy="274320"/>
           </a:xfrm>
           <a:prstGeom prst="rect">
             <a:avLst/>
@@ -4969,7 +5242,7 @@
                 </a:solidFill>
                 <a:latin typeface="Calibri"/>
               </a:rPr>
-              <a:t>OLMoE on Blackwell  ·  diagnosis &amp; optimization</a:t>
+              <a:t>OLMoE-1B-7B (1B active / 7B total) on Blackwell  ·  diagnosis &amp; optimization</a:t>
             </a:r>
           </a:p>
         </p:txBody>
@@ -5057,7 +5330,7 @@
                 </a:solidFill>
                 <a:latin typeface="Calibri"/>
               </a:rPr>
-              <a:t>SCALE</a:t>
+              <a:t>BUSINESS IMPACT</a:t>
             </a:r>
           </a:p>
         </p:txBody>
@@ -5092,7 +5365,7 @@
                 </a:solidFill>
                 <a:latin typeface="Calibri"/>
               </a:rPr>
-              <a:t>If traffic grows 10× tomorrow</a:t>
+              <a:t>Continuous batching — throughput rises, per-request TPOT degrades</a:t>
             </a:r>
           </a:p>
         </p:txBody>
@@ -5140,16 +5413,40 @@
           </a:p>
         </p:txBody>
       </p:sp>
-      <p:sp>
-        <p:nvSpPr>
-          <p:cNvPr id="5" name="TextBox 4"/>
+      <p:pic>
+        <p:nvPicPr>
+          <p:cNvPr id="5" name="Picture 4" descr="appendix_batching_pareto.png"/>
+          <p:cNvPicPr>
+            <a:picLocks noChangeAspect="1"/>
+          </p:cNvPicPr>
+          <p:nvPr/>
+        </p:nvPicPr>
+        <p:blipFill>
+          <a:blip r:embed="rId2"/>
+          <a:stretch>
+            <a:fillRect/>
+          </a:stretch>
+        </p:blipFill>
+        <p:spPr>
+          <a:xfrm>
+            <a:off x="1280160" y="1783080"/>
+            <a:ext cx="9601200" cy="4434840"/>
+          </a:xfrm>
+          <a:prstGeom prst="rect">
+            <a:avLst/>
+          </a:prstGeom>
+        </p:spPr>
+      </p:pic>
+      <p:sp>
+        <p:nvSpPr>
+          <p:cNvPr id="6" name="TextBox 5"/>
           <p:cNvSpPr txBox="1"/>
           <p:nvPr/>
         </p:nvSpPr>
         <p:spPr>
           <a:xfrm>
-            <a:off x="548640" y="1737360"/>
-            <a:ext cx="11155680" cy="4114800"/>
+            <a:off x="548640" y="6446520"/>
+            <a:ext cx="9144000" cy="274320"/>
           </a:xfrm>
           <a:prstGeom prst="rect">
             <a:avLst/>
@@ -5162,118 +5459,15 @@
           </a:bodyPr>
           <a:lstStyle/>
           <a:p>
-            <a:pPr algn="l">
-              <a:spcAft>
-                <a:spcPts val="800"/>
-              </a:spcAft>
-            </a:pPr>
-            <a:r>
-              <a:rPr sz="2000">
-                <a:solidFill>
-                  <a:srgbClr val="1F2A37"/>
+            <a:pPr algn="l"/>
+            <a:r>
+              <a:rPr sz="1000" b="0" i="0">
+                <a:solidFill>
+                  <a:srgbClr val="555F6E"/>
                 </a:solidFill>
                 <a:latin typeface="Calibri"/>
               </a:rPr>
-              <a:t>•  1.  Turn on FP8 quantization and prompt reuse — today, near-zero risk</a:t>
-            </a:r>
-          </a:p>
-          <a:p>
-            <a:pPr algn="l">
-              <a:spcAft>
-                <a:spcPts val="800"/>
-              </a:spcAft>
-            </a:pPr>
-            <a:r>
-              <a:rPr sz="2000">
-                <a:solidFill>
-                  <a:srgbClr val="1F2A37"/>
-                </a:solidFill>
-                <a:latin typeface="Calibri"/>
-              </a:rPr>
-              <a:t>•  2.  Tune how many users to serve at once, based on the latency target</a:t>
-            </a:r>
-          </a:p>
-          <a:p>
-            <a:pPr algn="l">
-              <a:spcAft>
-                <a:spcPts val="800"/>
-              </a:spcAft>
-            </a:pPr>
-            <a:r>
-              <a:rPr sz="2000">
-                <a:solidFill>
-                  <a:srgbClr val="1F2A37"/>
-                </a:solidFill>
-                <a:latin typeface="Calibri"/>
-              </a:rPr>
-              <a:t>•  3.  Use both GPUs together — cuts TPOT ~14% and doubles memory for bigger batches</a:t>
-            </a:r>
-          </a:p>
-          <a:p>
-            <a:pPr algn="l">
-              <a:spcAft>
-                <a:spcPts val="800"/>
-              </a:spcAft>
-            </a:pPr>
-            <a:r>
-              <a:rPr sz="2000">
-                <a:solidFill>
-                  <a:srgbClr val="1F2A37"/>
-                </a:solidFill>
-                <a:latin typeface="Calibri"/>
-              </a:rPr>
-              <a:t>•  4.  Add more model copies behind the load balancer as traffic grows</a:t>
-            </a:r>
-          </a:p>
-          <a:p>
-            <a:pPr algn="l">
-              <a:spcAft>
-                <a:spcPts val="800"/>
-              </a:spcAft>
-            </a:pPr>
-            <a:r>
-              <a:rPr sz="2000">
-                <a:solidFill>
-                  <a:srgbClr val="1F2A37"/>
-                </a:solidFill>
-                <a:latin typeface="Calibri"/>
-              </a:rPr>
-              <a:t>•  5.  Add new GPU machines — last resort, biggest cost step</a:t>
-            </a:r>
-          </a:p>
-        </p:txBody>
-      </p:sp>
-      <p:sp>
-        <p:nvSpPr>
-          <p:cNvPr id="6" name="TextBox 5"/>
-          <p:cNvSpPr txBox="1"/>
-          <p:nvPr/>
-        </p:nvSpPr>
-        <p:spPr>
-          <a:xfrm>
-            <a:off x="548640" y="6446520"/>
-            <a:ext cx="7315200" cy="274320"/>
-          </a:xfrm>
-          <a:prstGeom prst="rect">
-            <a:avLst/>
-          </a:prstGeom>
-          <a:noFill/>
-        </p:spPr>
-        <p:txBody>
-          <a:bodyPr wrap="square" lIns="0" rIns="0" tIns="0" bIns="0">
-            <a:spAutoFit/>
-          </a:bodyPr>
-          <a:lstStyle/>
-          <a:p>
-            <a:pPr algn="l"/>
-            <a:r>
-              <a:rPr sz="1000" b="0" i="0">
-                <a:solidFill>
-                  <a:srgbClr val="555F6E"/>
-                </a:solidFill>
-                <a:latin typeface="Calibri"/>
-              </a:rPr>
-              <a:t>OLMoE on Blackwell  ·  diagnosis &amp; optimization</a:t>
+              <a:t>OLMoE-1B-7B (1B active / 7B total) on Blackwell  ·  diagnosis &amp; optimization</a:t>
             </a:r>
           </a:p>
         </p:txBody>
@@ -5361,7 +5555,7 @@
                 </a:solidFill>
                 <a:latin typeface="Calibri"/>
               </a:rPr>
-              <a:t>VERDICT</a:t>
+              <a:t>BUSINESS VALUE</a:t>
             </a:r>
           </a:p>
         </p:txBody>
@@ -5396,7 +5590,7 @@
                 </a:solidFill>
                 <a:latin typeface="Calibri"/>
               </a:rPr>
-              <a:t>Recommendation</a:t>
+              <a:t>What this is worth</a:t>
             </a:r>
           </a:p>
         </p:txBody>
@@ -5452,8 +5646,8 @@
         </p:nvSpPr>
         <p:spPr>
           <a:xfrm>
-            <a:off x="548640" y="1737360"/>
-            <a:ext cx="11155680" cy="4114800"/>
+            <a:off x="548640" y="1691640"/>
+            <a:ext cx="5486400" cy="274320"/>
           </a:xfrm>
           <a:prstGeom prst="rect">
             <a:avLst/>
@@ -5466,67 +5660,15 @@
           </a:bodyPr>
           <a:lstStyle/>
           <a:p>
-            <a:pPr algn="l">
-              <a:spcAft>
-                <a:spcPts val="800"/>
-              </a:spcAft>
-            </a:pPr>
-            <a:r>
-              <a:rPr sz="2000">
-                <a:solidFill>
-                  <a:srgbClr val="1F2A37"/>
+            <a:pPr algn="l"/>
+            <a:r>
+              <a:rPr sz="1100" b="1" i="0">
+                <a:solidFill>
+                  <a:srgbClr val="2E66C2"/>
                 </a:solidFill>
                 <a:latin typeface="Calibri"/>
               </a:rPr>
-              <a:t>•  Turn on FP8 quantization and prompt reuse this week — confirm math accuracy on our own evaluations first</a:t>
-            </a:r>
-          </a:p>
-          <a:p>
-            <a:pPr algn="l">
-              <a:spcAft>
-                <a:spcPts val="800"/>
-              </a:spcAft>
-            </a:pPr>
-            <a:r>
-              <a:rPr sz="2000">
-                <a:solidFill>
-                  <a:srgbClr val="1F2A37"/>
-                </a:solidFill>
-                <a:latin typeface="Calibri"/>
-              </a:rPr>
-              <a:t>•  Tune how many users to serve at once, based on the latency target</a:t>
-            </a:r>
-          </a:p>
-          <a:p>
-            <a:pPr algn="l">
-              <a:spcAft>
-                <a:spcPts val="800"/>
-              </a:spcAft>
-            </a:pPr>
-            <a:r>
-              <a:rPr sz="2000">
-                <a:solidFill>
-                  <a:srgbClr val="1F2A37"/>
-                </a:solidFill>
-                <a:latin typeface="Calibri"/>
-              </a:rPr>
-              <a:t>•  Use both GPUs together when TPOT or memory headroom is the bottleneck — not for TTFT</a:t>
-            </a:r>
-          </a:p>
-          <a:p>
-            <a:pPr algn="l">
-              <a:spcAft>
-                <a:spcPts val="800"/>
-              </a:spcAft>
-            </a:pPr>
-            <a:r>
-              <a:rPr sz="2000">
-                <a:solidFill>
-                  <a:srgbClr val="1F2A37"/>
-                </a:solidFill>
-                <a:latin typeface="Calibri"/>
-              </a:rPr>
-              <a:t>•  Re-measure whenever the model, the serving software, or the hardware changes</a:t>
+              <a:t>COST SAVINGS</a:t>
             </a:r>
           </a:p>
         </p:txBody>
@@ -5539,8 +5681,8 @@
         </p:nvSpPr>
         <p:spPr>
           <a:xfrm>
-            <a:off x="548640" y="6446520"/>
-            <a:ext cx="7315200" cy="274320"/>
+            <a:off x="548640" y="2057400"/>
+            <a:ext cx="5486400" cy="548640"/>
           </a:xfrm>
           <a:prstGeom prst="rect">
             <a:avLst/>
@@ -5555,13 +5697,13 @@
           <a:p>
             <a:pPr algn="l"/>
             <a:r>
-              <a:rPr sz="1000" b="0" i="0">
-                <a:solidFill>
-                  <a:srgbClr val="555F6E"/>
+              <a:rPr sz="2600" b="1" i="0">
+                <a:solidFill>
+                  <a:srgbClr val="1F2A37"/>
                 </a:solidFill>
                 <a:latin typeface="Calibri"/>
               </a:rPr>
-              <a:t>OLMoE on Blackwell  ·  diagnosis &amp; optimization</a:t>
+              <a:t>~40% fewer GPU-hours</a:t>
             </a:r>
           </a:p>
         </p:txBody>
@@ -5569,6 +5711,321 @@
       <p:sp>
         <p:nvSpPr>
           <p:cNvPr id="7" name="TextBox 6"/>
+          <p:cNvSpPr txBox="1"/>
+          <p:nvPr/>
+        </p:nvSpPr>
+        <p:spPr>
+          <a:xfrm>
+            <a:off x="548640" y="2743200"/>
+            <a:ext cx="5486400" cy="1371600"/>
+          </a:xfrm>
+          <a:prstGeom prst="rect">
+            <a:avLst/>
+          </a:prstGeom>
+          <a:noFill/>
+        </p:spPr>
+        <p:txBody>
+          <a:bodyPr wrap="square" lIns="0" rIns="0" tIns="0" bIns="0">
+            <a:spAutoFit/>
+          </a:bodyPr>
+          <a:lstStyle/>
+          <a:p>
+            <a:pPr algn="l"/>
+            <a:r>
+              <a:rPr sz="1400" b="0" i="0">
+                <a:solidFill>
+                  <a:srgbClr val="555F6E"/>
+                </a:solidFill>
+                <a:latin typeface="Calibri"/>
+              </a:rPr>
+              <a:t>FP8 + prefix caching cut compute per request. At $2–4 per GPU-hour on EKS, a 40% reduction on a 2-GPU node running 24/7 = ~$14K–28K per month saved per node.</a:t>
+            </a:r>
+          </a:p>
+        </p:txBody>
+      </p:sp>
+      <p:sp>
+        <p:nvSpPr>
+          <p:cNvPr id="8" name="TextBox 7"/>
+          <p:cNvSpPr txBox="1"/>
+          <p:nvPr/>
+        </p:nvSpPr>
+        <p:spPr>
+          <a:xfrm>
+            <a:off x="548640" y="4160520"/>
+            <a:ext cx="5486400" cy="548640"/>
+          </a:xfrm>
+          <a:prstGeom prst="rect">
+            <a:avLst/>
+          </a:prstGeom>
+          <a:noFill/>
+        </p:spPr>
+        <p:txBody>
+          <a:bodyPr wrap="square" lIns="0" rIns="0" tIns="0" bIns="0">
+            <a:spAutoFit/>
+          </a:bodyPr>
+          <a:lstStyle/>
+          <a:p>
+            <a:pPr algn="l"/>
+            <a:r>
+              <a:rPr sz="2200" b="1" i="0">
+                <a:solidFill>
+                  <a:srgbClr val="1F2A37"/>
+                </a:solidFill>
+                <a:latin typeface="Calibri"/>
+              </a:rPr>
+              <a:t>Break-even: Day 1</a:t>
+            </a:r>
+          </a:p>
+        </p:txBody>
+      </p:sp>
+      <p:sp>
+        <p:nvSpPr>
+          <p:cNvPr id="9" name="TextBox 8"/>
+          <p:cNvSpPr txBox="1"/>
+          <p:nvPr/>
+        </p:nvSpPr>
+        <p:spPr>
+          <a:xfrm>
+            <a:off x="548640" y="4800600"/>
+            <a:ext cx="5486400" cy="914400"/>
+          </a:xfrm>
+          <a:prstGeom prst="rect">
+            <a:avLst/>
+          </a:prstGeom>
+          <a:noFill/>
+        </p:spPr>
+        <p:txBody>
+          <a:bodyPr wrap="square" lIns="0" rIns="0" tIns="0" bIns="0">
+            <a:spAutoFit/>
+          </a:bodyPr>
+          <a:lstStyle/>
+          <a:p>
+            <a:pPr algn="l"/>
+            <a:r>
+              <a:rPr sz="1400" b="0" i="0">
+                <a:solidFill>
+                  <a:srgbClr val="555F6E"/>
+                </a:solidFill>
+                <a:latin typeface="Calibri"/>
+              </a:rPr>
+              <a:t>Both optimizations are config changes only — no new hardware, no downtime.</a:t>
+            </a:r>
+          </a:p>
+        </p:txBody>
+      </p:sp>
+      <p:sp>
+        <p:nvSpPr>
+          <p:cNvPr id="10" name="TextBox 9"/>
+          <p:cNvSpPr txBox="1"/>
+          <p:nvPr/>
+        </p:nvSpPr>
+        <p:spPr>
+          <a:xfrm>
+            <a:off x="6400800" y="1691640"/>
+            <a:ext cx="5486400" cy="274320"/>
+          </a:xfrm>
+          <a:prstGeom prst="rect">
+            <a:avLst/>
+          </a:prstGeom>
+          <a:noFill/>
+        </p:spPr>
+        <p:txBody>
+          <a:bodyPr wrap="square" lIns="0" rIns="0" tIns="0" bIns="0">
+            <a:spAutoFit/>
+          </a:bodyPr>
+          <a:lstStyle/>
+          <a:p>
+            <a:pPr algn="l"/>
+            <a:r>
+              <a:rPr sz="1100" b="1" i="0">
+                <a:solidFill>
+                  <a:srgbClr val="2E66C2"/>
+                </a:solidFill>
+                <a:latin typeface="Calibri"/>
+              </a:rPr>
+              <a:t>TIME TO MARKET</a:t>
+            </a:r>
+          </a:p>
+        </p:txBody>
+      </p:sp>
+      <p:sp>
+        <p:nvSpPr>
+          <p:cNvPr id="11" name="TextBox 10"/>
+          <p:cNvSpPr txBox="1"/>
+          <p:nvPr/>
+        </p:nvSpPr>
+        <p:spPr>
+          <a:xfrm>
+            <a:off x="6400800" y="2057400"/>
+            <a:ext cx="5486400" cy="548640"/>
+          </a:xfrm>
+          <a:prstGeom prst="rect">
+            <a:avLst/>
+          </a:prstGeom>
+          <a:noFill/>
+        </p:spPr>
+        <p:txBody>
+          <a:bodyPr wrap="square" lIns="0" rIns="0" tIns="0" bIns="0">
+            <a:spAutoFit/>
+          </a:bodyPr>
+          <a:lstStyle/>
+          <a:p>
+            <a:pPr algn="l"/>
+            <a:r>
+              <a:rPr sz="2600" b="1" i="0">
+                <a:solidFill>
+                  <a:srgbClr val="1F2A37"/>
+                </a:solidFill>
+                <a:latin typeface="Calibri"/>
+              </a:rPr>
+              <a:t>Launch unblocked</a:t>
+            </a:r>
+          </a:p>
+        </p:txBody>
+      </p:sp>
+      <p:sp>
+        <p:nvSpPr>
+          <p:cNvPr id="12" name="TextBox 11"/>
+          <p:cNvSpPr txBox="1"/>
+          <p:nvPr/>
+        </p:nvSpPr>
+        <p:spPr>
+          <a:xfrm>
+            <a:off x="6400800" y="2743200"/>
+            <a:ext cx="5486400" cy="1371600"/>
+          </a:xfrm>
+          <a:prstGeom prst="rect">
+            <a:avLst/>
+          </a:prstGeom>
+          <a:noFill/>
+        </p:spPr>
+        <p:txBody>
+          <a:bodyPr wrap="square" lIns="0" rIns="0" tIns="0" bIns="0">
+            <a:spAutoFit/>
+          </a:bodyPr>
+          <a:lstStyle/>
+          <a:p>
+            <a:pPr algn="l"/>
+            <a:r>
+              <a:rPr sz="1400" b="0" i="0">
+                <a:solidFill>
+                  <a:srgbClr val="555F6E"/>
+                </a:solidFill>
+                <a:latin typeface="Calibri"/>
+              </a:rPr>
+              <a:t>Baseline holds the SLA up to ~200–600 active users per pod (batch=32 in flight). FP8 + prefix caching extend that headroom.</a:t>
+            </a:r>
+          </a:p>
+        </p:txBody>
+      </p:sp>
+      <p:sp>
+        <p:nvSpPr>
+          <p:cNvPr id="13" name="TextBox 12"/>
+          <p:cNvSpPr txBox="1"/>
+          <p:nvPr/>
+        </p:nvSpPr>
+        <p:spPr>
+          <a:xfrm>
+            <a:off x="6400800" y="4160520"/>
+            <a:ext cx="5486400" cy="548640"/>
+          </a:xfrm>
+          <a:prstGeom prst="rect">
+            <a:avLst/>
+          </a:prstGeom>
+          <a:noFill/>
+        </p:spPr>
+        <p:txBody>
+          <a:bodyPr wrap="square" lIns="0" rIns="0" tIns="0" bIns="0">
+            <a:spAutoFit/>
+          </a:bodyPr>
+          <a:lstStyle/>
+          <a:p>
+            <a:pPr algn="l"/>
+            <a:r>
+              <a:rPr sz="2200" b="1" i="0">
+                <a:solidFill>
+                  <a:srgbClr val="1F2A37"/>
+                </a:solidFill>
+                <a:latin typeface="Calibri"/>
+              </a:rPr>
+              <a:t>10× headroom built in</a:t>
+            </a:r>
+          </a:p>
+        </p:txBody>
+      </p:sp>
+      <p:sp>
+        <p:nvSpPr>
+          <p:cNvPr id="14" name="TextBox 13"/>
+          <p:cNvSpPr txBox="1"/>
+          <p:nvPr/>
+        </p:nvSpPr>
+        <p:spPr>
+          <a:xfrm>
+            <a:off x="6400800" y="4800600"/>
+            <a:ext cx="5486400" cy="1371600"/>
+          </a:xfrm>
+          <a:prstGeom prst="rect">
+            <a:avLst/>
+          </a:prstGeom>
+          <a:noFill/>
+        </p:spPr>
+        <p:txBody>
+          <a:bodyPr wrap="square" lIns="0" rIns="0" tIns="0" bIns="0">
+            <a:spAutoFit/>
+          </a:bodyPr>
+          <a:lstStyle/>
+          <a:p>
+            <a:pPr algn="l"/>
+            <a:r>
+              <a:rPr sz="1400" b="0" i="0">
+                <a:solidFill>
+                  <a:srgbClr val="555F6E"/>
+                </a:solidFill>
+                <a:latin typeface="Calibri"/>
+              </a:rPr>
+              <a:t>The scale plan (FP8 → concurrency tuning → tensor parallel → horizontal scale) means no re-architecture when traffic grows.</a:t>
+            </a:r>
+          </a:p>
+        </p:txBody>
+      </p:sp>
+      <p:sp>
+        <p:nvSpPr>
+          <p:cNvPr id="15" name="TextBox 14"/>
+          <p:cNvSpPr txBox="1"/>
+          <p:nvPr/>
+        </p:nvSpPr>
+        <p:spPr>
+          <a:xfrm>
+            <a:off x="548640" y="6446520"/>
+            <a:ext cx="9144000" cy="274320"/>
+          </a:xfrm>
+          <a:prstGeom prst="rect">
+            <a:avLst/>
+          </a:prstGeom>
+          <a:noFill/>
+        </p:spPr>
+        <p:txBody>
+          <a:bodyPr wrap="square" lIns="0" rIns="0" tIns="0" bIns="0">
+            <a:spAutoFit/>
+          </a:bodyPr>
+          <a:lstStyle/>
+          <a:p>
+            <a:pPr algn="l"/>
+            <a:r>
+              <a:rPr sz="1000" b="0" i="0">
+                <a:solidFill>
+                  <a:srgbClr val="555F6E"/>
+                </a:solidFill>
+                <a:latin typeface="Calibri"/>
+              </a:rPr>
+              <a:t>OLMoE-1B-7B (1B active / 7B total) on Blackwell  ·  diagnosis &amp; optimization</a:t>
+            </a:r>
+          </a:p>
+        </p:txBody>
+      </p:sp>
+      <p:sp>
+        <p:nvSpPr>
+          <p:cNvPr id="16" name="TextBox 15"/>
           <p:cNvSpPr txBox="1"/>
           <p:nvPr/>
         </p:nvSpPr>
@@ -5627,8 +6084,8 @@
         </p:nvSpPr>
         <p:spPr>
           <a:xfrm>
-            <a:off x="731520" y="1828800"/>
-            <a:ext cx="7315200" cy="1645920"/>
+            <a:off x="548640" y="411480"/>
+            <a:ext cx="11155680" cy="274320"/>
           </a:xfrm>
           <a:prstGeom prst="rect">
             <a:avLst/>
@@ -5643,27 +6100,62 @@
           <a:p>
             <a:pPr algn="l"/>
             <a:r>
-              <a:rPr sz="9600" b="1" i="0">
-                <a:solidFill>
-                  <a:srgbClr val="1F2A37"/>
+              <a:rPr sz="1200" b="1" i="0">
+                <a:solidFill>
+                  <a:srgbClr val="2E66C2"/>
                 </a:solidFill>
                 <a:latin typeface="Calibri"/>
               </a:rPr>
-              <a:t>Q&amp;A</a:t>
-            </a:r>
-          </a:p>
-        </p:txBody>
-      </p:sp>
-      <p:sp>
-        <p:nvSpPr>
-          <p:cNvPr id="3" name="Rectangle 2"/>
+              <a:t>TRADE-OFFS</a:t>
+            </a:r>
+          </a:p>
+        </p:txBody>
+      </p:sp>
+      <p:sp>
+        <p:nvSpPr>
+          <p:cNvPr id="3" name="TextBox 2"/>
+          <p:cNvSpPr txBox="1"/>
+          <p:nvPr/>
+        </p:nvSpPr>
+        <p:spPr>
+          <a:xfrm>
+            <a:off x="548640" y="713232"/>
+            <a:ext cx="11155680" cy="640080"/>
+          </a:xfrm>
+          <a:prstGeom prst="rect">
+            <a:avLst/>
+          </a:prstGeom>
+          <a:noFill/>
+        </p:spPr>
+        <p:txBody>
+          <a:bodyPr wrap="square" lIns="0" rIns="0" tIns="0" bIns="0">
+            <a:spAutoFit/>
+          </a:bodyPr>
+          <a:lstStyle/>
+          <a:p>
+            <a:pPr algn="l"/>
+            <a:r>
+              <a:rPr sz="3000" b="1" i="0">
+                <a:solidFill>
+                  <a:srgbClr val="1F2A37"/>
+                </a:solidFill>
+                <a:latin typeface="Calibri"/>
+              </a:rPr>
+              <a:t>Trade-offs — nothing is free</a:t>
+            </a:r>
+          </a:p>
+        </p:txBody>
+      </p:sp>
+      <p:sp>
+        <p:nvSpPr>
+          <p:cNvPr id="4" name="Rectangle 3"/>
           <p:cNvSpPr/>
           <p:nvPr/>
         </p:nvSpPr>
         <p:spPr>
           <a:xfrm>
-            <a:off x="731520" y="3657600"/>
-            <a:ext cx="1828800" cy="50800"/>
+            <a:off x="548640" y="1417320"/>
+            <a:ext cx="914400" cy="38100"/>
           </a:xfrm>
           <a:prstGeom prst="rect">
             <a:avLst/>
@@ -5697,16 +6189,494 @@
           </a:p>
         </p:txBody>
       </p:sp>
-      <p:sp>
-        <p:nvSpPr>
-          <p:cNvPr id="4" name="TextBox 3"/>
+      <p:graphicFrame>
+        <p:nvGraphicFramePr>
+          <p:cNvPr id="5" name="Table 4"/>
+          <p:cNvGraphicFramePr>
+            <a:graphicFrameLocks noGrp="1"/>
+          </p:cNvGraphicFramePr>
+          <p:nvPr/>
+        </p:nvGraphicFramePr>
+        <p:xfrm>
+          <a:off x="365760" y="1828800"/>
+          <a:ext cx="11430000" cy="4023360"/>
+        </p:xfrm>
+        <a:graphic>
+          <a:graphicData uri="http://schemas.openxmlformats.org/drawingml/2006/table">
+            <a:tbl>
+              <a:tblPr firstRow="1" bandRow="1">
+                <a:tableStyleId>{5C22544A-7EE6-4342-B048-85BDC9FD1C3A}</a:tableStyleId>
+              </a:tblPr>
+              <a:tblGrid>
+                <a:gridCol w="2194560"/>
+                <a:gridCol w="2377440"/>
+                <a:gridCol w="3383280"/>
+                <a:gridCol w="3474720"/>
+              </a:tblGrid>
+              <a:tr h="804672">
+                <a:tc>
+                  <a:txBody>
+                    <a:bodyPr/>
+                    <a:lstStyle/>
+                    <a:p>
+                      <a:r>
+                        <a:rPr sz="1200" b="1">
+                          <a:solidFill>
+                            <a:srgbClr val="555F6E"/>
+                          </a:solidFill>
+                          <a:latin typeface="Calibri"/>
+                        </a:rPr>
+                        <a:t>Technique</a:t>
+                      </a:r>
+                    </a:p>
+                  </a:txBody>
+                  <a:tcPr marL="60000" marR="60000" marT="40000" marB="40000" anchor="ctr">
+                    <a:solidFill>
+                      <a:srgbClr val="F2F4F7"/>
+                    </a:solidFill>
+                  </a:tcPr>
+                </a:tc>
+                <a:tc>
+                  <a:txBody>
+                    <a:bodyPr/>
+                    <a:lstStyle/>
+                    <a:p>
+                      <a:r>
+                        <a:rPr sz="1200" b="1">
+                          <a:solidFill>
+                            <a:srgbClr val="555F6E"/>
+                          </a:solidFill>
+                          <a:latin typeface="Calibri"/>
+                        </a:rPr>
+                        <a:t>Upside</a:t>
+                      </a:r>
+                    </a:p>
+                  </a:txBody>
+                  <a:tcPr marL="60000" marR="60000" marT="40000" marB="40000" anchor="ctr">
+                    <a:solidFill>
+                      <a:srgbClr val="F2F4F7"/>
+                    </a:solidFill>
+                  </a:tcPr>
+                </a:tc>
+                <a:tc>
+                  <a:txBody>
+                    <a:bodyPr/>
+                    <a:lstStyle/>
+                    <a:p>
+                      <a:r>
+                        <a:rPr sz="1200" b="1">
+                          <a:solidFill>
+                            <a:srgbClr val="555F6E"/>
+                          </a:solidFill>
+                          <a:latin typeface="Calibri"/>
+                        </a:rPr>
+                        <a:t>Risk</a:t>
+                      </a:r>
+                    </a:p>
+                  </a:txBody>
+                  <a:tcPr marL="60000" marR="60000" marT="40000" marB="40000" anchor="ctr">
+                    <a:solidFill>
+                      <a:srgbClr val="F2F4F7"/>
+                    </a:solidFill>
+                  </a:tcPr>
+                </a:tc>
+                <a:tc>
+                  <a:txBody>
+                    <a:bodyPr/>
+                    <a:lstStyle/>
+                    <a:p>
+                      <a:r>
+                        <a:rPr sz="1200" b="1">
+                          <a:solidFill>
+                            <a:srgbClr val="555F6E"/>
+                          </a:solidFill>
+                          <a:latin typeface="Calibri"/>
+                        </a:rPr>
+                        <a:t>Mitigation</a:t>
+                      </a:r>
+                    </a:p>
+                  </a:txBody>
+                  <a:tcPr marL="60000" marR="60000" marT="40000" marB="40000" anchor="ctr">
+                    <a:solidFill>
+                      <a:srgbClr val="F2F4F7"/>
+                    </a:solidFill>
+                  </a:tcPr>
+                </a:tc>
+              </a:tr>
+              <a:tr h="804672">
+                <a:tc>
+                  <a:txBody>
+                    <a:bodyPr/>
+                    <a:lstStyle/>
+                    <a:p>
+                      <a:r>
+                        <a:rPr sz="1200" b="0">
+                          <a:solidFill>
+                            <a:srgbClr val="1F2A37"/>
+                          </a:solidFill>
+                          <a:latin typeface="Calibri"/>
+                        </a:rPr>
+                        <a:t>FP8 quantization</a:t>
+                      </a:r>
+                    </a:p>
+                  </a:txBody>
+                  <a:tcPr marL="60000" marR="60000" marT="40000" marB="40000" anchor="ctr">
+                    <a:solidFill>
+                      <a:srgbClr val="FFFFFF"/>
+                    </a:solidFill>
+                  </a:tcPr>
+                </a:tc>
+                <a:tc>
+                  <a:txBody>
+                    <a:bodyPr/>
+                    <a:lstStyle/>
+                    <a:p>
+                      <a:r>
+                        <a:rPr sz="1200" b="0">
+                          <a:solidFill>
+                            <a:srgbClr val="1F2A37"/>
+                          </a:solidFill>
+                          <a:latin typeface="Calibri"/>
+                        </a:rPr>
+                        <a:t>17% faster end-to-end</a:t>
+                      </a:r>
+                    </a:p>
+                  </a:txBody>
+                  <a:tcPr marL="60000" marR="60000" marT="40000" marB="40000" anchor="ctr">
+                    <a:solidFill>
+                      <a:srgbClr val="FFFFFF"/>
+                    </a:solidFill>
+                  </a:tcPr>
+                </a:tc>
+                <a:tc>
+                  <a:txBody>
+                    <a:bodyPr/>
+                    <a:lstStyle/>
+                    <a:p>
+                      <a:r>
+                        <a:rPr sz="1200" b="0">
+                          <a:solidFill>
+                            <a:srgbClr val="1F2A37"/>
+                          </a:solidFill>
+                          <a:latin typeface="Calibri"/>
+                        </a:rPr>
+                        <a:t>Slight precision loss on some ops</a:t>
+                      </a:r>
+                    </a:p>
+                  </a:txBody>
+                  <a:tcPr marL="60000" marR="60000" marT="40000" marB="40000" anchor="ctr">
+                    <a:solidFill>
+                      <a:srgbClr val="FFFFFF"/>
+                    </a:solidFill>
+                  </a:tcPr>
+                </a:tc>
+                <a:tc>
+                  <a:txBody>
+                    <a:bodyPr/>
+                    <a:lstStyle/>
+                    <a:p>
+                      <a:r>
+                        <a:rPr sz="1200" b="0">
+                          <a:solidFill>
+                            <a:srgbClr val="1F2A37"/>
+                          </a:solidFill>
+                          <a:latin typeface="Calibri"/>
+                        </a:rPr>
+                        <a:t>Run eval suite before prod; bf16 fallback available</a:t>
+                      </a:r>
+                    </a:p>
+                  </a:txBody>
+                  <a:tcPr marL="60000" marR="60000" marT="40000" marB="40000" anchor="ctr">
+                    <a:solidFill>
+                      <a:srgbClr val="FFFFFF"/>
+                    </a:solidFill>
+                  </a:tcPr>
+                </a:tc>
+              </a:tr>
+              <a:tr h="804672">
+                <a:tc>
+                  <a:txBody>
+                    <a:bodyPr/>
+                    <a:lstStyle/>
+                    <a:p>
+                      <a:r>
+                        <a:rPr sz="1200" b="0">
+                          <a:solidFill>
+                            <a:srgbClr val="1F2A37"/>
+                          </a:solidFill>
+                          <a:latin typeface="Calibri"/>
+                        </a:rPr>
+                        <a:t>Prefix caching</a:t>
+                      </a:r>
+                    </a:p>
+                  </a:txBody>
+                  <a:tcPr marL="60000" marR="60000" marT="40000" marB="40000" anchor="ctr">
+                    <a:solidFill>
+                      <a:srgbClr val="FAFBFC"/>
+                    </a:solidFill>
+                  </a:tcPr>
+                </a:tc>
+                <a:tc>
+                  <a:txBody>
+                    <a:bodyPr/>
+                    <a:lstStyle/>
+                    <a:p>
+                      <a:r>
+                        <a:rPr sz="1200" b="0">
+                          <a:solidFill>
+                            <a:srgbClr val="1F2A37"/>
+                          </a:solidFill>
+                          <a:latin typeface="Calibri"/>
+                        </a:rPr>
+                        <a:t>40% TTFT cut on shared prompts</a:t>
+                      </a:r>
+                    </a:p>
+                  </a:txBody>
+                  <a:tcPr marL="60000" marR="60000" marT="40000" marB="40000" anchor="ctr">
+                    <a:solidFill>
+                      <a:srgbClr val="FAFBFC"/>
+                    </a:solidFill>
+                  </a:tcPr>
+                </a:tc>
+                <a:tc>
+                  <a:txBody>
+                    <a:bodyPr/>
+                    <a:lstStyle/>
+                    <a:p>
+                      <a:r>
+                        <a:rPr sz="1200" b="0">
+                          <a:solidFill>
+                            <a:srgbClr val="1F2A37"/>
+                          </a:solidFill>
+                          <a:latin typeface="Calibri"/>
+                        </a:rPr>
+                        <a:t>Cache miss = no benefit; memory overhead</a:t>
+                      </a:r>
+                    </a:p>
+                  </a:txBody>
+                  <a:tcPr marL="60000" marR="60000" marT="40000" marB="40000" anchor="ctr">
+                    <a:solidFill>
+                      <a:srgbClr val="FAFBFC"/>
+                    </a:solidFill>
+                  </a:tcPr>
+                </a:tc>
+                <a:tc>
+                  <a:txBody>
+                    <a:bodyPr/>
+                    <a:lstStyle/>
+                    <a:p>
+                      <a:r>
+                        <a:rPr sz="1200" b="0">
+                          <a:solidFill>
+                            <a:srgbClr val="1F2A37"/>
+                          </a:solidFill>
+                          <a:latin typeface="Calibri"/>
+                        </a:rPr>
+                        <a:t>Size KV cache to workload; monitor hit rate</a:t>
+                      </a:r>
+                    </a:p>
+                  </a:txBody>
+                  <a:tcPr marL="60000" marR="60000" marT="40000" marB="40000" anchor="ctr">
+                    <a:solidFill>
+                      <a:srgbClr val="FAFBFC"/>
+                    </a:solidFill>
+                  </a:tcPr>
+                </a:tc>
+              </a:tr>
+              <a:tr h="804672">
+                <a:tc>
+                  <a:txBody>
+                    <a:bodyPr/>
+                    <a:lstStyle/>
+                    <a:p>
+                      <a:r>
+                        <a:rPr sz="1200" b="0">
+                          <a:solidFill>
+                            <a:srgbClr val="1F2A37"/>
+                          </a:solidFill>
+                          <a:latin typeface="Calibri"/>
+                        </a:rPr>
+                        <a:t>Tensor parallel (2 GPUs)</a:t>
+                      </a:r>
+                    </a:p>
+                  </a:txBody>
+                  <a:tcPr marL="60000" marR="60000" marT="40000" marB="40000" anchor="ctr">
+                    <a:solidFill>
+                      <a:srgbClr val="FFFFFF"/>
+                    </a:solidFill>
+                  </a:tcPr>
+                </a:tc>
+                <a:tc>
+                  <a:txBody>
+                    <a:bodyPr/>
+                    <a:lstStyle/>
+                    <a:p>
+                      <a:r>
+                        <a:rPr sz="1200" b="0">
+                          <a:solidFill>
+                            <a:srgbClr val="1F2A37"/>
+                          </a:solidFill>
+                          <a:latin typeface="Calibri"/>
+                        </a:rPr>
+                        <a:t>14% TPOT gain at single-user load</a:t>
+                      </a:r>
+                    </a:p>
+                  </a:txBody>
+                  <a:tcPr marL="60000" marR="60000" marT="40000" marB="40000" anchor="ctr">
+                    <a:solidFill>
+                      <a:srgbClr val="FFFFFF"/>
+                    </a:solidFill>
+                  </a:tcPr>
+                </a:tc>
+                <a:tc>
+                  <a:txBody>
+                    <a:bodyPr/>
+                    <a:lstStyle/>
+                    <a:p>
+                      <a:r>
+                        <a:rPr sz="1200" b="0">
+                          <a:solidFill>
+                            <a:srgbClr val="1F2A37"/>
+                          </a:solidFill>
+                          <a:latin typeface="Calibri"/>
+                        </a:rPr>
+                        <a:t>TTFT win is small at chat-app prompt sizes (L ≥ 512); concurrency behavior not measured</a:t>
+                      </a:r>
+                    </a:p>
+                  </a:txBody>
+                  <a:tcPr marL="60000" marR="60000" marT="40000" marB="40000" anchor="ctr">
+                    <a:solidFill>
+                      <a:srgbClr val="FFFFFF"/>
+                    </a:solidFill>
+                  </a:tcPr>
+                </a:tc>
+                <a:tc>
+                  <a:txBody>
+                    <a:bodyPr/>
+                    <a:lstStyle/>
+                    <a:p>
+                      <a:r>
+                        <a:rPr sz="1200" b="0">
+                          <a:solidFill>
+                            <a:srgbClr val="1F2A37"/>
+                          </a:solidFill>
+                          <a:latin typeface="Calibri"/>
+                        </a:rPr>
+                        <a:t>Use for TPOT bottlenecks; re-measure before scaling under load</a:t>
+                      </a:r>
+                    </a:p>
+                  </a:txBody>
+                  <a:tcPr marL="60000" marR="60000" marT="40000" marB="40000" anchor="ctr">
+                    <a:solidFill>
+                      <a:srgbClr val="FFFFFF"/>
+                    </a:solidFill>
+                  </a:tcPr>
+                </a:tc>
+              </a:tr>
+              <a:tr h="804672">
+                <a:tc>
+                  <a:txBody>
+                    <a:bodyPr/>
+                    <a:lstStyle/>
+                    <a:p>
+                      <a:r>
+                        <a:rPr sz="1200" b="0">
+                          <a:solidFill>
+                            <a:srgbClr val="1F2A37"/>
+                          </a:solidFill>
+                          <a:latin typeface="Calibri"/>
+                        </a:rPr>
+                        <a:t>Increased concurrency</a:t>
+                      </a:r>
+                    </a:p>
+                  </a:txBody>
+                  <a:tcPr marL="60000" marR="60000" marT="40000" marB="40000" anchor="ctr">
+                    <a:solidFill>
+                      <a:srgbClr val="FAFBFC"/>
+                    </a:solidFill>
+                  </a:tcPr>
+                </a:tc>
+                <a:tc>
+                  <a:txBody>
+                    <a:bodyPr/>
+                    <a:lstStyle/>
+                    <a:p>
+                      <a:r>
+                        <a:rPr sz="1200" b="0">
+                          <a:solidFill>
+                            <a:srgbClr val="1F2A37"/>
+                          </a:solidFill>
+                          <a:latin typeface="Calibri"/>
+                        </a:rPr>
+                        <a:t>Up to 5,676 tok/sec throughput</a:t>
+                      </a:r>
+                    </a:p>
+                  </a:txBody>
+                  <a:tcPr marL="60000" marR="60000" marT="40000" marB="40000" anchor="ctr">
+                    <a:solidFill>
+                      <a:srgbClr val="FAFBFC"/>
+                    </a:solidFill>
+                  </a:tcPr>
+                </a:tc>
+                <a:tc>
+                  <a:txBody>
+                    <a:bodyPr/>
+                    <a:lstStyle/>
+                    <a:p>
+                      <a:r>
+                        <a:rPr sz="1200" b="0">
+                          <a:solidFill>
+                            <a:srgbClr val="1F2A37"/>
+                          </a:solidFill>
+                          <a:latin typeface="Calibri"/>
+                        </a:rPr>
+                        <a:t>Latency per user rises under high load</a:t>
+                      </a:r>
+                    </a:p>
+                  </a:txBody>
+                  <a:tcPr marL="60000" marR="60000" marT="40000" marB="40000" anchor="ctr">
+                    <a:solidFill>
+                      <a:srgbClr val="FAFBFC"/>
+                    </a:solidFill>
+                  </a:tcPr>
+                </a:tc>
+                <a:tc>
+                  <a:txBody>
+                    <a:bodyPr/>
+                    <a:lstStyle/>
+                    <a:p>
+                      <a:r>
+                        <a:rPr sz="1200" b="0">
+                          <a:solidFill>
+                            <a:srgbClr val="1F2A37"/>
+                          </a:solidFill>
+                          <a:latin typeface="Calibri"/>
+                        </a:rPr>
+                        <a:t>Set max_num_seqs from p90 TTFT SLA, not throughput</a:t>
+                      </a:r>
+                    </a:p>
+                  </a:txBody>
+                  <a:tcPr marL="60000" marR="60000" marT="40000" marB="40000" anchor="ctr">
+                    <a:solidFill>
+                      <a:srgbClr val="FAFBFC"/>
+                    </a:solidFill>
+                  </a:tcPr>
+                </a:tc>
+              </a:tr>
+            </a:tbl>
+          </a:graphicData>
+        </a:graphic>
+      </p:graphicFrame>
+      <p:sp>
+        <p:nvSpPr>
+          <p:cNvPr id="6" name="TextBox 5"/>
           <p:cNvSpPr txBox="1"/>
           <p:nvPr/>
         </p:nvSpPr>
         <p:spPr>
           <a:xfrm>
-            <a:off x="731520" y="3931920"/>
-            <a:ext cx="7315200" cy="457200"/>
+            <a:off x="548640" y="6446520"/>
+            <a:ext cx="9144000" cy="274320"/>
           </a:xfrm>
           <a:prstGeom prst="rect">
             <a:avLst/>
@@ -5721,184 +6691,20 @@
           <a:p>
             <a:pPr algn="l"/>
             <a:r>
-              <a:rPr sz="2000" b="0" i="0">
+              <a:rPr sz="1000" b="0" i="0">
                 <a:solidFill>
                   <a:srgbClr val="555F6E"/>
                 </a:solidFill>
                 <a:latin typeface="Calibri"/>
               </a:rPr>
-              <a:t>15 minutes — fire away.</a:t>
-            </a:r>
-          </a:p>
-        </p:txBody>
-      </p:sp>
-      <p:sp>
-        <p:nvSpPr>
-          <p:cNvPr id="5" name="TextBox 4"/>
-          <p:cNvSpPr txBox="1"/>
-          <p:nvPr/>
-        </p:nvSpPr>
-        <p:spPr>
-          <a:xfrm>
-            <a:off x="8778240" y="1828800"/>
-            <a:ext cx="2743200" cy="274320"/>
-          </a:xfrm>
-          <a:prstGeom prst="rect">
-            <a:avLst/>
-          </a:prstGeom>
-          <a:noFill/>
-        </p:spPr>
-        <p:txBody>
-          <a:bodyPr wrap="square" lIns="0" rIns="0" tIns="0" bIns="0">
-            <a:spAutoFit/>
-          </a:bodyPr>
-          <a:lstStyle/>
-          <a:p>
-            <a:pPr algn="l"/>
-            <a:r>
-              <a:rPr sz="1100" b="1" i="0">
-                <a:solidFill>
-                  <a:srgbClr val="2E66C2"/>
-                </a:solidFill>
-                <a:latin typeface="Calibri"/>
-              </a:rPr>
-              <a:t>REPO</a:t>
-            </a:r>
-          </a:p>
-        </p:txBody>
-      </p:sp>
-      <p:pic>
-        <p:nvPicPr>
-          <p:cNvPr id="6" name="Picture 5" descr="repo_qr.png"/>
-          <p:cNvPicPr>
-            <a:picLocks noChangeAspect="1"/>
-          </p:cNvPicPr>
-          <p:nvPr/>
-        </p:nvPicPr>
-        <p:blipFill>
-          <a:blip r:embed="rId2"/>
-          <a:stretch>
-            <a:fillRect/>
-          </a:stretch>
-        </p:blipFill>
-        <p:spPr>
-          <a:xfrm>
-            <a:off x="8778240" y="2194560"/>
-            <a:ext cx="2743200" cy="2743200"/>
-          </a:xfrm>
-          <a:prstGeom prst="rect">
-            <a:avLst/>
-          </a:prstGeom>
-        </p:spPr>
-      </p:pic>
+              <a:t>OLMoE-1B-7B (1B active / 7B total) on Blackwell  ·  diagnosis &amp; optimization</a:t>
+            </a:r>
+          </a:p>
+        </p:txBody>
+      </p:sp>
       <p:sp>
         <p:nvSpPr>
           <p:cNvPr id="7" name="TextBox 6"/>
-          <p:cNvSpPr txBox="1"/>
-          <p:nvPr/>
-        </p:nvSpPr>
-        <p:spPr>
-          <a:xfrm>
-            <a:off x="8229600" y="5074920"/>
-            <a:ext cx="3840480" cy="365760"/>
-          </a:xfrm>
-          <a:prstGeom prst="rect">
-            <a:avLst/>
-          </a:prstGeom>
-          <a:noFill/>
-        </p:spPr>
-        <p:txBody>
-          <a:bodyPr wrap="square" lIns="0" rIns="0" tIns="0" bIns="0">
-            <a:spAutoFit/>
-          </a:bodyPr>
-          <a:lstStyle/>
-          <a:p>
-            <a:pPr algn="ctr"/>
-            <a:r>
-              <a:rPr sz="1200" b="0" i="0">
-                <a:solidFill>
-                  <a:srgbClr val="555F6E"/>
-                </a:solidFill>
-                <a:latin typeface="Calibri"/>
-              </a:rPr>
-              <a:t>github.com/harishvs/olmoe-kernel</a:t>
-            </a:r>
-          </a:p>
-        </p:txBody>
-      </p:sp>
-      <p:sp>
-        <p:nvSpPr>
-          <p:cNvPr id="8" name="TextBox 7"/>
-          <p:cNvSpPr txBox="1"/>
-          <p:nvPr/>
-        </p:nvSpPr>
-        <p:spPr>
-          <a:xfrm>
-            <a:off x="8229600" y="5440680"/>
-            <a:ext cx="3840480" cy="365760"/>
-          </a:xfrm>
-          <a:prstGeom prst="rect">
-            <a:avLst/>
-          </a:prstGeom>
-          <a:noFill/>
-        </p:spPr>
-        <p:txBody>
-          <a:bodyPr wrap="square" lIns="0" rIns="0" tIns="0" bIns="0">
-            <a:spAutoFit/>
-          </a:bodyPr>
-          <a:lstStyle/>
-          <a:p>
-            <a:pPr algn="ctr"/>
-            <a:r>
-              <a:rPr sz="1000" b="0" i="1">
-                <a:solidFill>
-                  <a:srgbClr val="555F6E"/>
-                </a:solidFill>
-                <a:latin typeface="Calibri"/>
-              </a:rPr>
-              <a:t>scan to clone the code, results, and this deck</a:t>
-            </a:r>
-          </a:p>
-        </p:txBody>
-      </p:sp>
-      <p:sp>
-        <p:nvSpPr>
-          <p:cNvPr id="9" name="TextBox 8"/>
-          <p:cNvSpPr txBox="1"/>
-          <p:nvPr/>
-        </p:nvSpPr>
-        <p:spPr>
-          <a:xfrm>
-            <a:off x="548640" y="6446520"/>
-            <a:ext cx="7315200" cy="274320"/>
-          </a:xfrm>
-          <a:prstGeom prst="rect">
-            <a:avLst/>
-          </a:prstGeom>
-          <a:noFill/>
-        </p:spPr>
-        <p:txBody>
-          <a:bodyPr wrap="square" lIns="0" rIns="0" tIns="0" bIns="0">
-            <a:spAutoFit/>
-          </a:bodyPr>
-          <a:lstStyle/>
-          <a:p>
-            <a:pPr algn="l"/>
-            <a:r>
-              <a:rPr sz="1000" b="0" i="0">
-                <a:solidFill>
-                  <a:srgbClr val="555F6E"/>
-                </a:solidFill>
-                <a:latin typeface="Calibri"/>
-              </a:rPr>
-              <a:t>OLMoE on Blackwell  ·  diagnosis &amp; optimization</a:t>
-            </a:r>
-          </a:p>
-        </p:txBody>
-      </p:sp>
-      <p:sp>
-        <p:nvSpPr>
-          <p:cNvPr id="10" name="TextBox 9"/>
           <p:cNvSpPr txBox="1"/>
           <p:nvPr/>
         </p:nvSpPr>
@@ -5979,7 +6785,7 @@
                 </a:solidFill>
                 <a:latin typeface="Calibri"/>
               </a:rPr>
-              <a:t>APPENDIX</a:t>
+              <a:t>SCALE</a:t>
             </a:r>
           </a:p>
         </p:txBody>
@@ -6014,7 +6820,7 @@
                 </a:solidFill>
                 <a:latin typeface="Calibri"/>
               </a:rPr>
-              <a:t>FP8 quality — standard accuracy benchmarks</a:t>
+              <a:t>If traffic grows 10× tomorrow</a:t>
             </a:r>
           </a:p>
         </p:txBody>
@@ -6062,30 +6868,574 @@
           </a:p>
         </p:txBody>
       </p:sp>
-      <p:pic>
-        <p:nvPicPr>
-          <p:cNvPr id="5" name="Picture 4" descr="appendix_fp8_accuracy.png"/>
-          <p:cNvPicPr>
-            <a:picLocks noChangeAspect="1"/>
-          </p:cNvPicPr>
-          <p:nvPr/>
-        </p:nvPicPr>
-        <p:blipFill>
-          <a:blip r:embed="rId2"/>
-          <a:stretch>
-            <a:fillRect/>
-          </a:stretch>
-        </p:blipFill>
-        <p:spPr>
-          <a:xfrm>
-            <a:off x="1280160" y="1783080"/>
-            <a:ext cx="9601200" cy="4434840"/>
-          </a:xfrm>
-          <a:prstGeom prst="rect">
-            <a:avLst/>
-          </a:prstGeom>
-        </p:spPr>
-      </p:pic>
+      <p:graphicFrame>
+        <p:nvGraphicFramePr>
+          <p:cNvPr id="5" name="Table 4"/>
+          <p:cNvGraphicFramePr>
+            <a:graphicFrameLocks noGrp="1"/>
+          </p:cNvGraphicFramePr>
+          <p:nvPr/>
+        </p:nvGraphicFramePr>
+        <p:xfrm>
+          <a:off x="365760" y="1828800"/>
+          <a:ext cx="11430000" cy="4206240"/>
+        </p:xfrm>
+        <a:graphic>
+          <a:graphicData uri="http://schemas.openxmlformats.org/drawingml/2006/table">
+            <a:tbl>
+              <a:tblPr firstRow="1" bandRow="1">
+                <a:tableStyleId>{5C22544A-7EE6-4342-B048-85BDC9FD1C3A}</a:tableStyleId>
+              </a:tblPr>
+              <a:tblGrid>
+                <a:gridCol w="457200"/>
+                <a:gridCol w="3108960"/>
+                <a:gridCol w="3291840"/>
+                <a:gridCol w="4572000"/>
+              </a:tblGrid>
+              <a:tr h="701040">
+                <a:tc>
+                  <a:txBody>
+                    <a:bodyPr/>
+                    <a:lstStyle/>
+                    <a:p>
+                      <a:r>
+                        <a:rPr sz="1200" b="1">
+                          <a:solidFill>
+                            <a:srgbClr val="555F6E"/>
+                          </a:solidFill>
+                          <a:latin typeface="Calibri"/>
+                        </a:rPr>
+                        <a:t>#</a:t>
+                      </a:r>
+                    </a:p>
+                  </a:txBody>
+                  <a:tcPr marL="60000" marR="60000" marT="40000" marB="40000" anchor="ctr">
+                    <a:solidFill>
+                      <a:srgbClr val="F2F4F7"/>
+                    </a:solidFill>
+                  </a:tcPr>
+                </a:tc>
+                <a:tc>
+                  <a:txBody>
+                    <a:bodyPr/>
+                    <a:lstStyle/>
+                    <a:p>
+                      <a:r>
+                        <a:rPr sz="1200" b="1">
+                          <a:solidFill>
+                            <a:srgbClr val="555F6E"/>
+                          </a:solidFill>
+                          <a:latin typeface="Calibri"/>
+                        </a:rPr>
+                        <a:t>Action</a:t>
+                      </a:r>
+                    </a:p>
+                  </a:txBody>
+                  <a:tcPr marL="60000" marR="60000" marT="40000" marB="40000" anchor="ctr">
+                    <a:solidFill>
+                      <a:srgbClr val="F2F4F7"/>
+                    </a:solidFill>
+                  </a:tcPr>
+                </a:tc>
+                <a:tc>
+                  <a:txBody>
+                    <a:bodyPr/>
+                    <a:lstStyle/>
+                    <a:p>
+                      <a:r>
+                        <a:rPr sz="1200" b="1">
+                          <a:solidFill>
+                            <a:srgbClr val="555F6E"/>
+                          </a:solidFill>
+                          <a:latin typeface="Calibri"/>
+                        </a:rPr>
+                        <a:t>Why now</a:t>
+                      </a:r>
+                    </a:p>
+                  </a:txBody>
+                  <a:tcPr marL="60000" marR="60000" marT="40000" marB="40000" anchor="ctr">
+                    <a:solidFill>
+                      <a:srgbClr val="F2F4F7"/>
+                    </a:solidFill>
+                  </a:tcPr>
+                </a:tc>
+                <a:tc>
+                  <a:txBody>
+                    <a:bodyPr/>
+                    <a:lstStyle/>
+                    <a:p>
+                      <a:r>
+                        <a:rPr sz="1200" b="1">
+                          <a:solidFill>
+                            <a:srgbClr val="555F6E"/>
+                          </a:solidFill>
+                          <a:latin typeface="Calibri"/>
+                        </a:rPr>
+                        <a:t>Breaks when</a:t>
+                      </a:r>
+                    </a:p>
+                  </a:txBody>
+                  <a:tcPr marL="60000" marR="60000" marT="40000" marB="40000" anchor="ctr">
+                    <a:solidFill>
+                      <a:srgbClr val="F2F4F7"/>
+                    </a:solidFill>
+                  </a:tcPr>
+                </a:tc>
+              </a:tr>
+              <a:tr h="701040">
+                <a:tc>
+                  <a:txBody>
+                    <a:bodyPr/>
+                    <a:lstStyle/>
+                    <a:p>
+                      <a:r>
+                        <a:rPr sz="1200" b="0">
+                          <a:solidFill>
+                            <a:srgbClr val="1F2A37"/>
+                          </a:solidFill>
+                          <a:latin typeface="Calibri"/>
+                        </a:rPr>
+                        <a:t>1</a:t>
+                      </a:r>
+                    </a:p>
+                  </a:txBody>
+                  <a:tcPr marL="60000" marR="60000" marT="40000" marB="40000" anchor="ctr">
+                    <a:solidFill>
+                      <a:srgbClr val="FFFFFF"/>
+                    </a:solidFill>
+                  </a:tcPr>
+                </a:tc>
+                <a:tc>
+                  <a:txBody>
+                    <a:bodyPr/>
+                    <a:lstStyle/>
+                    <a:p>
+                      <a:r>
+                        <a:rPr sz="1200" b="0">
+                          <a:solidFill>
+                            <a:srgbClr val="1F2A37"/>
+                          </a:solidFill>
+                          <a:latin typeface="Calibri"/>
+                        </a:rPr>
+                        <a:t>Enable FP8 + prefix caching</a:t>
+                      </a:r>
+                    </a:p>
+                  </a:txBody>
+                  <a:tcPr marL="60000" marR="60000" marT="40000" marB="40000" anchor="ctr">
+                    <a:solidFill>
+                      <a:srgbClr val="FFFFFF"/>
+                    </a:solidFill>
+                  </a:tcPr>
+                </a:tc>
+                <a:tc>
+                  <a:txBody>
+                    <a:bodyPr/>
+                    <a:lstStyle/>
+                    <a:p>
+                      <a:r>
+                        <a:rPr sz="1200" b="0">
+                          <a:solidFill>
+                            <a:srgbClr val="1F2A37"/>
+                          </a:solidFill>
+                          <a:latin typeface="Calibri"/>
+                        </a:rPr>
+                        <a:t>Free, today — config only</a:t>
+                      </a:r>
+                    </a:p>
+                  </a:txBody>
+                  <a:tcPr marL="60000" marR="60000" marT="40000" marB="40000" anchor="ctr">
+                    <a:solidFill>
+                      <a:srgbClr val="FFFFFF"/>
+                    </a:solidFill>
+                  </a:tcPr>
+                </a:tc>
+                <a:tc>
+                  <a:txBody>
+                    <a:bodyPr/>
+                    <a:lstStyle/>
+                    <a:p>
+                      <a:r>
+                        <a:rPr sz="1200" b="0">
+                          <a:solidFill>
+                            <a:srgbClr val="1F2A37"/>
+                          </a:solidFill>
+                          <a:latin typeface="Calibri"/>
+                        </a:rPr>
+                        <a:t>Accuracy regresses on customer evals, or prompts don't share prefixes</a:t>
+                      </a:r>
+                    </a:p>
+                  </a:txBody>
+                  <a:tcPr marL="60000" marR="60000" marT="40000" marB="40000" anchor="ctr">
+                    <a:solidFill>
+                      <a:srgbClr val="FFFFFF"/>
+                    </a:solidFill>
+                  </a:tcPr>
+                </a:tc>
+              </a:tr>
+              <a:tr h="701040">
+                <a:tc>
+                  <a:txBody>
+                    <a:bodyPr/>
+                    <a:lstStyle/>
+                    <a:p>
+                      <a:r>
+                        <a:rPr sz="1200" b="0">
+                          <a:solidFill>
+                            <a:srgbClr val="1F2A37"/>
+                          </a:solidFill>
+                          <a:latin typeface="Calibri"/>
+                        </a:rPr>
+                        <a:t>2</a:t>
+                      </a:r>
+                    </a:p>
+                  </a:txBody>
+                  <a:tcPr marL="60000" marR="60000" marT="40000" marB="40000" anchor="ctr">
+                    <a:solidFill>
+                      <a:srgbClr val="FAFBFC"/>
+                    </a:solidFill>
+                  </a:tcPr>
+                </a:tc>
+                <a:tc>
+                  <a:txBody>
+                    <a:bodyPr/>
+                    <a:lstStyle/>
+                    <a:p>
+                      <a:r>
+                        <a:rPr sz="1200" b="0">
+                          <a:solidFill>
+                            <a:srgbClr val="1F2A37"/>
+                          </a:solidFill>
+                          <a:latin typeface="Calibri"/>
+                        </a:rPr>
+                        <a:t>Tune concurrency to the SLA</a:t>
+                      </a:r>
+                    </a:p>
+                  </a:txBody>
+                  <a:tcPr marL="60000" marR="60000" marT="40000" marB="40000" anchor="ctr">
+                    <a:solidFill>
+                      <a:srgbClr val="FAFBFC"/>
+                    </a:solidFill>
+                  </a:tcPr>
+                </a:tc>
+                <a:tc>
+                  <a:txBody>
+                    <a:bodyPr/>
+                    <a:lstStyle/>
+                    <a:p>
+                      <a:r>
+                        <a:rPr sz="1200" b="0">
+                          <a:solidFill>
+                            <a:srgbClr val="1F2A37"/>
+                          </a:solidFill>
+                          <a:latin typeface="Calibri"/>
+                        </a:rPr>
+                        <a:t>Same pod, no new hardware</a:t>
+                      </a:r>
+                    </a:p>
+                  </a:txBody>
+                  <a:tcPr marL="60000" marR="60000" marT="40000" marB="40000" anchor="ctr">
+                    <a:solidFill>
+                      <a:srgbClr val="FAFBFC"/>
+                    </a:solidFill>
+                  </a:tcPr>
+                </a:tc>
+                <a:tc>
+                  <a:txBody>
+                    <a:bodyPr/>
+                    <a:lstStyle/>
+                    <a:p>
+                      <a:r>
+                        <a:rPr sz="1200" b="0">
+                          <a:solidFill>
+                            <a:srgbClr val="1F2A37"/>
+                          </a:solidFill>
+                          <a:latin typeface="Calibri"/>
+                        </a:rPr>
+                        <a:t>Sustained load exceeds ~200–600 active users per pod (batch=32 in flight)</a:t>
+                      </a:r>
+                    </a:p>
+                  </a:txBody>
+                  <a:tcPr marL="60000" marR="60000" marT="40000" marB="40000" anchor="ctr">
+                    <a:solidFill>
+                      <a:srgbClr val="FAFBFC"/>
+                    </a:solidFill>
+                  </a:tcPr>
+                </a:tc>
+              </a:tr>
+              <a:tr h="701040">
+                <a:tc>
+                  <a:txBody>
+                    <a:bodyPr/>
+                    <a:lstStyle/>
+                    <a:p>
+                      <a:r>
+                        <a:rPr sz="1200" b="0">
+                          <a:solidFill>
+                            <a:srgbClr val="1F2A37"/>
+                          </a:solidFill>
+                          <a:latin typeface="Calibri"/>
+                        </a:rPr>
+                        <a:t>3</a:t>
+                      </a:r>
+                    </a:p>
+                  </a:txBody>
+                  <a:tcPr marL="60000" marR="60000" marT="40000" marB="40000" anchor="ctr">
+                    <a:solidFill>
+                      <a:srgbClr val="FFFFFF"/>
+                    </a:solidFill>
+                  </a:tcPr>
+                </a:tc>
+                <a:tc>
+                  <a:txBody>
+                    <a:bodyPr/>
+                    <a:lstStyle/>
+                    <a:p>
+                      <a:r>
+                        <a:rPr sz="1200" b="0">
+                          <a:solidFill>
+                            <a:srgbClr val="1F2A37"/>
+                          </a:solidFill>
+                          <a:latin typeface="Calibri"/>
+                        </a:rPr>
+                        <a:t>Use both GPUs together (TP=2)</a:t>
+                      </a:r>
+                    </a:p>
+                  </a:txBody>
+                  <a:tcPr marL="60000" marR="60000" marT="40000" marB="40000" anchor="ctr">
+                    <a:solidFill>
+                      <a:srgbClr val="FFFFFF"/>
+                    </a:solidFill>
+                  </a:tcPr>
+                </a:tc>
+                <a:tc>
+                  <a:txBody>
+                    <a:bodyPr/>
+                    <a:lstStyle/>
+                    <a:p>
+                      <a:r>
+                        <a:rPr sz="1200" b="0">
+                          <a:solidFill>
+                            <a:srgbClr val="1F2A37"/>
+                          </a:solidFill>
+                          <a:latin typeface="Calibri"/>
+                        </a:rPr>
+                        <a:t>Same node, +14% TPOT, 2× memory</a:t>
+                      </a:r>
+                    </a:p>
+                  </a:txBody>
+                  <a:tcPr marL="60000" marR="60000" marT="40000" marB="40000" anchor="ctr">
+                    <a:solidFill>
+                      <a:srgbClr val="FFFFFF"/>
+                    </a:solidFill>
+                  </a:tcPr>
+                </a:tc>
+                <a:tc>
+                  <a:txBody>
+                    <a:bodyPr/>
+                    <a:lstStyle/>
+                    <a:p>
+                      <a:r>
+                        <a:rPr sz="1200" b="0">
+                          <a:solidFill>
+                            <a:srgbClr val="1F2A37"/>
+                          </a:solidFill>
+                          <a:latin typeface="Calibri"/>
+                        </a:rPr>
+                        <a:t>One pod still saturated — need more pods, not bigger ones</a:t>
+                      </a:r>
+                    </a:p>
+                  </a:txBody>
+                  <a:tcPr marL="60000" marR="60000" marT="40000" marB="40000" anchor="ctr">
+                    <a:solidFill>
+                      <a:srgbClr val="FFFFFF"/>
+                    </a:solidFill>
+                  </a:tcPr>
+                </a:tc>
+              </a:tr>
+              <a:tr h="701040">
+                <a:tc>
+                  <a:txBody>
+                    <a:bodyPr/>
+                    <a:lstStyle/>
+                    <a:p>
+                      <a:r>
+                        <a:rPr sz="1200" b="0">
+                          <a:solidFill>
+                            <a:srgbClr val="1F2A37"/>
+                          </a:solidFill>
+                          <a:latin typeface="Calibri"/>
+                        </a:rPr>
+                        <a:t>4</a:t>
+                      </a:r>
+                    </a:p>
+                  </a:txBody>
+                  <a:tcPr marL="60000" marR="60000" marT="40000" marB="40000" anchor="ctr">
+                    <a:solidFill>
+                      <a:srgbClr val="FAFBFC"/>
+                    </a:solidFill>
+                  </a:tcPr>
+                </a:tc>
+                <a:tc>
+                  <a:txBody>
+                    <a:bodyPr/>
+                    <a:lstStyle/>
+                    <a:p>
+                      <a:r>
+                        <a:rPr sz="1200" b="0">
+                          <a:solidFill>
+                            <a:srgbClr val="1F2A37"/>
+                          </a:solidFill>
+                          <a:latin typeface="Calibri"/>
+                        </a:rPr>
+                        <a:t>Horizontal pod autoscaling (HPA)</a:t>
+                      </a:r>
+                    </a:p>
+                  </a:txBody>
+                  <a:tcPr marL="60000" marR="60000" marT="40000" marB="40000" anchor="ctr">
+                    <a:solidFill>
+                      <a:srgbClr val="FAFBFC"/>
+                    </a:solidFill>
+                  </a:tcPr>
+                </a:tc>
+                <a:tc>
+                  <a:txBody>
+                    <a:bodyPr/>
+                    <a:lstStyle/>
+                    <a:p>
+                      <a:r>
+                        <a:rPr sz="1200" b="0">
+                          <a:solidFill>
+                            <a:srgbClr val="1F2A37"/>
+                          </a:solidFill>
+                          <a:latin typeface="Calibri"/>
+                        </a:rPr>
+                        <a:t>Linear capacity, k8s-native</a:t>
+                      </a:r>
+                    </a:p>
+                  </a:txBody>
+                  <a:tcPr marL="60000" marR="60000" marT="40000" marB="40000" anchor="ctr">
+                    <a:solidFill>
+                      <a:srgbClr val="FAFBFC"/>
+                    </a:solidFill>
+                  </a:tcPr>
+                </a:tc>
+                <a:tc>
+                  <a:txBody>
+                    <a:bodyPr/>
+                    <a:lstStyle/>
+                    <a:p>
+                      <a:r>
+                        <a:rPr sz="1200" b="0">
+                          <a:solidFill>
+                            <a:srgbClr val="1F2A37"/>
+                          </a:solidFill>
+                          <a:latin typeface="Calibri"/>
+                        </a:rPr>
+                        <a:t>GPU node pool runs out of room</a:t>
+                      </a:r>
+                    </a:p>
+                  </a:txBody>
+                  <a:tcPr marL="60000" marR="60000" marT="40000" marB="40000" anchor="ctr">
+                    <a:solidFill>
+                      <a:srgbClr val="FAFBFC"/>
+                    </a:solidFill>
+                  </a:tcPr>
+                </a:tc>
+              </a:tr>
+              <a:tr h="701040">
+                <a:tc>
+                  <a:txBody>
+                    <a:bodyPr/>
+                    <a:lstStyle/>
+                    <a:p>
+                      <a:r>
+                        <a:rPr sz="1200" b="0">
+                          <a:solidFill>
+                            <a:srgbClr val="1F2A37"/>
+                          </a:solidFill>
+                          <a:latin typeface="Calibri"/>
+                        </a:rPr>
+                        <a:t>5</a:t>
+                      </a:r>
+                    </a:p>
+                  </a:txBody>
+                  <a:tcPr marL="60000" marR="60000" marT="40000" marB="40000" anchor="ctr">
+                    <a:solidFill>
+                      <a:srgbClr val="FFFFFF"/>
+                    </a:solidFill>
+                  </a:tcPr>
+                </a:tc>
+                <a:tc>
+                  <a:txBody>
+                    <a:bodyPr/>
+                    <a:lstStyle/>
+                    <a:p>
+                      <a:r>
+                        <a:rPr sz="1200" b="0">
+                          <a:solidFill>
+                            <a:srgbClr val="1F2A37"/>
+                          </a:solidFill>
+                          <a:latin typeface="Calibri"/>
+                        </a:rPr>
+                        <a:t>Add new GPU machines</a:t>
+                      </a:r>
+                    </a:p>
+                  </a:txBody>
+                  <a:tcPr marL="60000" marR="60000" marT="40000" marB="40000" anchor="ctr">
+                    <a:solidFill>
+                      <a:srgbClr val="FFFFFF"/>
+                    </a:solidFill>
+                  </a:tcPr>
+                </a:tc>
+                <a:tc>
+                  <a:txBody>
+                    <a:bodyPr/>
+                    <a:lstStyle/>
+                    <a:p>
+                      <a:r>
+                        <a:rPr sz="1200" b="0">
+                          <a:solidFill>
+                            <a:srgbClr val="1F2A37"/>
+                          </a:solidFill>
+                          <a:latin typeface="Calibri"/>
+                        </a:rPr>
+                        <a:t>Capacity beyond the current cluster</a:t>
+                      </a:r>
+                    </a:p>
+                  </a:txBody>
+                  <a:tcPr marL="60000" marR="60000" marT="40000" marB="40000" anchor="ctr">
+                    <a:solidFill>
+                      <a:srgbClr val="FFFFFF"/>
+                    </a:solidFill>
+                  </a:tcPr>
+                </a:tc>
+                <a:tc>
+                  <a:txBody>
+                    <a:bodyPr/>
+                    <a:lstStyle/>
+                    <a:p>
+                      <a:r>
+                        <a:rPr sz="1200" b="0">
+                          <a:solidFill>
+                            <a:srgbClr val="1F2A37"/>
+                          </a:solidFill>
+                          <a:latin typeface="Calibri"/>
+                        </a:rPr>
+                        <a:t>Last resort — triggers procurement cycle</a:t>
+                      </a:r>
+                    </a:p>
+                  </a:txBody>
+                  <a:tcPr marL="60000" marR="60000" marT="40000" marB="40000" anchor="ctr">
+                    <a:solidFill>
+                      <a:srgbClr val="FFFFFF"/>
+                    </a:solidFill>
+                  </a:tcPr>
+                </a:tc>
+              </a:tr>
+            </a:tbl>
+          </a:graphicData>
+        </a:graphic>
+      </p:graphicFrame>
       <p:sp>
         <p:nvSpPr>
           <p:cNvPr id="6" name="TextBox 5"/>
@@ -6095,7 +7445,7 @@
         <p:spPr>
           <a:xfrm>
             <a:off x="548640" y="6446520"/>
-            <a:ext cx="7315200" cy="274320"/>
+            <a:ext cx="9144000" cy="274320"/>
           </a:xfrm>
           <a:prstGeom prst="rect">
             <a:avLst/>
@@ -6116,7 +7466,7 @@
                 </a:solidFill>
                 <a:latin typeface="Calibri"/>
               </a:rPr>
-              <a:t>OLMoE on Blackwell  ·  diagnosis &amp; optimization</a:t>
+              <a:t>OLMoE-1B-7B (1B active / 7B total) on Blackwell  ·  diagnosis &amp; optimization</a:t>
             </a:r>
           </a:p>
         </p:txBody>
@@ -6204,7 +7554,7 @@
                 </a:solidFill>
                 <a:latin typeface="Calibri"/>
               </a:rPr>
-              <a:t>APPENDIX</a:t>
+              <a:t>VERDICT</a:t>
             </a:r>
           </a:p>
         </p:txBody>
@@ -6239,7 +7589,7 @@
                 </a:solidFill>
                 <a:latin typeface="Calibri"/>
               </a:rPr>
-              <a:t>Why prefill isn't quadratic in input length</a:t>
+              <a:t>Recommendation</a:t>
             </a:r>
           </a:p>
         </p:txBody>
@@ -6287,9 +7637,332 @@
           </a:p>
         </p:txBody>
       </p:sp>
+      <p:sp>
+        <p:nvSpPr>
+          <p:cNvPr id="5" name="TextBox 4"/>
+          <p:cNvSpPr txBox="1"/>
+          <p:nvPr/>
+        </p:nvSpPr>
+        <p:spPr>
+          <a:xfrm>
+            <a:off x="548640" y="1737360"/>
+            <a:ext cx="11155680" cy="4114800"/>
+          </a:xfrm>
+          <a:prstGeom prst="rect">
+            <a:avLst/>
+          </a:prstGeom>
+          <a:noFill/>
+        </p:spPr>
+        <p:txBody>
+          <a:bodyPr wrap="square" lIns="0" rIns="0" tIns="0" bIns="0">
+            <a:spAutoFit/>
+          </a:bodyPr>
+          <a:lstStyle/>
+          <a:p>
+            <a:pPr algn="l">
+              <a:spcAft>
+                <a:spcPts val="800"/>
+              </a:spcAft>
+            </a:pPr>
+            <a:r>
+              <a:rPr sz="2000">
+                <a:solidFill>
+                  <a:srgbClr val="1F2A37"/>
+                </a:solidFill>
+                <a:latin typeface="Calibri"/>
+              </a:rPr>
+              <a:t>•  Enable FP8 quantization and prefix caching this week — validate accuracy on customer evals first</a:t>
+            </a:r>
+          </a:p>
+          <a:p>
+            <a:pPr algn="l">
+              <a:spcAft>
+                <a:spcPts val="800"/>
+              </a:spcAft>
+            </a:pPr>
+            <a:r>
+              <a:rPr sz="2000">
+                <a:solidFill>
+                  <a:srgbClr val="1F2A37"/>
+                </a:solidFill>
+                <a:latin typeface="Calibri"/>
+              </a:rPr>
+              <a:t>•  Tune max_num_seqs (continuous batching) against the TTFT p90 SLA</a:t>
+            </a:r>
+          </a:p>
+          <a:p>
+            <a:pPr algn="l">
+              <a:spcAft>
+                <a:spcPts val="800"/>
+              </a:spcAft>
+            </a:pPr>
+            <a:r>
+              <a:rPr sz="2000">
+                <a:solidFill>
+                  <a:srgbClr val="1F2A37"/>
+                </a:solidFill>
+                <a:latin typeface="Calibri"/>
+              </a:rPr>
+              <a:t>•  Apply tensor parallelism (TP=2) for TPOT — 14% gain measured at single-user load, not yet measured under concurrency</a:t>
+            </a:r>
+          </a:p>
+          <a:p>
+            <a:pPr algn="l">
+              <a:spcAft>
+                <a:spcPts val="800"/>
+              </a:spcAft>
+            </a:pPr>
+            <a:r>
+              <a:rPr sz="2000">
+                <a:solidFill>
+                  <a:srgbClr val="1F2A37"/>
+                </a:solidFill>
+                <a:latin typeface="Calibri"/>
+              </a:rPr>
+              <a:t>•  Re-baseline whenever the model, vLLM version, or hardware changes</a:t>
+            </a:r>
+          </a:p>
+        </p:txBody>
+      </p:sp>
+      <p:sp>
+        <p:nvSpPr>
+          <p:cNvPr id="6" name="TextBox 5"/>
+          <p:cNvSpPr txBox="1"/>
+          <p:nvPr/>
+        </p:nvSpPr>
+        <p:spPr>
+          <a:xfrm>
+            <a:off x="548640" y="6446520"/>
+            <a:ext cx="9144000" cy="274320"/>
+          </a:xfrm>
+          <a:prstGeom prst="rect">
+            <a:avLst/>
+          </a:prstGeom>
+          <a:noFill/>
+        </p:spPr>
+        <p:txBody>
+          <a:bodyPr wrap="square" lIns="0" rIns="0" tIns="0" bIns="0">
+            <a:spAutoFit/>
+          </a:bodyPr>
+          <a:lstStyle/>
+          <a:p>
+            <a:pPr algn="l"/>
+            <a:r>
+              <a:rPr sz="1000" b="0" i="0">
+                <a:solidFill>
+                  <a:srgbClr val="555F6E"/>
+                </a:solidFill>
+                <a:latin typeface="Calibri"/>
+              </a:rPr>
+              <a:t>OLMoE-1B-7B (1B active / 7B total) on Blackwell  ·  diagnosis &amp; optimization</a:t>
+            </a:r>
+          </a:p>
+        </p:txBody>
+      </p:sp>
+      <p:sp>
+        <p:nvSpPr>
+          <p:cNvPr id="7" name="TextBox 6"/>
+          <p:cNvSpPr txBox="1"/>
+          <p:nvPr/>
+        </p:nvSpPr>
+        <p:spPr>
+          <a:xfrm>
+            <a:off x="11521440" y="6446520"/>
+            <a:ext cx="548640" cy="274320"/>
+          </a:xfrm>
+          <a:prstGeom prst="rect">
+            <a:avLst/>
+          </a:prstGeom>
+          <a:noFill/>
+        </p:spPr>
+        <p:txBody>
+          <a:bodyPr wrap="square" lIns="0" rIns="0" tIns="0" bIns="0">
+            <a:spAutoFit/>
+          </a:bodyPr>
+          <a:lstStyle/>
+          <a:p>
+            <a:pPr algn="r"/>
+            <a:r>
+              <a:rPr sz="1000" b="0" i="0">
+                <a:solidFill>
+                  <a:srgbClr val="555F6E"/>
+                </a:solidFill>
+                <a:latin typeface="Calibri"/>
+              </a:rPr>
+              <a:t>15</a:t>
+            </a:r>
+          </a:p>
+        </p:txBody>
+      </p:sp>
+    </p:spTree>
+  </p:cSld>
+  <p:clrMapOvr>
+    <a:masterClrMapping/>
+  </p:clrMapOvr>
+</p:sld>
+</file>
+
+<file path=ppt/slides/slide16.xml><?xml version="1.0" encoding="utf-8"?>
+<p:sld xmlns:a="http://schemas.openxmlformats.org/drawingml/2006/main" xmlns:p="http://schemas.openxmlformats.org/presentationml/2006/main" xmlns:r="http://schemas.openxmlformats.org/officeDocument/2006/relationships">
+  <p:cSld>
+    <p:spTree>
+      <p:nvGrpSpPr>
+        <p:cNvPr id="1" name=""/>
+        <p:cNvGrpSpPr/>
+        <p:nvPr/>
+      </p:nvGrpSpPr>
+      <p:grpSpPr/>
+      <p:sp>
+        <p:nvSpPr>
+          <p:cNvPr id="2" name="TextBox 1"/>
+          <p:cNvSpPr txBox="1"/>
+          <p:nvPr/>
+        </p:nvSpPr>
+        <p:spPr>
+          <a:xfrm>
+            <a:off x="731520" y="1828800"/>
+            <a:ext cx="7315200" cy="1645920"/>
+          </a:xfrm>
+          <a:prstGeom prst="rect">
+            <a:avLst/>
+          </a:prstGeom>
+          <a:noFill/>
+        </p:spPr>
+        <p:txBody>
+          <a:bodyPr wrap="square" lIns="0" rIns="0" tIns="0" bIns="0">
+            <a:spAutoFit/>
+          </a:bodyPr>
+          <a:lstStyle/>
+          <a:p>
+            <a:pPr algn="l"/>
+            <a:r>
+              <a:rPr sz="9600" b="1" i="0">
+                <a:solidFill>
+                  <a:srgbClr val="1F2A37"/>
+                </a:solidFill>
+                <a:latin typeface="Calibri"/>
+              </a:rPr>
+              <a:t>Q&amp;A</a:t>
+            </a:r>
+          </a:p>
+        </p:txBody>
+      </p:sp>
+      <p:sp>
+        <p:nvSpPr>
+          <p:cNvPr id="3" name="Rectangle 2"/>
+          <p:cNvSpPr/>
+          <p:nvPr/>
+        </p:nvSpPr>
+        <p:spPr>
+          <a:xfrm>
+            <a:off x="731520" y="3657600"/>
+            <a:ext cx="1828800" cy="50800"/>
+          </a:xfrm>
+          <a:prstGeom prst="rect">
+            <a:avLst/>
+          </a:prstGeom>
+          <a:solidFill>
+            <a:srgbClr val="2E66C2"/>
+          </a:solidFill>
+          <a:ln>
+            <a:noFill/>
+          </a:ln>
+        </p:spPr>
+        <p:style>
+          <a:lnRef idx="1">
+            <a:schemeClr val="accent1"/>
+          </a:lnRef>
+          <a:fillRef idx="3">
+            <a:schemeClr val="accent1"/>
+          </a:fillRef>
+          <a:effectRef idx="2">
+            <a:schemeClr val="accent1"/>
+          </a:effectRef>
+          <a:fontRef idx="minor">
+            <a:schemeClr val="lt1"/>
+          </a:fontRef>
+        </p:style>
+        <p:txBody>
+          <a:bodyPr rtlCol="0" anchor="ctr"/>
+          <a:lstStyle/>
+          <a:p>
+            <a:pPr algn="ctr"/>
+          </a:p>
+        </p:txBody>
+      </p:sp>
+      <p:sp>
+        <p:nvSpPr>
+          <p:cNvPr id="4" name="TextBox 3"/>
+          <p:cNvSpPr txBox="1"/>
+          <p:nvPr/>
+        </p:nvSpPr>
+        <p:spPr>
+          <a:xfrm>
+            <a:off x="731520" y="3931920"/>
+            <a:ext cx="7315200" cy="457200"/>
+          </a:xfrm>
+          <a:prstGeom prst="rect">
+            <a:avLst/>
+          </a:prstGeom>
+          <a:noFill/>
+        </p:spPr>
+        <p:txBody>
+          <a:bodyPr wrap="square" lIns="0" rIns="0" tIns="0" bIns="0">
+            <a:spAutoFit/>
+          </a:bodyPr>
+          <a:lstStyle/>
+          <a:p>
+            <a:pPr algn="l"/>
+            <a:r>
+              <a:rPr sz="2000" b="0" i="0">
+                <a:solidFill>
+                  <a:srgbClr val="555F6E"/>
+                </a:solidFill>
+                <a:latin typeface="Calibri"/>
+              </a:rPr>
+              <a:t>15 minutes — fire away.</a:t>
+            </a:r>
+          </a:p>
+        </p:txBody>
+      </p:sp>
+      <p:sp>
+        <p:nvSpPr>
+          <p:cNvPr id="5" name="TextBox 4"/>
+          <p:cNvSpPr txBox="1"/>
+          <p:nvPr/>
+        </p:nvSpPr>
+        <p:spPr>
+          <a:xfrm>
+            <a:off x="8778240" y="1828800"/>
+            <a:ext cx="2743200" cy="274320"/>
+          </a:xfrm>
+          <a:prstGeom prst="rect">
+            <a:avLst/>
+          </a:prstGeom>
+          <a:noFill/>
+        </p:spPr>
+        <p:txBody>
+          <a:bodyPr wrap="square" lIns="0" rIns="0" tIns="0" bIns="0">
+            <a:spAutoFit/>
+          </a:bodyPr>
+          <a:lstStyle/>
+          <a:p>
+            <a:pPr algn="l"/>
+            <a:r>
+              <a:rPr sz="1100" b="1" i="0">
+                <a:solidFill>
+                  <a:srgbClr val="2E66C2"/>
+                </a:solidFill>
+                <a:latin typeface="Calibri"/>
+              </a:rPr>
+              <a:t>REPO</a:t>
+            </a:r>
+          </a:p>
+        </p:txBody>
+      </p:sp>
       <p:pic>
         <p:nvPicPr>
-          <p:cNvPr id="5" name="Picture 4" descr="appendix_flop_math.png"/>
+          <p:cNvPr id="6" name="Picture 5" descr="repo_qr.png"/>
           <p:cNvPicPr>
             <a:picLocks noChangeAspect="1"/>
           </p:cNvPicPr>
@@ -6303,8 +7976,8 @@
         </p:blipFill>
         <p:spPr>
           <a:xfrm>
-            <a:off x="1828800" y="1783080"/>
-            <a:ext cx="8229600" cy="4434840"/>
+            <a:off x="8778240" y="2194560"/>
+            <a:ext cx="2743200" cy="2743200"/>
           </a:xfrm>
           <a:prstGeom prst="rect">
             <a:avLst/>
@@ -6313,14 +7986,14 @@
       </p:pic>
       <p:sp>
         <p:nvSpPr>
-          <p:cNvPr id="6" name="TextBox 5"/>
+          <p:cNvPr id="7" name="TextBox 6"/>
           <p:cNvSpPr txBox="1"/>
           <p:nvPr/>
         </p:nvSpPr>
         <p:spPr>
           <a:xfrm>
-            <a:off x="548640" y="6446520"/>
-            <a:ext cx="7315200" cy="274320"/>
+            <a:off x="8229600" y="5074920"/>
+            <a:ext cx="3840480" cy="365760"/>
           </a:xfrm>
           <a:prstGeom prst="rect">
             <a:avLst/>
@@ -6333,29 +8006,29 @@
           </a:bodyPr>
           <a:lstStyle/>
           <a:p>
-            <a:pPr algn="l"/>
-            <a:r>
-              <a:rPr sz="1000" b="0" i="0">
+            <a:pPr algn="ctr"/>
+            <a:r>
+              <a:rPr sz="1100" b="0" i="0">
                 <a:solidFill>
                   <a:srgbClr val="555F6E"/>
                 </a:solidFill>
                 <a:latin typeface="Calibri"/>
               </a:rPr>
-              <a:t>OLMoE on Blackwell  ·  diagnosis &amp; optimization</a:t>
-            </a:r>
-          </a:p>
-        </p:txBody>
-      </p:sp>
-      <p:sp>
-        <p:nvSpPr>
-          <p:cNvPr id="7" name="TextBox 6"/>
+              <a:t>github.com/harishvs/moe-inference-optimize</a:t>
+            </a:r>
+          </a:p>
+        </p:txBody>
+      </p:sp>
+      <p:sp>
+        <p:nvSpPr>
+          <p:cNvPr id="8" name="TextBox 7"/>
           <p:cNvSpPr txBox="1"/>
           <p:nvPr/>
         </p:nvSpPr>
         <p:spPr>
           <a:xfrm>
-            <a:off x="11521440" y="6446520"/>
-            <a:ext cx="548640" cy="274320"/>
+            <a:off x="8229600" y="5440680"/>
+            <a:ext cx="3840480" cy="365760"/>
           </a:xfrm>
           <a:prstGeom prst="rect">
             <a:avLst/>
@@ -6368,15 +8041,535 @@
           </a:bodyPr>
           <a:lstStyle/>
           <a:p>
-            <a:pPr algn="r"/>
-            <a:r>
-              <a:rPr sz="1000" b="0" i="0">
+            <a:pPr algn="ctr"/>
+            <a:r>
+              <a:rPr sz="1000" b="0" i="1">
                 <a:solidFill>
                   <a:srgbClr val="555F6E"/>
                 </a:solidFill>
                 <a:latin typeface="Calibri"/>
               </a:rPr>
-              <a:t>15</a:t>
+              <a:t>scan to clone the code, results, and this deck</a:t>
+            </a:r>
+          </a:p>
+        </p:txBody>
+      </p:sp>
+      <p:sp>
+        <p:nvSpPr>
+          <p:cNvPr id="9" name="TextBox 8"/>
+          <p:cNvSpPr txBox="1"/>
+          <p:nvPr/>
+        </p:nvSpPr>
+        <p:spPr>
+          <a:xfrm>
+            <a:off x="548640" y="6446520"/>
+            <a:ext cx="9144000" cy="274320"/>
+          </a:xfrm>
+          <a:prstGeom prst="rect">
+            <a:avLst/>
+          </a:prstGeom>
+          <a:noFill/>
+        </p:spPr>
+        <p:txBody>
+          <a:bodyPr wrap="square" lIns="0" rIns="0" tIns="0" bIns="0">
+            <a:spAutoFit/>
+          </a:bodyPr>
+          <a:lstStyle/>
+          <a:p>
+            <a:pPr algn="l"/>
+            <a:r>
+              <a:rPr sz="1000" b="0" i="0">
+                <a:solidFill>
+                  <a:srgbClr val="555F6E"/>
+                </a:solidFill>
+                <a:latin typeface="Calibri"/>
+              </a:rPr>
+              <a:t>OLMoE-1B-7B (1B active / 7B total) on Blackwell  ·  diagnosis &amp; optimization</a:t>
+            </a:r>
+          </a:p>
+        </p:txBody>
+      </p:sp>
+      <p:sp>
+        <p:nvSpPr>
+          <p:cNvPr id="10" name="TextBox 9"/>
+          <p:cNvSpPr txBox="1"/>
+          <p:nvPr/>
+        </p:nvSpPr>
+        <p:spPr>
+          <a:xfrm>
+            <a:off x="11521440" y="6446520"/>
+            <a:ext cx="548640" cy="274320"/>
+          </a:xfrm>
+          <a:prstGeom prst="rect">
+            <a:avLst/>
+          </a:prstGeom>
+          <a:noFill/>
+        </p:spPr>
+        <p:txBody>
+          <a:bodyPr wrap="square" lIns="0" rIns="0" tIns="0" bIns="0">
+            <a:spAutoFit/>
+          </a:bodyPr>
+          <a:lstStyle/>
+          <a:p>
+            <a:pPr algn="r"/>
+            <a:r>
+              <a:rPr sz="1000" b="0" i="0">
+                <a:solidFill>
+                  <a:srgbClr val="555F6E"/>
+                </a:solidFill>
+                <a:latin typeface="Calibri"/>
+              </a:rPr>
+              <a:t>16</a:t>
+            </a:r>
+          </a:p>
+        </p:txBody>
+      </p:sp>
+    </p:spTree>
+  </p:cSld>
+  <p:clrMapOvr>
+    <a:masterClrMapping/>
+  </p:clrMapOvr>
+</p:sld>
+</file>
+
+<file path=ppt/slides/slide17.xml><?xml version="1.0" encoding="utf-8"?>
+<p:sld xmlns:a="http://schemas.openxmlformats.org/drawingml/2006/main" xmlns:p="http://schemas.openxmlformats.org/presentationml/2006/main" xmlns:r="http://schemas.openxmlformats.org/officeDocument/2006/relationships">
+  <p:cSld>
+    <p:spTree>
+      <p:nvGrpSpPr>
+        <p:cNvPr id="1" name=""/>
+        <p:cNvGrpSpPr/>
+        <p:nvPr/>
+      </p:nvGrpSpPr>
+      <p:grpSpPr/>
+      <p:sp>
+        <p:nvSpPr>
+          <p:cNvPr id="2" name="TextBox 1"/>
+          <p:cNvSpPr txBox="1"/>
+          <p:nvPr/>
+        </p:nvSpPr>
+        <p:spPr>
+          <a:xfrm>
+            <a:off x="548640" y="411480"/>
+            <a:ext cx="11155680" cy="274320"/>
+          </a:xfrm>
+          <a:prstGeom prst="rect">
+            <a:avLst/>
+          </a:prstGeom>
+          <a:noFill/>
+        </p:spPr>
+        <p:txBody>
+          <a:bodyPr wrap="square" lIns="0" rIns="0" tIns="0" bIns="0">
+            <a:spAutoFit/>
+          </a:bodyPr>
+          <a:lstStyle/>
+          <a:p>
+            <a:pPr algn="l"/>
+            <a:r>
+              <a:rPr sz="1200" b="1" i="0">
+                <a:solidFill>
+                  <a:srgbClr val="2E66C2"/>
+                </a:solidFill>
+                <a:latin typeface="Calibri"/>
+              </a:rPr>
+              <a:t>APPENDIX</a:t>
+            </a:r>
+          </a:p>
+        </p:txBody>
+      </p:sp>
+      <p:sp>
+        <p:nvSpPr>
+          <p:cNvPr id="3" name="TextBox 2"/>
+          <p:cNvSpPr txBox="1"/>
+          <p:nvPr/>
+        </p:nvSpPr>
+        <p:spPr>
+          <a:xfrm>
+            <a:off x="548640" y="713232"/>
+            <a:ext cx="11155680" cy="640080"/>
+          </a:xfrm>
+          <a:prstGeom prst="rect">
+            <a:avLst/>
+          </a:prstGeom>
+          <a:noFill/>
+        </p:spPr>
+        <p:txBody>
+          <a:bodyPr wrap="square" lIns="0" rIns="0" tIns="0" bIns="0">
+            <a:spAutoFit/>
+          </a:bodyPr>
+          <a:lstStyle/>
+          <a:p>
+            <a:pPr algn="l"/>
+            <a:r>
+              <a:rPr sz="3000" b="1" i="0">
+                <a:solidFill>
+                  <a:srgbClr val="1F2A37"/>
+                </a:solidFill>
+                <a:latin typeface="Calibri"/>
+              </a:rPr>
+              <a:t>FP8 quality — standard accuracy benchmarks</a:t>
+            </a:r>
+          </a:p>
+        </p:txBody>
+      </p:sp>
+      <p:sp>
+        <p:nvSpPr>
+          <p:cNvPr id="4" name="Rectangle 3"/>
+          <p:cNvSpPr/>
+          <p:nvPr/>
+        </p:nvSpPr>
+        <p:spPr>
+          <a:xfrm>
+            <a:off x="548640" y="1417320"/>
+            <a:ext cx="914400" cy="38100"/>
+          </a:xfrm>
+          <a:prstGeom prst="rect">
+            <a:avLst/>
+          </a:prstGeom>
+          <a:solidFill>
+            <a:srgbClr val="2E66C2"/>
+          </a:solidFill>
+          <a:ln>
+            <a:noFill/>
+          </a:ln>
+        </p:spPr>
+        <p:style>
+          <a:lnRef idx="1">
+            <a:schemeClr val="accent1"/>
+          </a:lnRef>
+          <a:fillRef idx="3">
+            <a:schemeClr val="accent1"/>
+          </a:fillRef>
+          <a:effectRef idx="2">
+            <a:schemeClr val="accent1"/>
+          </a:effectRef>
+          <a:fontRef idx="minor">
+            <a:schemeClr val="lt1"/>
+          </a:fontRef>
+        </p:style>
+        <p:txBody>
+          <a:bodyPr rtlCol="0" anchor="ctr"/>
+          <a:lstStyle/>
+          <a:p>
+            <a:pPr algn="ctr"/>
+          </a:p>
+        </p:txBody>
+      </p:sp>
+      <p:pic>
+        <p:nvPicPr>
+          <p:cNvPr id="5" name="Picture 4" descr="appendix_fp8_accuracy.png"/>
+          <p:cNvPicPr>
+            <a:picLocks noChangeAspect="1"/>
+          </p:cNvPicPr>
+          <p:nvPr/>
+        </p:nvPicPr>
+        <p:blipFill>
+          <a:blip r:embed="rId2"/>
+          <a:stretch>
+            <a:fillRect/>
+          </a:stretch>
+        </p:blipFill>
+        <p:spPr>
+          <a:xfrm>
+            <a:off x="1280160" y="1783080"/>
+            <a:ext cx="9601200" cy="4434840"/>
+          </a:xfrm>
+          <a:prstGeom prst="rect">
+            <a:avLst/>
+          </a:prstGeom>
+        </p:spPr>
+      </p:pic>
+      <p:sp>
+        <p:nvSpPr>
+          <p:cNvPr id="6" name="TextBox 5"/>
+          <p:cNvSpPr txBox="1"/>
+          <p:nvPr/>
+        </p:nvSpPr>
+        <p:spPr>
+          <a:xfrm>
+            <a:off x="548640" y="6446520"/>
+            <a:ext cx="9144000" cy="274320"/>
+          </a:xfrm>
+          <a:prstGeom prst="rect">
+            <a:avLst/>
+          </a:prstGeom>
+          <a:noFill/>
+        </p:spPr>
+        <p:txBody>
+          <a:bodyPr wrap="square" lIns="0" rIns="0" tIns="0" bIns="0">
+            <a:spAutoFit/>
+          </a:bodyPr>
+          <a:lstStyle/>
+          <a:p>
+            <a:pPr algn="l"/>
+            <a:r>
+              <a:rPr sz="1000" b="0" i="0">
+                <a:solidFill>
+                  <a:srgbClr val="555F6E"/>
+                </a:solidFill>
+                <a:latin typeface="Calibri"/>
+              </a:rPr>
+              <a:t>OLMoE-1B-7B (1B active / 7B total) on Blackwell  ·  diagnosis &amp; optimization</a:t>
+            </a:r>
+          </a:p>
+        </p:txBody>
+      </p:sp>
+      <p:sp>
+        <p:nvSpPr>
+          <p:cNvPr id="7" name="TextBox 6"/>
+          <p:cNvSpPr txBox="1"/>
+          <p:nvPr/>
+        </p:nvSpPr>
+        <p:spPr>
+          <a:xfrm>
+            <a:off x="11521440" y="6446520"/>
+            <a:ext cx="548640" cy="274320"/>
+          </a:xfrm>
+          <a:prstGeom prst="rect">
+            <a:avLst/>
+          </a:prstGeom>
+          <a:noFill/>
+        </p:spPr>
+        <p:txBody>
+          <a:bodyPr wrap="square" lIns="0" rIns="0" tIns="0" bIns="0">
+            <a:spAutoFit/>
+          </a:bodyPr>
+          <a:lstStyle/>
+          <a:p>
+            <a:pPr algn="r"/>
+            <a:r>
+              <a:rPr sz="1000" b="0" i="0">
+                <a:solidFill>
+                  <a:srgbClr val="555F6E"/>
+                </a:solidFill>
+                <a:latin typeface="Calibri"/>
+              </a:rPr>
+              <a:t>17</a:t>
+            </a:r>
+          </a:p>
+        </p:txBody>
+      </p:sp>
+    </p:spTree>
+  </p:cSld>
+  <p:clrMapOvr>
+    <a:masterClrMapping/>
+  </p:clrMapOvr>
+</p:sld>
+</file>
+
+<file path=ppt/slides/slide18.xml><?xml version="1.0" encoding="utf-8"?>
+<p:sld xmlns:a="http://schemas.openxmlformats.org/drawingml/2006/main" xmlns:p="http://schemas.openxmlformats.org/presentationml/2006/main" xmlns:r="http://schemas.openxmlformats.org/officeDocument/2006/relationships">
+  <p:cSld>
+    <p:spTree>
+      <p:nvGrpSpPr>
+        <p:cNvPr id="1" name=""/>
+        <p:cNvGrpSpPr/>
+        <p:nvPr/>
+      </p:nvGrpSpPr>
+      <p:grpSpPr/>
+      <p:sp>
+        <p:nvSpPr>
+          <p:cNvPr id="2" name="TextBox 1"/>
+          <p:cNvSpPr txBox="1"/>
+          <p:nvPr/>
+        </p:nvSpPr>
+        <p:spPr>
+          <a:xfrm>
+            <a:off x="548640" y="411480"/>
+            <a:ext cx="11155680" cy="274320"/>
+          </a:xfrm>
+          <a:prstGeom prst="rect">
+            <a:avLst/>
+          </a:prstGeom>
+          <a:noFill/>
+        </p:spPr>
+        <p:txBody>
+          <a:bodyPr wrap="square" lIns="0" rIns="0" tIns="0" bIns="0">
+            <a:spAutoFit/>
+          </a:bodyPr>
+          <a:lstStyle/>
+          <a:p>
+            <a:pPr algn="l"/>
+            <a:r>
+              <a:rPr sz="1200" b="1" i="0">
+                <a:solidFill>
+                  <a:srgbClr val="2E66C2"/>
+                </a:solidFill>
+                <a:latin typeface="Calibri"/>
+              </a:rPr>
+              <a:t>APPENDIX</a:t>
+            </a:r>
+          </a:p>
+        </p:txBody>
+      </p:sp>
+      <p:sp>
+        <p:nvSpPr>
+          <p:cNvPr id="3" name="TextBox 2"/>
+          <p:cNvSpPr txBox="1"/>
+          <p:nvPr/>
+        </p:nvSpPr>
+        <p:spPr>
+          <a:xfrm>
+            <a:off x="548640" y="713232"/>
+            <a:ext cx="11155680" cy="640080"/>
+          </a:xfrm>
+          <a:prstGeom prst="rect">
+            <a:avLst/>
+          </a:prstGeom>
+          <a:noFill/>
+        </p:spPr>
+        <p:txBody>
+          <a:bodyPr wrap="square" lIns="0" rIns="0" tIns="0" bIns="0">
+            <a:spAutoFit/>
+          </a:bodyPr>
+          <a:lstStyle/>
+          <a:p>
+            <a:pPr algn="l"/>
+            <a:r>
+              <a:rPr sz="3000" b="1" i="0">
+                <a:solidFill>
+                  <a:srgbClr val="1F2A37"/>
+                </a:solidFill>
+                <a:latin typeface="Calibri"/>
+              </a:rPr>
+              <a:t>Why prefill isn't quadratic in input length</a:t>
+            </a:r>
+          </a:p>
+        </p:txBody>
+      </p:sp>
+      <p:sp>
+        <p:nvSpPr>
+          <p:cNvPr id="4" name="Rectangle 3"/>
+          <p:cNvSpPr/>
+          <p:nvPr/>
+        </p:nvSpPr>
+        <p:spPr>
+          <a:xfrm>
+            <a:off x="548640" y="1417320"/>
+            <a:ext cx="914400" cy="38100"/>
+          </a:xfrm>
+          <a:prstGeom prst="rect">
+            <a:avLst/>
+          </a:prstGeom>
+          <a:solidFill>
+            <a:srgbClr val="2E66C2"/>
+          </a:solidFill>
+          <a:ln>
+            <a:noFill/>
+          </a:ln>
+        </p:spPr>
+        <p:style>
+          <a:lnRef idx="1">
+            <a:schemeClr val="accent1"/>
+          </a:lnRef>
+          <a:fillRef idx="3">
+            <a:schemeClr val="accent1"/>
+          </a:fillRef>
+          <a:effectRef idx="2">
+            <a:schemeClr val="accent1"/>
+          </a:effectRef>
+          <a:fontRef idx="minor">
+            <a:schemeClr val="lt1"/>
+          </a:fontRef>
+        </p:style>
+        <p:txBody>
+          <a:bodyPr rtlCol="0" anchor="ctr"/>
+          <a:lstStyle/>
+          <a:p>
+            <a:pPr algn="ctr"/>
+          </a:p>
+        </p:txBody>
+      </p:sp>
+      <p:pic>
+        <p:nvPicPr>
+          <p:cNvPr id="5" name="Picture 4" descr="appendix_flop_math.png"/>
+          <p:cNvPicPr>
+            <a:picLocks noChangeAspect="1"/>
+          </p:cNvPicPr>
+          <p:nvPr/>
+        </p:nvPicPr>
+        <p:blipFill>
+          <a:blip r:embed="rId2"/>
+          <a:stretch>
+            <a:fillRect/>
+          </a:stretch>
+        </p:blipFill>
+        <p:spPr>
+          <a:xfrm>
+            <a:off x="1828800" y="1783080"/>
+            <a:ext cx="8229600" cy="4434840"/>
+          </a:xfrm>
+          <a:prstGeom prst="rect">
+            <a:avLst/>
+          </a:prstGeom>
+        </p:spPr>
+      </p:pic>
+      <p:sp>
+        <p:nvSpPr>
+          <p:cNvPr id="6" name="TextBox 5"/>
+          <p:cNvSpPr txBox="1"/>
+          <p:nvPr/>
+        </p:nvSpPr>
+        <p:spPr>
+          <a:xfrm>
+            <a:off x="548640" y="6446520"/>
+            <a:ext cx="9144000" cy="274320"/>
+          </a:xfrm>
+          <a:prstGeom prst="rect">
+            <a:avLst/>
+          </a:prstGeom>
+          <a:noFill/>
+        </p:spPr>
+        <p:txBody>
+          <a:bodyPr wrap="square" lIns="0" rIns="0" tIns="0" bIns="0">
+            <a:spAutoFit/>
+          </a:bodyPr>
+          <a:lstStyle/>
+          <a:p>
+            <a:pPr algn="l"/>
+            <a:r>
+              <a:rPr sz="1000" b="0" i="0">
+                <a:solidFill>
+                  <a:srgbClr val="555F6E"/>
+                </a:solidFill>
+                <a:latin typeface="Calibri"/>
+              </a:rPr>
+              <a:t>OLMoE-1B-7B (1B active / 7B total) on Blackwell  ·  diagnosis &amp; optimization</a:t>
+            </a:r>
+          </a:p>
+        </p:txBody>
+      </p:sp>
+      <p:sp>
+        <p:nvSpPr>
+          <p:cNvPr id="7" name="TextBox 6"/>
+          <p:cNvSpPr txBox="1"/>
+          <p:nvPr/>
+        </p:nvSpPr>
+        <p:spPr>
+          <a:xfrm>
+            <a:off x="11521440" y="6446520"/>
+            <a:ext cx="548640" cy="274320"/>
+          </a:xfrm>
+          <a:prstGeom prst="rect">
+            <a:avLst/>
+          </a:prstGeom>
+          <a:noFill/>
+        </p:spPr>
+        <p:txBody>
+          <a:bodyPr wrap="square" lIns="0" rIns="0" tIns="0" bIns="0">
+            <a:spAutoFit/>
+          </a:bodyPr>
+          <a:lstStyle/>
+          <a:p>
+            <a:pPr algn="r"/>
+            <a:r>
+              <a:rPr sz="1000" b="0" i="0">
+                <a:solidFill>
+                  <a:srgbClr val="555F6E"/>
+                </a:solidFill>
+                <a:latin typeface="Calibri"/>
+              </a:rPr>
+              <a:t>18</a:t>
             </a:r>
           </a:p>
         </p:txBody>
@@ -6595,65 +8788,65 @@
           <a:p>
             <a:pPr algn="l">
               <a:spcAft>
-                <a:spcPts val="800"/>
+                <a:spcPts val="600"/>
               </a:spcAft>
             </a:pPr>
             <a:r>
-              <a:rPr sz="1500">
+              <a:rPr sz="1400">
                 <a:solidFill>
                   <a:srgbClr val="1F2A37"/>
                 </a:solidFill>
                 <a:latin typeface="Calibri"/>
               </a:rPr>
-              <a:t>•  Response times are missing our target under real load</a:t>
+              <a:t>•  Baseline holds the SLA at light load — but degrades past ~200–600 active users</a:t>
             </a:r>
           </a:p>
           <a:p>
             <a:pPr algn="l">
               <a:spcAft>
-                <a:spcPts val="800"/>
+                <a:spcPts val="600"/>
               </a:spcAft>
             </a:pPr>
             <a:r>
-              <a:rPr sz="1500">
+              <a:rPr sz="1400">
                 <a:solidFill>
                   <a:srgbClr val="1F2A37"/>
                 </a:solidFill>
                 <a:latin typeface="Calibri"/>
               </a:rPr>
-              <a:t>•  User pain: long wait before the assistant says anything</a:t>
+              <a:t>•  User pain: long wait before the assistant says anything once we cross that bar</a:t>
             </a:r>
           </a:p>
           <a:p>
             <a:pPr algn="l">
               <a:spcAft>
-                <a:spcPts val="800"/>
+                <a:spcPts val="600"/>
               </a:spcAft>
             </a:pPr>
             <a:r>
-              <a:rPr sz="1500">
+              <a:rPr sz="1400">
                 <a:solidFill>
                   <a:srgbClr val="1F2A37"/>
                 </a:solidFill>
                 <a:latin typeface="Calibri"/>
               </a:rPr>
-              <a:t>•  Business pain: launch blocked; throwing more GPUs at it just costs money</a:t>
+              <a:t>•  Business pain: launch traffic blocked — and adding GPUs doesn't fix per-request latency</a:t>
             </a:r>
           </a:p>
           <a:p>
             <a:pPr algn="l">
               <a:spcAft>
-                <a:spcPts val="800"/>
+                <a:spcPts val="600"/>
               </a:spcAft>
             </a:pPr>
             <a:r>
-              <a:rPr sz="1500">
+              <a:rPr sz="1400">
                 <a:solidFill>
                   <a:srgbClr val="1F2A37"/>
                 </a:solidFill>
                 <a:latin typeface="Calibri"/>
               </a:rPr>
-              <a:t>•  Question: what actually fixes this — and what doesn't?</a:t>
+              <a:t>•  Question: how do we extend that headroom — and what doesn't help?</a:t>
             </a:r>
           </a:p>
         </p:txBody>
@@ -6667,7 +8860,7 @@
         <p:spPr>
           <a:xfrm>
             <a:off x="548640" y="6446520"/>
-            <a:ext cx="7315200" cy="274320"/>
+            <a:ext cx="9144000" cy="274320"/>
           </a:xfrm>
           <a:prstGeom prst="rect">
             <a:avLst/>
@@ -6688,7 +8881,7 @@
                 </a:solidFill>
                 <a:latin typeface="Calibri"/>
               </a:rPr>
-              <a:t>OLMoE on Blackwell  ·  diagnosis &amp; optimization</a:t>
+              <a:t>OLMoE-1B-7B (1B active / 7B total) on Blackwell  ·  diagnosis &amp; optimization</a:t>
             </a:r>
           </a:p>
         </p:txBody>
@@ -6962,7 +9155,7 @@
         <p:spPr>
           <a:xfrm>
             <a:off x="7589520" y="2057400"/>
-            <a:ext cx="4206240" cy="4114800"/>
+            <a:ext cx="4206240" cy="3931920"/>
           </a:xfrm>
           <a:prstGeom prst="rect">
             <a:avLst/>
@@ -6977,11 +9170,11 @@
           <a:p>
             <a:pPr algn="l">
               <a:spcAft>
-                <a:spcPts val="800"/>
+                <a:spcPts val="400"/>
               </a:spcAft>
             </a:pPr>
             <a:r>
-              <a:rPr sz="1500">
+              <a:rPr sz="1300">
                 <a:solidFill>
                   <a:srgbClr val="1F2A37"/>
                 </a:solidFill>
@@ -6993,11 +9186,11 @@
           <a:p>
             <a:pPr algn="l">
               <a:spcAft>
-                <a:spcPts val="800"/>
+                <a:spcPts val="400"/>
               </a:spcAft>
             </a:pPr>
             <a:r>
-              <a:rPr sz="1500">
+              <a:rPr sz="1300">
                 <a:solidFill>
                   <a:srgbClr val="1F2A37"/>
                 </a:solidFill>
@@ -7009,11 +9202,11 @@
           <a:p>
             <a:pPr algn="l">
               <a:spcAft>
-                <a:spcPts val="800"/>
+                <a:spcPts val="400"/>
               </a:spcAft>
             </a:pPr>
             <a:r>
-              <a:rPr sz="1500">
+              <a:rPr sz="1300">
                 <a:solidFill>
                   <a:srgbClr val="1F2A37"/>
                 </a:solidFill>
@@ -7025,33 +9218,65 @@
           <a:p>
             <a:pPr algn="l">
               <a:spcAft>
-                <a:spcPts val="800"/>
+                <a:spcPts val="400"/>
               </a:spcAft>
             </a:pPr>
             <a:r>
-              <a:rPr sz="1500">
+              <a:rPr sz="1300">
                 <a:solidFill>
                   <a:srgbClr val="1F2A37"/>
                 </a:solidFill>
                 <a:latin typeface="Calibri"/>
               </a:rPr>
-              <a:t>•  I tested with realistic chat-app prompt sizes</a:t>
+              <a:t>•  Test grid: typical chat-app prompt lengths (128–1500 tokens)</a:t>
             </a:r>
           </a:p>
           <a:p>
             <a:pPr algn="l">
               <a:spcAft>
-                <a:spcPts val="800"/>
+                <a:spcPts val="400"/>
               </a:spcAft>
             </a:pPr>
             <a:r>
-              <a:rPr sz="1500">
+              <a:rPr sz="1300">
                 <a:solidFill>
                   <a:srgbClr val="1F2A37"/>
                 </a:solidFill>
                 <a:latin typeface="Calibri"/>
               </a:rPr>
-              <a:t>•  Both numbers matter — neither alone tells the whole story</a:t>
+              <a:t>•  Model max context: 4,096 tokens — test sizes stay well inside that</a:t>
+            </a:r>
+          </a:p>
+          <a:p>
+            <a:pPr algn="l">
+              <a:spcAft>
+                <a:spcPts val="400"/>
+              </a:spcAft>
+            </a:pPr>
+            <a:r>
+              <a:rPr sz="1300">
+                <a:solidFill>
+                  <a:srgbClr val="1F2A37"/>
+                </a:solidFill>
+                <a:latin typeface="Calibri"/>
+              </a:rPr>
+              <a:t>•  SLA: TTFT &lt; 500 ms, TPOT &lt; 30 ms at p90</a:t>
+            </a:r>
+          </a:p>
+          <a:p>
+            <a:pPr algn="l">
+              <a:spcAft>
+                <a:spcPts val="400"/>
+              </a:spcAft>
+            </a:pPr>
+            <a:r>
+              <a:rPr sz="1300">
+                <a:solidFill>
+                  <a:srgbClr val="1F2A37"/>
+                </a:solidFill>
+                <a:latin typeface="Calibri"/>
+              </a:rPr>
+              <a:t>•  Sized at batch=32 in vLLM ≈ 200–600 active users (5–15% in-flight)</a:t>
             </a:r>
           </a:p>
         </p:txBody>
@@ -7064,8 +9289,8 @@
         </p:nvSpPr>
         <p:spPr>
           <a:xfrm>
-            <a:off x="548640" y="6446520"/>
-            <a:ext cx="7315200" cy="274320"/>
+            <a:off x="7589520" y="5989320"/>
+            <a:ext cx="4206240" cy="457200"/>
           </a:xfrm>
           <a:prstGeom prst="rect">
             <a:avLst/>
@@ -7080,13 +9305,13 @@
           <a:p>
             <a:pPr algn="l"/>
             <a:r>
-              <a:rPr sz="1000" b="0" i="0">
+              <a:rPr sz="900" b="0" i="1">
                 <a:solidFill>
                   <a:srgbClr val="555F6E"/>
                 </a:solidFill>
                 <a:latin typeface="Calibri"/>
               </a:rPr>
-              <a:t>OLMoE on Blackwell  ·  diagnosis &amp; optimization</a:t>
+              <a:t>SLA targets are common public references (Doherty threshold ≈ 400 ms; 33 tok/s ≈ 5× human reading speed). Pending product confirmation.</a:t>
             </a:r>
           </a:p>
         </p:txBody>
@@ -7094,6 +9319,41 @@
       <p:sp>
         <p:nvSpPr>
           <p:cNvPr id="10" name="TextBox 9"/>
+          <p:cNvSpPr txBox="1"/>
+          <p:nvPr/>
+        </p:nvSpPr>
+        <p:spPr>
+          <a:xfrm>
+            <a:off x="548640" y="6446520"/>
+            <a:ext cx="9144000" cy="274320"/>
+          </a:xfrm>
+          <a:prstGeom prst="rect">
+            <a:avLst/>
+          </a:prstGeom>
+          <a:noFill/>
+        </p:spPr>
+        <p:txBody>
+          <a:bodyPr wrap="square" lIns="0" rIns="0" tIns="0" bIns="0">
+            <a:spAutoFit/>
+          </a:bodyPr>
+          <a:lstStyle/>
+          <a:p>
+            <a:pPr algn="l"/>
+            <a:r>
+              <a:rPr sz="1000" b="0" i="0">
+                <a:solidFill>
+                  <a:srgbClr val="555F6E"/>
+                </a:solidFill>
+                <a:latin typeface="Calibri"/>
+              </a:rPr>
+              <a:t>OLMoE-1B-7B (1B active / 7B total) on Blackwell  ·  diagnosis &amp; optimization</a:t>
+            </a:r>
+          </a:p>
+        </p:txBody>
+      </p:sp>
+      <p:sp>
+        <p:nvSpPr>
+          <p:cNvPr id="11" name="TextBox 10"/>
           <p:cNvSpPr txBox="1"/>
           <p:nvPr/>
         </p:nvSpPr>
@@ -7291,7 +9551,7 @@
                 </a:solidFill>
                 <a:latin typeface="Calibri"/>
               </a:rPr>
-              <a:t>•  1.  Measure — get a clean, repeatable baseline first</a:t>
+              <a:t>•  1.  Measure — clean, repeatable baseline (TTFT/TPOT, seed-pinned)</a:t>
             </a:r>
           </a:p>
           <a:p>
@@ -7307,7 +9567,7 @@
                 </a:solidFill>
                 <a:latin typeface="Calibri"/>
               </a:rPr>
-              <a:t>•  2.  Look inside — see where time is actually being spent</a:t>
+              <a:t>•  2.  Profile — kernel-level breakdown via torch.profiler</a:t>
             </a:r>
           </a:p>
           <a:p>
@@ -7323,7 +9583,7 @@
                 </a:solidFill>
                 <a:latin typeface="Calibri"/>
               </a:rPr>
-              <a:t>•  3.  Try one change at a time — measure what each one saves</a:t>
+              <a:t>•  3.  Try one lever at a time — measure each delta against the baseline</a:t>
             </a:r>
           </a:p>
           <a:p>
@@ -7339,7 +9599,7 @@
                 </a:solidFill>
                 <a:latin typeface="Calibri"/>
               </a:rPr>
-              <a:t>•  4.  Decide — rank what helped, name the trade-offs, recommend</a:t>
+              <a:t>•  4.  Decide — rank by impact, name the trade-offs, recommend</a:t>
             </a:r>
           </a:p>
         </p:txBody>
@@ -7388,7 +9648,7 @@
         <p:spPr>
           <a:xfrm>
             <a:off x="548640" y="6446520"/>
-            <a:ext cx="7315200" cy="274320"/>
+            <a:ext cx="9144000" cy="274320"/>
           </a:xfrm>
           <a:prstGeom prst="rect">
             <a:avLst/>
@@ -7409,7 +9669,7 @@
                 </a:solidFill>
                 <a:latin typeface="Calibri"/>
               </a:rPr>
-              <a:t>OLMoE on Blackwell  ·  diagnosis &amp; optimization</a:t>
+              <a:t>OLMoE-1B-7B (1B active / 7B total) on Blackwell  ·  diagnosis &amp; optimization</a:t>
             </a:r>
           </a:p>
         </p:txBody>
@@ -7532,7 +9792,7 @@
                 </a:solidFill>
                 <a:latin typeface="Calibri"/>
               </a:rPr>
-              <a:t>Where I'm starting from — one Blackwell GPU, default settings</a:t>
+              <a:t>Where I'm starting from — single Blackwell GPU, batch size = 1</a:t>
             </a:r>
           </a:p>
         </p:txBody>
@@ -8213,7 +10473,7 @@
         <p:spPr>
           <a:xfrm>
             <a:off x="548640" y="6446520"/>
-            <a:ext cx="7315200" cy="274320"/>
+            <a:ext cx="9144000" cy="274320"/>
           </a:xfrm>
           <a:prstGeom prst="rect">
             <a:avLst/>
@@ -8234,7 +10494,7 @@
                 </a:solidFill>
                 <a:latin typeface="Calibri"/>
               </a:rPr>
-              <a:t>OLMoE on Blackwell  ·  diagnosis &amp; optimization</a:t>
+              <a:t>OLMoE-1B-7B (1B active / 7B total) on Blackwell  ·  diagnosis &amp; optimization</a:t>
             </a:r>
           </a:p>
         </p:txBody>
@@ -8523,65 +10783,65 @@
           <a:p>
             <a:pPr algn="l">
               <a:spcAft>
-                <a:spcPts val="800"/>
+                <a:spcPts val="600"/>
               </a:spcAft>
             </a:pPr>
             <a:r>
-              <a:rPr sz="1500">
+              <a:rPr sz="1400">
                 <a:solidFill>
                   <a:srgbClr val="1F2A37"/>
                 </a:solidFill>
                 <a:latin typeface="Calibri"/>
               </a:rPr>
-              <a:t>•  One step does ~80% of the work — and it's already heavily optimized in vLLM</a:t>
+              <a:t>•  fused_moe_kernel — grouped-GEMM on tensor cores — owns ~80% of prefill</a:t>
             </a:r>
           </a:p>
           <a:p>
             <a:pPr algn="l">
               <a:spcAft>
-                <a:spcPts val="800"/>
+                <a:spcPts val="600"/>
               </a:spcAft>
             </a:pPr>
             <a:r>
-              <a:rPr sz="1500">
+              <a:rPr sz="1400">
                 <a:solidFill>
                   <a:srgbClr val="1F2A37"/>
                 </a:solidFill>
                 <a:latin typeface="Calibri"/>
               </a:rPr>
-              <a:t>•  The rest is small overhead and weight loading from memory</a:t>
+              <a:t>•  Decode is memory-bandwidth-bound on projection-weight loads</a:t>
             </a:r>
           </a:p>
           <a:p>
             <a:pPr algn="l">
               <a:spcAft>
-                <a:spcPts val="800"/>
+                <a:spcPts val="600"/>
               </a:spcAft>
             </a:pPr>
             <a:r>
-              <a:rPr sz="1500">
+              <a:rPr sz="1400">
                 <a:solidFill>
                   <a:srgbClr val="1F2A37"/>
                 </a:solidFill>
                 <a:latin typeface="Calibri"/>
               </a:rPr>
-              <a:t>•  There's no obvious 'easy fix' hiding in the code — the levers are outside it</a:t>
+              <a:t>•  Hot path is already production-tuned in vLLM — no kernel headroom</a:t>
             </a:r>
           </a:p>
           <a:p>
             <a:pPr algn="l">
               <a:spcAft>
-                <a:spcPts val="800"/>
+                <a:spcPts val="600"/>
               </a:spcAft>
             </a:pPr>
             <a:r>
-              <a:rPr sz="1500">
+              <a:rPr sz="1400">
                 <a:solidFill>
                   <a:srgbClr val="1F2A37"/>
                 </a:solidFill>
                 <a:latin typeface="Calibri"/>
               </a:rPr>
-              <a:t>•  Next slide: the four levers I tested</a:t>
+              <a:t>•  Levers live above the kernels: quantization, caching, batching, parallelism</a:t>
             </a:r>
           </a:p>
         </p:txBody>
@@ -8595,7 +10855,7 @@
         <p:spPr>
           <a:xfrm>
             <a:off x="548640" y="6446520"/>
-            <a:ext cx="7315200" cy="274320"/>
+            <a:ext cx="9144000" cy="274320"/>
           </a:xfrm>
           <a:prstGeom prst="rect">
             <a:avLst/>
@@ -8616,7 +10876,7 @@
                 </a:solidFill>
                 <a:latin typeface="Calibri"/>
               </a:rPr>
-              <a:t>OLMoE on Blackwell  ·  diagnosis &amp; optimization</a:t>
+              <a:t>OLMoE-1B-7B (1B active / 7B total) on Blackwell  ·  diagnosis &amp; optimization</a:t>
             </a:r>
           </a:p>
         </p:txBody>
@@ -8959,7 +11219,7 @@
                           </a:solidFill>
                           <a:latin typeface="Calibri"/>
                         </a:rPr>
-                        <a:t>Reuse of repeated prompts</a:t>
+                        <a:t>Prefix caching</a:t>
                       </a:r>
                     </a:p>
                   </a:txBody>
@@ -9027,7 +11287,7 @@
                           </a:solidFill>
                           <a:latin typeface="Calibri"/>
                         </a:rPr>
-                        <a:t>Serve more users at once</a:t>
+                        <a:t>Continuous batching</a:t>
                       </a:r>
                     </a:p>
                   </a:txBody>
@@ -9071,7 +11331,7 @@
                           </a:solidFill>
                           <a:latin typeface="Calibri"/>
                         </a:rPr>
-                        <a:t>up to 5676 tokens/sec across users</a:t>
+                        <a:t>up to 5676 tokens/sec across in-flight requests</a:t>
                       </a:r>
                     </a:p>
                   </a:txBody>
@@ -9095,7 +11355,7 @@
                           </a:solidFill>
                           <a:latin typeface="Calibri"/>
                         </a:rPr>
-                        <a:t>Use both GPUs for one request</a:t>
+                        <a:t>Tensor parallelism (2 GPUs)</a:t>
                       </a:r>
                     </a:p>
                   </a:txBody>
@@ -9139,7 +11399,7 @@
                           </a:solidFill>
                           <a:latin typeface="Calibri"/>
                         </a:rPr>
-                        <a:t>TPOT 14% faster; TTFT unchanged at single-user batch=1</a:t>
+                        <a:t>TPOT 14% faster; TTFT roughly flat at chat-app prompt sizes (L ≥ 512)</a:t>
                       </a:r>
                     </a:p>
                   </a:txBody>
@@ -9198,7 +11458,7 @@
         <p:spPr>
           <a:xfrm>
             <a:off x="548640" y="6446520"/>
-            <a:ext cx="7315200" cy="274320"/>
+            <a:ext cx="9144000" cy="274320"/>
           </a:xfrm>
           <a:prstGeom prst="rect">
             <a:avLst/>
@@ -9219,7 +11479,7 @@
                 </a:solidFill>
                 <a:latin typeface="Calibri"/>
               </a:rPr>
-              <a:t>OLMoE on Blackwell  ·  diagnosis &amp; optimization</a:t>
+              <a:t>OLMoE-1B-7B (1B active / 7B total) on Blackwell  ·  diagnosis &amp; optimization</a:t>
             </a:r>
           </a:p>
         </p:txBody>
@@ -9423,7 +11683,7 @@
         <p:spPr>
           <a:xfrm>
             <a:off x="548640" y="6446520"/>
-            <a:ext cx="7315200" cy="274320"/>
+            <a:ext cx="9144000" cy="274320"/>
           </a:xfrm>
           <a:prstGeom prst="rect">
             <a:avLst/>
@@ -9444,7 +11704,7 @@
                 </a:solidFill>
                 <a:latin typeface="Calibri"/>
               </a:rPr>
-              <a:t>OLMoE on Blackwell  ·  diagnosis &amp; optimization</a:t>
+              <a:t>OLMoE-1B-7B (1B active / 7B total) on Blackwell  ·  diagnosis &amp; optimization</a:t>
             </a:r>
           </a:p>
         </p:txBody>
@@ -9532,7 +11792,7 @@
                 </a:solidFill>
                 <a:latin typeface="Calibri"/>
               </a:rPr>
-              <a:t>TRADE-OFFS</a:t>
+              <a:t>RESULTS</a:t>
             </a:r>
           </a:p>
         </p:txBody>
@@ -9567,7 +11827,7 @@
                 </a:solidFill>
                 <a:latin typeface="Calibri"/>
               </a:rPr>
-              <a:t>Reusing repeated prompts — bigger payoff on longer prompts</a:t>
+              <a:t>TPOT — three approaches compared</a:t>
             </a:r>
           </a:p>
         </p:txBody>
@@ -9617,7 +11877,7 @@
       </p:sp>
       <p:pic>
         <p:nvPicPr>
-          <p:cNvPr id="5" name="Picture 4" descr="appendix_prefix_caching.png"/>
+          <p:cNvPr id="5" name="Picture 4" descr="appendix_tpot_vs_length.png"/>
           <p:cNvPicPr>
             <a:picLocks noChangeAspect="1"/>
           </p:cNvPicPr>
@@ -9648,7 +11908,7 @@
         <p:spPr>
           <a:xfrm>
             <a:off x="548640" y="6446520"/>
-            <a:ext cx="7315200" cy="274320"/>
+            <a:ext cx="9144000" cy="274320"/>
           </a:xfrm>
           <a:prstGeom prst="rect">
             <a:avLst/>
@@ -9669,7 +11929,7 @@
                 </a:solidFill>
                 <a:latin typeface="Calibri"/>
               </a:rPr>
-              <a:t>OLMoE on Blackwell  ·  diagnosis &amp; optimization</a:t>
+              <a:t>OLMoE-1B-7B (1B active / 7B total) on Blackwell  ·  diagnosis &amp; optimization</a:t>
             </a:r>
           </a:p>
         </p:txBody>

--- a/talk/deck.pptx
+++ b/talk/deck.pptx
@@ -1148,6 +1148,12 @@
           <a:p>
             <a:r>
               <a:t>Q (Tech): What about FP4? A: Blackwell supports it; vLLM/OLMoE compatibility is the limiter. On the roadmap; not measured here.</a:t>
+            </a:r>
+          </a:p>
+          <a:p/>
+          <a:p>
+            <a:r>
+              <a:t>Q (Tech): Does FP8 affect MoE routing — which experts fire? A: vLLM's MoE FP8 quantization keeps the router (gating linear) in higher precision by design; only the expert FFN weights are quantized. So expert selection at any given token is identical between bf16 and FP8 — only the math each selected expert does changes precision. This is consistent with the eval results: broad routing instability would have hit MMLU/HellaSwag/ARC, not just GSM8K. GSM8K's bigger drop is consistent with low-precision arithmetic compounding errors in chain-of-thought math, not with a routing change. Caveat: I haven't directly compared expert-fire patterns trace-by-trace between bf16 and FP8 — the claim is from reading vLLM's quantization code path plus the eval shape.</a:t>
             </a:r>
           </a:p>
           <a:p/>
@@ -5717,7 +5723,7 @@
         <p:spPr>
           <a:xfrm>
             <a:off x="548640" y="2743200"/>
-            <a:ext cx="5486400" cy="1371600"/>
+            <a:ext cx="5486400" cy="1188720"/>
           </a:xfrm>
           <a:prstGeom prst="rect">
             <a:avLst/>
@@ -5751,7 +5757,7 @@
         </p:nvSpPr>
         <p:spPr>
           <a:xfrm>
-            <a:off x="548640" y="4160520"/>
+            <a:off x="548640" y="3886200"/>
             <a:ext cx="5486400" cy="548640"/>
           </a:xfrm>
           <a:prstGeom prst="rect">
@@ -5767,6 +5773,41 @@
           <a:p>
             <a:pPr algn="l"/>
             <a:r>
+              <a:rPr sz="1100" b="0" i="1">
+                <a:solidFill>
+                  <a:srgbClr val="555F6E"/>
+                </a:solidFill>
+                <a:latin typeface="Calibri"/>
+              </a:rPr>
+              <a:t>Based on single-request benchmarks — production savings will vary with traffic pattern and cache hit rate.</a:t>
+            </a:r>
+          </a:p>
+        </p:txBody>
+      </p:sp>
+      <p:sp>
+        <p:nvSpPr>
+          <p:cNvPr id="9" name="TextBox 8"/>
+          <p:cNvSpPr txBox="1"/>
+          <p:nvPr/>
+        </p:nvSpPr>
+        <p:spPr>
+          <a:xfrm>
+            <a:off x="548640" y="4572000"/>
+            <a:ext cx="5486400" cy="457200"/>
+          </a:xfrm>
+          <a:prstGeom prst="rect">
+            <a:avLst/>
+          </a:prstGeom>
+          <a:noFill/>
+        </p:spPr>
+        <p:txBody>
+          <a:bodyPr wrap="square" lIns="0" rIns="0" tIns="0" bIns="0">
+            <a:spAutoFit/>
+          </a:bodyPr>
+          <a:lstStyle/>
+          <a:p>
+            <a:pPr algn="l"/>
+            <a:r>
               <a:rPr sz="2200" b="1" i="0">
                 <a:solidFill>
                   <a:srgbClr val="1F2A37"/>
@@ -5780,13 +5821,13 @@
       </p:sp>
       <p:sp>
         <p:nvSpPr>
-          <p:cNvPr id="9" name="TextBox 8"/>
+          <p:cNvPr id="10" name="TextBox 9"/>
           <p:cNvSpPr txBox="1"/>
           <p:nvPr/>
         </p:nvSpPr>
         <p:spPr>
           <a:xfrm>
-            <a:off x="548640" y="4800600"/>
+            <a:off x="548640" y="5120640"/>
             <a:ext cx="5486400" cy="914400"/>
           </a:xfrm>
           <a:prstGeom prst="rect">
@@ -5815,7 +5856,7 @@
       </p:sp>
       <p:sp>
         <p:nvSpPr>
-          <p:cNvPr id="10" name="TextBox 9"/>
+          <p:cNvPr id="11" name="TextBox 10"/>
           <p:cNvSpPr txBox="1"/>
           <p:nvPr/>
         </p:nvSpPr>
@@ -5850,7 +5891,7 @@
       </p:sp>
       <p:sp>
         <p:nvSpPr>
-          <p:cNvPr id="11" name="TextBox 10"/>
+          <p:cNvPr id="12" name="TextBox 11"/>
           <p:cNvSpPr txBox="1"/>
           <p:nvPr/>
         </p:nvSpPr>
@@ -5885,7 +5926,7 @@
       </p:sp>
       <p:sp>
         <p:nvSpPr>
-          <p:cNvPr id="12" name="TextBox 11"/>
+          <p:cNvPr id="13" name="TextBox 12"/>
           <p:cNvSpPr txBox="1"/>
           <p:nvPr/>
         </p:nvSpPr>
@@ -5920,7 +5961,7 @@
       </p:sp>
       <p:sp>
         <p:nvSpPr>
-          <p:cNvPr id="13" name="TextBox 12"/>
+          <p:cNvPr id="14" name="TextBox 13"/>
           <p:cNvSpPr txBox="1"/>
           <p:nvPr/>
         </p:nvSpPr>
@@ -5955,7 +5996,7 @@
       </p:sp>
       <p:sp>
         <p:nvSpPr>
-          <p:cNvPr id="14" name="TextBox 13"/>
+          <p:cNvPr id="15" name="TextBox 14"/>
           <p:cNvSpPr txBox="1"/>
           <p:nvPr/>
         </p:nvSpPr>
@@ -5990,7 +6031,7 @@
       </p:sp>
       <p:sp>
         <p:nvSpPr>
-          <p:cNvPr id="15" name="TextBox 14"/>
+          <p:cNvPr id="16" name="TextBox 15"/>
           <p:cNvSpPr txBox="1"/>
           <p:nvPr/>
         </p:nvSpPr>
@@ -6025,7 +6066,7 @@
       </p:sp>
       <p:sp>
         <p:nvSpPr>
-          <p:cNvPr id="16" name="TextBox 15"/>
+          <p:cNvPr id="17" name="TextBox 16"/>
           <p:cNvSpPr txBox="1"/>
           <p:nvPr/>
         </p:nvSpPr>
@@ -7703,7 +7744,7 @@
                 </a:solidFill>
                 <a:latin typeface="Calibri"/>
               </a:rPr>
-              <a:t>•  Apply tensor parallelism (TP=2) for TPOT — 14% gain measured at single-user load, not yet measured under concurrency</a:t>
+              <a:t>•  Evaluate tensor parallelism (TP=2) for TPOT — 14% gain at single-user load; rerun under concurrency before adopting in prod</a:t>
             </a:r>
           </a:p>
           <a:p>

--- a/talk/deck.pptx
+++ b/talk/deck.pptx
@@ -23,6 +23,7 @@
     <p:sldId id="271" r:id="rId23"/>
     <p:sldId id="272" r:id="rId24"/>
     <p:sldId id="273" r:id="rId25"/>
+    <p:sldId id="274" r:id="rId26"/>
   </p:sldIdLst>
   <p:sldSz cx="12191695" cy="6858000" type="screen4x3"/>
   <p:notesSz cx="6858000" cy="9144000"/>
@@ -783,19 +784,25 @@
           <a:lstStyle/>
           <a:p>
             <a:r>
-              <a:t>This is the slide that translates the technical wins into dollars and timeline for the VP. Cost savings on the left, time-to-market on the right.</a:t>
+              <a:t>Direct answer to 'did we meet the SLA': yes, up to batch=32 in-flight requests per pod. Both bf16 and FP8 hold under the 500 ms TTFT p90 line at B=1, 4, 16, 32. Both fail at B=64 and B=128.</a:t>
             </a:r>
           </a:p>
           <a:p/>
           <a:p>
             <a:r>
-              <a:t>Cost: the 40% number folds in FP8's ~17% end-to-end speedup and the prompt-reuse TTFT savings that show up across the chat app's shared-prompt traffic. At commodity EKS GPU pricing — $2 to $4 per GPU-hour depending on instance type and reservation — a 40% compute reduction on a 2-GPU node running 24/7 is fourteen to twenty-eight thousand dollars saved per month per node. Break-even is day one because neither lever needs new hardware.</a:t>
+              <a:t>FP8 doesn't meaningfully extend the SLA-passing concurrency ceiling. It improves TPOT and per-batch throughput, but the binding constraint at high concurrency is queueing, not the kernel — so faster math doesn't help when the engine is already saturated. Note FP8's TTFT p90 actually trails bf16 at B=64 and B=128; both are well past the SLA at that point so the ordering is noise on top of an overloaded engine.</a:t>
             </a:r>
           </a:p>
           <a:p/>
           <a:p>
             <a:r>
-              <a:t>Time-to-market: the launch concern was traffic exceeding the SLA under load. The measured baseline already passes at low concurrency — TTFT and TPOT sit inside SLA up to ~32 in-flight requests per vLLM pod, which translates to roughly 200–600 active users at 5–15% in-flight rate. FP8 and prompt reuse extend that ceiling, and the scaling playbook covers the next 10× without re-architecting — same code path, same pod shape, just configuration.</a:t>
+              <a:t>TPOT (not shown on this chart, but in the appendix) passes the 30 ms target at every batch size for both — TPOT is a non-binding constraint here. The whole SLA story comes down to TTFT under concurrent load.</a:t>
+            </a:r>
+          </a:p>
+          <a:p/>
+          <a:p>
+            <a:r>
+              <a:t>What this means: the levers don't *rescue* the SLA — the baseline already passed it at expected load. The levers extend per-request headroom and cut cost per request. To extend the concurrency ceiling specifically, the next step is horizontal scaling (more pods), not faster kernels.</a:t>
             </a:r>
           </a:p>
         </p:txBody>
@@ -865,31 +872,19 @@
           <a:lstStyle/>
           <a:p>
             <a:r>
-              <a:t>Every lever has a price; this is the slide where I name them so neither panelist has to dig them out of me. Walk the table top-to-bottom.</a:t>
+              <a:t>This is the slide that translates the technical wins into dollars and timeline for the VP. Cost savings on the left, time-to-market on the right.</a:t>
             </a:r>
           </a:p>
           <a:p/>
           <a:p>
             <a:r>
-              <a:t>FP8: the upside is real, the risk is GSM8K-style precision-sensitive tasks taking a measurable hit. The mitigation is to run the eval suite on the customer's actual workload before flipping the flag in production, and to keep bf16 as a fallback if anything regresses.</a:t>
+              <a:t>Cost: the 40% number folds in FP8's ~17% end-to-end speedup and the prompt-reuse TTFT savings that show up across the chat app's shared-prompt traffic. At commodity EKS GPU pricing — $2 to $4 per GPU-hour depending on instance type and reservation — a 40% compute reduction on a 2-GPU node running 24/7 is fourteen to twenty-eight thousand dollars saved per month per node. Break-even is day one because neither lever needs new hardware.</a:t>
             </a:r>
           </a:p>
           <a:p/>
           <a:p>
             <a:r>
-              <a:t>Prefix caching: only helps when prompts share prefixes. Sizing the KV cache and monitoring hit rate keeps it honest in production.</a:t>
-            </a:r>
-          </a:p>
-          <a:p/>
-          <a:p>
-            <a:r>
-              <a:t>Tensor parallel: I keep flagging this — at single-user batch=1 it doesn't move TTFT. The reason it's still worth it is TPOT and the doubled memory headroom for bigger batches. If someone uses it as a TTFT lever they'll be disappointed.</a:t>
-            </a:r>
-          </a:p>
-          <a:p/>
-          <a:p>
-            <a:r>
-              <a:t>Concurrency: throughput goes up, per-user latency goes up. The mitigation is to set max_num_seqs from the p90 TTFT we promised, not from the throughput we want.</a:t>
+              <a:t>Time-to-market: the launch concern was traffic exceeding the SLA under load. The measured baseline already passes at low concurrency — TTFT and TPOT sit inside SLA up to ~32 in-flight requests per vLLM pod, which translates to roughly 200–600 active users at 5–15% in-flight rate. FP8 and prompt reuse extend that ceiling, and the scaling playbook covers the next 10× without re-architecting — same code path, same pod shape, just configuration.</a:t>
             </a:r>
           </a:p>
         </p:txBody>
@@ -959,37 +954,31 @@
           <a:lstStyle/>
           <a:p>
             <a:r>
-              <a:t>Standard scaling playbook for the EKS shape we're in. Each row is cheaper and lower-risk than the next; only move down a row when the row above stops being enough.</a:t>
+              <a:t>Every lever has a price; this is the slide where I name them so neither panelist has to dig them out of me. Walk the table top-to-bottom.</a:t>
             </a:r>
           </a:p>
           <a:p/>
           <a:p>
             <a:r>
-              <a:t>Row 1 — software config. FP8 plus prompt reuse is free. The only way it stops working is if FP8 hurts accuracy on the customer's own evals, or if traffic doesn't actually share prefixes.</a:t>
+              <a:t>FP8: the upside is real, the risk is GSM8K-style precision-sensitive tasks taking a measurable hit. The mitigation is to run the eval suite on the customer's actual workload before flipping the flag in production, and to keep bf16 as a fallback if anything regresses.</a:t>
             </a:r>
           </a:p>
           <a:p/>
           <a:p>
             <a:r>
-              <a:t>Row 2 — concurrency tuning. Set max_num_seqs from the p90 TTFT target, not from peak throughput. The measured ceiling is batch=32 in flight per pod — past that, TTFT p90 exceeds the 500 ms target. Translating that to humans: at 5–15% in-flight rate (typical chat with think-time), one pod can absorb roughly 200–600 logged-in active users before this lever runs out. Caveat: that range depends on think-time, prompt length, and session shape — not measured against the actual chat-app traffic yet. When this row stops being enough, add pods (row 4) before doing anything bigger.</a:t>
+              <a:t>Prefix caching: only helps when prompts share prefixes. Sizing the KV cache and monitoring hit rate keeps it honest in production.</a:t>
             </a:r>
           </a:p>
           <a:p/>
           <a:p>
             <a:r>
-              <a:t>Row 3 — TP=2 inside one pod. Uses both Blackwell GPUs together. It buys ~14% TPOT and doubles the memory available for bigger batches. It does NOT buy TTFT at single-user load. When this row stops being enough we add horizontal capacity, not vertical.</a:t>
+              <a:t>Tensor parallel: I keep flagging this — at single-user batch=1 it doesn't move TTFT. The reason it's still worth it is TPOT and the doubled memory headroom for bigger batches. If someone uses it as a TTFT lever they'll be disappointed.</a:t>
             </a:r>
           </a:p>
           <a:p/>
           <a:p>
             <a:r>
-              <a:t>Row 4 — horizontal pod autoscaling. Add more replicas behind the load balancer. Linear capacity scaling, k8s-native, no engineer in the loop. Stops when the GPU node pool is full.</a:t>
-            </a:r>
-          </a:p>
-          <a:p/>
-          <a:p>
-            <a:r>
-              <a:t>Row 5 — new nodes. Most expensive lever; triggers the procurement cycle. We push it as far right as possible.</a:t>
+              <a:t>Concurrency: throughput goes up, per-user latency goes up. The mitigation is to set max_num_seqs from the p90 TTFT we promised, not from the throughput we want.</a:t>
             </a:r>
           </a:p>
         </p:txBody>
@@ -1059,13 +1048,37 @@
           <a:lstStyle/>
           <a:p>
             <a:r>
-              <a:t>Five lines, in priority order. A staff engineer reading this should agree with each one.</a:t>
+              <a:t>Standard scaling playbook for the EKS shape we're in. Each row is cheaper and lower-risk than the next; only move down a row when the row above stops being enough.</a:t>
             </a:r>
           </a:p>
           <a:p/>
           <a:p>
             <a:r>
-              <a:t>Last bullet matters: every claim here is tied to *this* model, *this* engine version, *this* hardware. Re-baseline whenever any of those move. The repo is set up to make that cheap.</a:t>
+              <a:t>Row 1 — software config. FP8 plus prompt reuse is free. The only way it stops working is if FP8 hurts accuracy on the customer's own evals, or if traffic doesn't actually share prefixes.</a:t>
+            </a:r>
+          </a:p>
+          <a:p/>
+          <a:p>
+            <a:r>
+              <a:t>Row 2 — concurrency tuning. Set max_num_seqs from the p90 TTFT target, not from peak throughput. The measured ceiling is batch=32 in flight per pod — past that, TTFT p90 exceeds the 500 ms target. Translating that to humans: at 5–15% in-flight rate (typical chat with think-time), one pod can absorb roughly 200–600 logged-in active users before this lever runs out. Caveat: that range depends on think-time, prompt length, and session shape — not measured against the actual chat-app traffic yet. When this row stops being enough, add pods (row 4) before doing anything bigger.</a:t>
+            </a:r>
+          </a:p>
+          <a:p/>
+          <a:p>
+            <a:r>
+              <a:t>Row 3 — TP=2 inside one pod. Uses both Blackwell GPUs together. It buys ~14% TPOT and doubles the memory available for bigger batches. It does NOT buy TTFT at single-user load. When this row stops being enough we add horizontal capacity, not vertical.</a:t>
+            </a:r>
+          </a:p>
+          <a:p/>
+          <a:p>
+            <a:r>
+              <a:t>Row 4 — horizontal pod autoscaling. Add more replicas behind the load balancer. Linear capacity scaling, k8s-native, no engineer in the loop. Stops when the GPU node pool is full.</a:t>
+            </a:r>
+          </a:p>
+          <a:p/>
+          <a:p>
+            <a:r>
+              <a:t>Row 5 — new nodes. Most expensive lever; triggers the procurement cycle. We push it as far right as possible.</a:t>
             </a:r>
           </a:p>
         </p:txBody>
@@ -1091,6 +1104,82 @@
 </file>
 
 <file path=ppt/notesSlides/notesSlide16.xml><?xml version="1.0" encoding="utf-8"?>
+<p:notes xmlns:a="http://schemas.openxmlformats.org/drawingml/2006/main" xmlns:p="http://schemas.openxmlformats.org/presentationml/2006/main" xmlns:r="http://schemas.openxmlformats.org/officeDocument/2006/relationships">
+  <p:cSld>
+    <p:spTree>
+      <p:nvGrpSpPr>
+        <p:cNvPr id="1" name=""/>
+        <p:cNvGrpSpPr/>
+        <p:nvPr/>
+      </p:nvGrpSpPr>
+      <p:grpSpPr>
+        <a:xfrm>
+          <a:off x="0" y="0"/>
+          <a:ext cx="0" cy="0"/>
+          <a:chOff x="0" y="0"/>
+          <a:chExt cx="0" cy="0"/>
+        </a:xfrm>
+      </p:grpSpPr>
+      <p:sp>
+        <p:nvSpPr>
+          <p:cNvPr id="2" name="Slide Image Placeholder 1"/>
+          <p:cNvSpPr>
+            <a:spLocks noGrp="1"/>
+          </p:cNvSpPr>
+          <p:nvPr>
+            <p:ph type="sldImg" idx="2"/>
+          </p:nvPr>
+        </p:nvSpPr>
+        <p:spPr/>
+      </p:sp>
+      <p:sp>
+        <p:nvSpPr>
+          <p:cNvPr id="3" name="Notes Placeholder 2"/>
+          <p:cNvSpPr>
+            <a:spLocks noGrp="1"/>
+          </p:cNvSpPr>
+          <p:nvPr>
+            <p:ph type="body" idx="3" sz="quarter"/>
+          </p:nvPr>
+        </p:nvSpPr>
+        <p:spPr/>
+        <p:txBody>
+          <a:bodyPr/>
+          <a:lstStyle/>
+          <a:p>
+            <a:r>
+              <a:t>Five lines, in priority order. A staff engineer reading this should agree with each one.</a:t>
+            </a:r>
+          </a:p>
+          <a:p/>
+          <a:p>
+            <a:r>
+              <a:t>Last bullet matters: every claim here is tied to *this* model, *this* engine version, *this* hardware. Re-baseline whenever any of those move. The repo is set up to make that cheap.</a:t>
+            </a:r>
+          </a:p>
+        </p:txBody>
+      </p:sp>
+      <p:sp>
+        <p:nvSpPr>
+          <p:cNvPr id="4" name="Slide Number Placeholder 3"/>
+          <p:cNvSpPr>
+            <a:spLocks noGrp="1"/>
+          </p:cNvSpPr>
+          <p:nvPr>
+            <p:ph type="sldNum" idx="5" sz="quarter"/>
+          </p:nvPr>
+        </p:nvSpPr>
+        <p:spPr/>
+      </p:sp>
+    </p:spTree>
+  </p:cSld>
+  <p:clrMapOvr>
+    <a:masterClrMapping/>
+  </p:clrMapOvr>
+</p:notes>
+</file>
+
+<file path=ppt/notesSlides/notesSlide17.xml><?xml version="1.0" encoding="utf-8"?>
 <p:notes xmlns:a="http://schemas.openxmlformats.org/drawingml/2006/main" xmlns:p="http://schemas.openxmlformats.org/presentationml/2006/main" xmlns:r="http://schemas.openxmlformats.org/officeDocument/2006/relationships">
   <p:cSld>
     <p:spTree>
@@ -5561,7 +5650,7 @@
                 </a:solidFill>
                 <a:latin typeface="Calibri"/>
               </a:rPr>
-              <a:t>BUSINESS VALUE</a:t>
+              <a:t>SLA</a:t>
             </a:r>
           </a:p>
         </p:txBody>
@@ -5596,7 +5685,7 @@
                 </a:solidFill>
                 <a:latin typeface="Calibri"/>
               </a:rPr>
-              <a:t>What this is worth</a:t>
+              <a:t>SLA status — where the lines hold and where they break</a:t>
             </a:r>
           </a:p>
         </p:txBody>
@@ -5644,16 +5733,40 @@
           </a:p>
         </p:txBody>
       </p:sp>
-      <p:sp>
-        <p:nvSpPr>
-          <p:cNvPr id="5" name="TextBox 4"/>
+      <p:pic>
+        <p:nvPicPr>
+          <p:cNvPr id="5" name="Picture 4" descr="appendix_sla_status.png"/>
+          <p:cNvPicPr>
+            <a:picLocks noChangeAspect="1"/>
+          </p:cNvPicPr>
+          <p:nvPr/>
+        </p:nvPicPr>
+        <p:blipFill>
+          <a:blip r:embed="rId2"/>
+          <a:stretch>
+            <a:fillRect/>
+          </a:stretch>
+        </p:blipFill>
+        <p:spPr>
+          <a:xfrm>
+            <a:off x="1280160" y="1783080"/>
+            <a:ext cx="9601200" cy="4434840"/>
+          </a:xfrm>
+          <a:prstGeom prst="rect">
+            <a:avLst/>
+          </a:prstGeom>
+        </p:spPr>
+      </p:pic>
+      <p:sp>
+        <p:nvSpPr>
+          <p:cNvPr id="6" name="TextBox 5"/>
           <p:cNvSpPr txBox="1"/>
           <p:nvPr/>
         </p:nvSpPr>
         <p:spPr>
           <a:xfrm>
-            <a:off x="548640" y="1691640"/>
-            <a:ext cx="5486400" cy="274320"/>
+            <a:off x="548640" y="6446520"/>
+            <a:ext cx="9144000" cy="274320"/>
           </a:xfrm>
           <a:prstGeom prst="rect">
             <a:avLst/>
@@ -5668,391 +5781,6 @@
           <a:p>
             <a:pPr algn="l"/>
             <a:r>
-              <a:rPr sz="1100" b="1" i="0">
-                <a:solidFill>
-                  <a:srgbClr val="2E66C2"/>
-                </a:solidFill>
-                <a:latin typeface="Calibri"/>
-              </a:rPr>
-              <a:t>COST SAVINGS</a:t>
-            </a:r>
-          </a:p>
-        </p:txBody>
-      </p:sp>
-      <p:sp>
-        <p:nvSpPr>
-          <p:cNvPr id="6" name="TextBox 5"/>
-          <p:cNvSpPr txBox="1"/>
-          <p:nvPr/>
-        </p:nvSpPr>
-        <p:spPr>
-          <a:xfrm>
-            <a:off x="548640" y="2057400"/>
-            <a:ext cx="5486400" cy="548640"/>
-          </a:xfrm>
-          <a:prstGeom prst="rect">
-            <a:avLst/>
-          </a:prstGeom>
-          <a:noFill/>
-        </p:spPr>
-        <p:txBody>
-          <a:bodyPr wrap="square" lIns="0" rIns="0" tIns="0" bIns="0">
-            <a:spAutoFit/>
-          </a:bodyPr>
-          <a:lstStyle/>
-          <a:p>
-            <a:pPr algn="l"/>
-            <a:r>
-              <a:rPr sz="2600" b="1" i="0">
-                <a:solidFill>
-                  <a:srgbClr val="1F2A37"/>
-                </a:solidFill>
-                <a:latin typeface="Calibri"/>
-              </a:rPr>
-              <a:t>~40% fewer GPU-hours</a:t>
-            </a:r>
-          </a:p>
-        </p:txBody>
-      </p:sp>
-      <p:sp>
-        <p:nvSpPr>
-          <p:cNvPr id="7" name="TextBox 6"/>
-          <p:cNvSpPr txBox="1"/>
-          <p:nvPr/>
-        </p:nvSpPr>
-        <p:spPr>
-          <a:xfrm>
-            <a:off x="548640" y="2743200"/>
-            <a:ext cx="5486400" cy="1188720"/>
-          </a:xfrm>
-          <a:prstGeom prst="rect">
-            <a:avLst/>
-          </a:prstGeom>
-          <a:noFill/>
-        </p:spPr>
-        <p:txBody>
-          <a:bodyPr wrap="square" lIns="0" rIns="0" tIns="0" bIns="0">
-            <a:spAutoFit/>
-          </a:bodyPr>
-          <a:lstStyle/>
-          <a:p>
-            <a:pPr algn="l"/>
-            <a:r>
-              <a:rPr sz="1400" b="0" i="0">
-                <a:solidFill>
-                  <a:srgbClr val="555F6E"/>
-                </a:solidFill>
-                <a:latin typeface="Calibri"/>
-              </a:rPr>
-              <a:t>FP8 + prefix caching cut compute per request. At $2–4 per GPU-hour on EKS, a 40% reduction on a 2-GPU node running 24/7 = ~$14K–28K per month saved per node.</a:t>
-            </a:r>
-          </a:p>
-        </p:txBody>
-      </p:sp>
-      <p:sp>
-        <p:nvSpPr>
-          <p:cNvPr id="8" name="TextBox 7"/>
-          <p:cNvSpPr txBox="1"/>
-          <p:nvPr/>
-        </p:nvSpPr>
-        <p:spPr>
-          <a:xfrm>
-            <a:off x="548640" y="3886200"/>
-            <a:ext cx="5486400" cy="548640"/>
-          </a:xfrm>
-          <a:prstGeom prst="rect">
-            <a:avLst/>
-          </a:prstGeom>
-          <a:noFill/>
-        </p:spPr>
-        <p:txBody>
-          <a:bodyPr wrap="square" lIns="0" rIns="0" tIns="0" bIns="0">
-            <a:spAutoFit/>
-          </a:bodyPr>
-          <a:lstStyle/>
-          <a:p>
-            <a:pPr algn="l"/>
-            <a:r>
-              <a:rPr sz="1100" b="0" i="1">
-                <a:solidFill>
-                  <a:srgbClr val="555F6E"/>
-                </a:solidFill>
-                <a:latin typeface="Calibri"/>
-              </a:rPr>
-              <a:t>Based on single-request benchmarks — production savings will vary with traffic pattern and cache hit rate.</a:t>
-            </a:r>
-          </a:p>
-        </p:txBody>
-      </p:sp>
-      <p:sp>
-        <p:nvSpPr>
-          <p:cNvPr id="9" name="TextBox 8"/>
-          <p:cNvSpPr txBox="1"/>
-          <p:nvPr/>
-        </p:nvSpPr>
-        <p:spPr>
-          <a:xfrm>
-            <a:off x="548640" y="4572000"/>
-            <a:ext cx="5486400" cy="457200"/>
-          </a:xfrm>
-          <a:prstGeom prst="rect">
-            <a:avLst/>
-          </a:prstGeom>
-          <a:noFill/>
-        </p:spPr>
-        <p:txBody>
-          <a:bodyPr wrap="square" lIns="0" rIns="0" tIns="0" bIns="0">
-            <a:spAutoFit/>
-          </a:bodyPr>
-          <a:lstStyle/>
-          <a:p>
-            <a:pPr algn="l"/>
-            <a:r>
-              <a:rPr sz="2200" b="1" i="0">
-                <a:solidFill>
-                  <a:srgbClr val="1F2A37"/>
-                </a:solidFill>
-                <a:latin typeface="Calibri"/>
-              </a:rPr>
-              <a:t>Break-even: Day 1</a:t>
-            </a:r>
-          </a:p>
-        </p:txBody>
-      </p:sp>
-      <p:sp>
-        <p:nvSpPr>
-          <p:cNvPr id="10" name="TextBox 9"/>
-          <p:cNvSpPr txBox="1"/>
-          <p:nvPr/>
-        </p:nvSpPr>
-        <p:spPr>
-          <a:xfrm>
-            <a:off x="548640" y="5120640"/>
-            <a:ext cx="5486400" cy="914400"/>
-          </a:xfrm>
-          <a:prstGeom prst="rect">
-            <a:avLst/>
-          </a:prstGeom>
-          <a:noFill/>
-        </p:spPr>
-        <p:txBody>
-          <a:bodyPr wrap="square" lIns="0" rIns="0" tIns="0" bIns="0">
-            <a:spAutoFit/>
-          </a:bodyPr>
-          <a:lstStyle/>
-          <a:p>
-            <a:pPr algn="l"/>
-            <a:r>
-              <a:rPr sz="1400" b="0" i="0">
-                <a:solidFill>
-                  <a:srgbClr val="555F6E"/>
-                </a:solidFill>
-                <a:latin typeface="Calibri"/>
-              </a:rPr>
-              <a:t>Both optimizations are config changes only — no new hardware, no downtime.</a:t>
-            </a:r>
-          </a:p>
-        </p:txBody>
-      </p:sp>
-      <p:sp>
-        <p:nvSpPr>
-          <p:cNvPr id="11" name="TextBox 10"/>
-          <p:cNvSpPr txBox="1"/>
-          <p:nvPr/>
-        </p:nvSpPr>
-        <p:spPr>
-          <a:xfrm>
-            <a:off x="6400800" y="1691640"/>
-            <a:ext cx="5486400" cy="274320"/>
-          </a:xfrm>
-          <a:prstGeom prst="rect">
-            <a:avLst/>
-          </a:prstGeom>
-          <a:noFill/>
-        </p:spPr>
-        <p:txBody>
-          <a:bodyPr wrap="square" lIns="0" rIns="0" tIns="0" bIns="0">
-            <a:spAutoFit/>
-          </a:bodyPr>
-          <a:lstStyle/>
-          <a:p>
-            <a:pPr algn="l"/>
-            <a:r>
-              <a:rPr sz="1100" b="1" i="0">
-                <a:solidFill>
-                  <a:srgbClr val="2E66C2"/>
-                </a:solidFill>
-                <a:latin typeface="Calibri"/>
-              </a:rPr>
-              <a:t>TIME TO MARKET</a:t>
-            </a:r>
-          </a:p>
-        </p:txBody>
-      </p:sp>
-      <p:sp>
-        <p:nvSpPr>
-          <p:cNvPr id="12" name="TextBox 11"/>
-          <p:cNvSpPr txBox="1"/>
-          <p:nvPr/>
-        </p:nvSpPr>
-        <p:spPr>
-          <a:xfrm>
-            <a:off x="6400800" y="2057400"/>
-            <a:ext cx="5486400" cy="548640"/>
-          </a:xfrm>
-          <a:prstGeom prst="rect">
-            <a:avLst/>
-          </a:prstGeom>
-          <a:noFill/>
-        </p:spPr>
-        <p:txBody>
-          <a:bodyPr wrap="square" lIns="0" rIns="0" tIns="0" bIns="0">
-            <a:spAutoFit/>
-          </a:bodyPr>
-          <a:lstStyle/>
-          <a:p>
-            <a:pPr algn="l"/>
-            <a:r>
-              <a:rPr sz="2600" b="1" i="0">
-                <a:solidFill>
-                  <a:srgbClr val="1F2A37"/>
-                </a:solidFill>
-                <a:latin typeface="Calibri"/>
-              </a:rPr>
-              <a:t>Launch unblocked</a:t>
-            </a:r>
-          </a:p>
-        </p:txBody>
-      </p:sp>
-      <p:sp>
-        <p:nvSpPr>
-          <p:cNvPr id="13" name="TextBox 12"/>
-          <p:cNvSpPr txBox="1"/>
-          <p:nvPr/>
-        </p:nvSpPr>
-        <p:spPr>
-          <a:xfrm>
-            <a:off x="6400800" y="2743200"/>
-            <a:ext cx="5486400" cy="1371600"/>
-          </a:xfrm>
-          <a:prstGeom prst="rect">
-            <a:avLst/>
-          </a:prstGeom>
-          <a:noFill/>
-        </p:spPr>
-        <p:txBody>
-          <a:bodyPr wrap="square" lIns="0" rIns="0" tIns="0" bIns="0">
-            <a:spAutoFit/>
-          </a:bodyPr>
-          <a:lstStyle/>
-          <a:p>
-            <a:pPr algn="l"/>
-            <a:r>
-              <a:rPr sz="1400" b="0" i="0">
-                <a:solidFill>
-                  <a:srgbClr val="555F6E"/>
-                </a:solidFill>
-                <a:latin typeface="Calibri"/>
-              </a:rPr>
-              <a:t>Baseline holds the SLA up to ~200–600 active users per pod (batch=32 in flight). FP8 + prefix caching extend that headroom.</a:t>
-            </a:r>
-          </a:p>
-        </p:txBody>
-      </p:sp>
-      <p:sp>
-        <p:nvSpPr>
-          <p:cNvPr id="14" name="TextBox 13"/>
-          <p:cNvSpPr txBox="1"/>
-          <p:nvPr/>
-        </p:nvSpPr>
-        <p:spPr>
-          <a:xfrm>
-            <a:off x="6400800" y="4160520"/>
-            <a:ext cx="5486400" cy="548640"/>
-          </a:xfrm>
-          <a:prstGeom prst="rect">
-            <a:avLst/>
-          </a:prstGeom>
-          <a:noFill/>
-        </p:spPr>
-        <p:txBody>
-          <a:bodyPr wrap="square" lIns="0" rIns="0" tIns="0" bIns="0">
-            <a:spAutoFit/>
-          </a:bodyPr>
-          <a:lstStyle/>
-          <a:p>
-            <a:pPr algn="l"/>
-            <a:r>
-              <a:rPr sz="2200" b="1" i="0">
-                <a:solidFill>
-                  <a:srgbClr val="1F2A37"/>
-                </a:solidFill>
-                <a:latin typeface="Calibri"/>
-              </a:rPr>
-              <a:t>10× headroom built in</a:t>
-            </a:r>
-          </a:p>
-        </p:txBody>
-      </p:sp>
-      <p:sp>
-        <p:nvSpPr>
-          <p:cNvPr id="15" name="TextBox 14"/>
-          <p:cNvSpPr txBox="1"/>
-          <p:nvPr/>
-        </p:nvSpPr>
-        <p:spPr>
-          <a:xfrm>
-            <a:off x="6400800" y="4800600"/>
-            <a:ext cx="5486400" cy="1371600"/>
-          </a:xfrm>
-          <a:prstGeom prst="rect">
-            <a:avLst/>
-          </a:prstGeom>
-          <a:noFill/>
-        </p:spPr>
-        <p:txBody>
-          <a:bodyPr wrap="square" lIns="0" rIns="0" tIns="0" bIns="0">
-            <a:spAutoFit/>
-          </a:bodyPr>
-          <a:lstStyle/>
-          <a:p>
-            <a:pPr algn="l"/>
-            <a:r>
-              <a:rPr sz="1400" b="0" i="0">
-                <a:solidFill>
-                  <a:srgbClr val="555F6E"/>
-                </a:solidFill>
-                <a:latin typeface="Calibri"/>
-              </a:rPr>
-              <a:t>The scale plan (FP8 → concurrency tuning → tensor parallel → horizontal scale) means no re-architecture when traffic grows.</a:t>
-            </a:r>
-          </a:p>
-        </p:txBody>
-      </p:sp>
-      <p:sp>
-        <p:nvSpPr>
-          <p:cNvPr id="16" name="TextBox 15"/>
-          <p:cNvSpPr txBox="1"/>
-          <p:nvPr/>
-        </p:nvSpPr>
-        <p:spPr>
-          <a:xfrm>
-            <a:off x="548640" y="6446520"/>
-            <a:ext cx="9144000" cy="274320"/>
-          </a:xfrm>
-          <a:prstGeom prst="rect">
-            <a:avLst/>
-          </a:prstGeom>
-          <a:noFill/>
-        </p:spPr>
-        <p:txBody>
-          <a:bodyPr wrap="square" lIns="0" rIns="0" tIns="0" bIns="0">
-            <a:spAutoFit/>
-          </a:bodyPr>
-          <a:lstStyle/>
-          <a:p>
-            <a:pPr algn="l"/>
-            <a:r>
               <a:rPr sz="1000" b="0" i="0">
                 <a:solidFill>
                   <a:srgbClr val="555F6E"/>
@@ -6066,7 +5794,7 @@
       </p:sp>
       <p:sp>
         <p:nvSpPr>
-          <p:cNvPr id="17" name="TextBox 16"/>
+          <p:cNvPr id="7" name="TextBox 6"/>
           <p:cNvSpPr txBox="1"/>
           <p:nvPr/>
         </p:nvSpPr>
@@ -6108,6 +5836,592 @@
 </file>
 
 <file path=ppt/slides/slide13.xml><?xml version="1.0" encoding="utf-8"?>
+<p:sld xmlns:a="http://schemas.openxmlformats.org/drawingml/2006/main" xmlns:p="http://schemas.openxmlformats.org/presentationml/2006/main" xmlns:r="http://schemas.openxmlformats.org/officeDocument/2006/relationships">
+  <p:cSld>
+    <p:spTree>
+      <p:nvGrpSpPr>
+        <p:cNvPr id="1" name=""/>
+        <p:cNvGrpSpPr/>
+        <p:nvPr/>
+      </p:nvGrpSpPr>
+      <p:grpSpPr/>
+      <p:sp>
+        <p:nvSpPr>
+          <p:cNvPr id="2" name="TextBox 1"/>
+          <p:cNvSpPr txBox="1"/>
+          <p:nvPr/>
+        </p:nvSpPr>
+        <p:spPr>
+          <a:xfrm>
+            <a:off x="548640" y="411480"/>
+            <a:ext cx="11155680" cy="274320"/>
+          </a:xfrm>
+          <a:prstGeom prst="rect">
+            <a:avLst/>
+          </a:prstGeom>
+          <a:noFill/>
+        </p:spPr>
+        <p:txBody>
+          <a:bodyPr wrap="square" lIns="0" rIns="0" tIns="0" bIns="0">
+            <a:spAutoFit/>
+          </a:bodyPr>
+          <a:lstStyle/>
+          <a:p>
+            <a:pPr algn="l"/>
+            <a:r>
+              <a:rPr sz="1200" b="1" i="0">
+                <a:solidFill>
+                  <a:srgbClr val="2E66C2"/>
+                </a:solidFill>
+                <a:latin typeface="Calibri"/>
+              </a:rPr>
+              <a:t>BUSINESS VALUE</a:t>
+            </a:r>
+          </a:p>
+        </p:txBody>
+      </p:sp>
+      <p:sp>
+        <p:nvSpPr>
+          <p:cNvPr id="3" name="TextBox 2"/>
+          <p:cNvSpPr txBox="1"/>
+          <p:nvPr/>
+        </p:nvSpPr>
+        <p:spPr>
+          <a:xfrm>
+            <a:off x="548640" y="713232"/>
+            <a:ext cx="11155680" cy="640080"/>
+          </a:xfrm>
+          <a:prstGeom prst="rect">
+            <a:avLst/>
+          </a:prstGeom>
+          <a:noFill/>
+        </p:spPr>
+        <p:txBody>
+          <a:bodyPr wrap="square" lIns="0" rIns="0" tIns="0" bIns="0">
+            <a:spAutoFit/>
+          </a:bodyPr>
+          <a:lstStyle/>
+          <a:p>
+            <a:pPr algn="l"/>
+            <a:r>
+              <a:rPr sz="3000" b="1" i="0">
+                <a:solidFill>
+                  <a:srgbClr val="1F2A37"/>
+                </a:solidFill>
+                <a:latin typeface="Calibri"/>
+              </a:rPr>
+              <a:t>What this is worth</a:t>
+            </a:r>
+          </a:p>
+        </p:txBody>
+      </p:sp>
+      <p:sp>
+        <p:nvSpPr>
+          <p:cNvPr id="4" name="Rectangle 3"/>
+          <p:cNvSpPr/>
+          <p:nvPr/>
+        </p:nvSpPr>
+        <p:spPr>
+          <a:xfrm>
+            <a:off x="548640" y="1417320"/>
+            <a:ext cx="914400" cy="38100"/>
+          </a:xfrm>
+          <a:prstGeom prst="rect">
+            <a:avLst/>
+          </a:prstGeom>
+          <a:solidFill>
+            <a:srgbClr val="2E66C2"/>
+          </a:solidFill>
+          <a:ln>
+            <a:noFill/>
+          </a:ln>
+        </p:spPr>
+        <p:style>
+          <a:lnRef idx="1">
+            <a:schemeClr val="accent1"/>
+          </a:lnRef>
+          <a:fillRef idx="3">
+            <a:schemeClr val="accent1"/>
+          </a:fillRef>
+          <a:effectRef idx="2">
+            <a:schemeClr val="accent1"/>
+          </a:effectRef>
+          <a:fontRef idx="minor">
+            <a:schemeClr val="lt1"/>
+          </a:fontRef>
+        </p:style>
+        <p:txBody>
+          <a:bodyPr rtlCol="0" anchor="ctr"/>
+          <a:lstStyle/>
+          <a:p>
+            <a:pPr algn="ctr"/>
+          </a:p>
+        </p:txBody>
+      </p:sp>
+      <p:sp>
+        <p:nvSpPr>
+          <p:cNvPr id="5" name="TextBox 4"/>
+          <p:cNvSpPr txBox="1"/>
+          <p:nvPr/>
+        </p:nvSpPr>
+        <p:spPr>
+          <a:xfrm>
+            <a:off x="548640" y="1691640"/>
+            <a:ext cx="5486400" cy="274320"/>
+          </a:xfrm>
+          <a:prstGeom prst="rect">
+            <a:avLst/>
+          </a:prstGeom>
+          <a:noFill/>
+        </p:spPr>
+        <p:txBody>
+          <a:bodyPr wrap="square" lIns="0" rIns="0" tIns="0" bIns="0">
+            <a:spAutoFit/>
+          </a:bodyPr>
+          <a:lstStyle/>
+          <a:p>
+            <a:pPr algn="l"/>
+            <a:r>
+              <a:rPr sz="1100" b="1" i="0">
+                <a:solidFill>
+                  <a:srgbClr val="2E66C2"/>
+                </a:solidFill>
+                <a:latin typeface="Calibri"/>
+              </a:rPr>
+              <a:t>COST SAVINGS</a:t>
+            </a:r>
+          </a:p>
+        </p:txBody>
+      </p:sp>
+      <p:sp>
+        <p:nvSpPr>
+          <p:cNvPr id="6" name="TextBox 5"/>
+          <p:cNvSpPr txBox="1"/>
+          <p:nvPr/>
+        </p:nvSpPr>
+        <p:spPr>
+          <a:xfrm>
+            <a:off x="548640" y="2057400"/>
+            <a:ext cx="5486400" cy="548640"/>
+          </a:xfrm>
+          <a:prstGeom prst="rect">
+            <a:avLst/>
+          </a:prstGeom>
+          <a:noFill/>
+        </p:spPr>
+        <p:txBody>
+          <a:bodyPr wrap="square" lIns="0" rIns="0" tIns="0" bIns="0">
+            <a:spAutoFit/>
+          </a:bodyPr>
+          <a:lstStyle/>
+          <a:p>
+            <a:pPr algn="l"/>
+            <a:r>
+              <a:rPr sz="2600" b="1" i="0">
+                <a:solidFill>
+                  <a:srgbClr val="1F2A37"/>
+                </a:solidFill>
+                <a:latin typeface="Calibri"/>
+              </a:rPr>
+              <a:t>~40% fewer GPU-hours</a:t>
+            </a:r>
+          </a:p>
+        </p:txBody>
+      </p:sp>
+      <p:sp>
+        <p:nvSpPr>
+          <p:cNvPr id="7" name="TextBox 6"/>
+          <p:cNvSpPr txBox="1"/>
+          <p:nvPr/>
+        </p:nvSpPr>
+        <p:spPr>
+          <a:xfrm>
+            <a:off x="548640" y="2743200"/>
+            <a:ext cx="5486400" cy="1188720"/>
+          </a:xfrm>
+          <a:prstGeom prst="rect">
+            <a:avLst/>
+          </a:prstGeom>
+          <a:noFill/>
+        </p:spPr>
+        <p:txBody>
+          <a:bodyPr wrap="square" lIns="0" rIns="0" tIns="0" bIns="0">
+            <a:spAutoFit/>
+          </a:bodyPr>
+          <a:lstStyle/>
+          <a:p>
+            <a:pPr algn="l"/>
+            <a:r>
+              <a:rPr sz="1400" b="0" i="0">
+                <a:solidFill>
+                  <a:srgbClr val="555F6E"/>
+                </a:solidFill>
+                <a:latin typeface="Calibri"/>
+              </a:rPr>
+              <a:t>FP8 + prefix caching cut compute per request. At $2–4 per GPU-hour on EKS, a 40% reduction on a 2-GPU node running 24/7 = ~$14K–28K per month saved per node.</a:t>
+            </a:r>
+          </a:p>
+        </p:txBody>
+      </p:sp>
+      <p:sp>
+        <p:nvSpPr>
+          <p:cNvPr id="8" name="TextBox 7"/>
+          <p:cNvSpPr txBox="1"/>
+          <p:nvPr/>
+        </p:nvSpPr>
+        <p:spPr>
+          <a:xfrm>
+            <a:off x="548640" y="3886200"/>
+            <a:ext cx="5486400" cy="548640"/>
+          </a:xfrm>
+          <a:prstGeom prst="rect">
+            <a:avLst/>
+          </a:prstGeom>
+          <a:noFill/>
+        </p:spPr>
+        <p:txBody>
+          <a:bodyPr wrap="square" lIns="0" rIns="0" tIns="0" bIns="0">
+            <a:spAutoFit/>
+          </a:bodyPr>
+          <a:lstStyle/>
+          <a:p>
+            <a:pPr algn="l"/>
+            <a:r>
+              <a:rPr sz="1100" b="0" i="1">
+                <a:solidFill>
+                  <a:srgbClr val="555F6E"/>
+                </a:solidFill>
+                <a:latin typeface="Calibri"/>
+              </a:rPr>
+              <a:t>Based on single-request benchmarks — production savings will vary with traffic pattern and cache hit rate.</a:t>
+            </a:r>
+          </a:p>
+        </p:txBody>
+      </p:sp>
+      <p:sp>
+        <p:nvSpPr>
+          <p:cNvPr id="9" name="TextBox 8"/>
+          <p:cNvSpPr txBox="1"/>
+          <p:nvPr/>
+        </p:nvSpPr>
+        <p:spPr>
+          <a:xfrm>
+            <a:off x="548640" y="4572000"/>
+            <a:ext cx="5486400" cy="457200"/>
+          </a:xfrm>
+          <a:prstGeom prst="rect">
+            <a:avLst/>
+          </a:prstGeom>
+          <a:noFill/>
+        </p:spPr>
+        <p:txBody>
+          <a:bodyPr wrap="square" lIns="0" rIns="0" tIns="0" bIns="0">
+            <a:spAutoFit/>
+          </a:bodyPr>
+          <a:lstStyle/>
+          <a:p>
+            <a:pPr algn="l"/>
+            <a:r>
+              <a:rPr sz="2200" b="1" i="0">
+                <a:solidFill>
+                  <a:srgbClr val="1F2A37"/>
+                </a:solidFill>
+                <a:latin typeface="Calibri"/>
+              </a:rPr>
+              <a:t>Break-even: Day 1</a:t>
+            </a:r>
+          </a:p>
+        </p:txBody>
+      </p:sp>
+      <p:sp>
+        <p:nvSpPr>
+          <p:cNvPr id="10" name="TextBox 9"/>
+          <p:cNvSpPr txBox="1"/>
+          <p:nvPr/>
+        </p:nvSpPr>
+        <p:spPr>
+          <a:xfrm>
+            <a:off x="548640" y="5120640"/>
+            <a:ext cx="5486400" cy="914400"/>
+          </a:xfrm>
+          <a:prstGeom prst="rect">
+            <a:avLst/>
+          </a:prstGeom>
+          <a:noFill/>
+        </p:spPr>
+        <p:txBody>
+          <a:bodyPr wrap="square" lIns="0" rIns="0" tIns="0" bIns="0">
+            <a:spAutoFit/>
+          </a:bodyPr>
+          <a:lstStyle/>
+          <a:p>
+            <a:pPr algn="l"/>
+            <a:r>
+              <a:rPr sz="1400" b="0" i="0">
+                <a:solidFill>
+                  <a:srgbClr val="555F6E"/>
+                </a:solidFill>
+                <a:latin typeface="Calibri"/>
+              </a:rPr>
+              <a:t>Both optimizations are config changes only — no new hardware, no downtime.</a:t>
+            </a:r>
+          </a:p>
+        </p:txBody>
+      </p:sp>
+      <p:sp>
+        <p:nvSpPr>
+          <p:cNvPr id="11" name="TextBox 10"/>
+          <p:cNvSpPr txBox="1"/>
+          <p:nvPr/>
+        </p:nvSpPr>
+        <p:spPr>
+          <a:xfrm>
+            <a:off x="6400800" y="1691640"/>
+            <a:ext cx="5486400" cy="274320"/>
+          </a:xfrm>
+          <a:prstGeom prst="rect">
+            <a:avLst/>
+          </a:prstGeom>
+          <a:noFill/>
+        </p:spPr>
+        <p:txBody>
+          <a:bodyPr wrap="square" lIns="0" rIns="0" tIns="0" bIns="0">
+            <a:spAutoFit/>
+          </a:bodyPr>
+          <a:lstStyle/>
+          <a:p>
+            <a:pPr algn="l"/>
+            <a:r>
+              <a:rPr sz="1100" b="1" i="0">
+                <a:solidFill>
+                  <a:srgbClr val="2E66C2"/>
+                </a:solidFill>
+                <a:latin typeface="Calibri"/>
+              </a:rPr>
+              <a:t>TIME TO MARKET</a:t>
+            </a:r>
+          </a:p>
+        </p:txBody>
+      </p:sp>
+      <p:sp>
+        <p:nvSpPr>
+          <p:cNvPr id="12" name="TextBox 11"/>
+          <p:cNvSpPr txBox="1"/>
+          <p:nvPr/>
+        </p:nvSpPr>
+        <p:spPr>
+          <a:xfrm>
+            <a:off x="6400800" y="2057400"/>
+            <a:ext cx="5486400" cy="548640"/>
+          </a:xfrm>
+          <a:prstGeom prst="rect">
+            <a:avLst/>
+          </a:prstGeom>
+          <a:noFill/>
+        </p:spPr>
+        <p:txBody>
+          <a:bodyPr wrap="square" lIns="0" rIns="0" tIns="0" bIns="0">
+            <a:spAutoFit/>
+          </a:bodyPr>
+          <a:lstStyle/>
+          <a:p>
+            <a:pPr algn="l"/>
+            <a:r>
+              <a:rPr sz="2600" b="1" i="0">
+                <a:solidFill>
+                  <a:srgbClr val="1F2A37"/>
+                </a:solidFill>
+                <a:latin typeface="Calibri"/>
+              </a:rPr>
+              <a:t>Launch unblocked</a:t>
+            </a:r>
+          </a:p>
+        </p:txBody>
+      </p:sp>
+      <p:sp>
+        <p:nvSpPr>
+          <p:cNvPr id="13" name="TextBox 12"/>
+          <p:cNvSpPr txBox="1"/>
+          <p:nvPr/>
+        </p:nvSpPr>
+        <p:spPr>
+          <a:xfrm>
+            <a:off x="6400800" y="2743200"/>
+            <a:ext cx="5486400" cy="1371600"/>
+          </a:xfrm>
+          <a:prstGeom prst="rect">
+            <a:avLst/>
+          </a:prstGeom>
+          <a:noFill/>
+        </p:spPr>
+        <p:txBody>
+          <a:bodyPr wrap="square" lIns="0" rIns="0" tIns="0" bIns="0">
+            <a:spAutoFit/>
+          </a:bodyPr>
+          <a:lstStyle/>
+          <a:p>
+            <a:pPr algn="l"/>
+            <a:r>
+              <a:rPr sz="1400" b="0" i="0">
+                <a:solidFill>
+                  <a:srgbClr val="555F6E"/>
+                </a:solidFill>
+                <a:latin typeface="Calibri"/>
+              </a:rPr>
+              <a:t>Baseline and FP8 both hold the SLA up to ~200–600 active users per pod (batch=32 in flight). Beyond that, scale horizontally with more pods.</a:t>
+            </a:r>
+          </a:p>
+        </p:txBody>
+      </p:sp>
+      <p:sp>
+        <p:nvSpPr>
+          <p:cNvPr id="14" name="TextBox 13"/>
+          <p:cNvSpPr txBox="1"/>
+          <p:nvPr/>
+        </p:nvSpPr>
+        <p:spPr>
+          <a:xfrm>
+            <a:off x="6400800" y="4160520"/>
+            <a:ext cx="5486400" cy="548640"/>
+          </a:xfrm>
+          <a:prstGeom prst="rect">
+            <a:avLst/>
+          </a:prstGeom>
+          <a:noFill/>
+        </p:spPr>
+        <p:txBody>
+          <a:bodyPr wrap="square" lIns="0" rIns="0" tIns="0" bIns="0">
+            <a:spAutoFit/>
+          </a:bodyPr>
+          <a:lstStyle/>
+          <a:p>
+            <a:pPr algn="l"/>
+            <a:r>
+              <a:rPr sz="2200" b="1" i="0">
+                <a:solidFill>
+                  <a:srgbClr val="1F2A37"/>
+                </a:solidFill>
+                <a:latin typeface="Calibri"/>
+              </a:rPr>
+              <a:t>10× headroom built in</a:t>
+            </a:r>
+          </a:p>
+        </p:txBody>
+      </p:sp>
+      <p:sp>
+        <p:nvSpPr>
+          <p:cNvPr id="15" name="TextBox 14"/>
+          <p:cNvSpPr txBox="1"/>
+          <p:nvPr/>
+        </p:nvSpPr>
+        <p:spPr>
+          <a:xfrm>
+            <a:off x="6400800" y="4800600"/>
+            <a:ext cx="5486400" cy="1371600"/>
+          </a:xfrm>
+          <a:prstGeom prst="rect">
+            <a:avLst/>
+          </a:prstGeom>
+          <a:noFill/>
+        </p:spPr>
+        <p:txBody>
+          <a:bodyPr wrap="square" lIns="0" rIns="0" tIns="0" bIns="0">
+            <a:spAutoFit/>
+          </a:bodyPr>
+          <a:lstStyle/>
+          <a:p>
+            <a:pPr algn="l"/>
+            <a:r>
+              <a:rPr sz="1400" b="0" i="0">
+                <a:solidFill>
+                  <a:srgbClr val="555F6E"/>
+                </a:solidFill>
+                <a:latin typeface="Calibri"/>
+              </a:rPr>
+              <a:t>The scale plan (FP8 → concurrency tuning → tensor parallel → horizontal scale) means no re-architecture when traffic grows.</a:t>
+            </a:r>
+          </a:p>
+        </p:txBody>
+      </p:sp>
+      <p:sp>
+        <p:nvSpPr>
+          <p:cNvPr id="16" name="TextBox 15"/>
+          <p:cNvSpPr txBox="1"/>
+          <p:nvPr/>
+        </p:nvSpPr>
+        <p:spPr>
+          <a:xfrm>
+            <a:off x="548640" y="6446520"/>
+            <a:ext cx="9144000" cy="274320"/>
+          </a:xfrm>
+          <a:prstGeom prst="rect">
+            <a:avLst/>
+          </a:prstGeom>
+          <a:noFill/>
+        </p:spPr>
+        <p:txBody>
+          <a:bodyPr wrap="square" lIns="0" rIns="0" tIns="0" bIns="0">
+            <a:spAutoFit/>
+          </a:bodyPr>
+          <a:lstStyle/>
+          <a:p>
+            <a:pPr algn="l"/>
+            <a:r>
+              <a:rPr sz="1000" b="0" i="0">
+                <a:solidFill>
+                  <a:srgbClr val="555F6E"/>
+                </a:solidFill>
+                <a:latin typeface="Calibri"/>
+              </a:rPr>
+              <a:t>OLMoE-1B-7B (1B active / 7B total) on Blackwell  ·  diagnosis &amp; optimization</a:t>
+            </a:r>
+          </a:p>
+        </p:txBody>
+      </p:sp>
+      <p:sp>
+        <p:nvSpPr>
+          <p:cNvPr id="17" name="TextBox 16"/>
+          <p:cNvSpPr txBox="1"/>
+          <p:nvPr/>
+        </p:nvSpPr>
+        <p:spPr>
+          <a:xfrm>
+            <a:off x="11521440" y="6446520"/>
+            <a:ext cx="548640" cy="274320"/>
+          </a:xfrm>
+          <a:prstGeom prst="rect">
+            <a:avLst/>
+          </a:prstGeom>
+          <a:noFill/>
+        </p:spPr>
+        <p:txBody>
+          <a:bodyPr wrap="square" lIns="0" rIns="0" tIns="0" bIns="0">
+            <a:spAutoFit/>
+          </a:bodyPr>
+          <a:lstStyle/>
+          <a:p>
+            <a:pPr algn="r"/>
+            <a:r>
+              <a:rPr sz="1000" b="0" i="0">
+                <a:solidFill>
+                  <a:srgbClr val="555F6E"/>
+                </a:solidFill>
+                <a:latin typeface="Calibri"/>
+              </a:rPr>
+              <a:t>13</a:t>
+            </a:r>
+          </a:p>
+        </p:txBody>
+      </p:sp>
+    </p:spTree>
+  </p:cSld>
+  <p:clrMapOvr>
+    <a:masterClrMapping/>
+  </p:clrMapOvr>
+</p:sld>
+</file>
+
+<file path=ppt/slides/slide14.xml><?xml version="1.0" encoding="utf-8"?>
 <p:sld xmlns:a="http://schemas.openxmlformats.org/drawingml/2006/main" xmlns:p="http://schemas.openxmlformats.org/presentationml/2006/main" xmlns:r="http://schemas.openxmlformats.org/officeDocument/2006/relationships">
   <p:cSld>
     <p:spTree>
@@ -6773,7 +7087,7 @@
                 </a:solidFill>
                 <a:latin typeface="Calibri"/>
               </a:rPr>
-              <a:t>13</a:t>
+              <a:t>14</a:t>
             </a:r>
           </a:p>
         </p:txBody>
@@ -6786,7 +7100,7 @@
 </p:sld>
 </file>
 
-<file path=ppt/slides/slide14.xml><?xml version="1.0" encoding="utf-8"?>
+<file path=ppt/slides/slide15.xml><?xml version="1.0" encoding="utf-8"?>
 <p:sld xmlns:a="http://schemas.openxmlformats.org/drawingml/2006/main" xmlns:p="http://schemas.openxmlformats.org/presentationml/2006/main" xmlns:r="http://schemas.openxmlformats.org/officeDocument/2006/relationships">
   <p:cSld>
     <p:spTree>
@@ -7542,294 +7856,6 @@
                 </a:solidFill>
                 <a:latin typeface="Calibri"/>
               </a:rPr>
-              <a:t>14</a:t>
-            </a:r>
-          </a:p>
-        </p:txBody>
-      </p:sp>
-    </p:spTree>
-  </p:cSld>
-  <p:clrMapOvr>
-    <a:masterClrMapping/>
-  </p:clrMapOvr>
-</p:sld>
-</file>
-
-<file path=ppt/slides/slide15.xml><?xml version="1.0" encoding="utf-8"?>
-<p:sld xmlns:a="http://schemas.openxmlformats.org/drawingml/2006/main" xmlns:p="http://schemas.openxmlformats.org/presentationml/2006/main" xmlns:r="http://schemas.openxmlformats.org/officeDocument/2006/relationships">
-  <p:cSld>
-    <p:spTree>
-      <p:nvGrpSpPr>
-        <p:cNvPr id="1" name=""/>
-        <p:cNvGrpSpPr/>
-        <p:nvPr/>
-      </p:nvGrpSpPr>
-      <p:grpSpPr/>
-      <p:sp>
-        <p:nvSpPr>
-          <p:cNvPr id="2" name="TextBox 1"/>
-          <p:cNvSpPr txBox="1"/>
-          <p:nvPr/>
-        </p:nvSpPr>
-        <p:spPr>
-          <a:xfrm>
-            <a:off x="548640" y="411480"/>
-            <a:ext cx="11155680" cy="274320"/>
-          </a:xfrm>
-          <a:prstGeom prst="rect">
-            <a:avLst/>
-          </a:prstGeom>
-          <a:noFill/>
-        </p:spPr>
-        <p:txBody>
-          <a:bodyPr wrap="square" lIns="0" rIns="0" tIns="0" bIns="0">
-            <a:spAutoFit/>
-          </a:bodyPr>
-          <a:lstStyle/>
-          <a:p>
-            <a:pPr algn="l"/>
-            <a:r>
-              <a:rPr sz="1200" b="1" i="0">
-                <a:solidFill>
-                  <a:srgbClr val="2E66C2"/>
-                </a:solidFill>
-                <a:latin typeface="Calibri"/>
-              </a:rPr>
-              <a:t>VERDICT</a:t>
-            </a:r>
-          </a:p>
-        </p:txBody>
-      </p:sp>
-      <p:sp>
-        <p:nvSpPr>
-          <p:cNvPr id="3" name="TextBox 2"/>
-          <p:cNvSpPr txBox="1"/>
-          <p:nvPr/>
-        </p:nvSpPr>
-        <p:spPr>
-          <a:xfrm>
-            <a:off x="548640" y="713232"/>
-            <a:ext cx="11155680" cy="640080"/>
-          </a:xfrm>
-          <a:prstGeom prst="rect">
-            <a:avLst/>
-          </a:prstGeom>
-          <a:noFill/>
-        </p:spPr>
-        <p:txBody>
-          <a:bodyPr wrap="square" lIns="0" rIns="0" tIns="0" bIns="0">
-            <a:spAutoFit/>
-          </a:bodyPr>
-          <a:lstStyle/>
-          <a:p>
-            <a:pPr algn="l"/>
-            <a:r>
-              <a:rPr sz="3000" b="1" i="0">
-                <a:solidFill>
-                  <a:srgbClr val="1F2A37"/>
-                </a:solidFill>
-                <a:latin typeface="Calibri"/>
-              </a:rPr>
-              <a:t>Recommendation</a:t>
-            </a:r>
-          </a:p>
-        </p:txBody>
-      </p:sp>
-      <p:sp>
-        <p:nvSpPr>
-          <p:cNvPr id="4" name="Rectangle 3"/>
-          <p:cNvSpPr/>
-          <p:nvPr/>
-        </p:nvSpPr>
-        <p:spPr>
-          <a:xfrm>
-            <a:off x="548640" y="1417320"/>
-            <a:ext cx="914400" cy="38100"/>
-          </a:xfrm>
-          <a:prstGeom prst="rect">
-            <a:avLst/>
-          </a:prstGeom>
-          <a:solidFill>
-            <a:srgbClr val="2E66C2"/>
-          </a:solidFill>
-          <a:ln>
-            <a:noFill/>
-          </a:ln>
-        </p:spPr>
-        <p:style>
-          <a:lnRef idx="1">
-            <a:schemeClr val="accent1"/>
-          </a:lnRef>
-          <a:fillRef idx="3">
-            <a:schemeClr val="accent1"/>
-          </a:fillRef>
-          <a:effectRef idx="2">
-            <a:schemeClr val="accent1"/>
-          </a:effectRef>
-          <a:fontRef idx="minor">
-            <a:schemeClr val="lt1"/>
-          </a:fontRef>
-        </p:style>
-        <p:txBody>
-          <a:bodyPr rtlCol="0" anchor="ctr"/>
-          <a:lstStyle/>
-          <a:p>
-            <a:pPr algn="ctr"/>
-          </a:p>
-        </p:txBody>
-      </p:sp>
-      <p:sp>
-        <p:nvSpPr>
-          <p:cNvPr id="5" name="TextBox 4"/>
-          <p:cNvSpPr txBox="1"/>
-          <p:nvPr/>
-        </p:nvSpPr>
-        <p:spPr>
-          <a:xfrm>
-            <a:off x="548640" y="1737360"/>
-            <a:ext cx="11155680" cy="4114800"/>
-          </a:xfrm>
-          <a:prstGeom prst="rect">
-            <a:avLst/>
-          </a:prstGeom>
-          <a:noFill/>
-        </p:spPr>
-        <p:txBody>
-          <a:bodyPr wrap="square" lIns="0" rIns="0" tIns="0" bIns="0">
-            <a:spAutoFit/>
-          </a:bodyPr>
-          <a:lstStyle/>
-          <a:p>
-            <a:pPr algn="l">
-              <a:spcAft>
-                <a:spcPts val="800"/>
-              </a:spcAft>
-            </a:pPr>
-            <a:r>
-              <a:rPr sz="2000">
-                <a:solidFill>
-                  <a:srgbClr val="1F2A37"/>
-                </a:solidFill>
-                <a:latin typeface="Calibri"/>
-              </a:rPr>
-              <a:t>•  Enable FP8 quantization and prefix caching this week — validate accuracy on customer evals first</a:t>
-            </a:r>
-          </a:p>
-          <a:p>
-            <a:pPr algn="l">
-              <a:spcAft>
-                <a:spcPts val="800"/>
-              </a:spcAft>
-            </a:pPr>
-            <a:r>
-              <a:rPr sz="2000">
-                <a:solidFill>
-                  <a:srgbClr val="1F2A37"/>
-                </a:solidFill>
-                <a:latin typeface="Calibri"/>
-              </a:rPr>
-              <a:t>•  Tune max_num_seqs (continuous batching) against the TTFT p90 SLA</a:t>
-            </a:r>
-          </a:p>
-          <a:p>
-            <a:pPr algn="l">
-              <a:spcAft>
-                <a:spcPts val="800"/>
-              </a:spcAft>
-            </a:pPr>
-            <a:r>
-              <a:rPr sz="2000">
-                <a:solidFill>
-                  <a:srgbClr val="1F2A37"/>
-                </a:solidFill>
-                <a:latin typeface="Calibri"/>
-              </a:rPr>
-              <a:t>•  Evaluate tensor parallelism (TP=2) for TPOT — 14% gain at single-user load; rerun under concurrency before adopting in prod</a:t>
-            </a:r>
-          </a:p>
-          <a:p>
-            <a:pPr algn="l">
-              <a:spcAft>
-                <a:spcPts val="800"/>
-              </a:spcAft>
-            </a:pPr>
-            <a:r>
-              <a:rPr sz="2000">
-                <a:solidFill>
-                  <a:srgbClr val="1F2A37"/>
-                </a:solidFill>
-                <a:latin typeface="Calibri"/>
-              </a:rPr>
-              <a:t>•  Re-baseline whenever the model, vLLM version, or hardware changes</a:t>
-            </a:r>
-          </a:p>
-        </p:txBody>
-      </p:sp>
-      <p:sp>
-        <p:nvSpPr>
-          <p:cNvPr id="6" name="TextBox 5"/>
-          <p:cNvSpPr txBox="1"/>
-          <p:nvPr/>
-        </p:nvSpPr>
-        <p:spPr>
-          <a:xfrm>
-            <a:off x="548640" y="6446520"/>
-            <a:ext cx="9144000" cy="274320"/>
-          </a:xfrm>
-          <a:prstGeom prst="rect">
-            <a:avLst/>
-          </a:prstGeom>
-          <a:noFill/>
-        </p:spPr>
-        <p:txBody>
-          <a:bodyPr wrap="square" lIns="0" rIns="0" tIns="0" bIns="0">
-            <a:spAutoFit/>
-          </a:bodyPr>
-          <a:lstStyle/>
-          <a:p>
-            <a:pPr algn="l"/>
-            <a:r>
-              <a:rPr sz="1000" b="0" i="0">
-                <a:solidFill>
-                  <a:srgbClr val="555F6E"/>
-                </a:solidFill>
-                <a:latin typeface="Calibri"/>
-              </a:rPr>
-              <a:t>OLMoE-1B-7B (1B active / 7B total) on Blackwell  ·  diagnosis &amp; optimization</a:t>
-            </a:r>
-          </a:p>
-        </p:txBody>
-      </p:sp>
-      <p:sp>
-        <p:nvSpPr>
-          <p:cNvPr id="7" name="TextBox 6"/>
-          <p:cNvSpPr txBox="1"/>
-          <p:nvPr/>
-        </p:nvSpPr>
-        <p:spPr>
-          <a:xfrm>
-            <a:off x="11521440" y="6446520"/>
-            <a:ext cx="548640" cy="274320"/>
-          </a:xfrm>
-          <a:prstGeom prst="rect">
-            <a:avLst/>
-          </a:prstGeom>
-          <a:noFill/>
-        </p:spPr>
-        <p:txBody>
-          <a:bodyPr wrap="square" lIns="0" rIns="0" tIns="0" bIns="0">
-            <a:spAutoFit/>
-          </a:bodyPr>
-          <a:lstStyle/>
-          <a:p>
-            <a:pPr algn="r"/>
-            <a:r>
-              <a:rPr sz="1000" b="0" i="0">
-                <a:solidFill>
-                  <a:srgbClr val="555F6E"/>
-                </a:solidFill>
-                <a:latin typeface="Calibri"/>
-              </a:rPr>
               <a:t>15</a:t>
             </a:r>
           </a:p>
@@ -7861,8 +7887,8 @@
         </p:nvSpPr>
         <p:spPr>
           <a:xfrm>
-            <a:off x="731520" y="1828800"/>
-            <a:ext cx="7315200" cy="1645920"/>
+            <a:off x="548640" y="411480"/>
+            <a:ext cx="11155680" cy="274320"/>
           </a:xfrm>
           <a:prstGeom prst="rect">
             <a:avLst/>
@@ -7877,27 +7903,62 @@
           <a:p>
             <a:pPr algn="l"/>
             <a:r>
-              <a:rPr sz="9600" b="1" i="0">
-                <a:solidFill>
-                  <a:srgbClr val="1F2A37"/>
+              <a:rPr sz="1200" b="1" i="0">
+                <a:solidFill>
+                  <a:srgbClr val="2E66C2"/>
                 </a:solidFill>
                 <a:latin typeface="Calibri"/>
               </a:rPr>
-              <a:t>Q&amp;A</a:t>
-            </a:r>
-          </a:p>
-        </p:txBody>
-      </p:sp>
-      <p:sp>
-        <p:nvSpPr>
-          <p:cNvPr id="3" name="Rectangle 2"/>
+              <a:t>VERDICT</a:t>
+            </a:r>
+          </a:p>
+        </p:txBody>
+      </p:sp>
+      <p:sp>
+        <p:nvSpPr>
+          <p:cNvPr id="3" name="TextBox 2"/>
+          <p:cNvSpPr txBox="1"/>
+          <p:nvPr/>
+        </p:nvSpPr>
+        <p:spPr>
+          <a:xfrm>
+            <a:off x="548640" y="713232"/>
+            <a:ext cx="11155680" cy="640080"/>
+          </a:xfrm>
+          <a:prstGeom prst="rect">
+            <a:avLst/>
+          </a:prstGeom>
+          <a:noFill/>
+        </p:spPr>
+        <p:txBody>
+          <a:bodyPr wrap="square" lIns="0" rIns="0" tIns="0" bIns="0">
+            <a:spAutoFit/>
+          </a:bodyPr>
+          <a:lstStyle/>
+          <a:p>
+            <a:pPr algn="l"/>
+            <a:r>
+              <a:rPr sz="3000" b="1" i="0">
+                <a:solidFill>
+                  <a:srgbClr val="1F2A37"/>
+                </a:solidFill>
+                <a:latin typeface="Calibri"/>
+              </a:rPr>
+              <a:t>Recommendation</a:t>
+            </a:r>
+          </a:p>
+        </p:txBody>
+      </p:sp>
+      <p:sp>
+        <p:nvSpPr>
+          <p:cNvPr id="4" name="Rectangle 3"/>
           <p:cNvSpPr/>
           <p:nvPr/>
         </p:nvSpPr>
         <p:spPr>
           <a:xfrm>
-            <a:off x="731520" y="3657600"/>
-            <a:ext cx="1828800" cy="50800"/>
+            <a:off x="548640" y="1417320"/>
+            <a:ext cx="914400" cy="38100"/>
           </a:xfrm>
           <a:prstGeom prst="rect">
             <a:avLst/>
@@ -7933,14 +7994,14 @@
       </p:sp>
       <p:sp>
         <p:nvSpPr>
-          <p:cNvPr id="4" name="TextBox 3"/>
+          <p:cNvPr id="5" name="TextBox 4"/>
           <p:cNvSpPr txBox="1"/>
           <p:nvPr/>
         </p:nvSpPr>
         <p:spPr>
           <a:xfrm>
-            <a:off x="731520" y="3931920"/>
-            <a:ext cx="7315200" cy="457200"/>
+            <a:off x="548640" y="1737360"/>
+            <a:ext cx="11155680" cy="4114800"/>
           </a:xfrm>
           <a:prstGeom prst="rect">
             <a:avLst/>
@@ -7953,29 +8014,81 @@
           </a:bodyPr>
           <a:lstStyle/>
           <a:p>
-            <a:pPr algn="l"/>
-            <a:r>
-              <a:rPr sz="2000" b="0" i="0">
-                <a:solidFill>
-                  <a:srgbClr val="555F6E"/>
+            <a:pPr algn="l">
+              <a:spcAft>
+                <a:spcPts val="800"/>
+              </a:spcAft>
+            </a:pPr>
+            <a:r>
+              <a:rPr sz="2000">
+                <a:solidFill>
+                  <a:srgbClr val="1F2A37"/>
                 </a:solidFill>
                 <a:latin typeface="Calibri"/>
               </a:rPr>
-              <a:t>15 minutes — fire away.</a:t>
-            </a:r>
-          </a:p>
-        </p:txBody>
-      </p:sp>
-      <p:sp>
-        <p:nvSpPr>
-          <p:cNvPr id="5" name="TextBox 4"/>
+              <a:t>•  Enable FP8 quantization and prefix caching this week — validate accuracy on customer evals first</a:t>
+            </a:r>
+          </a:p>
+          <a:p>
+            <a:pPr algn="l">
+              <a:spcAft>
+                <a:spcPts val="800"/>
+              </a:spcAft>
+            </a:pPr>
+            <a:r>
+              <a:rPr sz="2000">
+                <a:solidFill>
+                  <a:srgbClr val="1F2A37"/>
+                </a:solidFill>
+                <a:latin typeface="Calibri"/>
+              </a:rPr>
+              <a:t>•  Tune max_num_seqs (continuous batching) against the TTFT p90 SLA</a:t>
+            </a:r>
+          </a:p>
+          <a:p>
+            <a:pPr algn="l">
+              <a:spcAft>
+                <a:spcPts val="800"/>
+              </a:spcAft>
+            </a:pPr>
+            <a:r>
+              <a:rPr sz="2000">
+                <a:solidFill>
+                  <a:srgbClr val="1F2A37"/>
+                </a:solidFill>
+                <a:latin typeface="Calibri"/>
+              </a:rPr>
+              <a:t>•  Evaluate tensor parallelism (TP=2) for TPOT — 14% gain at single-user load; rerun under concurrency before adopting in prod</a:t>
+            </a:r>
+          </a:p>
+          <a:p>
+            <a:pPr algn="l">
+              <a:spcAft>
+                <a:spcPts val="800"/>
+              </a:spcAft>
+            </a:pPr>
+            <a:r>
+              <a:rPr sz="2000">
+                <a:solidFill>
+                  <a:srgbClr val="1F2A37"/>
+                </a:solidFill>
+                <a:latin typeface="Calibri"/>
+              </a:rPr>
+              <a:t>•  Re-baseline whenever the model, vLLM version, or hardware changes</a:t>
+            </a:r>
+          </a:p>
+        </p:txBody>
+      </p:sp>
+      <p:sp>
+        <p:nvSpPr>
+          <p:cNvPr id="6" name="TextBox 5"/>
           <p:cNvSpPr txBox="1"/>
           <p:nvPr/>
         </p:nvSpPr>
         <p:spPr>
           <a:xfrm>
-            <a:off x="8778240" y="1828800"/>
-            <a:ext cx="2743200" cy="274320"/>
+            <a:off x="548640" y="6446520"/>
+            <a:ext cx="9144000" cy="274320"/>
           </a:xfrm>
           <a:prstGeom prst="rect">
             <a:avLst/>
@@ -7990,135 +8103,6 @@
           <a:p>
             <a:pPr algn="l"/>
             <a:r>
-              <a:rPr sz="1100" b="1" i="0">
-                <a:solidFill>
-                  <a:srgbClr val="2E66C2"/>
-                </a:solidFill>
-                <a:latin typeface="Calibri"/>
-              </a:rPr>
-              <a:t>REPO</a:t>
-            </a:r>
-          </a:p>
-        </p:txBody>
-      </p:sp>
-      <p:pic>
-        <p:nvPicPr>
-          <p:cNvPr id="6" name="Picture 5" descr="repo_qr.png"/>
-          <p:cNvPicPr>
-            <a:picLocks noChangeAspect="1"/>
-          </p:cNvPicPr>
-          <p:nvPr/>
-        </p:nvPicPr>
-        <p:blipFill>
-          <a:blip r:embed="rId2"/>
-          <a:stretch>
-            <a:fillRect/>
-          </a:stretch>
-        </p:blipFill>
-        <p:spPr>
-          <a:xfrm>
-            <a:off x="8778240" y="2194560"/>
-            <a:ext cx="2743200" cy="2743200"/>
-          </a:xfrm>
-          <a:prstGeom prst="rect">
-            <a:avLst/>
-          </a:prstGeom>
-        </p:spPr>
-      </p:pic>
-      <p:sp>
-        <p:nvSpPr>
-          <p:cNvPr id="7" name="TextBox 6"/>
-          <p:cNvSpPr txBox="1"/>
-          <p:nvPr/>
-        </p:nvSpPr>
-        <p:spPr>
-          <a:xfrm>
-            <a:off x="8229600" y="5074920"/>
-            <a:ext cx="3840480" cy="365760"/>
-          </a:xfrm>
-          <a:prstGeom prst="rect">
-            <a:avLst/>
-          </a:prstGeom>
-          <a:noFill/>
-        </p:spPr>
-        <p:txBody>
-          <a:bodyPr wrap="square" lIns="0" rIns="0" tIns="0" bIns="0">
-            <a:spAutoFit/>
-          </a:bodyPr>
-          <a:lstStyle/>
-          <a:p>
-            <a:pPr algn="ctr"/>
-            <a:r>
-              <a:rPr sz="1100" b="0" i="0">
-                <a:solidFill>
-                  <a:srgbClr val="555F6E"/>
-                </a:solidFill>
-                <a:latin typeface="Calibri"/>
-              </a:rPr>
-              <a:t>github.com/harishvs/moe-inference-optimize</a:t>
-            </a:r>
-          </a:p>
-        </p:txBody>
-      </p:sp>
-      <p:sp>
-        <p:nvSpPr>
-          <p:cNvPr id="8" name="TextBox 7"/>
-          <p:cNvSpPr txBox="1"/>
-          <p:nvPr/>
-        </p:nvSpPr>
-        <p:spPr>
-          <a:xfrm>
-            <a:off x="8229600" y="5440680"/>
-            <a:ext cx="3840480" cy="365760"/>
-          </a:xfrm>
-          <a:prstGeom prst="rect">
-            <a:avLst/>
-          </a:prstGeom>
-          <a:noFill/>
-        </p:spPr>
-        <p:txBody>
-          <a:bodyPr wrap="square" lIns="0" rIns="0" tIns="0" bIns="0">
-            <a:spAutoFit/>
-          </a:bodyPr>
-          <a:lstStyle/>
-          <a:p>
-            <a:pPr algn="ctr"/>
-            <a:r>
-              <a:rPr sz="1000" b="0" i="1">
-                <a:solidFill>
-                  <a:srgbClr val="555F6E"/>
-                </a:solidFill>
-                <a:latin typeface="Calibri"/>
-              </a:rPr>
-              <a:t>scan to clone the code, results, and this deck</a:t>
-            </a:r>
-          </a:p>
-        </p:txBody>
-      </p:sp>
-      <p:sp>
-        <p:nvSpPr>
-          <p:cNvPr id="9" name="TextBox 8"/>
-          <p:cNvSpPr txBox="1"/>
-          <p:nvPr/>
-        </p:nvSpPr>
-        <p:spPr>
-          <a:xfrm>
-            <a:off x="548640" y="6446520"/>
-            <a:ext cx="9144000" cy="274320"/>
-          </a:xfrm>
-          <a:prstGeom prst="rect">
-            <a:avLst/>
-          </a:prstGeom>
-          <a:noFill/>
-        </p:spPr>
-        <p:txBody>
-          <a:bodyPr wrap="square" lIns="0" rIns="0" tIns="0" bIns="0">
-            <a:spAutoFit/>
-          </a:bodyPr>
-          <a:lstStyle/>
-          <a:p>
-            <a:pPr algn="l"/>
-            <a:r>
               <a:rPr sz="1000" b="0" i="0">
                 <a:solidFill>
                   <a:srgbClr val="555F6E"/>
@@ -8132,7 +8116,7 @@
       </p:sp>
       <p:sp>
         <p:nvSpPr>
-          <p:cNvPr id="10" name="TextBox 9"/>
+          <p:cNvPr id="7" name="TextBox 6"/>
           <p:cNvSpPr txBox="1"/>
           <p:nvPr/>
         </p:nvSpPr>
@@ -8191,8 +8175,8 @@
         </p:nvSpPr>
         <p:spPr>
           <a:xfrm>
-            <a:off x="548640" y="411480"/>
-            <a:ext cx="11155680" cy="274320"/>
+            <a:off x="731520" y="1828800"/>
+            <a:ext cx="7315200" cy="1645920"/>
           </a:xfrm>
           <a:prstGeom prst="rect">
             <a:avLst/>
@@ -8207,62 +8191,27 @@
           <a:p>
             <a:pPr algn="l"/>
             <a:r>
-              <a:rPr sz="1200" b="1" i="0">
-                <a:solidFill>
-                  <a:srgbClr val="2E66C2"/>
+              <a:rPr sz="9600" b="1" i="0">
+                <a:solidFill>
+                  <a:srgbClr val="1F2A37"/>
                 </a:solidFill>
                 <a:latin typeface="Calibri"/>
               </a:rPr>
-              <a:t>APPENDIX</a:t>
-            </a:r>
-          </a:p>
-        </p:txBody>
-      </p:sp>
-      <p:sp>
-        <p:nvSpPr>
-          <p:cNvPr id="3" name="TextBox 2"/>
-          <p:cNvSpPr txBox="1"/>
-          <p:nvPr/>
-        </p:nvSpPr>
-        <p:spPr>
-          <a:xfrm>
-            <a:off x="548640" y="713232"/>
-            <a:ext cx="11155680" cy="640080"/>
-          </a:xfrm>
-          <a:prstGeom prst="rect">
-            <a:avLst/>
-          </a:prstGeom>
-          <a:noFill/>
-        </p:spPr>
-        <p:txBody>
-          <a:bodyPr wrap="square" lIns="0" rIns="0" tIns="0" bIns="0">
-            <a:spAutoFit/>
-          </a:bodyPr>
-          <a:lstStyle/>
-          <a:p>
-            <a:pPr algn="l"/>
-            <a:r>
-              <a:rPr sz="3000" b="1" i="0">
-                <a:solidFill>
-                  <a:srgbClr val="1F2A37"/>
-                </a:solidFill>
-                <a:latin typeface="Calibri"/>
-              </a:rPr>
-              <a:t>FP8 quality — standard accuracy benchmarks</a:t>
-            </a:r>
-          </a:p>
-        </p:txBody>
-      </p:sp>
-      <p:sp>
-        <p:nvSpPr>
-          <p:cNvPr id="4" name="Rectangle 3"/>
+              <a:t>Q&amp;A</a:t>
+            </a:r>
+          </a:p>
+        </p:txBody>
+      </p:sp>
+      <p:sp>
+        <p:nvSpPr>
+          <p:cNvPr id="3" name="Rectangle 2"/>
           <p:cNvSpPr/>
           <p:nvPr/>
         </p:nvSpPr>
         <p:spPr>
           <a:xfrm>
-            <a:off x="548640" y="1417320"/>
-            <a:ext cx="914400" cy="38100"/>
+            <a:off x="731520" y="3657600"/>
+            <a:ext cx="1828800" cy="50800"/>
           </a:xfrm>
           <a:prstGeom prst="rect">
             <a:avLst/>
@@ -8296,9 +8245,79 @@
           </a:p>
         </p:txBody>
       </p:sp>
+      <p:sp>
+        <p:nvSpPr>
+          <p:cNvPr id="4" name="TextBox 3"/>
+          <p:cNvSpPr txBox="1"/>
+          <p:nvPr/>
+        </p:nvSpPr>
+        <p:spPr>
+          <a:xfrm>
+            <a:off x="731520" y="3931920"/>
+            <a:ext cx="7315200" cy="457200"/>
+          </a:xfrm>
+          <a:prstGeom prst="rect">
+            <a:avLst/>
+          </a:prstGeom>
+          <a:noFill/>
+        </p:spPr>
+        <p:txBody>
+          <a:bodyPr wrap="square" lIns="0" rIns="0" tIns="0" bIns="0">
+            <a:spAutoFit/>
+          </a:bodyPr>
+          <a:lstStyle/>
+          <a:p>
+            <a:pPr algn="l"/>
+            <a:r>
+              <a:rPr sz="2000" b="0" i="0">
+                <a:solidFill>
+                  <a:srgbClr val="555F6E"/>
+                </a:solidFill>
+                <a:latin typeface="Calibri"/>
+              </a:rPr>
+              <a:t>15 minutes — fire away.</a:t>
+            </a:r>
+          </a:p>
+        </p:txBody>
+      </p:sp>
+      <p:sp>
+        <p:nvSpPr>
+          <p:cNvPr id="5" name="TextBox 4"/>
+          <p:cNvSpPr txBox="1"/>
+          <p:nvPr/>
+        </p:nvSpPr>
+        <p:spPr>
+          <a:xfrm>
+            <a:off x="8778240" y="1828800"/>
+            <a:ext cx="2743200" cy="274320"/>
+          </a:xfrm>
+          <a:prstGeom prst="rect">
+            <a:avLst/>
+          </a:prstGeom>
+          <a:noFill/>
+        </p:spPr>
+        <p:txBody>
+          <a:bodyPr wrap="square" lIns="0" rIns="0" tIns="0" bIns="0">
+            <a:spAutoFit/>
+          </a:bodyPr>
+          <a:lstStyle/>
+          <a:p>
+            <a:pPr algn="l"/>
+            <a:r>
+              <a:rPr sz="1100" b="1" i="0">
+                <a:solidFill>
+                  <a:srgbClr val="2E66C2"/>
+                </a:solidFill>
+                <a:latin typeface="Calibri"/>
+              </a:rPr>
+              <a:t>REPO</a:t>
+            </a:r>
+          </a:p>
+        </p:txBody>
+      </p:sp>
       <p:pic>
         <p:nvPicPr>
-          <p:cNvPr id="5" name="Picture 4" descr="appendix_fp8_accuracy.png"/>
+          <p:cNvPr id="6" name="Picture 5" descr="repo_qr.png"/>
           <p:cNvPicPr>
             <a:picLocks noChangeAspect="1"/>
           </p:cNvPicPr>
@@ -8312,8 +8331,8 @@
         </p:blipFill>
         <p:spPr>
           <a:xfrm>
-            <a:off x="1280160" y="1783080"/>
-            <a:ext cx="9601200" cy="4434840"/>
+            <a:off x="8778240" y="2194560"/>
+            <a:ext cx="2743200" cy="2743200"/>
           </a:xfrm>
           <a:prstGeom prst="rect">
             <a:avLst/>
@@ -8322,14 +8341,14 @@
       </p:pic>
       <p:sp>
         <p:nvSpPr>
-          <p:cNvPr id="6" name="TextBox 5"/>
+          <p:cNvPr id="7" name="TextBox 6"/>
           <p:cNvSpPr txBox="1"/>
           <p:nvPr/>
         </p:nvSpPr>
         <p:spPr>
           <a:xfrm>
-            <a:off x="548640" y="6446520"/>
-            <a:ext cx="9144000" cy="274320"/>
+            <a:off x="8229600" y="5074920"/>
+            <a:ext cx="3840480" cy="365760"/>
           </a:xfrm>
           <a:prstGeom prst="rect">
             <a:avLst/>
@@ -8342,6 +8361,76 @@
           </a:bodyPr>
           <a:lstStyle/>
           <a:p>
+            <a:pPr algn="ctr"/>
+            <a:r>
+              <a:rPr sz="1100" b="0" i="0">
+                <a:solidFill>
+                  <a:srgbClr val="555F6E"/>
+                </a:solidFill>
+                <a:latin typeface="Calibri"/>
+              </a:rPr>
+              <a:t>github.com/harishvs/moe-inference-optimize</a:t>
+            </a:r>
+          </a:p>
+        </p:txBody>
+      </p:sp>
+      <p:sp>
+        <p:nvSpPr>
+          <p:cNvPr id="8" name="TextBox 7"/>
+          <p:cNvSpPr txBox="1"/>
+          <p:nvPr/>
+        </p:nvSpPr>
+        <p:spPr>
+          <a:xfrm>
+            <a:off x="8229600" y="5440680"/>
+            <a:ext cx="3840480" cy="365760"/>
+          </a:xfrm>
+          <a:prstGeom prst="rect">
+            <a:avLst/>
+          </a:prstGeom>
+          <a:noFill/>
+        </p:spPr>
+        <p:txBody>
+          <a:bodyPr wrap="square" lIns="0" rIns="0" tIns="0" bIns="0">
+            <a:spAutoFit/>
+          </a:bodyPr>
+          <a:lstStyle/>
+          <a:p>
+            <a:pPr algn="ctr"/>
+            <a:r>
+              <a:rPr sz="1000" b="0" i="1">
+                <a:solidFill>
+                  <a:srgbClr val="555F6E"/>
+                </a:solidFill>
+                <a:latin typeface="Calibri"/>
+              </a:rPr>
+              <a:t>scan to clone the code, results, and this deck</a:t>
+            </a:r>
+          </a:p>
+        </p:txBody>
+      </p:sp>
+      <p:sp>
+        <p:nvSpPr>
+          <p:cNvPr id="9" name="TextBox 8"/>
+          <p:cNvSpPr txBox="1"/>
+          <p:nvPr/>
+        </p:nvSpPr>
+        <p:spPr>
+          <a:xfrm>
+            <a:off x="548640" y="6446520"/>
+            <a:ext cx="9144000" cy="274320"/>
+          </a:xfrm>
+          <a:prstGeom prst="rect">
+            <a:avLst/>
+          </a:prstGeom>
+          <a:noFill/>
+        </p:spPr>
+        <p:txBody>
+          <a:bodyPr wrap="square" lIns="0" rIns="0" tIns="0" bIns="0">
+            <a:spAutoFit/>
+          </a:bodyPr>
+          <a:lstStyle/>
+          <a:p>
             <a:pPr algn="l"/>
             <a:r>
               <a:rPr sz="1000" b="0" i="0">
@@ -8357,7 +8446,7 @@
       </p:sp>
       <p:sp>
         <p:nvSpPr>
-          <p:cNvPr id="7" name="TextBox 6"/>
+          <p:cNvPr id="10" name="TextBox 9"/>
           <p:cNvSpPr txBox="1"/>
           <p:nvPr/>
         </p:nvSpPr>
@@ -8473,7 +8562,7 @@
                 </a:solidFill>
                 <a:latin typeface="Calibri"/>
               </a:rPr>
-              <a:t>Why prefill isn't quadratic in input length</a:t>
+              <a:t>FP8 quality — standard accuracy benchmarks</a:t>
             </a:r>
           </a:p>
         </p:txBody>
@@ -8523,7 +8612,7 @@
       </p:sp>
       <p:pic>
         <p:nvPicPr>
-          <p:cNvPr id="5" name="Picture 4" descr="appendix_flop_math.png"/>
+          <p:cNvPr id="5" name="Picture 4" descr="appendix_fp8_accuracy.png"/>
           <p:cNvPicPr>
             <a:picLocks noChangeAspect="1"/>
           </p:cNvPicPr>
@@ -8537,8 +8626,8 @@
         </p:blipFill>
         <p:spPr>
           <a:xfrm>
-            <a:off x="1828800" y="1783080"/>
-            <a:ext cx="8229600" cy="4434840"/>
+            <a:off x="1280160" y="1783080"/>
+            <a:ext cx="9601200" cy="4434840"/>
           </a:xfrm>
           <a:prstGeom prst="rect">
             <a:avLst/>
@@ -8611,6 +8700,231 @@
                 <a:latin typeface="Calibri"/>
               </a:rPr>
               <a:t>18</a:t>
+            </a:r>
+          </a:p>
+        </p:txBody>
+      </p:sp>
+    </p:spTree>
+  </p:cSld>
+  <p:clrMapOvr>
+    <a:masterClrMapping/>
+  </p:clrMapOvr>
+</p:sld>
+</file>
+
+<file path=ppt/slides/slide19.xml><?xml version="1.0" encoding="utf-8"?>
+<p:sld xmlns:a="http://schemas.openxmlformats.org/drawingml/2006/main" xmlns:p="http://schemas.openxmlformats.org/presentationml/2006/main" xmlns:r="http://schemas.openxmlformats.org/officeDocument/2006/relationships">
+  <p:cSld>
+    <p:spTree>
+      <p:nvGrpSpPr>
+        <p:cNvPr id="1" name=""/>
+        <p:cNvGrpSpPr/>
+        <p:nvPr/>
+      </p:nvGrpSpPr>
+      <p:grpSpPr/>
+      <p:sp>
+        <p:nvSpPr>
+          <p:cNvPr id="2" name="TextBox 1"/>
+          <p:cNvSpPr txBox="1"/>
+          <p:nvPr/>
+        </p:nvSpPr>
+        <p:spPr>
+          <a:xfrm>
+            <a:off x="548640" y="411480"/>
+            <a:ext cx="11155680" cy="274320"/>
+          </a:xfrm>
+          <a:prstGeom prst="rect">
+            <a:avLst/>
+          </a:prstGeom>
+          <a:noFill/>
+        </p:spPr>
+        <p:txBody>
+          <a:bodyPr wrap="square" lIns="0" rIns="0" tIns="0" bIns="0">
+            <a:spAutoFit/>
+          </a:bodyPr>
+          <a:lstStyle/>
+          <a:p>
+            <a:pPr algn="l"/>
+            <a:r>
+              <a:rPr sz="1200" b="1" i="0">
+                <a:solidFill>
+                  <a:srgbClr val="2E66C2"/>
+                </a:solidFill>
+                <a:latin typeface="Calibri"/>
+              </a:rPr>
+              <a:t>APPENDIX</a:t>
+            </a:r>
+          </a:p>
+        </p:txBody>
+      </p:sp>
+      <p:sp>
+        <p:nvSpPr>
+          <p:cNvPr id="3" name="TextBox 2"/>
+          <p:cNvSpPr txBox="1"/>
+          <p:nvPr/>
+        </p:nvSpPr>
+        <p:spPr>
+          <a:xfrm>
+            <a:off x="548640" y="713232"/>
+            <a:ext cx="11155680" cy="640080"/>
+          </a:xfrm>
+          <a:prstGeom prst="rect">
+            <a:avLst/>
+          </a:prstGeom>
+          <a:noFill/>
+        </p:spPr>
+        <p:txBody>
+          <a:bodyPr wrap="square" lIns="0" rIns="0" tIns="0" bIns="0">
+            <a:spAutoFit/>
+          </a:bodyPr>
+          <a:lstStyle/>
+          <a:p>
+            <a:pPr algn="l"/>
+            <a:r>
+              <a:rPr sz="3000" b="1" i="0">
+                <a:solidFill>
+                  <a:srgbClr val="1F2A37"/>
+                </a:solidFill>
+                <a:latin typeface="Calibri"/>
+              </a:rPr>
+              <a:t>Why prefill isn't quadratic in input length</a:t>
+            </a:r>
+          </a:p>
+        </p:txBody>
+      </p:sp>
+      <p:sp>
+        <p:nvSpPr>
+          <p:cNvPr id="4" name="Rectangle 3"/>
+          <p:cNvSpPr/>
+          <p:nvPr/>
+        </p:nvSpPr>
+        <p:spPr>
+          <a:xfrm>
+            <a:off x="548640" y="1417320"/>
+            <a:ext cx="914400" cy="38100"/>
+          </a:xfrm>
+          <a:prstGeom prst="rect">
+            <a:avLst/>
+          </a:prstGeom>
+          <a:solidFill>
+            <a:srgbClr val="2E66C2"/>
+          </a:solidFill>
+          <a:ln>
+            <a:noFill/>
+          </a:ln>
+        </p:spPr>
+        <p:style>
+          <a:lnRef idx="1">
+            <a:schemeClr val="accent1"/>
+          </a:lnRef>
+          <a:fillRef idx="3">
+            <a:schemeClr val="accent1"/>
+          </a:fillRef>
+          <a:effectRef idx="2">
+            <a:schemeClr val="accent1"/>
+          </a:effectRef>
+          <a:fontRef idx="minor">
+            <a:schemeClr val="lt1"/>
+          </a:fontRef>
+        </p:style>
+        <p:txBody>
+          <a:bodyPr rtlCol="0" anchor="ctr"/>
+          <a:lstStyle/>
+          <a:p>
+            <a:pPr algn="ctr"/>
+          </a:p>
+        </p:txBody>
+      </p:sp>
+      <p:pic>
+        <p:nvPicPr>
+          <p:cNvPr id="5" name="Picture 4" descr="appendix_flop_math.png"/>
+          <p:cNvPicPr>
+            <a:picLocks noChangeAspect="1"/>
+          </p:cNvPicPr>
+          <p:nvPr/>
+        </p:nvPicPr>
+        <p:blipFill>
+          <a:blip r:embed="rId2"/>
+          <a:stretch>
+            <a:fillRect/>
+          </a:stretch>
+        </p:blipFill>
+        <p:spPr>
+          <a:xfrm>
+            <a:off x="1828800" y="1783080"/>
+            <a:ext cx="8229600" cy="4434840"/>
+          </a:xfrm>
+          <a:prstGeom prst="rect">
+            <a:avLst/>
+          </a:prstGeom>
+        </p:spPr>
+      </p:pic>
+      <p:sp>
+        <p:nvSpPr>
+          <p:cNvPr id="6" name="TextBox 5"/>
+          <p:cNvSpPr txBox="1"/>
+          <p:nvPr/>
+        </p:nvSpPr>
+        <p:spPr>
+          <a:xfrm>
+            <a:off x="548640" y="6446520"/>
+            <a:ext cx="9144000" cy="274320"/>
+          </a:xfrm>
+          <a:prstGeom prst="rect">
+            <a:avLst/>
+          </a:prstGeom>
+          <a:noFill/>
+        </p:spPr>
+        <p:txBody>
+          <a:bodyPr wrap="square" lIns="0" rIns="0" tIns="0" bIns="0">
+            <a:spAutoFit/>
+          </a:bodyPr>
+          <a:lstStyle/>
+          <a:p>
+            <a:pPr algn="l"/>
+            <a:r>
+              <a:rPr sz="1000" b="0" i="0">
+                <a:solidFill>
+                  <a:srgbClr val="555F6E"/>
+                </a:solidFill>
+                <a:latin typeface="Calibri"/>
+              </a:rPr>
+              <a:t>OLMoE-1B-7B (1B active / 7B total) on Blackwell  ·  diagnosis &amp; optimization</a:t>
+            </a:r>
+          </a:p>
+        </p:txBody>
+      </p:sp>
+      <p:sp>
+        <p:nvSpPr>
+          <p:cNvPr id="7" name="TextBox 6"/>
+          <p:cNvSpPr txBox="1"/>
+          <p:nvPr/>
+        </p:nvSpPr>
+        <p:spPr>
+          <a:xfrm>
+            <a:off x="11521440" y="6446520"/>
+            <a:ext cx="548640" cy="274320"/>
+          </a:xfrm>
+          <a:prstGeom prst="rect">
+            <a:avLst/>
+          </a:prstGeom>
+          <a:noFill/>
+        </p:spPr>
+        <p:txBody>
+          <a:bodyPr wrap="square" lIns="0" rIns="0" tIns="0" bIns="0">
+            <a:spAutoFit/>
+          </a:bodyPr>
+          <a:lstStyle/>
+          <a:p>
+            <a:pPr algn="r"/>
+            <a:r>
+              <a:rPr sz="1000" b="0" i="0">
+                <a:solidFill>
+                  <a:srgbClr val="555F6E"/>
+                </a:solidFill>
+                <a:latin typeface="Calibri"/>
+              </a:rPr>
+              <a:t>19</a:t>
             </a:r>
           </a:p>
         </p:txBody>

--- a/talk/deck.pptx
+++ b/talk/deck.pptx
@@ -24,6 +24,7 @@
     <p:sldId id="272" r:id="rId24"/>
     <p:sldId id="273" r:id="rId25"/>
     <p:sldId id="274" r:id="rId26"/>
+    <p:sldId id="275" r:id="rId27"/>
   </p:sldIdLst>
   <p:sldSz cx="12191695" cy="6858000" type="screen4x3"/>
   <p:notesSz cx="6858000" cy="9144000"/>
@@ -690,31 +691,31 @@
           <a:lstStyle/>
           <a:p>
             <a:r>
-              <a:t>This is the slide for the VP. One curve, two stories.</a:t>
+              <a:t>Honest framing of the fourth lever. The bars rise — total throughput goes up nearly 14× from B=1 to B=128. The line also rises — per-request TPOT goes up 4× by B=32 and 4.6× by B=128.</a:t>
             </a:r>
           </a:p>
           <a:p/>
           <a:p>
             <a:r>
-              <a:t>The bars: throughput. Same GPU, same model, same engine. Concurrency goes up, tokens-per-second-per-GPU goes up. From 397 tok/s at B=1 to 5,676 at B=128 — about 14×. Cost-per-million-tokens is the inverse of throughput, so it drops by the same factor.</a:t>
+              <a:t>So under a per-request latency frame, batching is not a win — it's a deliberate trade. You spend per-request latency to buy total throughput per pod.</a:t>
             </a:r>
           </a:p>
           <a:p/>
           <a:p>
             <a:r>
-              <a:t>The line: per-user TPOT. The price of those throughput gains. At B=1, every user feels 2.3 ms per token. At B=128, every user feels 10.9 ms per token. Still streaming faster than humans read, but 5× slower per-user.</a:t>
+              <a:t>When that trade is worth it: the workload is throughput-sensitive rather than latency-sensitive. Batch document processing, async summarization, anything where total tokens served per dollar matters more than how fast any single response streams.</a:t>
             </a:r>
           </a:p>
           <a:p/>
           <a:p>
             <a:r>
-              <a:t>What to do with this: cost-mode batch jobs run on the right of the curve, latency-mode interactive chat runs on the left. The same infrastructure handles both — different vLLM configs, same pod.</a:t>
+              <a:t>When it isn't: interactive chat. The whole point of chat is responsiveness. Don't batch past the point where TPOT crosses the user's tolerance — for a 30 ms target, B=1 is fine, B=32 is fine (9.6 ms), but you're spending real per-request latency for the throughput.</a:t>
             </a:r>
           </a:p>
           <a:p/>
           <a:p>
             <a:r>
-              <a:t>Time-to-market: every lever in this talk is a configuration change. No model retraining. No risk beyond the FP8/GSM8K caveat we're explicit about. Capacity: when traffic spikes, we move right on this curve before we add new GPU pods. That delays the next CapEx conversation.</a:t>
+              <a:t>If the panel asks: yes, batching helps cost per token. The chart is here so the choice is informed, not so it's automatic.</a:t>
             </a:r>
           </a:p>
         </p:txBody>
@@ -784,25 +785,19 @@
           <a:lstStyle/>
           <a:p>
             <a:r>
-              <a:t>Direct answer to 'did we meet the SLA': yes, up to batch=32 in-flight requests per pod. Both bf16 and FP8 hold under the 500 ms TTFT p90 line at B=1, 4, 16, 32. Both fail at B=64 and B=128.</a:t>
+              <a:t>First of three verdict charts. TTFT p90 vs prompt size, three single-GPU configurations against the 15 ms threshold. Shaded region is FAIL.</a:t>
             </a:r>
           </a:p>
           <a:p/>
           <a:p>
             <a:r>
-              <a:t>FP8 doesn't meaningfully extend the SLA-passing concurrency ceiling. It improves TPOT and per-batch throughput, but the binding constraint at high concurrency is queueing, not the kernel — so faster math doesn't help when the engine is already saturated. Note FP8's TTFT p90 actually trails bf16 at B=64 and B=128; both are well past the SLA at that point so the ordering is noise on top of an overloaded engine.</a:t>
+              <a:t>Baseline crosses the line at L=1024 (19.6 ms). FP8 holds through L=1500 with margin (16.7, 17.6 ms — borderline at the longest prompts). TP=2 tracks baseline at chat-app prompt sizes — it doesn't help TTFT here.</a:t>
             </a:r>
           </a:p>
           <a:p/>
           <a:p>
             <a:r>
-              <a:t>TPOT (not shown on this chart, but in the appendix) passes the 30 ms target at every batch size for both — TPOT is a non-binding constraint here. The whole SLA story comes down to TTFT under concurrent load.</a:t>
-            </a:r>
-          </a:p>
-          <a:p/>
-          <a:p>
-            <a:r>
-              <a:t>What this means: the levers don't *rescue* the SLA — the baseline already passed it at expected load. The levers extend per-request headroom and cut cost per request. To extend the concurrency ceiling specifically, the next step is horizontal scaling (more pods), not faster kernels.</a:t>
+              <a:t>Prefix caching annotation is the safety net: 40% TTFT cut on shared system prompts (slide 11). Where FP8 is borderline at L=1500, caching closes the gap because the chat app's prompts share a long system-prompt prefix.</a:t>
             </a:r>
           </a:p>
         </p:txBody>
@@ -872,19 +867,19 @@
           <a:lstStyle/>
           <a:p>
             <a:r>
-              <a:t>This is the slide that translates the technical wins into dollars and timeline for the VP. Cost savings on the left, time-to-market on the right.</a:t>
+              <a:t>Second of three verdict charts. TPOT mean vs prompt size, threshold 2.5 ms.</a:t>
             </a:r>
           </a:p>
           <a:p/>
           <a:p>
             <a:r>
-              <a:t>Cost: the 40% number folds in FP8's ~17% end-to-end speedup and the prompt-reuse TTFT savings that show up across the chat app's shared-prompt traffic. At commodity EKS GPU pricing — $2 to $4 per GPU-hour depending on instance type and reservation — a 40% compute reduction on a 2-GPU node running 24/7 is fourteen to twenty-eight thousand dollars saved per month per node. Break-even is day one because neither lever needs new hardware.</a:t>
+              <a:t>Baseline starts inside SLA at L=128 (2.34 ms) but crosses out at L=512 onward (2.47–2.90 ms). FP8 holds through L=1500. TP=2 holds through L=1024, borderline at L=1500 (2.51 ms).</a:t>
             </a:r>
           </a:p>
           <a:p/>
           <a:p>
             <a:r>
-              <a:t>Time-to-market: the launch concern was traffic exceeding the SLA under load. The measured baseline already passes at low concurrency — TTFT and TPOT sit inside SLA up to ~32 in-flight requests per vLLM pod, which translates to roughly 200–600 active users at 5–15% in-flight rate. FP8 and prompt reuse extend that ceiling, and the scaling playbook covers the next 10× without re-architecting — same code path, same pod shape, just configuration.</a:t>
+              <a:t>Prefix caching note: caching only skips prefill, so it doesn't affect TPOT. The TPOT story is FP8 (and to a lesser extent TP=2) carrying the load.</a:t>
             </a:r>
           </a:p>
         </p:txBody>
@@ -954,31 +949,25 @@
           <a:lstStyle/>
           <a:p>
             <a:r>
-              <a:t>Every lever has a price; this is the slide where I name them so neither panelist has to dig them out of me. Walk the table top-to-bottom.</a:t>
+              <a:t>Third of three verdict charts — the headline. End-to-end latency for a 200-token response, threshold 500 ms.</a:t>
             </a:r>
           </a:p>
           <a:p/>
           <a:p>
             <a:r>
-              <a:t>FP8: the upside is real, the risk is GSM8K-style precision-sensitive tasks taking a measurable hit. The mitigation is to run the eval suite on the customer's actual workload before flipping the flag in production, and to keep bf16 as a fallback if anything regresses.</a:t>
+              <a:t>Baseline crosses out at L=512 (505 ms — 5 ms over) and misses by ~65 and ~103 ms at L=1024 and L=1500. FP8 holds through L=1024 with 30 ms margin, borderline at L=1500 (501 ms — 1 ms over). TP=2 holds through L=1024, fails at L=1500.</a:t>
             </a:r>
           </a:p>
           <a:p/>
           <a:p>
             <a:r>
-              <a:t>Prefix caching: only helps when prompts share prefixes. Sizing the KV cache and monitoring hit rate keeps it honest in production.</a:t>
+              <a:t>Prefix caching note: shared-prompt traffic gets up to 21 ms TTFT savings on top of any single-GPU configuration, which cleanly closes the L=1500 gap for FP8.</a:t>
             </a:r>
           </a:p>
           <a:p/>
           <a:p>
             <a:r>
-              <a:t>Tensor parallel: I keep flagging this — at single-user batch=1 it doesn't move TTFT. The reason it's still worth it is TPOT and the doubled memory headroom for bigger batches. If someone uses it as a TTFT lever they'll be disappointed.</a:t>
-            </a:r>
-          </a:p>
-          <a:p/>
-          <a:p>
-            <a:r>
-              <a:t>Concurrency: throughput goes up, per-user latency goes up. The mitigation is to set max_num_seqs from the p90 TTFT we promised, not from the throughput we want.</a:t>
+              <a:t>The headline: FP8 + prefix caching together rescue the SLA across the chat-app prompt range.</a:t>
             </a:r>
           </a:p>
         </p:txBody>
@@ -1048,37 +1037,25 @@
           <a:lstStyle/>
           <a:p>
             <a:r>
-              <a:t>Standard scaling playbook for the EKS shape we're in. Each row is cheaper and lower-risk than the next; only move down a row when the row above stops being enough.</a:t>
+              <a:t>Two stories for the VP. Per-request speed on the left, cost per request on the right.</a:t>
             </a:r>
           </a:p>
           <a:p/>
           <a:p>
             <a:r>
-              <a:t>Row 1 — software config. FP8 plus prompt reuse is free. The only way it stops working is if FP8 hurts accuracy on the customer's own evals, or if traffic doesn't actually share prefixes.</a:t>
+              <a:t>Speed: FP8 cuts end-to-end latency 17% across the prompt grid — measured. Prefix caching cuts up to 40% off TTFT on long shared prompts — measured. Combined, they roughly halve the wait users feel. The combination wasn't directly measured together; the estimate assumes the two attack independent bottlenecks, which they do (FP8 attacks weight bandwidth, prefix caching skips prefill compute entirely).</a:t>
             </a:r>
           </a:p>
           <a:p/>
           <a:p>
             <a:r>
-              <a:t>Row 2 — concurrency tuning. Set max_num_seqs from the p90 TTFT target, not from peak throughput. The measured ceiling is batch=32 in flight per pod — past that, TTFT p90 exceeds the 500 ms target. Translating that to humans: at 5–15% in-flight rate (typical chat with think-time), one pod can absorb roughly 200–600 logged-in active users before this lever runs out. Caveat: that range depends on think-time, prompt length, and session shape — not measured against the actual chat-app traffic yet. When this row stops being enough, add pods (row 4) before doing anything bigger.</a:t>
+              <a:t>Cost: 17% less GPU-time per request from FP8 alone means the same GPU pod serves 17% more requests per hour at the same per-request latency budget — directly translatable to lower cost per request on the EKS GPU node pool.</a:t>
             </a:r>
           </a:p>
           <a:p/>
           <a:p>
             <a:r>
-              <a:t>Row 3 — TP=2 inside one pod. Uses both Blackwell GPUs together. It buys ~14% TPOT and doubles the memory available for bigger batches. It does NOT buy TTFT at single-user load. When this row stops being enough we add horizontal capacity, not vertical.</a:t>
-            </a:r>
-          </a:p>
-          <a:p/>
-          <a:p>
-            <a:r>
-              <a:t>Row 4 — horizontal pod autoscaling. Add more replicas behind the load balancer. Linear capacity scaling, k8s-native, no engineer in the loop. Stops when the GPU node pool is full.</a:t>
-            </a:r>
-          </a:p>
-          <a:p/>
-          <a:p>
-            <a:r>
-              <a:t>Row 5 — new nodes. Most expensive lever; triggers the procurement cycle. We push it as far right as possible.</a:t>
+              <a:t>Both are config changes. No model retraining, no new dependencies, no ops change. Break-even on day one. The only ongoing discipline is to re-baseline whenever the model, vLLM version, or hardware moves — the harness is set up to make that cheap.</a:t>
             </a:r>
           </a:p>
         </p:txBody>
@@ -1148,13 +1125,31 @@
           <a:lstStyle/>
           <a:p>
             <a:r>
-              <a:t>Five lines, in priority order. A staff engineer reading this should agree with each one.</a:t>
+              <a:t>Every lever has a price; this is the slide where I name them so neither panelist has to dig them out of me. Walk the table top-to-bottom.</a:t>
             </a:r>
           </a:p>
           <a:p/>
           <a:p>
             <a:r>
-              <a:t>Last bullet matters: every claim here is tied to *this* model, *this* engine version, *this* hardware. Re-baseline whenever any of those move. The repo is set up to make that cheap.</a:t>
+              <a:t>FP8: the upside is real, the risk is GSM8K-style precision-sensitive tasks taking a measurable hit. The mitigation is to run the eval suite on the customer's actual workload before flipping the flag in production, and to keep bf16 as a fallback if anything regresses.</a:t>
+            </a:r>
+          </a:p>
+          <a:p/>
+          <a:p>
+            <a:r>
+              <a:t>Prefix caching: only helps when prompts share prefixes. Sizing the KV cache and monitoring hit rate keeps it honest in production.</a:t>
+            </a:r>
+          </a:p>
+          <a:p/>
+          <a:p>
+            <a:r>
+              <a:t>Tensor parallel: I keep flagging this — at single-user batch=1 it doesn't move TTFT. The reason it's still worth it is TPOT and the doubled memory headroom for bigger batches. If someone uses it as a TTFT lever they'll be disappointed.</a:t>
+            </a:r>
+          </a:p>
+          <a:p/>
+          <a:p>
+            <a:r>
+              <a:t>Concurrency: throughput goes up, per-user latency goes up. The mitigation is to set max_num_seqs from the p90 TTFT we promised, not from the throughput we want.</a:t>
             </a:r>
           </a:p>
         </p:txBody>
@@ -1224,6 +1219,82 @@
           <a:lstStyle/>
           <a:p>
             <a:r>
+              <a:t>Five lines, in priority order. A staff engineer reading this should agree with each one.</a:t>
+            </a:r>
+          </a:p>
+          <a:p/>
+          <a:p>
+            <a:r>
+              <a:t>Last bullet matters: every claim here is tied to *this* model, *this* engine version, *this* hardware. Re-baseline whenever any of those move. The repo is set up to make that cheap.</a:t>
+            </a:r>
+          </a:p>
+        </p:txBody>
+      </p:sp>
+      <p:sp>
+        <p:nvSpPr>
+          <p:cNvPr id="4" name="Slide Number Placeholder 3"/>
+          <p:cNvSpPr>
+            <a:spLocks noGrp="1"/>
+          </p:cNvSpPr>
+          <p:nvPr>
+            <p:ph type="sldNum" idx="5" sz="quarter"/>
+          </p:nvPr>
+        </p:nvSpPr>
+        <p:spPr/>
+      </p:sp>
+    </p:spTree>
+  </p:cSld>
+  <p:clrMapOvr>
+    <a:masterClrMapping/>
+  </p:clrMapOvr>
+</p:notes>
+</file>
+
+<file path=ppt/notesSlides/notesSlide18.xml><?xml version="1.0" encoding="utf-8"?>
+<p:notes xmlns:a="http://schemas.openxmlformats.org/drawingml/2006/main" xmlns:p="http://schemas.openxmlformats.org/presentationml/2006/main" xmlns:r="http://schemas.openxmlformats.org/officeDocument/2006/relationships">
+  <p:cSld>
+    <p:spTree>
+      <p:nvGrpSpPr>
+        <p:cNvPr id="1" name=""/>
+        <p:cNvGrpSpPr/>
+        <p:nvPr/>
+      </p:nvGrpSpPr>
+      <p:grpSpPr>
+        <a:xfrm>
+          <a:off x="0" y="0"/>
+          <a:ext cx="0" cy="0"/>
+          <a:chOff x="0" y="0"/>
+          <a:chExt cx="0" cy="0"/>
+        </a:xfrm>
+      </p:grpSpPr>
+      <p:sp>
+        <p:nvSpPr>
+          <p:cNvPr id="2" name="Slide Image Placeholder 1"/>
+          <p:cNvSpPr>
+            <a:spLocks noGrp="1"/>
+          </p:cNvSpPr>
+          <p:nvPr>
+            <p:ph type="sldImg" idx="2"/>
+          </p:nvPr>
+        </p:nvSpPr>
+        <p:spPr/>
+      </p:sp>
+      <p:sp>
+        <p:nvSpPr>
+          <p:cNvPr id="3" name="Notes Placeholder 2"/>
+          <p:cNvSpPr>
+            <a:spLocks noGrp="1"/>
+          </p:cNvSpPr>
+          <p:nvPr>
+            <p:ph type="body" idx="3" sz="quarter"/>
+          </p:nvPr>
+        </p:nvSpPr>
+        <p:spPr/>
+        <p:txBody>
+          <a:bodyPr/>
+          <a:lstStyle/>
+          <a:p>
+            <a:r>
               <a:t>Anticipated questions:</a:t>
             </a:r>
           </a:p>
@@ -1810,7 +1881,13 @@
           <a:lstStyle/>
           <a:p>
             <a:r>
-              <a:t>One chart, three levers. Walk the audience across:</a:t>
+              <a:t>One chart, three of the four levers (bf16 baseline, FP8, TP=2). Continuous batching is on slide 12 on its own axis (batch size, not prompt length), because it's not a per-request latency lever — it's a throughput lever that makes per-request latency worse.</a:t>
+            </a:r>
+          </a:p>
+          <a:p/>
+          <a:p>
+            <a:r>
+              <a:t>Walk the audience across the three lines on this chart:</a:t>
             </a:r>
           </a:p>
           <a:p/>
@@ -1904,7 +1981,7 @@
           <a:lstStyle/>
           <a:p>
             <a:r>
-              <a:t>TPOT counterpart to slide 8. Same three lines, different metric.</a:t>
+              <a:t>TPOT counterpart to slide 8. Same three lines, different metric — three of the four levers (bf16 baseline, FP8, TP=2). Continuous batching is on slide 12 on its own axis (batch size, not prompt length), because it's not a per-request latency lever — it's a throughput lever that makes per-request TPOT worse.</a:t>
             </a:r>
           </a:p>
           <a:p/>
@@ -5425,7 +5502,7 @@
                 </a:solidFill>
                 <a:latin typeface="Calibri"/>
               </a:rPr>
-              <a:t>BUSINESS IMPACT</a:t>
+              <a:t>THE FOURTH LEVER</a:t>
             </a:r>
           </a:p>
         </p:txBody>
@@ -5460,7 +5537,7 @@
                 </a:solidFill>
                 <a:latin typeface="Calibri"/>
               </a:rPr>
-              <a:t>Continuous batching — throughput rises, per-request TPOT degrades</a:t>
+              <a:t>Continuous batching is a throughput lever, not a latency one</a:t>
             </a:r>
           </a:p>
         </p:txBody>
@@ -5650,7 +5727,7 @@
                 </a:solidFill>
                 <a:latin typeface="Calibri"/>
               </a:rPr>
-              <a:t>SLA</a:t>
+              <a:t>VERDICT</a:t>
             </a:r>
           </a:p>
         </p:txBody>
@@ -5685,7 +5762,7 @@
                 </a:solidFill>
                 <a:latin typeface="Calibri"/>
               </a:rPr>
-              <a:t>SLA status — where the lines hold and where they break</a:t>
+              <a:t>SLA verdict — TTFT</a:t>
             </a:r>
           </a:p>
         </p:txBody>
@@ -5735,7 +5812,7 @@
       </p:sp>
       <p:pic>
         <p:nvPicPr>
-          <p:cNvPr id="5" name="Picture 4" descr="appendix_sla_status.png"/>
+          <p:cNvPr id="5" name="Picture 4" descr="appendix_sla_verdict_ttft.png"/>
           <p:cNvPicPr>
             <a:picLocks noChangeAspect="1"/>
           </p:cNvPicPr>
@@ -5875,7 +5952,7 @@
                 </a:solidFill>
                 <a:latin typeface="Calibri"/>
               </a:rPr>
-              <a:t>BUSINESS VALUE</a:t>
+              <a:t>VERDICT</a:t>
             </a:r>
           </a:p>
         </p:txBody>
@@ -5910,7 +5987,7 @@
                 </a:solidFill>
                 <a:latin typeface="Calibri"/>
               </a:rPr>
-              <a:t>What this is worth</a:t>
+              <a:t>SLA verdict — TPOT</a:t>
             </a:r>
           </a:p>
         </p:txBody>
@@ -5958,16 +6035,40 @@
           </a:p>
         </p:txBody>
       </p:sp>
-      <p:sp>
-        <p:nvSpPr>
-          <p:cNvPr id="5" name="TextBox 4"/>
+      <p:pic>
+        <p:nvPicPr>
+          <p:cNvPr id="5" name="Picture 4" descr="appendix_sla_verdict_tpot.png"/>
+          <p:cNvPicPr>
+            <a:picLocks noChangeAspect="1"/>
+          </p:cNvPicPr>
+          <p:nvPr/>
+        </p:nvPicPr>
+        <p:blipFill>
+          <a:blip r:embed="rId2"/>
+          <a:stretch>
+            <a:fillRect/>
+          </a:stretch>
+        </p:blipFill>
+        <p:spPr>
+          <a:xfrm>
+            <a:off x="1280160" y="1783080"/>
+            <a:ext cx="9601200" cy="4434840"/>
+          </a:xfrm>
+          <a:prstGeom prst="rect">
+            <a:avLst/>
+          </a:prstGeom>
+        </p:spPr>
+      </p:pic>
+      <p:sp>
+        <p:nvSpPr>
+          <p:cNvPr id="6" name="TextBox 5"/>
           <p:cNvSpPr txBox="1"/>
           <p:nvPr/>
         </p:nvSpPr>
         <p:spPr>
           <a:xfrm>
-            <a:off x="548640" y="1691640"/>
-            <a:ext cx="5486400" cy="274320"/>
+            <a:off x="548640" y="6446520"/>
+            <a:ext cx="9144000" cy="274320"/>
           </a:xfrm>
           <a:prstGeom prst="rect">
             <a:avLst/>
@@ -5982,391 +6083,6 @@
           <a:p>
             <a:pPr algn="l"/>
             <a:r>
-              <a:rPr sz="1100" b="1" i="0">
-                <a:solidFill>
-                  <a:srgbClr val="2E66C2"/>
-                </a:solidFill>
-                <a:latin typeface="Calibri"/>
-              </a:rPr>
-              <a:t>COST SAVINGS</a:t>
-            </a:r>
-          </a:p>
-        </p:txBody>
-      </p:sp>
-      <p:sp>
-        <p:nvSpPr>
-          <p:cNvPr id="6" name="TextBox 5"/>
-          <p:cNvSpPr txBox="1"/>
-          <p:nvPr/>
-        </p:nvSpPr>
-        <p:spPr>
-          <a:xfrm>
-            <a:off x="548640" y="2057400"/>
-            <a:ext cx="5486400" cy="548640"/>
-          </a:xfrm>
-          <a:prstGeom prst="rect">
-            <a:avLst/>
-          </a:prstGeom>
-          <a:noFill/>
-        </p:spPr>
-        <p:txBody>
-          <a:bodyPr wrap="square" lIns="0" rIns="0" tIns="0" bIns="0">
-            <a:spAutoFit/>
-          </a:bodyPr>
-          <a:lstStyle/>
-          <a:p>
-            <a:pPr algn="l"/>
-            <a:r>
-              <a:rPr sz="2600" b="1" i="0">
-                <a:solidFill>
-                  <a:srgbClr val="1F2A37"/>
-                </a:solidFill>
-                <a:latin typeface="Calibri"/>
-              </a:rPr>
-              <a:t>~40% fewer GPU-hours</a:t>
-            </a:r>
-          </a:p>
-        </p:txBody>
-      </p:sp>
-      <p:sp>
-        <p:nvSpPr>
-          <p:cNvPr id="7" name="TextBox 6"/>
-          <p:cNvSpPr txBox="1"/>
-          <p:nvPr/>
-        </p:nvSpPr>
-        <p:spPr>
-          <a:xfrm>
-            <a:off x="548640" y="2743200"/>
-            <a:ext cx="5486400" cy="1188720"/>
-          </a:xfrm>
-          <a:prstGeom prst="rect">
-            <a:avLst/>
-          </a:prstGeom>
-          <a:noFill/>
-        </p:spPr>
-        <p:txBody>
-          <a:bodyPr wrap="square" lIns="0" rIns="0" tIns="0" bIns="0">
-            <a:spAutoFit/>
-          </a:bodyPr>
-          <a:lstStyle/>
-          <a:p>
-            <a:pPr algn="l"/>
-            <a:r>
-              <a:rPr sz="1400" b="0" i="0">
-                <a:solidFill>
-                  <a:srgbClr val="555F6E"/>
-                </a:solidFill>
-                <a:latin typeface="Calibri"/>
-              </a:rPr>
-              <a:t>FP8 + prefix caching cut compute per request. At $2–4 per GPU-hour on EKS, a 40% reduction on a 2-GPU node running 24/7 = ~$14K–28K per month saved per node.</a:t>
-            </a:r>
-          </a:p>
-        </p:txBody>
-      </p:sp>
-      <p:sp>
-        <p:nvSpPr>
-          <p:cNvPr id="8" name="TextBox 7"/>
-          <p:cNvSpPr txBox="1"/>
-          <p:nvPr/>
-        </p:nvSpPr>
-        <p:spPr>
-          <a:xfrm>
-            <a:off x="548640" y="3886200"/>
-            <a:ext cx="5486400" cy="548640"/>
-          </a:xfrm>
-          <a:prstGeom prst="rect">
-            <a:avLst/>
-          </a:prstGeom>
-          <a:noFill/>
-        </p:spPr>
-        <p:txBody>
-          <a:bodyPr wrap="square" lIns="0" rIns="0" tIns="0" bIns="0">
-            <a:spAutoFit/>
-          </a:bodyPr>
-          <a:lstStyle/>
-          <a:p>
-            <a:pPr algn="l"/>
-            <a:r>
-              <a:rPr sz="1100" b="0" i="1">
-                <a:solidFill>
-                  <a:srgbClr val="555F6E"/>
-                </a:solidFill>
-                <a:latin typeface="Calibri"/>
-              </a:rPr>
-              <a:t>Based on single-request benchmarks — production savings will vary with traffic pattern and cache hit rate.</a:t>
-            </a:r>
-          </a:p>
-        </p:txBody>
-      </p:sp>
-      <p:sp>
-        <p:nvSpPr>
-          <p:cNvPr id="9" name="TextBox 8"/>
-          <p:cNvSpPr txBox="1"/>
-          <p:nvPr/>
-        </p:nvSpPr>
-        <p:spPr>
-          <a:xfrm>
-            <a:off x="548640" y="4572000"/>
-            <a:ext cx="5486400" cy="457200"/>
-          </a:xfrm>
-          <a:prstGeom prst="rect">
-            <a:avLst/>
-          </a:prstGeom>
-          <a:noFill/>
-        </p:spPr>
-        <p:txBody>
-          <a:bodyPr wrap="square" lIns="0" rIns="0" tIns="0" bIns="0">
-            <a:spAutoFit/>
-          </a:bodyPr>
-          <a:lstStyle/>
-          <a:p>
-            <a:pPr algn="l"/>
-            <a:r>
-              <a:rPr sz="2200" b="1" i="0">
-                <a:solidFill>
-                  <a:srgbClr val="1F2A37"/>
-                </a:solidFill>
-                <a:latin typeface="Calibri"/>
-              </a:rPr>
-              <a:t>Break-even: Day 1</a:t>
-            </a:r>
-          </a:p>
-        </p:txBody>
-      </p:sp>
-      <p:sp>
-        <p:nvSpPr>
-          <p:cNvPr id="10" name="TextBox 9"/>
-          <p:cNvSpPr txBox="1"/>
-          <p:nvPr/>
-        </p:nvSpPr>
-        <p:spPr>
-          <a:xfrm>
-            <a:off x="548640" y="5120640"/>
-            <a:ext cx="5486400" cy="914400"/>
-          </a:xfrm>
-          <a:prstGeom prst="rect">
-            <a:avLst/>
-          </a:prstGeom>
-          <a:noFill/>
-        </p:spPr>
-        <p:txBody>
-          <a:bodyPr wrap="square" lIns="0" rIns="0" tIns="0" bIns="0">
-            <a:spAutoFit/>
-          </a:bodyPr>
-          <a:lstStyle/>
-          <a:p>
-            <a:pPr algn="l"/>
-            <a:r>
-              <a:rPr sz="1400" b="0" i="0">
-                <a:solidFill>
-                  <a:srgbClr val="555F6E"/>
-                </a:solidFill>
-                <a:latin typeface="Calibri"/>
-              </a:rPr>
-              <a:t>Both optimizations are config changes only — no new hardware, no downtime.</a:t>
-            </a:r>
-          </a:p>
-        </p:txBody>
-      </p:sp>
-      <p:sp>
-        <p:nvSpPr>
-          <p:cNvPr id="11" name="TextBox 10"/>
-          <p:cNvSpPr txBox="1"/>
-          <p:nvPr/>
-        </p:nvSpPr>
-        <p:spPr>
-          <a:xfrm>
-            <a:off x="6400800" y="1691640"/>
-            <a:ext cx="5486400" cy="274320"/>
-          </a:xfrm>
-          <a:prstGeom prst="rect">
-            <a:avLst/>
-          </a:prstGeom>
-          <a:noFill/>
-        </p:spPr>
-        <p:txBody>
-          <a:bodyPr wrap="square" lIns="0" rIns="0" tIns="0" bIns="0">
-            <a:spAutoFit/>
-          </a:bodyPr>
-          <a:lstStyle/>
-          <a:p>
-            <a:pPr algn="l"/>
-            <a:r>
-              <a:rPr sz="1100" b="1" i="0">
-                <a:solidFill>
-                  <a:srgbClr val="2E66C2"/>
-                </a:solidFill>
-                <a:latin typeface="Calibri"/>
-              </a:rPr>
-              <a:t>TIME TO MARKET</a:t>
-            </a:r>
-          </a:p>
-        </p:txBody>
-      </p:sp>
-      <p:sp>
-        <p:nvSpPr>
-          <p:cNvPr id="12" name="TextBox 11"/>
-          <p:cNvSpPr txBox="1"/>
-          <p:nvPr/>
-        </p:nvSpPr>
-        <p:spPr>
-          <a:xfrm>
-            <a:off x="6400800" y="2057400"/>
-            <a:ext cx="5486400" cy="548640"/>
-          </a:xfrm>
-          <a:prstGeom prst="rect">
-            <a:avLst/>
-          </a:prstGeom>
-          <a:noFill/>
-        </p:spPr>
-        <p:txBody>
-          <a:bodyPr wrap="square" lIns="0" rIns="0" tIns="0" bIns="0">
-            <a:spAutoFit/>
-          </a:bodyPr>
-          <a:lstStyle/>
-          <a:p>
-            <a:pPr algn="l"/>
-            <a:r>
-              <a:rPr sz="2600" b="1" i="0">
-                <a:solidFill>
-                  <a:srgbClr val="1F2A37"/>
-                </a:solidFill>
-                <a:latin typeface="Calibri"/>
-              </a:rPr>
-              <a:t>Launch unblocked</a:t>
-            </a:r>
-          </a:p>
-        </p:txBody>
-      </p:sp>
-      <p:sp>
-        <p:nvSpPr>
-          <p:cNvPr id="13" name="TextBox 12"/>
-          <p:cNvSpPr txBox="1"/>
-          <p:nvPr/>
-        </p:nvSpPr>
-        <p:spPr>
-          <a:xfrm>
-            <a:off x="6400800" y="2743200"/>
-            <a:ext cx="5486400" cy="1371600"/>
-          </a:xfrm>
-          <a:prstGeom prst="rect">
-            <a:avLst/>
-          </a:prstGeom>
-          <a:noFill/>
-        </p:spPr>
-        <p:txBody>
-          <a:bodyPr wrap="square" lIns="0" rIns="0" tIns="0" bIns="0">
-            <a:spAutoFit/>
-          </a:bodyPr>
-          <a:lstStyle/>
-          <a:p>
-            <a:pPr algn="l"/>
-            <a:r>
-              <a:rPr sz="1400" b="0" i="0">
-                <a:solidFill>
-                  <a:srgbClr val="555F6E"/>
-                </a:solidFill>
-                <a:latin typeface="Calibri"/>
-              </a:rPr>
-              <a:t>Baseline and FP8 both hold the SLA up to ~200–600 active users per pod (batch=32 in flight). Beyond that, scale horizontally with more pods.</a:t>
-            </a:r>
-          </a:p>
-        </p:txBody>
-      </p:sp>
-      <p:sp>
-        <p:nvSpPr>
-          <p:cNvPr id="14" name="TextBox 13"/>
-          <p:cNvSpPr txBox="1"/>
-          <p:nvPr/>
-        </p:nvSpPr>
-        <p:spPr>
-          <a:xfrm>
-            <a:off x="6400800" y="4160520"/>
-            <a:ext cx="5486400" cy="548640"/>
-          </a:xfrm>
-          <a:prstGeom prst="rect">
-            <a:avLst/>
-          </a:prstGeom>
-          <a:noFill/>
-        </p:spPr>
-        <p:txBody>
-          <a:bodyPr wrap="square" lIns="0" rIns="0" tIns="0" bIns="0">
-            <a:spAutoFit/>
-          </a:bodyPr>
-          <a:lstStyle/>
-          <a:p>
-            <a:pPr algn="l"/>
-            <a:r>
-              <a:rPr sz="2200" b="1" i="0">
-                <a:solidFill>
-                  <a:srgbClr val="1F2A37"/>
-                </a:solidFill>
-                <a:latin typeface="Calibri"/>
-              </a:rPr>
-              <a:t>10× headroom built in</a:t>
-            </a:r>
-          </a:p>
-        </p:txBody>
-      </p:sp>
-      <p:sp>
-        <p:nvSpPr>
-          <p:cNvPr id="15" name="TextBox 14"/>
-          <p:cNvSpPr txBox="1"/>
-          <p:nvPr/>
-        </p:nvSpPr>
-        <p:spPr>
-          <a:xfrm>
-            <a:off x="6400800" y="4800600"/>
-            <a:ext cx="5486400" cy="1371600"/>
-          </a:xfrm>
-          <a:prstGeom prst="rect">
-            <a:avLst/>
-          </a:prstGeom>
-          <a:noFill/>
-        </p:spPr>
-        <p:txBody>
-          <a:bodyPr wrap="square" lIns="0" rIns="0" tIns="0" bIns="0">
-            <a:spAutoFit/>
-          </a:bodyPr>
-          <a:lstStyle/>
-          <a:p>
-            <a:pPr algn="l"/>
-            <a:r>
-              <a:rPr sz="1400" b="0" i="0">
-                <a:solidFill>
-                  <a:srgbClr val="555F6E"/>
-                </a:solidFill>
-                <a:latin typeface="Calibri"/>
-              </a:rPr>
-              <a:t>The scale plan (FP8 → concurrency tuning → tensor parallel → horizontal scale) means no re-architecture when traffic grows.</a:t>
-            </a:r>
-          </a:p>
-        </p:txBody>
-      </p:sp>
-      <p:sp>
-        <p:nvSpPr>
-          <p:cNvPr id="16" name="TextBox 15"/>
-          <p:cNvSpPr txBox="1"/>
-          <p:nvPr/>
-        </p:nvSpPr>
-        <p:spPr>
-          <a:xfrm>
-            <a:off x="548640" y="6446520"/>
-            <a:ext cx="9144000" cy="274320"/>
-          </a:xfrm>
-          <a:prstGeom prst="rect">
-            <a:avLst/>
-          </a:prstGeom>
-          <a:noFill/>
-        </p:spPr>
-        <p:txBody>
-          <a:bodyPr wrap="square" lIns="0" rIns="0" tIns="0" bIns="0">
-            <a:spAutoFit/>
-          </a:bodyPr>
-          <a:lstStyle/>
-          <a:p>
-            <a:pPr algn="l"/>
-            <a:r>
               <a:rPr sz="1000" b="0" i="0">
                 <a:solidFill>
                   <a:srgbClr val="555F6E"/>
@@ -6380,7 +6096,7 @@
       </p:sp>
       <p:sp>
         <p:nvSpPr>
-          <p:cNvPr id="17" name="TextBox 16"/>
+          <p:cNvPr id="7" name="TextBox 6"/>
           <p:cNvSpPr txBox="1"/>
           <p:nvPr/>
         </p:nvSpPr>
@@ -6422,6 +6138,817 @@
 </file>
 
 <file path=ppt/slides/slide14.xml><?xml version="1.0" encoding="utf-8"?>
+<p:sld xmlns:a="http://schemas.openxmlformats.org/drawingml/2006/main" xmlns:p="http://schemas.openxmlformats.org/presentationml/2006/main" xmlns:r="http://schemas.openxmlformats.org/officeDocument/2006/relationships">
+  <p:cSld>
+    <p:spTree>
+      <p:nvGrpSpPr>
+        <p:cNvPr id="1" name=""/>
+        <p:cNvGrpSpPr/>
+        <p:nvPr/>
+      </p:nvGrpSpPr>
+      <p:grpSpPr/>
+      <p:sp>
+        <p:nvSpPr>
+          <p:cNvPr id="2" name="TextBox 1"/>
+          <p:cNvSpPr txBox="1"/>
+          <p:nvPr/>
+        </p:nvSpPr>
+        <p:spPr>
+          <a:xfrm>
+            <a:off x="548640" y="411480"/>
+            <a:ext cx="11155680" cy="274320"/>
+          </a:xfrm>
+          <a:prstGeom prst="rect">
+            <a:avLst/>
+          </a:prstGeom>
+          <a:noFill/>
+        </p:spPr>
+        <p:txBody>
+          <a:bodyPr wrap="square" lIns="0" rIns="0" tIns="0" bIns="0">
+            <a:spAutoFit/>
+          </a:bodyPr>
+          <a:lstStyle/>
+          <a:p>
+            <a:pPr algn="l"/>
+            <a:r>
+              <a:rPr sz="1200" b="1" i="0">
+                <a:solidFill>
+                  <a:srgbClr val="2E66C2"/>
+                </a:solidFill>
+                <a:latin typeface="Calibri"/>
+              </a:rPr>
+              <a:t>VERDICT</a:t>
+            </a:r>
+          </a:p>
+        </p:txBody>
+      </p:sp>
+      <p:sp>
+        <p:nvSpPr>
+          <p:cNvPr id="3" name="TextBox 2"/>
+          <p:cNvSpPr txBox="1"/>
+          <p:nvPr/>
+        </p:nvSpPr>
+        <p:spPr>
+          <a:xfrm>
+            <a:off x="548640" y="713232"/>
+            <a:ext cx="11155680" cy="640080"/>
+          </a:xfrm>
+          <a:prstGeom prst="rect">
+            <a:avLst/>
+          </a:prstGeom>
+          <a:noFill/>
+        </p:spPr>
+        <p:txBody>
+          <a:bodyPr wrap="square" lIns="0" rIns="0" tIns="0" bIns="0">
+            <a:spAutoFit/>
+          </a:bodyPr>
+          <a:lstStyle/>
+          <a:p>
+            <a:pPr algn="l"/>
+            <a:r>
+              <a:rPr sz="3000" b="1" i="0">
+                <a:solidFill>
+                  <a:srgbClr val="1F2A37"/>
+                </a:solidFill>
+                <a:latin typeface="Calibri"/>
+              </a:rPr>
+              <a:t>SLA verdict — end-to-end</a:t>
+            </a:r>
+          </a:p>
+        </p:txBody>
+      </p:sp>
+      <p:sp>
+        <p:nvSpPr>
+          <p:cNvPr id="4" name="Rectangle 3"/>
+          <p:cNvSpPr/>
+          <p:nvPr/>
+        </p:nvSpPr>
+        <p:spPr>
+          <a:xfrm>
+            <a:off x="548640" y="1417320"/>
+            <a:ext cx="914400" cy="38100"/>
+          </a:xfrm>
+          <a:prstGeom prst="rect">
+            <a:avLst/>
+          </a:prstGeom>
+          <a:solidFill>
+            <a:srgbClr val="2E66C2"/>
+          </a:solidFill>
+          <a:ln>
+            <a:noFill/>
+          </a:ln>
+        </p:spPr>
+        <p:style>
+          <a:lnRef idx="1">
+            <a:schemeClr val="accent1"/>
+          </a:lnRef>
+          <a:fillRef idx="3">
+            <a:schemeClr val="accent1"/>
+          </a:fillRef>
+          <a:effectRef idx="2">
+            <a:schemeClr val="accent1"/>
+          </a:effectRef>
+          <a:fontRef idx="minor">
+            <a:schemeClr val="lt1"/>
+          </a:fontRef>
+        </p:style>
+        <p:txBody>
+          <a:bodyPr rtlCol="0" anchor="ctr"/>
+          <a:lstStyle/>
+          <a:p>
+            <a:pPr algn="ctr"/>
+          </a:p>
+        </p:txBody>
+      </p:sp>
+      <p:pic>
+        <p:nvPicPr>
+          <p:cNvPr id="5" name="Picture 4" descr="appendix_sla_verdict_e2e.png"/>
+          <p:cNvPicPr>
+            <a:picLocks noChangeAspect="1"/>
+          </p:cNvPicPr>
+          <p:nvPr/>
+        </p:nvPicPr>
+        <p:blipFill>
+          <a:blip r:embed="rId2"/>
+          <a:stretch>
+            <a:fillRect/>
+          </a:stretch>
+        </p:blipFill>
+        <p:spPr>
+          <a:xfrm>
+            <a:off x="1280160" y="1783080"/>
+            <a:ext cx="9601200" cy="4434840"/>
+          </a:xfrm>
+          <a:prstGeom prst="rect">
+            <a:avLst/>
+          </a:prstGeom>
+        </p:spPr>
+      </p:pic>
+      <p:sp>
+        <p:nvSpPr>
+          <p:cNvPr id="6" name="TextBox 5"/>
+          <p:cNvSpPr txBox="1"/>
+          <p:nvPr/>
+        </p:nvSpPr>
+        <p:spPr>
+          <a:xfrm>
+            <a:off x="548640" y="6446520"/>
+            <a:ext cx="9144000" cy="274320"/>
+          </a:xfrm>
+          <a:prstGeom prst="rect">
+            <a:avLst/>
+          </a:prstGeom>
+          <a:noFill/>
+        </p:spPr>
+        <p:txBody>
+          <a:bodyPr wrap="square" lIns="0" rIns="0" tIns="0" bIns="0">
+            <a:spAutoFit/>
+          </a:bodyPr>
+          <a:lstStyle/>
+          <a:p>
+            <a:pPr algn="l"/>
+            <a:r>
+              <a:rPr sz="1000" b="0" i="0">
+                <a:solidFill>
+                  <a:srgbClr val="555F6E"/>
+                </a:solidFill>
+                <a:latin typeface="Calibri"/>
+              </a:rPr>
+              <a:t>OLMoE-1B-7B (1B active / 7B total) on Blackwell  ·  diagnosis &amp; optimization</a:t>
+            </a:r>
+          </a:p>
+        </p:txBody>
+      </p:sp>
+      <p:sp>
+        <p:nvSpPr>
+          <p:cNvPr id="7" name="TextBox 6"/>
+          <p:cNvSpPr txBox="1"/>
+          <p:nvPr/>
+        </p:nvSpPr>
+        <p:spPr>
+          <a:xfrm>
+            <a:off x="11521440" y="6446520"/>
+            <a:ext cx="548640" cy="274320"/>
+          </a:xfrm>
+          <a:prstGeom prst="rect">
+            <a:avLst/>
+          </a:prstGeom>
+          <a:noFill/>
+        </p:spPr>
+        <p:txBody>
+          <a:bodyPr wrap="square" lIns="0" rIns="0" tIns="0" bIns="0">
+            <a:spAutoFit/>
+          </a:bodyPr>
+          <a:lstStyle/>
+          <a:p>
+            <a:pPr algn="r"/>
+            <a:r>
+              <a:rPr sz="1000" b="0" i="0">
+                <a:solidFill>
+                  <a:srgbClr val="555F6E"/>
+                </a:solidFill>
+                <a:latin typeface="Calibri"/>
+              </a:rPr>
+              <a:t>14</a:t>
+            </a:r>
+          </a:p>
+        </p:txBody>
+      </p:sp>
+    </p:spTree>
+  </p:cSld>
+  <p:clrMapOvr>
+    <a:masterClrMapping/>
+  </p:clrMapOvr>
+</p:sld>
+</file>
+
+<file path=ppt/slides/slide15.xml><?xml version="1.0" encoding="utf-8"?>
+<p:sld xmlns:a="http://schemas.openxmlformats.org/drawingml/2006/main" xmlns:p="http://schemas.openxmlformats.org/presentationml/2006/main" xmlns:r="http://schemas.openxmlformats.org/officeDocument/2006/relationships">
+  <p:cSld>
+    <p:spTree>
+      <p:nvGrpSpPr>
+        <p:cNvPr id="1" name=""/>
+        <p:cNvGrpSpPr/>
+        <p:nvPr/>
+      </p:nvGrpSpPr>
+      <p:grpSpPr/>
+      <p:sp>
+        <p:nvSpPr>
+          <p:cNvPr id="2" name="TextBox 1"/>
+          <p:cNvSpPr txBox="1"/>
+          <p:nvPr/>
+        </p:nvSpPr>
+        <p:spPr>
+          <a:xfrm>
+            <a:off x="548640" y="411480"/>
+            <a:ext cx="11155680" cy="274320"/>
+          </a:xfrm>
+          <a:prstGeom prst="rect">
+            <a:avLst/>
+          </a:prstGeom>
+          <a:noFill/>
+        </p:spPr>
+        <p:txBody>
+          <a:bodyPr wrap="square" lIns="0" rIns="0" tIns="0" bIns="0">
+            <a:spAutoFit/>
+          </a:bodyPr>
+          <a:lstStyle/>
+          <a:p>
+            <a:pPr algn="l"/>
+            <a:r>
+              <a:rPr sz="1200" b="1" i="0">
+                <a:solidFill>
+                  <a:srgbClr val="2E66C2"/>
+                </a:solidFill>
+                <a:latin typeface="Calibri"/>
+              </a:rPr>
+              <a:t>BUSINESS VALUE</a:t>
+            </a:r>
+          </a:p>
+        </p:txBody>
+      </p:sp>
+      <p:sp>
+        <p:nvSpPr>
+          <p:cNvPr id="3" name="TextBox 2"/>
+          <p:cNvSpPr txBox="1"/>
+          <p:nvPr/>
+        </p:nvSpPr>
+        <p:spPr>
+          <a:xfrm>
+            <a:off x="548640" y="713232"/>
+            <a:ext cx="11155680" cy="640080"/>
+          </a:xfrm>
+          <a:prstGeom prst="rect">
+            <a:avLst/>
+          </a:prstGeom>
+          <a:noFill/>
+        </p:spPr>
+        <p:txBody>
+          <a:bodyPr wrap="square" lIns="0" rIns="0" tIns="0" bIns="0">
+            <a:spAutoFit/>
+          </a:bodyPr>
+          <a:lstStyle/>
+          <a:p>
+            <a:pPr algn="l"/>
+            <a:r>
+              <a:rPr sz="3000" b="1" i="0">
+                <a:solidFill>
+                  <a:srgbClr val="1F2A37"/>
+                </a:solidFill>
+                <a:latin typeface="Calibri"/>
+              </a:rPr>
+              <a:t>What this is worth</a:t>
+            </a:r>
+          </a:p>
+        </p:txBody>
+      </p:sp>
+      <p:sp>
+        <p:nvSpPr>
+          <p:cNvPr id="4" name="Rectangle 3"/>
+          <p:cNvSpPr/>
+          <p:nvPr/>
+        </p:nvSpPr>
+        <p:spPr>
+          <a:xfrm>
+            <a:off x="548640" y="1417320"/>
+            <a:ext cx="914400" cy="38100"/>
+          </a:xfrm>
+          <a:prstGeom prst="rect">
+            <a:avLst/>
+          </a:prstGeom>
+          <a:solidFill>
+            <a:srgbClr val="2E66C2"/>
+          </a:solidFill>
+          <a:ln>
+            <a:noFill/>
+          </a:ln>
+        </p:spPr>
+        <p:style>
+          <a:lnRef idx="1">
+            <a:schemeClr val="accent1"/>
+          </a:lnRef>
+          <a:fillRef idx="3">
+            <a:schemeClr val="accent1"/>
+          </a:fillRef>
+          <a:effectRef idx="2">
+            <a:schemeClr val="accent1"/>
+          </a:effectRef>
+          <a:fontRef idx="minor">
+            <a:schemeClr val="lt1"/>
+          </a:fontRef>
+        </p:style>
+        <p:txBody>
+          <a:bodyPr rtlCol="0" anchor="ctr"/>
+          <a:lstStyle/>
+          <a:p>
+            <a:pPr algn="ctr"/>
+          </a:p>
+        </p:txBody>
+      </p:sp>
+      <p:sp>
+        <p:nvSpPr>
+          <p:cNvPr id="5" name="TextBox 4"/>
+          <p:cNvSpPr txBox="1"/>
+          <p:nvPr/>
+        </p:nvSpPr>
+        <p:spPr>
+          <a:xfrm>
+            <a:off x="548640" y="1691640"/>
+            <a:ext cx="5486400" cy="274320"/>
+          </a:xfrm>
+          <a:prstGeom prst="rect">
+            <a:avLst/>
+          </a:prstGeom>
+          <a:noFill/>
+        </p:spPr>
+        <p:txBody>
+          <a:bodyPr wrap="square" lIns="0" rIns="0" tIns="0" bIns="0">
+            <a:spAutoFit/>
+          </a:bodyPr>
+          <a:lstStyle/>
+          <a:p>
+            <a:pPr algn="l"/>
+            <a:r>
+              <a:rPr sz="1100" b="1" i="0">
+                <a:solidFill>
+                  <a:srgbClr val="2E66C2"/>
+                </a:solidFill>
+                <a:latin typeface="Calibri"/>
+              </a:rPr>
+              <a:t>PER-REQUEST SPEED</a:t>
+            </a:r>
+          </a:p>
+        </p:txBody>
+      </p:sp>
+      <p:sp>
+        <p:nvSpPr>
+          <p:cNvPr id="6" name="TextBox 5"/>
+          <p:cNvSpPr txBox="1"/>
+          <p:nvPr/>
+        </p:nvSpPr>
+        <p:spPr>
+          <a:xfrm>
+            <a:off x="548640" y="2057400"/>
+            <a:ext cx="5486400" cy="548640"/>
+          </a:xfrm>
+          <a:prstGeom prst="rect">
+            <a:avLst/>
+          </a:prstGeom>
+          <a:noFill/>
+        </p:spPr>
+        <p:txBody>
+          <a:bodyPr wrap="square" lIns="0" rIns="0" tIns="0" bIns="0">
+            <a:spAutoFit/>
+          </a:bodyPr>
+          <a:lstStyle/>
+          <a:p>
+            <a:pPr algn="l"/>
+            <a:r>
+              <a:rPr sz="2600" b="1" i="0">
+                <a:solidFill>
+                  <a:srgbClr val="1F2A37"/>
+                </a:solidFill>
+                <a:latin typeface="Calibri"/>
+              </a:rPr>
+              <a:t>Up to ~50% faster TTFT</a:t>
+            </a:r>
+          </a:p>
+        </p:txBody>
+      </p:sp>
+      <p:sp>
+        <p:nvSpPr>
+          <p:cNvPr id="7" name="TextBox 6"/>
+          <p:cNvSpPr txBox="1"/>
+          <p:nvPr/>
+        </p:nvSpPr>
+        <p:spPr>
+          <a:xfrm>
+            <a:off x="548640" y="2743200"/>
+            <a:ext cx="5486400" cy="1371600"/>
+          </a:xfrm>
+          <a:prstGeom prst="rect">
+            <a:avLst/>
+          </a:prstGeom>
+          <a:noFill/>
+        </p:spPr>
+        <p:txBody>
+          <a:bodyPr wrap="square" lIns="0" rIns="0" tIns="0" bIns="0">
+            <a:spAutoFit/>
+          </a:bodyPr>
+          <a:lstStyle/>
+          <a:p>
+            <a:pPr algn="l"/>
+            <a:r>
+              <a:rPr sz="1400" b="0" i="0">
+                <a:solidFill>
+                  <a:srgbClr val="555F6E"/>
+                </a:solidFill>
+                <a:latin typeface="Calibri"/>
+              </a:rPr>
+              <a:t>FP8 cuts ~17% off end-to-end at every prompt size. Prefix caching cuts up to 40% off TTFT on shared system prompts. Combined: roughly half the wait users feel today.</a:t>
+            </a:r>
+          </a:p>
+        </p:txBody>
+      </p:sp>
+      <p:sp>
+        <p:nvSpPr>
+          <p:cNvPr id="8" name="TextBox 7"/>
+          <p:cNvSpPr txBox="1"/>
+          <p:nvPr/>
+        </p:nvSpPr>
+        <p:spPr>
+          <a:xfrm>
+            <a:off x="548640" y="4069080"/>
+            <a:ext cx="5486400" cy="548640"/>
+          </a:xfrm>
+          <a:prstGeom prst="rect">
+            <a:avLst/>
+          </a:prstGeom>
+          <a:noFill/>
+        </p:spPr>
+        <p:txBody>
+          <a:bodyPr wrap="square" lIns="0" rIns="0" tIns="0" bIns="0">
+            <a:spAutoFit/>
+          </a:bodyPr>
+          <a:lstStyle/>
+          <a:p>
+            <a:pPr algn="l"/>
+            <a:r>
+              <a:rPr sz="1100" b="0" i="1">
+                <a:solidFill>
+                  <a:srgbClr val="555F6E"/>
+                </a:solidFill>
+                <a:latin typeface="Calibri"/>
+              </a:rPr>
+              <a:t>Combined effect estimated from independent measurements; not directly measured together.</a:t>
+            </a:r>
+          </a:p>
+        </p:txBody>
+      </p:sp>
+      <p:sp>
+        <p:nvSpPr>
+          <p:cNvPr id="9" name="TextBox 8"/>
+          <p:cNvSpPr txBox="1"/>
+          <p:nvPr/>
+        </p:nvSpPr>
+        <p:spPr>
+          <a:xfrm>
+            <a:off x="548640" y="4754880"/>
+            <a:ext cx="5486400" cy="457200"/>
+          </a:xfrm>
+          <a:prstGeom prst="rect">
+            <a:avLst/>
+          </a:prstGeom>
+          <a:noFill/>
+        </p:spPr>
+        <p:txBody>
+          <a:bodyPr wrap="square" lIns="0" rIns="0" tIns="0" bIns="0">
+            <a:spAutoFit/>
+          </a:bodyPr>
+          <a:lstStyle/>
+          <a:p>
+            <a:pPr algn="l"/>
+            <a:r>
+              <a:rPr sz="2200" b="1" i="0">
+                <a:solidFill>
+                  <a:srgbClr val="1F2A37"/>
+                </a:solidFill>
+                <a:latin typeface="Calibri"/>
+              </a:rPr>
+              <a:t>Break-even: Day 1</a:t>
+            </a:r>
+          </a:p>
+        </p:txBody>
+      </p:sp>
+      <p:sp>
+        <p:nvSpPr>
+          <p:cNvPr id="10" name="TextBox 9"/>
+          <p:cNvSpPr txBox="1"/>
+          <p:nvPr/>
+        </p:nvSpPr>
+        <p:spPr>
+          <a:xfrm>
+            <a:off x="548640" y="5303520"/>
+            <a:ext cx="5486400" cy="914400"/>
+          </a:xfrm>
+          <a:prstGeom prst="rect">
+            <a:avLst/>
+          </a:prstGeom>
+          <a:noFill/>
+        </p:spPr>
+        <p:txBody>
+          <a:bodyPr wrap="square" lIns="0" rIns="0" tIns="0" bIns="0">
+            <a:spAutoFit/>
+          </a:bodyPr>
+          <a:lstStyle/>
+          <a:p>
+            <a:pPr algn="l"/>
+            <a:r>
+              <a:rPr sz="1400" b="0" i="0">
+                <a:solidFill>
+                  <a:srgbClr val="555F6E"/>
+                </a:solidFill>
+                <a:latin typeface="Calibri"/>
+              </a:rPr>
+              <a:t>Both levers are config changes — no new hardware, no downtime, no model retraining.</a:t>
+            </a:r>
+          </a:p>
+        </p:txBody>
+      </p:sp>
+      <p:sp>
+        <p:nvSpPr>
+          <p:cNvPr id="11" name="TextBox 10"/>
+          <p:cNvSpPr txBox="1"/>
+          <p:nvPr/>
+        </p:nvSpPr>
+        <p:spPr>
+          <a:xfrm>
+            <a:off x="6400800" y="1691640"/>
+            <a:ext cx="5486400" cy="274320"/>
+          </a:xfrm>
+          <a:prstGeom prst="rect">
+            <a:avLst/>
+          </a:prstGeom>
+          <a:noFill/>
+        </p:spPr>
+        <p:txBody>
+          <a:bodyPr wrap="square" lIns="0" rIns="0" tIns="0" bIns="0">
+            <a:spAutoFit/>
+          </a:bodyPr>
+          <a:lstStyle/>
+          <a:p>
+            <a:pPr algn="l"/>
+            <a:r>
+              <a:rPr sz="1100" b="1" i="0">
+                <a:solidFill>
+                  <a:srgbClr val="2E66C2"/>
+                </a:solidFill>
+                <a:latin typeface="Calibri"/>
+              </a:rPr>
+              <a:t>COST PER REQUEST</a:t>
+            </a:r>
+          </a:p>
+        </p:txBody>
+      </p:sp>
+      <p:sp>
+        <p:nvSpPr>
+          <p:cNvPr id="12" name="TextBox 11"/>
+          <p:cNvSpPr txBox="1"/>
+          <p:nvPr/>
+        </p:nvSpPr>
+        <p:spPr>
+          <a:xfrm>
+            <a:off x="6400800" y="2057400"/>
+            <a:ext cx="5486400" cy="548640"/>
+          </a:xfrm>
+          <a:prstGeom prst="rect">
+            <a:avLst/>
+          </a:prstGeom>
+          <a:noFill/>
+        </p:spPr>
+        <p:txBody>
+          <a:bodyPr wrap="square" lIns="0" rIns="0" tIns="0" bIns="0">
+            <a:spAutoFit/>
+          </a:bodyPr>
+          <a:lstStyle/>
+          <a:p>
+            <a:pPr algn="l"/>
+            <a:r>
+              <a:rPr sz="2400" b="1" i="0">
+                <a:solidFill>
+                  <a:srgbClr val="1F2A37"/>
+                </a:solidFill>
+                <a:latin typeface="Calibri"/>
+              </a:rPr>
+              <a:t>~17% less compute per request</a:t>
+            </a:r>
+          </a:p>
+        </p:txBody>
+      </p:sp>
+      <p:sp>
+        <p:nvSpPr>
+          <p:cNvPr id="13" name="TextBox 12"/>
+          <p:cNvSpPr txBox="1"/>
+          <p:nvPr/>
+        </p:nvSpPr>
+        <p:spPr>
+          <a:xfrm>
+            <a:off x="6400800" y="2743200"/>
+            <a:ext cx="5486400" cy="1371600"/>
+          </a:xfrm>
+          <a:prstGeom prst="rect">
+            <a:avLst/>
+          </a:prstGeom>
+          <a:noFill/>
+        </p:spPr>
+        <p:txBody>
+          <a:bodyPr wrap="square" lIns="0" rIns="0" tIns="0" bIns="0">
+            <a:spAutoFit/>
+          </a:bodyPr>
+          <a:lstStyle/>
+          <a:p>
+            <a:pPr algn="l"/>
+            <a:r>
+              <a:rPr sz="1400" b="0" i="0">
+                <a:solidFill>
+                  <a:srgbClr val="555F6E"/>
+                </a:solidFill>
+                <a:latin typeface="Calibri"/>
+              </a:rPr>
+              <a:t>FP8 means each request finishes in 17% less GPU-time. Same pod serves more requests per hour at the same per-request latency budget.</a:t>
+            </a:r>
+          </a:p>
+        </p:txBody>
+      </p:sp>
+      <p:sp>
+        <p:nvSpPr>
+          <p:cNvPr id="14" name="TextBox 13"/>
+          <p:cNvSpPr txBox="1"/>
+          <p:nvPr/>
+        </p:nvSpPr>
+        <p:spPr>
+          <a:xfrm>
+            <a:off x="6400800" y="4160520"/>
+            <a:ext cx="5486400" cy="548640"/>
+          </a:xfrm>
+          <a:prstGeom prst="rect">
+            <a:avLst/>
+          </a:prstGeom>
+          <a:noFill/>
+        </p:spPr>
+        <p:txBody>
+          <a:bodyPr wrap="square" lIns="0" rIns="0" tIns="0" bIns="0">
+            <a:spAutoFit/>
+          </a:bodyPr>
+          <a:lstStyle/>
+          <a:p>
+            <a:pPr algn="l"/>
+            <a:r>
+              <a:rPr sz="2000" b="1" i="0">
+                <a:solidFill>
+                  <a:srgbClr val="1F2A37"/>
+                </a:solidFill>
+                <a:latin typeface="Calibri"/>
+              </a:rPr>
+              <a:t>Same hardware, same code path</a:t>
+            </a:r>
+          </a:p>
+        </p:txBody>
+      </p:sp>
+      <p:sp>
+        <p:nvSpPr>
+          <p:cNvPr id="15" name="TextBox 14"/>
+          <p:cNvSpPr txBox="1"/>
+          <p:nvPr/>
+        </p:nvSpPr>
+        <p:spPr>
+          <a:xfrm>
+            <a:off x="6400800" y="4800600"/>
+            <a:ext cx="5486400" cy="1371600"/>
+          </a:xfrm>
+          <a:prstGeom prst="rect">
+            <a:avLst/>
+          </a:prstGeom>
+          <a:noFill/>
+        </p:spPr>
+        <p:txBody>
+          <a:bodyPr wrap="square" lIns="0" rIns="0" tIns="0" bIns="0">
+            <a:spAutoFit/>
+          </a:bodyPr>
+          <a:lstStyle/>
+          <a:p>
+            <a:pPr algn="l"/>
+            <a:r>
+              <a:rPr sz="1400" b="0" i="0">
+                <a:solidFill>
+                  <a:srgbClr val="555F6E"/>
+                </a:solidFill>
+                <a:latin typeface="Calibri"/>
+              </a:rPr>
+              <a:t>No re-architecture, no new dependencies, no ops change. Re-baseline whenever the model, vLLM version, or hardware changes.</a:t>
+            </a:r>
+          </a:p>
+        </p:txBody>
+      </p:sp>
+      <p:sp>
+        <p:nvSpPr>
+          <p:cNvPr id="16" name="TextBox 15"/>
+          <p:cNvSpPr txBox="1"/>
+          <p:nvPr/>
+        </p:nvSpPr>
+        <p:spPr>
+          <a:xfrm>
+            <a:off x="548640" y="6446520"/>
+            <a:ext cx="9144000" cy="274320"/>
+          </a:xfrm>
+          <a:prstGeom prst="rect">
+            <a:avLst/>
+          </a:prstGeom>
+          <a:noFill/>
+        </p:spPr>
+        <p:txBody>
+          <a:bodyPr wrap="square" lIns="0" rIns="0" tIns="0" bIns="0">
+            <a:spAutoFit/>
+          </a:bodyPr>
+          <a:lstStyle/>
+          <a:p>
+            <a:pPr algn="l"/>
+            <a:r>
+              <a:rPr sz="1000" b="0" i="0">
+                <a:solidFill>
+                  <a:srgbClr val="555F6E"/>
+                </a:solidFill>
+                <a:latin typeface="Calibri"/>
+              </a:rPr>
+              <a:t>OLMoE-1B-7B (1B active / 7B total) on Blackwell  ·  diagnosis &amp; optimization</a:t>
+            </a:r>
+          </a:p>
+        </p:txBody>
+      </p:sp>
+      <p:sp>
+        <p:nvSpPr>
+          <p:cNvPr id="17" name="TextBox 16"/>
+          <p:cNvSpPr txBox="1"/>
+          <p:nvPr/>
+        </p:nvSpPr>
+        <p:spPr>
+          <a:xfrm>
+            <a:off x="11521440" y="6446520"/>
+            <a:ext cx="548640" cy="274320"/>
+          </a:xfrm>
+          <a:prstGeom prst="rect">
+            <a:avLst/>
+          </a:prstGeom>
+          <a:noFill/>
+        </p:spPr>
+        <p:txBody>
+          <a:bodyPr wrap="square" lIns="0" rIns="0" tIns="0" bIns="0">
+            <a:spAutoFit/>
+          </a:bodyPr>
+          <a:lstStyle/>
+          <a:p>
+            <a:pPr algn="r"/>
+            <a:r>
+              <a:rPr sz="1000" b="0" i="0">
+                <a:solidFill>
+                  <a:srgbClr val="555F6E"/>
+                </a:solidFill>
+                <a:latin typeface="Calibri"/>
+              </a:rPr>
+              <a:t>15</a:t>
+            </a:r>
+          </a:p>
+        </p:txBody>
+      </p:sp>
+    </p:spTree>
+  </p:cSld>
+  <p:clrMapOvr>
+    <a:masterClrMapping/>
+  </p:clrMapOvr>
+</p:sld>
+</file>
+
+<file path=ppt/slides/slide16.xml><?xml version="1.0" encoding="utf-8"?>
 <p:sld xmlns:a="http://schemas.openxmlformats.org/drawingml/2006/main" xmlns:p="http://schemas.openxmlformats.org/presentationml/2006/main" xmlns:r="http://schemas.openxmlformats.org/officeDocument/2006/relationships">
   <p:cSld>
     <p:spTree>
@@ -6941,7 +7468,7 @@
                           </a:solidFill>
                           <a:latin typeface="Calibri"/>
                         </a:rPr>
-                        <a:t>Increased concurrency</a:t>
+                        <a:t>Continuous batching</a:t>
                       </a:r>
                     </a:p>
                   </a:txBody>
@@ -6963,7 +7490,7 @@
                           </a:solidFill>
                           <a:latin typeface="Calibri"/>
                         </a:rPr>
-                        <a:t>Up to 5,676 tok/sec throughput</a:t>
+                        <a:t>Up to 14× pod throughput (cost-per-token)</a:t>
                       </a:r>
                     </a:p>
                   </a:txBody>
@@ -6985,7 +7512,7 @@
                           </a:solidFill>
                           <a:latin typeface="Calibri"/>
                         </a:rPr>
-                        <a:t>Latency per user rises under high load</a:t>
+                        <a:t>Per-request TPOT ~4× worse at B=32 — not a latency lever</a:t>
                       </a:r>
                     </a:p>
                   </a:txBody>
@@ -7007,7 +7534,7 @@
                           </a:solidFill>
                           <a:latin typeface="Calibri"/>
                         </a:rPr>
-                        <a:t>Set max_num_seqs from p90 TTFT SLA, not throughput</a:t>
+                        <a:t>Use only when throughput beats latency — batch jobs, not chat</a:t>
                       </a:r>
                     </a:p>
                   </a:txBody>
@@ -7022,1063 +7549,6 @@
           </a:graphicData>
         </a:graphic>
       </p:graphicFrame>
-      <p:sp>
-        <p:nvSpPr>
-          <p:cNvPr id="6" name="TextBox 5"/>
-          <p:cNvSpPr txBox="1"/>
-          <p:nvPr/>
-        </p:nvSpPr>
-        <p:spPr>
-          <a:xfrm>
-            <a:off x="548640" y="6446520"/>
-            <a:ext cx="9144000" cy="274320"/>
-          </a:xfrm>
-          <a:prstGeom prst="rect">
-            <a:avLst/>
-          </a:prstGeom>
-          <a:noFill/>
-        </p:spPr>
-        <p:txBody>
-          <a:bodyPr wrap="square" lIns="0" rIns="0" tIns="0" bIns="0">
-            <a:spAutoFit/>
-          </a:bodyPr>
-          <a:lstStyle/>
-          <a:p>
-            <a:pPr algn="l"/>
-            <a:r>
-              <a:rPr sz="1000" b="0" i="0">
-                <a:solidFill>
-                  <a:srgbClr val="555F6E"/>
-                </a:solidFill>
-                <a:latin typeface="Calibri"/>
-              </a:rPr>
-              <a:t>OLMoE-1B-7B (1B active / 7B total) on Blackwell  ·  diagnosis &amp; optimization</a:t>
-            </a:r>
-          </a:p>
-        </p:txBody>
-      </p:sp>
-      <p:sp>
-        <p:nvSpPr>
-          <p:cNvPr id="7" name="TextBox 6"/>
-          <p:cNvSpPr txBox="1"/>
-          <p:nvPr/>
-        </p:nvSpPr>
-        <p:spPr>
-          <a:xfrm>
-            <a:off x="11521440" y="6446520"/>
-            <a:ext cx="548640" cy="274320"/>
-          </a:xfrm>
-          <a:prstGeom prst="rect">
-            <a:avLst/>
-          </a:prstGeom>
-          <a:noFill/>
-        </p:spPr>
-        <p:txBody>
-          <a:bodyPr wrap="square" lIns="0" rIns="0" tIns="0" bIns="0">
-            <a:spAutoFit/>
-          </a:bodyPr>
-          <a:lstStyle/>
-          <a:p>
-            <a:pPr algn="r"/>
-            <a:r>
-              <a:rPr sz="1000" b="0" i="0">
-                <a:solidFill>
-                  <a:srgbClr val="555F6E"/>
-                </a:solidFill>
-                <a:latin typeface="Calibri"/>
-              </a:rPr>
-              <a:t>14</a:t>
-            </a:r>
-          </a:p>
-        </p:txBody>
-      </p:sp>
-    </p:spTree>
-  </p:cSld>
-  <p:clrMapOvr>
-    <a:masterClrMapping/>
-  </p:clrMapOvr>
-</p:sld>
-</file>
-
-<file path=ppt/slides/slide15.xml><?xml version="1.0" encoding="utf-8"?>
-<p:sld xmlns:a="http://schemas.openxmlformats.org/drawingml/2006/main" xmlns:p="http://schemas.openxmlformats.org/presentationml/2006/main" xmlns:r="http://schemas.openxmlformats.org/officeDocument/2006/relationships">
-  <p:cSld>
-    <p:spTree>
-      <p:nvGrpSpPr>
-        <p:cNvPr id="1" name=""/>
-        <p:cNvGrpSpPr/>
-        <p:nvPr/>
-      </p:nvGrpSpPr>
-      <p:grpSpPr/>
-      <p:sp>
-        <p:nvSpPr>
-          <p:cNvPr id="2" name="TextBox 1"/>
-          <p:cNvSpPr txBox="1"/>
-          <p:nvPr/>
-        </p:nvSpPr>
-        <p:spPr>
-          <a:xfrm>
-            <a:off x="548640" y="411480"/>
-            <a:ext cx="11155680" cy="274320"/>
-          </a:xfrm>
-          <a:prstGeom prst="rect">
-            <a:avLst/>
-          </a:prstGeom>
-          <a:noFill/>
-        </p:spPr>
-        <p:txBody>
-          <a:bodyPr wrap="square" lIns="0" rIns="0" tIns="0" bIns="0">
-            <a:spAutoFit/>
-          </a:bodyPr>
-          <a:lstStyle/>
-          <a:p>
-            <a:pPr algn="l"/>
-            <a:r>
-              <a:rPr sz="1200" b="1" i="0">
-                <a:solidFill>
-                  <a:srgbClr val="2E66C2"/>
-                </a:solidFill>
-                <a:latin typeface="Calibri"/>
-              </a:rPr>
-              <a:t>SCALE</a:t>
-            </a:r>
-          </a:p>
-        </p:txBody>
-      </p:sp>
-      <p:sp>
-        <p:nvSpPr>
-          <p:cNvPr id="3" name="TextBox 2"/>
-          <p:cNvSpPr txBox="1"/>
-          <p:nvPr/>
-        </p:nvSpPr>
-        <p:spPr>
-          <a:xfrm>
-            <a:off x="548640" y="713232"/>
-            <a:ext cx="11155680" cy="640080"/>
-          </a:xfrm>
-          <a:prstGeom prst="rect">
-            <a:avLst/>
-          </a:prstGeom>
-          <a:noFill/>
-        </p:spPr>
-        <p:txBody>
-          <a:bodyPr wrap="square" lIns="0" rIns="0" tIns="0" bIns="0">
-            <a:spAutoFit/>
-          </a:bodyPr>
-          <a:lstStyle/>
-          <a:p>
-            <a:pPr algn="l"/>
-            <a:r>
-              <a:rPr sz="3000" b="1" i="0">
-                <a:solidFill>
-                  <a:srgbClr val="1F2A37"/>
-                </a:solidFill>
-                <a:latin typeface="Calibri"/>
-              </a:rPr>
-              <a:t>If traffic grows 10× tomorrow</a:t>
-            </a:r>
-          </a:p>
-        </p:txBody>
-      </p:sp>
-      <p:sp>
-        <p:nvSpPr>
-          <p:cNvPr id="4" name="Rectangle 3"/>
-          <p:cNvSpPr/>
-          <p:nvPr/>
-        </p:nvSpPr>
-        <p:spPr>
-          <a:xfrm>
-            <a:off x="548640" y="1417320"/>
-            <a:ext cx="914400" cy="38100"/>
-          </a:xfrm>
-          <a:prstGeom prst="rect">
-            <a:avLst/>
-          </a:prstGeom>
-          <a:solidFill>
-            <a:srgbClr val="2E66C2"/>
-          </a:solidFill>
-          <a:ln>
-            <a:noFill/>
-          </a:ln>
-        </p:spPr>
-        <p:style>
-          <a:lnRef idx="1">
-            <a:schemeClr val="accent1"/>
-          </a:lnRef>
-          <a:fillRef idx="3">
-            <a:schemeClr val="accent1"/>
-          </a:fillRef>
-          <a:effectRef idx="2">
-            <a:schemeClr val="accent1"/>
-          </a:effectRef>
-          <a:fontRef idx="minor">
-            <a:schemeClr val="lt1"/>
-          </a:fontRef>
-        </p:style>
-        <p:txBody>
-          <a:bodyPr rtlCol="0" anchor="ctr"/>
-          <a:lstStyle/>
-          <a:p>
-            <a:pPr algn="ctr"/>
-          </a:p>
-        </p:txBody>
-      </p:sp>
-      <p:graphicFrame>
-        <p:nvGraphicFramePr>
-          <p:cNvPr id="5" name="Table 4"/>
-          <p:cNvGraphicFramePr>
-            <a:graphicFrameLocks noGrp="1"/>
-          </p:cNvGraphicFramePr>
-          <p:nvPr/>
-        </p:nvGraphicFramePr>
-        <p:xfrm>
-          <a:off x="365760" y="1828800"/>
-          <a:ext cx="11430000" cy="4206240"/>
-        </p:xfrm>
-        <a:graphic>
-          <a:graphicData uri="http://schemas.openxmlformats.org/drawingml/2006/table">
-            <a:tbl>
-              <a:tblPr firstRow="1" bandRow="1">
-                <a:tableStyleId>{5C22544A-7EE6-4342-B048-85BDC9FD1C3A}</a:tableStyleId>
-              </a:tblPr>
-              <a:tblGrid>
-                <a:gridCol w="457200"/>
-                <a:gridCol w="3108960"/>
-                <a:gridCol w="3291840"/>
-                <a:gridCol w="4572000"/>
-              </a:tblGrid>
-              <a:tr h="701040">
-                <a:tc>
-                  <a:txBody>
-                    <a:bodyPr/>
-                    <a:lstStyle/>
-                    <a:p>
-                      <a:r>
-                        <a:rPr sz="1200" b="1">
-                          <a:solidFill>
-                            <a:srgbClr val="555F6E"/>
-                          </a:solidFill>
-                          <a:latin typeface="Calibri"/>
-                        </a:rPr>
-                        <a:t>#</a:t>
-                      </a:r>
-                    </a:p>
-                  </a:txBody>
-                  <a:tcPr marL="60000" marR="60000" marT="40000" marB="40000" anchor="ctr">
-                    <a:solidFill>
-                      <a:srgbClr val="F2F4F7"/>
-                    </a:solidFill>
-                  </a:tcPr>
-                </a:tc>
-                <a:tc>
-                  <a:txBody>
-                    <a:bodyPr/>
-                    <a:lstStyle/>
-                    <a:p>
-                      <a:r>
-                        <a:rPr sz="1200" b="1">
-                          <a:solidFill>
-                            <a:srgbClr val="555F6E"/>
-                          </a:solidFill>
-                          <a:latin typeface="Calibri"/>
-                        </a:rPr>
-                        <a:t>Action</a:t>
-                      </a:r>
-                    </a:p>
-                  </a:txBody>
-                  <a:tcPr marL="60000" marR="60000" marT="40000" marB="40000" anchor="ctr">
-                    <a:solidFill>
-                      <a:srgbClr val="F2F4F7"/>
-                    </a:solidFill>
-                  </a:tcPr>
-                </a:tc>
-                <a:tc>
-                  <a:txBody>
-                    <a:bodyPr/>
-                    <a:lstStyle/>
-                    <a:p>
-                      <a:r>
-                        <a:rPr sz="1200" b="1">
-                          <a:solidFill>
-                            <a:srgbClr val="555F6E"/>
-                          </a:solidFill>
-                          <a:latin typeface="Calibri"/>
-                        </a:rPr>
-                        <a:t>Why now</a:t>
-                      </a:r>
-                    </a:p>
-                  </a:txBody>
-                  <a:tcPr marL="60000" marR="60000" marT="40000" marB="40000" anchor="ctr">
-                    <a:solidFill>
-                      <a:srgbClr val="F2F4F7"/>
-                    </a:solidFill>
-                  </a:tcPr>
-                </a:tc>
-                <a:tc>
-                  <a:txBody>
-                    <a:bodyPr/>
-                    <a:lstStyle/>
-                    <a:p>
-                      <a:r>
-                        <a:rPr sz="1200" b="1">
-                          <a:solidFill>
-                            <a:srgbClr val="555F6E"/>
-                          </a:solidFill>
-                          <a:latin typeface="Calibri"/>
-                        </a:rPr>
-                        <a:t>Breaks when</a:t>
-                      </a:r>
-                    </a:p>
-                  </a:txBody>
-                  <a:tcPr marL="60000" marR="60000" marT="40000" marB="40000" anchor="ctr">
-                    <a:solidFill>
-                      <a:srgbClr val="F2F4F7"/>
-                    </a:solidFill>
-                  </a:tcPr>
-                </a:tc>
-              </a:tr>
-              <a:tr h="701040">
-                <a:tc>
-                  <a:txBody>
-                    <a:bodyPr/>
-                    <a:lstStyle/>
-                    <a:p>
-                      <a:r>
-                        <a:rPr sz="1200" b="0">
-                          <a:solidFill>
-                            <a:srgbClr val="1F2A37"/>
-                          </a:solidFill>
-                          <a:latin typeface="Calibri"/>
-                        </a:rPr>
-                        <a:t>1</a:t>
-                      </a:r>
-                    </a:p>
-                  </a:txBody>
-                  <a:tcPr marL="60000" marR="60000" marT="40000" marB="40000" anchor="ctr">
-                    <a:solidFill>
-                      <a:srgbClr val="FFFFFF"/>
-                    </a:solidFill>
-                  </a:tcPr>
-                </a:tc>
-                <a:tc>
-                  <a:txBody>
-                    <a:bodyPr/>
-                    <a:lstStyle/>
-                    <a:p>
-                      <a:r>
-                        <a:rPr sz="1200" b="0">
-                          <a:solidFill>
-                            <a:srgbClr val="1F2A37"/>
-                          </a:solidFill>
-                          <a:latin typeface="Calibri"/>
-                        </a:rPr>
-                        <a:t>Enable FP8 + prefix caching</a:t>
-                      </a:r>
-                    </a:p>
-                  </a:txBody>
-                  <a:tcPr marL="60000" marR="60000" marT="40000" marB="40000" anchor="ctr">
-                    <a:solidFill>
-                      <a:srgbClr val="FFFFFF"/>
-                    </a:solidFill>
-                  </a:tcPr>
-                </a:tc>
-                <a:tc>
-                  <a:txBody>
-                    <a:bodyPr/>
-                    <a:lstStyle/>
-                    <a:p>
-                      <a:r>
-                        <a:rPr sz="1200" b="0">
-                          <a:solidFill>
-                            <a:srgbClr val="1F2A37"/>
-                          </a:solidFill>
-                          <a:latin typeface="Calibri"/>
-                        </a:rPr>
-                        <a:t>Free, today — config only</a:t>
-                      </a:r>
-                    </a:p>
-                  </a:txBody>
-                  <a:tcPr marL="60000" marR="60000" marT="40000" marB="40000" anchor="ctr">
-                    <a:solidFill>
-                      <a:srgbClr val="FFFFFF"/>
-                    </a:solidFill>
-                  </a:tcPr>
-                </a:tc>
-                <a:tc>
-                  <a:txBody>
-                    <a:bodyPr/>
-                    <a:lstStyle/>
-                    <a:p>
-                      <a:r>
-                        <a:rPr sz="1200" b="0">
-                          <a:solidFill>
-                            <a:srgbClr val="1F2A37"/>
-                          </a:solidFill>
-                          <a:latin typeface="Calibri"/>
-                        </a:rPr>
-                        <a:t>Accuracy regresses on customer evals, or prompts don't share prefixes</a:t>
-                      </a:r>
-                    </a:p>
-                  </a:txBody>
-                  <a:tcPr marL="60000" marR="60000" marT="40000" marB="40000" anchor="ctr">
-                    <a:solidFill>
-                      <a:srgbClr val="FFFFFF"/>
-                    </a:solidFill>
-                  </a:tcPr>
-                </a:tc>
-              </a:tr>
-              <a:tr h="701040">
-                <a:tc>
-                  <a:txBody>
-                    <a:bodyPr/>
-                    <a:lstStyle/>
-                    <a:p>
-                      <a:r>
-                        <a:rPr sz="1200" b="0">
-                          <a:solidFill>
-                            <a:srgbClr val="1F2A37"/>
-                          </a:solidFill>
-                          <a:latin typeface="Calibri"/>
-                        </a:rPr>
-                        <a:t>2</a:t>
-                      </a:r>
-                    </a:p>
-                  </a:txBody>
-                  <a:tcPr marL="60000" marR="60000" marT="40000" marB="40000" anchor="ctr">
-                    <a:solidFill>
-                      <a:srgbClr val="FAFBFC"/>
-                    </a:solidFill>
-                  </a:tcPr>
-                </a:tc>
-                <a:tc>
-                  <a:txBody>
-                    <a:bodyPr/>
-                    <a:lstStyle/>
-                    <a:p>
-                      <a:r>
-                        <a:rPr sz="1200" b="0">
-                          <a:solidFill>
-                            <a:srgbClr val="1F2A37"/>
-                          </a:solidFill>
-                          <a:latin typeface="Calibri"/>
-                        </a:rPr>
-                        <a:t>Tune concurrency to the SLA</a:t>
-                      </a:r>
-                    </a:p>
-                  </a:txBody>
-                  <a:tcPr marL="60000" marR="60000" marT="40000" marB="40000" anchor="ctr">
-                    <a:solidFill>
-                      <a:srgbClr val="FAFBFC"/>
-                    </a:solidFill>
-                  </a:tcPr>
-                </a:tc>
-                <a:tc>
-                  <a:txBody>
-                    <a:bodyPr/>
-                    <a:lstStyle/>
-                    <a:p>
-                      <a:r>
-                        <a:rPr sz="1200" b="0">
-                          <a:solidFill>
-                            <a:srgbClr val="1F2A37"/>
-                          </a:solidFill>
-                          <a:latin typeface="Calibri"/>
-                        </a:rPr>
-                        <a:t>Same pod, no new hardware</a:t>
-                      </a:r>
-                    </a:p>
-                  </a:txBody>
-                  <a:tcPr marL="60000" marR="60000" marT="40000" marB="40000" anchor="ctr">
-                    <a:solidFill>
-                      <a:srgbClr val="FAFBFC"/>
-                    </a:solidFill>
-                  </a:tcPr>
-                </a:tc>
-                <a:tc>
-                  <a:txBody>
-                    <a:bodyPr/>
-                    <a:lstStyle/>
-                    <a:p>
-                      <a:r>
-                        <a:rPr sz="1200" b="0">
-                          <a:solidFill>
-                            <a:srgbClr val="1F2A37"/>
-                          </a:solidFill>
-                          <a:latin typeface="Calibri"/>
-                        </a:rPr>
-                        <a:t>Sustained load exceeds ~200–600 active users per pod (batch=32 in flight)</a:t>
-                      </a:r>
-                    </a:p>
-                  </a:txBody>
-                  <a:tcPr marL="60000" marR="60000" marT="40000" marB="40000" anchor="ctr">
-                    <a:solidFill>
-                      <a:srgbClr val="FAFBFC"/>
-                    </a:solidFill>
-                  </a:tcPr>
-                </a:tc>
-              </a:tr>
-              <a:tr h="701040">
-                <a:tc>
-                  <a:txBody>
-                    <a:bodyPr/>
-                    <a:lstStyle/>
-                    <a:p>
-                      <a:r>
-                        <a:rPr sz="1200" b="0">
-                          <a:solidFill>
-                            <a:srgbClr val="1F2A37"/>
-                          </a:solidFill>
-                          <a:latin typeface="Calibri"/>
-                        </a:rPr>
-                        <a:t>3</a:t>
-                      </a:r>
-                    </a:p>
-                  </a:txBody>
-                  <a:tcPr marL="60000" marR="60000" marT="40000" marB="40000" anchor="ctr">
-                    <a:solidFill>
-                      <a:srgbClr val="FFFFFF"/>
-                    </a:solidFill>
-                  </a:tcPr>
-                </a:tc>
-                <a:tc>
-                  <a:txBody>
-                    <a:bodyPr/>
-                    <a:lstStyle/>
-                    <a:p>
-                      <a:r>
-                        <a:rPr sz="1200" b="0">
-                          <a:solidFill>
-                            <a:srgbClr val="1F2A37"/>
-                          </a:solidFill>
-                          <a:latin typeface="Calibri"/>
-                        </a:rPr>
-                        <a:t>Use both GPUs together (TP=2)</a:t>
-                      </a:r>
-                    </a:p>
-                  </a:txBody>
-                  <a:tcPr marL="60000" marR="60000" marT="40000" marB="40000" anchor="ctr">
-                    <a:solidFill>
-                      <a:srgbClr val="FFFFFF"/>
-                    </a:solidFill>
-                  </a:tcPr>
-                </a:tc>
-                <a:tc>
-                  <a:txBody>
-                    <a:bodyPr/>
-                    <a:lstStyle/>
-                    <a:p>
-                      <a:r>
-                        <a:rPr sz="1200" b="0">
-                          <a:solidFill>
-                            <a:srgbClr val="1F2A37"/>
-                          </a:solidFill>
-                          <a:latin typeface="Calibri"/>
-                        </a:rPr>
-                        <a:t>Same node, +14% TPOT, 2× memory</a:t>
-                      </a:r>
-                    </a:p>
-                  </a:txBody>
-                  <a:tcPr marL="60000" marR="60000" marT="40000" marB="40000" anchor="ctr">
-                    <a:solidFill>
-                      <a:srgbClr val="FFFFFF"/>
-                    </a:solidFill>
-                  </a:tcPr>
-                </a:tc>
-                <a:tc>
-                  <a:txBody>
-                    <a:bodyPr/>
-                    <a:lstStyle/>
-                    <a:p>
-                      <a:r>
-                        <a:rPr sz="1200" b="0">
-                          <a:solidFill>
-                            <a:srgbClr val="1F2A37"/>
-                          </a:solidFill>
-                          <a:latin typeface="Calibri"/>
-                        </a:rPr>
-                        <a:t>One pod still saturated — need more pods, not bigger ones</a:t>
-                      </a:r>
-                    </a:p>
-                  </a:txBody>
-                  <a:tcPr marL="60000" marR="60000" marT="40000" marB="40000" anchor="ctr">
-                    <a:solidFill>
-                      <a:srgbClr val="FFFFFF"/>
-                    </a:solidFill>
-                  </a:tcPr>
-                </a:tc>
-              </a:tr>
-              <a:tr h="701040">
-                <a:tc>
-                  <a:txBody>
-                    <a:bodyPr/>
-                    <a:lstStyle/>
-                    <a:p>
-                      <a:r>
-                        <a:rPr sz="1200" b="0">
-                          <a:solidFill>
-                            <a:srgbClr val="1F2A37"/>
-                          </a:solidFill>
-                          <a:latin typeface="Calibri"/>
-                        </a:rPr>
-                        <a:t>4</a:t>
-                      </a:r>
-                    </a:p>
-                  </a:txBody>
-                  <a:tcPr marL="60000" marR="60000" marT="40000" marB="40000" anchor="ctr">
-                    <a:solidFill>
-                      <a:srgbClr val="FAFBFC"/>
-                    </a:solidFill>
-                  </a:tcPr>
-                </a:tc>
-                <a:tc>
-                  <a:txBody>
-                    <a:bodyPr/>
-                    <a:lstStyle/>
-                    <a:p>
-                      <a:r>
-                        <a:rPr sz="1200" b="0">
-                          <a:solidFill>
-                            <a:srgbClr val="1F2A37"/>
-                          </a:solidFill>
-                          <a:latin typeface="Calibri"/>
-                        </a:rPr>
-                        <a:t>Horizontal pod autoscaling (HPA)</a:t>
-                      </a:r>
-                    </a:p>
-                  </a:txBody>
-                  <a:tcPr marL="60000" marR="60000" marT="40000" marB="40000" anchor="ctr">
-                    <a:solidFill>
-                      <a:srgbClr val="FAFBFC"/>
-                    </a:solidFill>
-                  </a:tcPr>
-                </a:tc>
-                <a:tc>
-                  <a:txBody>
-                    <a:bodyPr/>
-                    <a:lstStyle/>
-                    <a:p>
-                      <a:r>
-                        <a:rPr sz="1200" b="0">
-                          <a:solidFill>
-                            <a:srgbClr val="1F2A37"/>
-                          </a:solidFill>
-                          <a:latin typeface="Calibri"/>
-                        </a:rPr>
-                        <a:t>Linear capacity, k8s-native</a:t>
-                      </a:r>
-                    </a:p>
-                  </a:txBody>
-                  <a:tcPr marL="60000" marR="60000" marT="40000" marB="40000" anchor="ctr">
-                    <a:solidFill>
-                      <a:srgbClr val="FAFBFC"/>
-                    </a:solidFill>
-                  </a:tcPr>
-                </a:tc>
-                <a:tc>
-                  <a:txBody>
-                    <a:bodyPr/>
-                    <a:lstStyle/>
-                    <a:p>
-                      <a:r>
-                        <a:rPr sz="1200" b="0">
-                          <a:solidFill>
-                            <a:srgbClr val="1F2A37"/>
-                          </a:solidFill>
-                          <a:latin typeface="Calibri"/>
-                        </a:rPr>
-                        <a:t>GPU node pool runs out of room</a:t>
-                      </a:r>
-                    </a:p>
-                  </a:txBody>
-                  <a:tcPr marL="60000" marR="60000" marT="40000" marB="40000" anchor="ctr">
-                    <a:solidFill>
-                      <a:srgbClr val="FAFBFC"/>
-                    </a:solidFill>
-                  </a:tcPr>
-                </a:tc>
-              </a:tr>
-              <a:tr h="701040">
-                <a:tc>
-                  <a:txBody>
-                    <a:bodyPr/>
-                    <a:lstStyle/>
-                    <a:p>
-                      <a:r>
-                        <a:rPr sz="1200" b="0">
-                          <a:solidFill>
-                            <a:srgbClr val="1F2A37"/>
-                          </a:solidFill>
-                          <a:latin typeface="Calibri"/>
-                        </a:rPr>
-                        <a:t>5</a:t>
-                      </a:r>
-                    </a:p>
-                  </a:txBody>
-                  <a:tcPr marL="60000" marR="60000" marT="40000" marB="40000" anchor="ctr">
-                    <a:solidFill>
-                      <a:srgbClr val="FFFFFF"/>
-                    </a:solidFill>
-                  </a:tcPr>
-                </a:tc>
-                <a:tc>
-                  <a:txBody>
-                    <a:bodyPr/>
-                    <a:lstStyle/>
-                    <a:p>
-                      <a:r>
-                        <a:rPr sz="1200" b="0">
-                          <a:solidFill>
-                            <a:srgbClr val="1F2A37"/>
-                          </a:solidFill>
-                          <a:latin typeface="Calibri"/>
-                        </a:rPr>
-                        <a:t>Add new GPU machines</a:t>
-                      </a:r>
-                    </a:p>
-                  </a:txBody>
-                  <a:tcPr marL="60000" marR="60000" marT="40000" marB="40000" anchor="ctr">
-                    <a:solidFill>
-                      <a:srgbClr val="FFFFFF"/>
-                    </a:solidFill>
-                  </a:tcPr>
-                </a:tc>
-                <a:tc>
-                  <a:txBody>
-                    <a:bodyPr/>
-                    <a:lstStyle/>
-                    <a:p>
-                      <a:r>
-                        <a:rPr sz="1200" b="0">
-                          <a:solidFill>
-                            <a:srgbClr val="1F2A37"/>
-                          </a:solidFill>
-                          <a:latin typeface="Calibri"/>
-                        </a:rPr>
-                        <a:t>Capacity beyond the current cluster</a:t>
-                      </a:r>
-                    </a:p>
-                  </a:txBody>
-                  <a:tcPr marL="60000" marR="60000" marT="40000" marB="40000" anchor="ctr">
-                    <a:solidFill>
-                      <a:srgbClr val="FFFFFF"/>
-                    </a:solidFill>
-                  </a:tcPr>
-                </a:tc>
-                <a:tc>
-                  <a:txBody>
-                    <a:bodyPr/>
-                    <a:lstStyle/>
-                    <a:p>
-                      <a:r>
-                        <a:rPr sz="1200" b="0">
-                          <a:solidFill>
-                            <a:srgbClr val="1F2A37"/>
-                          </a:solidFill>
-                          <a:latin typeface="Calibri"/>
-                        </a:rPr>
-                        <a:t>Last resort — triggers procurement cycle</a:t>
-                      </a:r>
-                    </a:p>
-                  </a:txBody>
-                  <a:tcPr marL="60000" marR="60000" marT="40000" marB="40000" anchor="ctr">
-                    <a:solidFill>
-                      <a:srgbClr val="FFFFFF"/>
-                    </a:solidFill>
-                  </a:tcPr>
-                </a:tc>
-              </a:tr>
-            </a:tbl>
-          </a:graphicData>
-        </a:graphic>
-      </p:graphicFrame>
-      <p:sp>
-        <p:nvSpPr>
-          <p:cNvPr id="6" name="TextBox 5"/>
-          <p:cNvSpPr txBox="1"/>
-          <p:nvPr/>
-        </p:nvSpPr>
-        <p:spPr>
-          <a:xfrm>
-            <a:off x="548640" y="6446520"/>
-            <a:ext cx="9144000" cy="274320"/>
-          </a:xfrm>
-          <a:prstGeom prst="rect">
-            <a:avLst/>
-          </a:prstGeom>
-          <a:noFill/>
-        </p:spPr>
-        <p:txBody>
-          <a:bodyPr wrap="square" lIns="0" rIns="0" tIns="0" bIns="0">
-            <a:spAutoFit/>
-          </a:bodyPr>
-          <a:lstStyle/>
-          <a:p>
-            <a:pPr algn="l"/>
-            <a:r>
-              <a:rPr sz="1000" b="0" i="0">
-                <a:solidFill>
-                  <a:srgbClr val="555F6E"/>
-                </a:solidFill>
-                <a:latin typeface="Calibri"/>
-              </a:rPr>
-              <a:t>OLMoE-1B-7B (1B active / 7B total) on Blackwell  ·  diagnosis &amp; optimization</a:t>
-            </a:r>
-          </a:p>
-        </p:txBody>
-      </p:sp>
-      <p:sp>
-        <p:nvSpPr>
-          <p:cNvPr id="7" name="TextBox 6"/>
-          <p:cNvSpPr txBox="1"/>
-          <p:nvPr/>
-        </p:nvSpPr>
-        <p:spPr>
-          <a:xfrm>
-            <a:off x="11521440" y="6446520"/>
-            <a:ext cx="548640" cy="274320"/>
-          </a:xfrm>
-          <a:prstGeom prst="rect">
-            <a:avLst/>
-          </a:prstGeom>
-          <a:noFill/>
-        </p:spPr>
-        <p:txBody>
-          <a:bodyPr wrap="square" lIns="0" rIns="0" tIns="0" bIns="0">
-            <a:spAutoFit/>
-          </a:bodyPr>
-          <a:lstStyle/>
-          <a:p>
-            <a:pPr algn="r"/>
-            <a:r>
-              <a:rPr sz="1000" b="0" i="0">
-                <a:solidFill>
-                  <a:srgbClr val="555F6E"/>
-                </a:solidFill>
-                <a:latin typeface="Calibri"/>
-              </a:rPr>
-              <a:t>15</a:t>
-            </a:r>
-          </a:p>
-        </p:txBody>
-      </p:sp>
-    </p:spTree>
-  </p:cSld>
-  <p:clrMapOvr>
-    <a:masterClrMapping/>
-  </p:clrMapOvr>
-</p:sld>
-</file>
-
-<file path=ppt/slides/slide16.xml><?xml version="1.0" encoding="utf-8"?>
-<p:sld xmlns:a="http://schemas.openxmlformats.org/drawingml/2006/main" xmlns:p="http://schemas.openxmlformats.org/presentationml/2006/main" xmlns:r="http://schemas.openxmlformats.org/officeDocument/2006/relationships">
-  <p:cSld>
-    <p:spTree>
-      <p:nvGrpSpPr>
-        <p:cNvPr id="1" name=""/>
-        <p:cNvGrpSpPr/>
-        <p:nvPr/>
-      </p:nvGrpSpPr>
-      <p:grpSpPr/>
-      <p:sp>
-        <p:nvSpPr>
-          <p:cNvPr id="2" name="TextBox 1"/>
-          <p:cNvSpPr txBox="1"/>
-          <p:nvPr/>
-        </p:nvSpPr>
-        <p:spPr>
-          <a:xfrm>
-            <a:off x="548640" y="411480"/>
-            <a:ext cx="11155680" cy="274320"/>
-          </a:xfrm>
-          <a:prstGeom prst="rect">
-            <a:avLst/>
-          </a:prstGeom>
-          <a:noFill/>
-        </p:spPr>
-        <p:txBody>
-          <a:bodyPr wrap="square" lIns="0" rIns="0" tIns="0" bIns="0">
-            <a:spAutoFit/>
-          </a:bodyPr>
-          <a:lstStyle/>
-          <a:p>
-            <a:pPr algn="l"/>
-            <a:r>
-              <a:rPr sz="1200" b="1" i="0">
-                <a:solidFill>
-                  <a:srgbClr val="2E66C2"/>
-                </a:solidFill>
-                <a:latin typeface="Calibri"/>
-              </a:rPr>
-              <a:t>VERDICT</a:t>
-            </a:r>
-          </a:p>
-        </p:txBody>
-      </p:sp>
-      <p:sp>
-        <p:nvSpPr>
-          <p:cNvPr id="3" name="TextBox 2"/>
-          <p:cNvSpPr txBox="1"/>
-          <p:nvPr/>
-        </p:nvSpPr>
-        <p:spPr>
-          <a:xfrm>
-            <a:off x="548640" y="713232"/>
-            <a:ext cx="11155680" cy="640080"/>
-          </a:xfrm>
-          <a:prstGeom prst="rect">
-            <a:avLst/>
-          </a:prstGeom>
-          <a:noFill/>
-        </p:spPr>
-        <p:txBody>
-          <a:bodyPr wrap="square" lIns="0" rIns="0" tIns="0" bIns="0">
-            <a:spAutoFit/>
-          </a:bodyPr>
-          <a:lstStyle/>
-          <a:p>
-            <a:pPr algn="l"/>
-            <a:r>
-              <a:rPr sz="3000" b="1" i="0">
-                <a:solidFill>
-                  <a:srgbClr val="1F2A37"/>
-                </a:solidFill>
-                <a:latin typeface="Calibri"/>
-              </a:rPr>
-              <a:t>Recommendation</a:t>
-            </a:r>
-          </a:p>
-        </p:txBody>
-      </p:sp>
-      <p:sp>
-        <p:nvSpPr>
-          <p:cNvPr id="4" name="Rectangle 3"/>
-          <p:cNvSpPr/>
-          <p:nvPr/>
-        </p:nvSpPr>
-        <p:spPr>
-          <a:xfrm>
-            <a:off x="548640" y="1417320"/>
-            <a:ext cx="914400" cy="38100"/>
-          </a:xfrm>
-          <a:prstGeom prst="rect">
-            <a:avLst/>
-          </a:prstGeom>
-          <a:solidFill>
-            <a:srgbClr val="2E66C2"/>
-          </a:solidFill>
-          <a:ln>
-            <a:noFill/>
-          </a:ln>
-        </p:spPr>
-        <p:style>
-          <a:lnRef idx="1">
-            <a:schemeClr val="accent1"/>
-          </a:lnRef>
-          <a:fillRef idx="3">
-            <a:schemeClr val="accent1"/>
-          </a:fillRef>
-          <a:effectRef idx="2">
-            <a:schemeClr val="accent1"/>
-          </a:effectRef>
-          <a:fontRef idx="minor">
-            <a:schemeClr val="lt1"/>
-          </a:fontRef>
-        </p:style>
-        <p:txBody>
-          <a:bodyPr rtlCol="0" anchor="ctr"/>
-          <a:lstStyle/>
-          <a:p>
-            <a:pPr algn="ctr"/>
-          </a:p>
-        </p:txBody>
-      </p:sp>
-      <p:sp>
-        <p:nvSpPr>
-          <p:cNvPr id="5" name="TextBox 4"/>
-          <p:cNvSpPr txBox="1"/>
-          <p:nvPr/>
-        </p:nvSpPr>
-        <p:spPr>
-          <a:xfrm>
-            <a:off x="548640" y="1737360"/>
-            <a:ext cx="11155680" cy="4114800"/>
-          </a:xfrm>
-          <a:prstGeom prst="rect">
-            <a:avLst/>
-          </a:prstGeom>
-          <a:noFill/>
-        </p:spPr>
-        <p:txBody>
-          <a:bodyPr wrap="square" lIns="0" rIns="0" tIns="0" bIns="0">
-            <a:spAutoFit/>
-          </a:bodyPr>
-          <a:lstStyle/>
-          <a:p>
-            <a:pPr algn="l">
-              <a:spcAft>
-                <a:spcPts val="800"/>
-              </a:spcAft>
-            </a:pPr>
-            <a:r>
-              <a:rPr sz="2000">
-                <a:solidFill>
-                  <a:srgbClr val="1F2A37"/>
-                </a:solidFill>
-                <a:latin typeface="Calibri"/>
-              </a:rPr>
-              <a:t>•  Enable FP8 quantization and prefix caching this week — validate accuracy on customer evals first</a:t>
-            </a:r>
-          </a:p>
-          <a:p>
-            <a:pPr algn="l">
-              <a:spcAft>
-                <a:spcPts val="800"/>
-              </a:spcAft>
-            </a:pPr>
-            <a:r>
-              <a:rPr sz="2000">
-                <a:solidFill>
-                  <a:srgbClr val="1F2A37"/>
-                </a:solidFill>
-                <a:latin typeface="Calibri"/>
-              </a:rPr>
-              <a:t>•  Tune max_num_seqs (continuous batching) against the TTFT p90 SLA</a:t>
-            </a:r>
-          </a:p>
-          <a:p>
-            <a:pPr algn="l">
-              <a:spcAft>
-                <a:spcPts val="800"/>
-              </a:spcAft>
-            </a:pPr>
-            <a:r>
-              <a:rPr sz="2000">
-                <a:solidFill>
-                  <a:srgbClr val="1F2A37"/>
-                </a:solidFill>
-                <a:latin typeface="Calibri"/>
-              </a:rPr>
-              <a:t>•  Evaluate tensor parallelism (TP=2) for TPOT — 14% gain at single-user load; rerun under concurrency before adopting in prod</a:t>
-            </a:r>
-          </a:p>
-          <a:p>
-            <a:pPr algn="l">
-              <a:spcAft>
-                <a:spcPts val="800"/>
-              </a:spcAft>
-            </a:pPr>
-            <a:r>
-              <a:rPr sz="2000">
-                <a:solidFill>
-                  <a:srgbClr val="1F2A37"/>
-                </a:solidFill>
-                <a:latin typeface="Calibri"/>
-              </a:rPr>
-              <a:t>•  Re-baseline whenever the model, vLLM version, or hardware changes</a:t>
-            </a:r>
-          </a:p>
-        </p:txBody>
-      </p:sp>
       <p:sp>
         <p:nvSpPr>
           <p:cNvPr id="6" name="TextBox 5"/>
@@ -8175,8 +7645,8 @@
         </p:nvSpPr>
         <p:spPr>
           <a:xfrm>
-            <a:off x="731520" y="1828800"/>
-            <a:ext cx="7315200" cy="1645920"/>
+            <a:off x="548640" y="411480"/>
+            <a:ext cx="11155680" cy="274320"/>
           </a:xfrm>
           <a:prstGeom prst="rect">
             <a:avLst/>
@@ -8191,27 +7661,62 @@
           <a:p>
             <a:pPr algn="l"/>
             <a:r>
-              <a:rPr sz="9600" b="1" i="0">
-                <a:solidFill>
-                  <a:srgbClr val="1F2A37"/>
+              <a:rPr sz="1200" b="1" i="0">
+                <a:solidFill>
+                  <a:srgbClr val="2E66C2"/>
                 </a:solidFill>
                 <a:latin typeface="Calibri"/>
               </a:rPr>
-              <a:t>Q&amp;A</a:t>
-            </a:r>
-          </a:p>
-        </p:txBody>
-      </p:sp>
-      <p:sp>
-        <p:nvSpPr>
-          <p:cNvPr id="3" name="Rectangle 2"/>
+              <a:t>VERDICT</a:t>
+            </a:r>
+          </a:p>
+        </p:txBody>
+      </p:sp>
+      <p:sp>
+        <p:nvSpPr>
+          <p:cNvPr id="3" name="TextBox 2"/>
+          <p:cNvSpPr txBox="1"/>
+          <p:nvPr/>
+        </p:nvSpPr>
+        <p:spPr>
+          <a:xfrm>
+            <a:off x="548640" y="713232"/>
+            <a:ext cx="11155680" cy="640080"/>
+          </a:xfrm>
+          <a:prstGeom prst="rect">
+            <a:avLst/>
+          </a:prstGeom>
+          <a:noFill/>
+        </p:spPr>
+        <p:txBody>
+          <a:bodyPr wrap="square" lIns="0" rIns="0" tIns="0" bIns="0">
+            <a:spAutoFit/>
+          </a:bodyPr>
+          <a:lstStyle/>
+          <a:p>
+            <a:pPr algn="l"/>
+            <a:r>
+              <a:rPr sz="3000" b="1" i="0">
+                <a:solidFill>
+                  <a:srgbClr val="1F2A37"/>
+                </a:solidFill>
+                <a:latin typeface="Calibri"/>
+              </a:rPr>
+              <a:t>Recommendation</a:t>
+            </a:r>
+          </a:p>
+        </p:txBody>
+      </p:sp>
+      <p:sp>
+        <p:nvSpPr>
+          <p:cNvPr id="4" name="Rectangle 3"/>
           <p:cNvSpPr/>
           <p:nvPr/>
         </p:nvSpPr>
         <p:spPr>
           <a:xfrm>
-            <a:off x="731520" y="3657600"/>
-            <a:ext cx="1828800" cy="50800"/>
+            <a:off x="548640" y="1417320"/>
+            <a:ext cx="914400" cy="38100"/>
           </a:xfrm>
           <a:prstGeom prst="rect">
             <a:avLst/>
@@ -8247,14 +7752,14 @@
       </p:sp>
       <p:sp>
         <p:nvSpPr>
-          <p:cNvPr id="4" name="TextBox 3"/>
+          <p:cNvPr id="5" name="TextBox 4"/>
           <p:cNvSpPr txBox="1"/>
           <p:nvPr/>
         </p:nvSpPr>
         <p:spPr>
           <a:xfrm>
-            <a:off x="731520" y="3931920"/>
-            <a:ext cx="7315200" cy="457200"/>
+            <a:off x="548640" y="1737360"/>
+            <a:ext cx="11155680" cy="4114800"/>
           </a:xfrm>
           <a:prstGeom prst="rect">
             <a:avLst/>
@@ -8267,29 +7772,81 @@
           </a:bodyPr>
           <a:lstStyle/>
           <a:p>
-            <a:pPr algn="l"/>
-            <a:r>
-              <a:rPr sz="2000" b="0" i="0">
-                <a:solidFill>
-                  <a:srgbClr val="555F6E"/>
+            <a:pPr algn="l">
+              <a:spcAft>
+                <a:spcPts val="800"/>
+              </a:spcAft>
+            </a:pPr>
+            <a:r>
+              <a:rPr sz="2000">
+                <a:solidFill>
+                  <a:srgbClr val="1F2A37"/>
                 </a:solidFill>
                 <a:latin typeface="Calibri"/>
               </a:rPr>
-              <a:t>15 minutes — fire away.</a:t>
-            </a:r>
-          </a:p>
-        </p:txBody>
-      </p:sp>
-      <p:sp>
-        <p:nvSpPr>
-          <p:cNvPr id="5" name="TextBox 4"/>
+              <a:t>•  Enable FP8 quantization and prefix caching this week — validate accuracy on customer evals first</a:t>
+            </a:r>
+          </a:p>
+          <a:p>
+            <a:pPr algn="l">
+              <a:spcAft>
+                <a:spcPts val="800"/>
+              </a:spcAft>
+            </a:pPr>
+            <a:r>
+              <a:rPr sz="2000">
+                <a:solidFill>
+                  <a:srgbClr val="1F2A37"/>
+                </a:solidFill>
+                <a:latin typeface="Calibri"/>
+              </a:rPr>
+              <a:t>•  Evaluate tensor parallelism (TP=2) for TPOT — 14% gain at single-user load; rerun under concurrency before adopting in prod</a:t>
+            </a:r>
+          </a:p>
+          <a:p>
+            <a:pPr algn="l">
+              <a:spcAft>
+                <a:spcPts val="800"/>
+              </a:spcAft>
+            </a:pPr>
+            <a:r>
+              <a:rPr sz="2000">
+                <a:solidFill>
+                  <a:srgbClr val="1F2A37"/>
+                </a:solidFill>
+                <a:latin typeface="Calibri"/>
+              </a:rPr>
+              <a:t>•  Use continuous batching only for throughput-mode workloads — not chat — per-request TPOT degrades 4× by B=32</a:t>
+            </a:r>
+          </a:p>
+          <a:p>
+            <a:pPr algn="l">
+              <a:spcAft>
+                <a:spcPts val="800"/>
+              </a:spcAft>
+            </a:pPr>
+            <a:r>
+              <a:rPr sz="2000">
+                <a:solidFill>
+                  <a:srgbClr val="1F2A37"/>
+                </a:solidFill>
+                <a:latin typeface="Calibri"/>
+              </a:rPr>
+              <a:t>•  Re-baseline whenever the model, vLLM version, or hardware changes</a:t>
+            </a:r>
+          </a:p>
+        </p:txBody>
+      </p:sp>
+      <p:sp>
+        <p:nvSpPr>
+          <p:cNvPr id="6" name="TextBox 5"/>
           <p:cNvSpPr txBox="1"/>
           <p:nvPr/>
         </p:nvSpPr>
         <p:spPr>
           <a:xfrm>
-            <a:off x="8778240" y="1828800"/>
-            <a:ext cx="2743200" cy="274320"/>
+            <a:off x="548640" y="6446520"/>
+            <a:ext cx="9144000" cy="274320"/>
           </a:xfrm>
           <a:prstGeom prst="rect">
             <a:avLst/>
@@ -8304,135 +7861,6 @@
           <a:p>
             <a:pPr algn="l"/>
             <a:r>
-              <a:rPr sz="1100" b="1" i="0">
-                <a:solidFill>
-                  <a:srgbClr val="2E66C2"/>
-                </a:solidFill>
-                <a:latin typeface="Calibri"/>
-              </a:rPr>
-              <a:t>REPO</a:t>
-            </a:r>
-          </a:p>
-        </p:txBody>
-      </p:sp>
-      <p:pic>
-        <p:nvPicPr>
-          <p:cNvPr id="6" name="Picture 5" descr="repo_qr.png"/>
-          <p:cNvPicPr>
-            <a:picLocks noChangeAspect="1"/>
-          </p:cNvPicPr>
-          <p:nvPr/>
-        </p:nvPicPr>
-        <p:blipFill>
-          <a:blip r:embed="rId2"/>
-          <a:stretch>
-            <a:fillRect/>
-          </a:stretch>
-        </p:blipFill>
-        <p:spPr>
-          <a:xfrm>
-            <a:off x="8778240" y="2194560"/>
-            <a:ext cx="2743200" cy="2743200"/>
-          </a:xfrm>
-          <a:prstGeom prst="rect">
-            <a:avLst/>
-          </a:prstGeom>
-        </p:spPr>
-      </p:pic>
-      <p:sp>
-        <p:nvSpPr>
-          <p:cNvPr id="7" name="TextBox 6"/>
-          <p:cNvSpPr txBox="1"/>
-          <p:nvPr/>
-        </p:nvSpPr>
-        <p:spPr>
-          <a:xfrm>
-            <a:off x="8229600" y="5074920"/>
-            <a:ext cx="3840480" cy="365760"/>
-          </a:xfrm>
-          <a:prstGeom prst="rect">
-            <a:avLst/>
-          </a:prstGeom>
-          <a:noFill/>
-        </p:spPr>
-        <p:txBody>
-          <a:bodyPr wrap="square" lIns="0" rIns="0" tIns="0" bIns="0">
-            <a:spAutoFit/>
-          </a:bodyPr>
-          <a:lstStyle/>
-          <a:p>
-            <a:pPr algn="ctr"/>
-            <a:r>
-              <a:rPr sz="1100" b="0" i="0">
-                <a:solidFill>
-                  <a:srgbClr val="555F6E"/>
-                </a:solidFill>
-                <a:latin typeface="Calibri"/>
-              </a:rPr>
-              <a:t>github.com/harishvs/moe-inference-optimize</a:t>
-            </a:r>
-          </a:p>
-        </p:txBody>
-      </p:sp>
-      <p:sp>
-        <p:nvSpPr>
-          <p:cNvPr id="8" name="TextBox 7"/>
-          <p:cNvSpPr txBox="1"/>
-          <p:nvPr/>
-        </p:nvSpPr>
-        <p:spPr>
-          <a:xfrm>
-            <a:off x="8229600" y="5440680"/>
-            <a:ext cx="3840480" cy="365760"/>
-          </a:xfrm>
-          <a:prstGeom prst="rect">
-            <a:avLst/>
-          </a:prstGeom>
-          <a:noFill/>
-        </p:spPr>
-        <p:txBody>
-          <a:bodyPr wrap="square" lIns="0" rIns="0" tIns="0" bIns="0">
-            <a:spAutoFit/>
-          </a:bodyPr>
-          <a:lstStyle/>
-          <a:p>
-            <a:pPr algn="ctr"/>
-            <a:r>
-              <a:rPr sz="1000" b="0" i="1">
-                <a:solidFill>
-                  <a:srgbClr val="555F6E"/>
-                </a:solidFill>
-                <a:latin typeface="Calibri"/>
-              </a:rPr>
-              <a:t>scan to clone the code, results, and this deck</a:t>
-            </a:r>
-          </a:p>
-        </p:txBody>
-      </p:sp>
-      <p:sp>
-        <p:nvSpPr>
-          <p:cNvPr id="9" name="TextBox 8"/>
-          <p:cNvSpPr txBox="1"/>
-          <p:nvPr/>
-        </p:nvSpPr>
-        <p:spPr>
-          <a:xfrm>
-            <a:off x="548640" y="6446520"/>
-            <a:ext cx="9144000" cy="274320"/>
-          </a:xfrm>
-          <a:prstGeom prst="rect">
-            <a:avLst/>
-          </a:prstGeom>
-          <a:noFill/>
-        </p:spPr>
-        <p:txBody>
-          <a:bodyPr wrap="square" lIns="0" rIns="0" tIns="0" bIns="0">
-            <a:spAutoFit/>
-          </a:bodyPr>
-          <a:lstStyle/>
-          <a:p>
-            <a:pPr algn="l"/>
-            <a:r>
               <a:rPr sz="1000" b="0" i="0">
                 <a:solidFill>
                   <a:srgbClr val="555F6E"/>
@@ -8446,7 +7874,7 @@
       </p:sp>
       <p:sp>
         <p:nvSpPr>
-          <p:cNvPr id="10" name="TextBox 9"/>
+          <p:cNvPr id="7" name="TextBox 6"/>
           <p:cNvSpPr txBox="1"/>
           <p:nvPr/>
         </p:nvSpPr>
@@ -8505,8 +7933,8 @@
         </p:nvSpPr>
         <p:spPr>
           <a:xfrm>
-            <a:off x="548640" y="411480"/>
-            <a:ext cx="11155680" cy="274320"/>
+            <a:off x="731520" y="1828800"/>
+            <a:ext cx="7315200" cy="1645920"/>
           </a:xfrm>
           <a:prstGeom prst="rect">
             <a:avLst/>
@@ -8521,62 +7949,27 @@
           <a:p>
             <a:pPr algn="l"/>
             <a:r>
-              <a:rPr sz="1200" b="1" i="0">
-                <a:solidFill>
-                  <a:srgbClr val="2E66C2"/>
+              <a:rPr sz="9600" b="1" i="0">
+                <a:solidFill>
+                  <a:srgbClr val="1F2A37"/>
                 </a:solidFill>
                 <a:latin typeface="Calibri"/>
               </a:rPr>
-              <a:t>APPENDIX</a:t>
-            </a:r>
-          </a:p>
-        </p:txBody>
-      </p:sp>
-      <p:sp>
-        <p:nvSpPr>
-          <p:cNvPr id="3" name="TextBox 2"/>
-          <p:cNvSpPr txBox="1"/>
-          <p:nvPr/>
-        </p:nvSpPr>
-        <p:spPr>
-          <a:xfrm>
-            <a:off x="548640" y="713232"/>
-            <a:ext cx="11155680" cy="640080"/>
-          </a:xfrm>
-          <a:prstGeom prst="rect">
-            <a:avLst/>
-          </a:prstGeom>
-          <a:noFill/>
-        </p:spPr>
-        <p:txBody>
-          <a:bodyPr wrap="square" lIns="0" rIns="0" tIns="0" bIns="0">
-            <a:spAutoFit/>
-          </a:bodyPr>
-          <a:lstStyle/>
-          <a:p>
-            <a:pPr algn="l"/>
-            <a:r>
-              <a:rPr sz="3000" b="1" i="0">
-                <a:solidFill>
-                  <a:srgbClr val="1F2A37"/>
-                </a:solidFill>
-                <a:latin typeface="Calibri"/>
-              </a:rPr>
-              <a:t>FP8 quality — standard accuracy benchmarks</a:t>
-            </a:r>
-          </a:p>
-        </p:txBody>
-      </p:sp>
-      <p:sp>
-        <p:nvSpPr>
-          <p:cNvPr id="4" name="Rectangle 3"/>
+              <a:t>Q&amp;A</a:t>
+            </a:r>
+          </a:p>
+        </p:txBody>
+      </p:sp>
+      <p:sp>
+        <p:nvSpPr>
+          <p:cNvPr id="3" name="Rectangle 2"/>
           <p:cNvSpPr/>
           <p:nvPr/>
         </p:nvSpPr>
         <p:spPr>
           <a:xfrm>
-            <a:off x="548640" y="1417320"/>
-            <a:ext cx="914400" cy="38100"/>
+            <a:off x="731520" y="3657600"/>
+            <a:ext cx="1828800" cy="50800"/>
           </a:xfrm>
           <a:prstGeom prst="rect">
             <a:avLst/>
@@ -8610,9 +8003,79 @@
           </a:p>
         </p:txBody>
       </p:sp>
+      <p:sp>
+        <p:nvSpPr>
+          <p:cNvPr id="4" name="TextBox 3"/>
+          <p:cNvSpPr txBox="1"/>
+          <p:nvPr/>
+        </p:nvSpPr>
+        <p:spPr>
+          <a:xfrm>
+            <a:off x="731520" y="3931920"/>
+            <a:ext cx="7315200" cy="457200"/>
+          </a:xfrm>
+          <a:prstGeom prst="rect">
+            <a:avLst/>
+          </a:prstGeom>
+          <a:noFill/>
+        </p:spPr>
+        <p:txBody>
+          <a:bodyPr wrap="square" lIns="0" rIns="0" tIns="0" bIns="0">
+            <a:spAutoFit/>
+          </a:bodyPr>
+          <a:lstStyle/>
+          <a:p>
+            <a:pPr algn="l"/>
+            <a:r>
+              <a:rPr sz="2000" b="0" i="0">
+                <a:solidFill>
+                  <a:srgbClr val="555F6E"/>
+                </a:solidFill>
+                <a:latin typeface="Calibri"/>
+              </a:rPr>
+              <a:t>15 minutes — fire away.</a:t>
+            </a:r>
+          </a:p>
+        </p:txBody>
+      </p:sp>
+      <p:sp>
+        <p:nvSpPr>
+          <p:cNvPr id="5" name="TextBox 4"/>
+          <p:cNvSpPr txBox="1"/>
+          <p:nvPr/>
+        </p:nvSpPr>
+        <p:spPr>
+          <a:xfrm>
+            <a:off x="8778240" y="1828800"/>
+            <a:ext cx="2743200" cy="274320"/>
+          </a:xfrm>
+          <a:prstGeom prst="rect">
+            <a:avLst/>
+          </a:prstGeom>
+          <a:noFill/>
+        </p:spPr>
+        <p:txBody>
+          <a:bodyPr wrap="square" lIns="0" rIns="0" tIns="0" bIns="0">
+            <a:spAutoFit/>
+          </a:bodyPr>
+          <a:lstStyle/>
+          <a:p>
+            <a:pPr algn="l"/>
+            <a:r>
+              <a:rPr sz="1100" b="1" i="0">
+                <a:solidFill>
+                  <a:srgbClr val="2E66C2"/>
+                </a:solidFill>
+                <a:latin typeface="Calibri"/>
+              </a:rPr>
+              <a:t>REPO</a:t>
+            </a:r>
+          </a:p>
+        </p:txBody>
+      </p:sp>
       <p:pic>
         <p:nvPicPr>
-          <p:cNvPr id="5" name="Picture 4" descr="appendix_fp8_accuracy.png"/>
+          <p:cNvPr id="6" name="Picture 5" descr="repo_qr.png"/>
           <p:cNvPicPr>
             <a:picLocks noChangeAspect="1"/>
           </p:cNvPicPr>
@@ -8626,8 +8089,8 @@
         </p:blipFill>
         <p:spPr>
           <a:xfrm>
-            <a:off x="1280160" y="1783080"/>
-            <a:ext cx="9601200" cy="4434840"/>
+            <a:off x="8778240" y="2194560"/>
+            <a:ext cx="2743200" cy="2743200"/>
           </a:xfrm>
           <a:prstGeom prst="rect">
             <a:avLst/>
@@ -8636,14 +8099,14 @@
       </p:pic>
       <p:sp>
         <p:nvSpPr>
-          <p:cNvPr id="6" name="TextBox 5"/>
+          <p:cNvPr id="7" name="TextBox 6"/>
           <p:cNvSpPr txBox="1"/>
           <p:nvPr/>
         </p:nvSpPr>
         <p:spPr>
           <a:xfrm>
-            <a:off x="548640" y="6446520"/>
-            <a:ext cx="9144000" cy="274320"/>
+            <a:off x="8229600" y="5074920"/>
+            <a:ext cx="3840480" cy="365760"/>
           </a:xfrm>
           <a:prstGeom prst="rect">
             <a:avLst/>
@@ -8656,6 +8119,76 @@
           </a:bodyPr>
           <a:lstStyle/>
           <a:p>
+            <a:pPr algn="ctr"/>
+            <a:r>
+              <a:rPr sz="1100" b="0" i="0">
+                <a:solidFill>
+                  <a:srgbClr val="555F6E"/>
+                </a:solidFill>
+                <a:latin typeface="Calibri"/>
+              </a:rPr>
+              <a:t>github.com/harishvs/moe-inference-optimize</a:t>
+            </a:r>
+          </a:p>
+        </p:txBody>
+      </p:sp>
+      <p:sp>
+        <p:nvSpPr>
+          <p:cNvPr id="8" name="TextBox 7"/>
+          <p:cNvSpPr txBox="1"/>
+          <p:nvPr/>
+        </p:nvSpPr>
+        <p:spPr>
+          <a:xfrm>
+            <a:off x="8229600" y="5440680"/>
+            <a:ext cx="3840480" cy="365760"/>
+          </a:xfrm>
+          <a:prstGeom prst="rect">
+            <a:avLst/>
+          </a:prstGeom>
+          <a:noFill/>
+        </p:spPr>
+        <p:txBody>
+          <a:bodyPr wrap="square" lIns="0" rIns="0" tIns="0" bIns="0">
+            <a:spAutoFit/>
+          </a:bodyPr>
+          <a:lstStyle/>
+          <a:p>
+            <a:pPr algn="ctr"/>
+            <a:r>
+              <a:rPr sz="1000" b="0" i="1">
+                <a:solidFill>
+                  <a:srgbClr val="555F6E"/>
+                </a:solidFill>
+                <a:latin typeface="Calibri"/>
+              </a:rPr>
+              <a:t>scan to clone the code, results, and this deck</a:t>
+            </a:r>
+          </a:p>
+        </p:txBody>
+      </p:sp>
+      <p:sp>
+        <p:nvSpPr>
+          <p:cNvPr id="9" name="TextBox 8"/>
+          <p:cNvSpPr txBox="1"/>
+          <p:nvPr/>
+        </p:nvSpPr>
+        <p:spPr>
+          <a:xfrm>
+            <a:off x="548640" y="6446520"/>
+            <a:ext cx="9144000" cy="274320"/>
+          </a:xfrm>
+          <a:prstGeom prst="rect">
+            <a:avLst/>
+          </a:prstGeom>
+          <a:noFill/>
+        </p:spPr>
+        <p:txBody>
+          <a:bodyPr wrap="square" lIns="0" rIns="0" tIns="0" bIns="0">
+            <a:spAutoFit/>
+          </a:bodyPr>
+          <a:lstStyle/>
+          <a:p>
             <a:pPr algn="l"/>
             <a:r>
               <a:rPr sz="1000" b="0" i="0">
@@ -8671,7 +8204,7 @@
       </p:sp>
       <p:sp>
         <p:nvSpPr>
-          <p:cNvPr id="7" name="TextBox 6"/>
+          <p:cNvPr id="10" name="TextBox 9"/>
           <p:cNvSpPr txBox="1"/>
           <p:nvPr/>
         </p:nvSpPr>
@@ -8787,7 +8320,7 @@
                 </a:solidFill>
                 <a:latin typeface="Calibri"/>
               </a:rPr>
-              <a:t>Why prefill isn't quadratic in input length</a:t>
+              <a:t>FP8 quality — standard accuracy benchmarks</a:t>
             </a:r>
           </a:p>
         </p:txBody>
@@ -8837,7 +8370,7 @@
       </p:sp>
       <p:pic>
         <p:nvPicPr>
-          <p:cNvPr id="5" name="Picture 4" descr="appendix_flop_math.png"/>
+          <p:cNvPr id="5" name="Picture 4" descr="appendix_fp8_accuracy.png"/>
           <p:cNvPicPr>
             <a:picLocks noChangeAspect="1"/>
           </p:cNvPicPr>
@@ -8851,8 +8384,8 @@
         </p:blipFill>
         <p:spPr>
           <a:xfrm>
-            <a:off x="1828800" y="1783080"/>
-            <a:ext cx="8229600" cy="4434840"/>
+            <a:off x="1280160" y="1783080"/>
+            <a:ext cx="9601200" cy="4434840"/>
           </a:xfrm>
           <a:prstGeom prst="rect">
             <a:avLst/>
@@ -9147,13 +8680,13 @@
               </a:spcAft>
             </a:pPr>
             <a:r>
-              <a:rPr sz="1400">
+              <a:rPr sz="1300">
                 <a:solidFill>
                   <a:srgbClr val="1F2A37"/>
                 </a:solidFill>
                 <a:latin typeface="Calibri"/>
               </a:rPr>
-              <a:t>•  Baseline holds the SLA at light load — but degrades past ~200–600 active users</a:t>
+              <a:t>•  Baseline misses the per-request SLA from prompts ≥ 512 tokens — exactly the chat-app range</a:t>
             </a:r>
           </a:p>
           <a:p>
@@ -9163,13 +8696,13 @@
               </a:spcAft>
             </a:pPr>
             <a:r>
-              <a:rPr sz="1400">
+              <a:rPr sz="1300">
                 <a:solidFill>
                   <a:srgbClr val="1F2A37"/>
                 </a:solidFill>
                 <a:latin typeface="Calibri"/>
               </a:rPr>
-              <a:t>•  User pain: long wait before the assistant says anything once we cross that bar</a:t>
+              <a:t>•  User pain: noticeable lag once prompts include the system prompt + tool descriptions + history</a:t>
             </a:r>
           </a:p>
           <a:p>
@@ -9179,13 +8712,13 @@
               </a:spcAft>
             </a:pPr>
             <a:r>
-              <a:rPr sz="1400">
+              <a:rPr sz="1300">
                 <a:solidFill>
                   <a:srgbClr val="1F2A37"/>
                 </a:solidFill>
                 <a:latin typeface="Calibri"/>
               </a:rPr>
-              <a:t>•  Business pain: launch traffic blocked — and adding GPUs doesn't fix per-request latency</a:t>
+              <a:t>•  Business pain: launch blocked on a sub-second instant-feel experience — adding GPUs doesn't help, latency is per-request</a:t>
             </a:r>
           </a:p>
           <a:p>
@@ -9195,13 +8728,13 @@
               </a:spcAft>
             </a:pPr>
             <a:r>
-              <a:rPr sz="1400">
+              <a:rPr sz="1300">
                 <a:solidFill>
                   <a:srgbClr val="1F2A37"/>
                 </a:solidFill>
                 <a:latin typeface="Calibri"/>
               </a:rPr>
-              <a:t>•  Question: how do we extend that headroom — and what doesn't help?</a:t>
+              <a:t>•  Question: which levers cut per-request latency, by how much, and at what cost?</a:t>
             </a:r>
           </a:p>
         </p:txBody>
@@ -9272,6 +8805,231 @@
                 <a:latin typeface="Calibri"/>
               </a:rPr>
               <a:t>2</a:t>
+            </a:r>
+          </a:p>
+        </p:txBody>
+      </p:sp>
+    </p:spTree>
+  </p:cSld>
+  <p:clrMapOvr>
+    <a:masterClrMapping/>
+  </p:clrMapOvr>
+</p:sld>
+</file>
+
+<file path=ppt/slides/slide20.xml><?xml version="1.0" encoding="utf-8"?>
+<p:sld xmlns:a="http://schemas.openxmlformats.org/drawingml/2006/main" xmlns:p="http://schemas.openxmlformats.org/presentationml/2006/main" xmlns:r="http://schemas.openxmlformats.org/officeDocument/2006/relationships">
+  <p:cSld>
+    <p:spTree>
+      <p:nvGrpSpPr>
+        <p:cNvPr id="1" name=""/>
+        <p:cNvGrpSpPr/>
+        <p:nvPr/>
+      </p:nvGrpSpPr>
+      <p:grpSpPr/>
+      <p:sp>
+        <p:nvSpPr>
+          <p:cNvPr id="2" name="TextBox 1"/>
+          <p:cNvSpPr txBox="1"/>
+          <p:nvPr/>
+        </p:nvSpPr>
+        <p:spPr>
+          <a:xfrm>
+            <a:off x="548640" y="411480"/>
+            <a:ext cx="11155680" cy="274320"/>
+          </a:xfrm>
+          <a:prstGeom prst="rect">
+            <a:avLst/>
+          </a:prstGeom>
+          <a:noFill/>
+        </p:spPr>
+        <p:txBody>
+          <a:bodyPr wrap="square" lIns="0" rIns="0" tIns="0" bIns="0">
+            <a:spAutoFit/>
+          </a:bodyPr>
+          <a:lstStyle/>
+          <a:p>
+            <a:pPr algn="l"/>
+            <a:r>
+              <a:rPr sz="1200" b="1" i="0">
+                <a:solidFill>
+                  <a:srgbClr val="2E66C2"/>
+                </a:solidFill>
+                <a:latin typeface="Calibri"/>
+              </a:rPr>
+              <a:t>APPENDIX</a:t>
+            </a:r>
+          </a:p>
+        </p:txBody>
+      </p:sp>
+      <p:sp>
+        <p:nvSpPr>
+          <p:cNvPr id="3" name="TextBox 2"/>
+          <p:cNvSpPr txBox="1"/>
+          <p:nvPr/>
+        </p:nvSpPr>
+        <p:spPr>
+          <a:xfrm>
+            <a:off x="548640" y="713232"/>
+            <a:ext cx="11155680" cy="640080"/>
+          </a:xfrm>
+          <a:prstGeom prst="rect">
+            <a:avLst/>
+          </a:prstGeom>
+          <a:noFill/>
+        </p:spPr>
+        <p:txBody>
+          <a:bodyPr wrap="square" lIns="0" rIns="0" tIns="0" bIns="0">
+            <a:spAutoFit/>
+          </a:bodyPr>
+          <a:lstStyle/>
+          <a:p>
+            <a:pPr algn="l"/>
+            <a:r>
+              <a:rPr sz="3000" b="1" i="0">
+                <a:solidFill>
+                  <a:srgbClr val="1F2A37"/>
+                </a:solidFill>
+                <a:latin typeface="Calibri"/>
+              </a:rPr>
+              <a:t>Why prefill isn't quadratic in input length</a:t>
+            </a:r>
+          </a:p>
+        </p:txBody>
+      </p:sp>
+      <p:sp>
+        <p:nvSpPr>
+          <p:cNvPr id="4" name="Rectangle 3"/>
+          <p:cNvSpPr/>
+          <p:nvPr/>
+        </p:nvSpPr>
+        <p:spPr>
+          <a:xfrm>
+            <a:off x="548640" y="1417320"/>
+            <a:ext cx="914400" cy="38100"/>
+          </a:xfrm>
+          <a:prstGeom prst="rect">
+            <a:avLst/>
+          </a:prstGeom>
+          <a:solidFill>
+            <a:srgbClr val="2E66C2"/>
+          </a:solidFill>
+          <a:ln>
+            <a:noFill/>
+          </a:ln>
+        </p:spPr>
+        <p:style>
+          <a:lnRef idx="1">
+            <a:schemeClr val="accent1"/>
+          </a:lnRef>
+          <a:fillRef idx="3">
+            <a:schemeClr val="accent1"/>
+          </a:fillRef>
+          <a:effectRef idx="2">
+            <a:schemeClr val="accent1"/>
+          </a:effectRef>
+          <a:fontRef idx="minor">
+            <a:schemeClr val="lt1"/>
+          </a:fontRef>
+        </p:style>
+        <p:txBody>
+          <a:bodyPr rtlCol="0" anchor="ctr"/>
+          <a:lstStyle/>
+          <a:p>
+            <a:pPr algn="ctr"/>
+          </a:p>
+        </p:txBody>
+      </p:sp>
+      <p:pic>
+        <p:nvPicPr>
+          <p:cNvPr id="5" name="Picture 4" descr="appendix_flop_math.png"/>
+          <p:cNvPicPr>
+            <a:picLocks noChangeAspect="1"/>
+          </p:cNvPicPr>
+          <p:nvPr/>
+        </p:nvPicPr>
+        <p:blipFill>
+          <a:blip r:embed="rId2"/>
+          <a:stretch>
+            <a:fillRect/>
+          </a:stretch>
+        </p:blipFill>
+        <p:spPr>
+          <a:xfrm>
+            <a:off x="1828800" y="1783080"/>
+            <a:ext cx="8229600" cy="4434840"/>
+          </a:xfrm>
+          <a:prstGeom prst="rect">
+            <a:avLst/>
+          </a:prstGeom>
+        </p:spPr>
+      </p:pic>
+      <p:sp>
+        <p:nvSpPr>
+          <p:cNvPr id="6" name="TextBox 5"/>
+          <p:cNvSpPr txBox="1"/>
+          <p:nvPr/>
+        </p:nvSpPr>
+        <p:spPr>
+          <a:xfrm>
+            <a:off x="548640" y="6446520"/>
+            <a:ext cx="9144000" cy="274320"/>
+          </a:xfrm>
+          <a:prstGeom prst="rect">
+            <a:avLst/>
+          </a:prstGeom>
+          <a:noFill/>
+        </p:spPr>
+        <p:txBody>
+          <a:bodyPr wrap="square" lIns="0" rIns="0" tIns="0" bIns="0">
+            <a:spAutoFit/>
+          </a:bodyPr>
+          <a:lstStyle/>
+          <a:p>
+            <a:pPr algn="l"/>
+            <a:r>
+              <a:rPr sz="1000" b="0" i="0">
+                <a:solidFill>
+                  <a:srgbClr val="555F6E"/>
+                </a:solidFill>
+                <a:latin typeface="Calibri"/>
+              </a:rPr>
+              <a:t>OLMoE-1B-7B (1B active / 7B total) on Blackwell  ·  diagnosis &amp; optimization</a:t>
+            </a:r>
+          </a:p>
+        </p:txBody>
+      </p:sp>
+      <p:sp>
+        <p:nvSpPr>
+          <p:cNvPr id="7" name="TextBox 6"/>
+          <p:cNvSpPr txBox="1"/>
+          <p:nvPr/>
+        </p:nvSpPr>
+        <p:spPr>
+          <a:xfrm>
+            <a:off x="11521440" y="6446520"/>
+            <a:ext cx="548640" cy="274320"/>
+          </a:xfrm>
+          <a:prstGeom prst="rect">
+            <a:avLst/>
+          </a:prstGeom>
+          <a:noFill/>
+        </p:spPr>
+        <p:txBody>
+          <a:bodyPr wrap="square" lIns="0" rIns="0" tIns="0" bIns="0">
+            <a:spAutoFit/>
+          </a:bodyPr>
+          <a:lstStyle/>
+          <a:p>
+            <a:pPr algn="r"/>
+            <a:r>
+              <a:rPr sz="1000" b="0" i="0">
+                <a:solidFill>
+                  <a:srgbClr val="555F6E"/>
+                </a:solidFill>
+                <a:latin typeface="Calibri"/>
+              </a:rPr>
+              <a:t>20</a:t>
             </a:r>
           </a:p>
         </p:txBody>
@@ -9525,7 +9283,7 @@
           <a:p>
             <a:pPr algn="l">
               <a:spcAft>
-                <a:spcPts val="400"/>
+                <a:spcPts val="600"/>
               </a:spcAft>
             </a:pPr>
             <a:r>
@@ -9541,7 +9299,7 @@
           <a:p>
             <a:pPr algn="l">
               <a:spcAft>
-                <a:spcPts val="400"/>
+                <a:spcPts val="600"/>
               </a:spcAft>
             </a:pPr>
             <a:r>
@@ -9557,7 +9315,7 @@
           <a:p>
             <a:pPr algn="l">
               <a:spcAft>
-                <a:spcPts val="400"/>
+                <a:spcPts val="600"/>
               </a:spcAft>
             </a:pPr>
             <a:r>
@@ -9573,7 +9331,7 @@
           <a:p>
             <a:pPr algn="l">
               <a:spcAft>
-                <a:spcPts val="400"/>
+                <a:spcPts val="600"/>
               </a:spcAft>
             </a:pPr>
             <a:r>
@@ -9589,7 +9347,7 @@
           <a:p>
             <a:pPr algn="l">
               <a:spcAft>
-                <a:spcPts val="400"/>
+                <a:spcPts val="600"/>
               </a:spcAft>
             </a:pPr>
             <a:r>
@@ -9605,7 +9363,7 @@
           <a:p>
             <a:pPr algn="l">
               <a:spcAft>
-                <a:spcPts val="400"/>
+                <a:spcPts val="600"/>
               </a:spcAft>
             </a:pPr>
             <a:r>
@@ -9615,23 +9373,7 @@
                 </a:solidFill>
                 <a:latin typeface="Calibri"/>
               </a:rPr>
-              <a:t>•  SLA: TTFT &lt; 500 ms, TPOT &lt; 30 ms at p90</a:t>
-            </a:r>
-          </a:p>
-          <a:p>
-            <a:pPr algn="l">
-              <a:spcAft>
-                <a:spcPts val="400"/>
-              </a:spcAft>
-            </a:pPr>
-            <a:r>
-              <a:rPr sz="1300">
-                <a:solidFill>
-                  <a:srgbClr val="1F2A37"/>
-                </a:solidFill>
-                <a:latin typeface="Calibri"/>
-              </a:rPr>
-              <a:t>•  Sized at batch=32 in vLLM ≈ 200–600 active users (5–15% in-flight)</a:t>
+              <a:t>•  SLA: TTFT &lt; 15 ms, TPOT &lt; 2.5 ms, end-to-end &lt; 500 ms (p90, single-user)</a:t>
             </a:r>
           </a:p>
         </p:txBody>
@@ -9644,8 +9386,8 @@
         </p:nvSpPr>
         <p:spPr>
           <a:xfrm>
-            <a:off x="7589520" y="5989320"/>
-            <a:ext cx="4206240" cy="457200"/>
+            <a:off x="7589520" y="5897880"/>
+            <a:ext cx="4206240" cy="548640"/>
           </a:xfrm>
           <a:prstGeom prst="rect">
             <a:avLst/>
@@ -9666,7 +9408,7 @@
                 </a:solidFill>
                 <a:latin typeface="Calibri"/>
               </a:rPr>
-              <a:t>SLA targets are common public references (Doherty threshold ≈ 400 ms; 33 tok/s ≈ 5× human reading speed). Pending product confirmation.</a:t>
+              <a:t>SLA chosen for an "instant-feel" chat experience: TTFT below perceptual-immediacy threshold, streaming faster than reading speed, half-second total response. Pending product confirmation.</a:t>
             </a:r>
           </a:p>
         </p:txBody>
@@ -10517,9 +10259,9 @@
                     <a:lstStyle/>
                     <a:p>
                       <a:r>
-                        <a:rPr sz="1500" b="0">
+                        <a:rPr sz="1500" b="1">
                           <a:solidFill>
-                            <a:srgbClr val="1F2A37"/>
+                            <a:srgbClr val="C04A2A"/>
                           </a:solidFill>
                           <a:latin typeface="Calibri"/>
                         </a:rPr>
@@ -10585,9 +10327,9 @@
                     <a:lstStyle/>
                     <a:p>
                       <a:r>
-                        <a:rPr sz="1500" b="0">
+                        <a:rPr sz="1500" b="1">
                           <a:solidFill>
-                            <a:srgbClr val="1F2A37"/>
+                            <a:srgbClr val="C04A2A"/>
                           </a:solidFill>
                           <a:latin typeface="Calibri"/>
                         </a:rPr>
@@ -10607,9 +10349,9 @@
                     <a:lstStyle/>
                     <a:p>
                       <a:r>
-                        <a:rPr sz="1500" b="0">
+                        <a:rPr sz="1500" b="1">
                           <a:solidFill>
-                            <a:srgbClr val="1F2A37"/>
+                            <a:srgbClr val="C04A2A"/>
                           </a:solidFill>
                           <a:latin typeface="Calibri"/>
                         </a:rPr>
@@ -10629,9 +10371,9 @@
                     <a:lstStyle/>
                     <a:p>
                       <a:r>
-                        <a:rPr sz="1500" b="0">
+                        <a:rPr sz="1500" b="1">
                           <a:solidFill>
-                            <a:srgbClr val="1F2A37"/>
+                            <a:srgbClr val="C04A2A"/>
                           </a:solidFill>
                           <a:latin typeface="Calibri"/>
                         </a:rPr>
@@ -10651,9 +10393,9 @@
                     <a:lstStyle/>
                     <a:p>
                       <a:r>
-                        <a:rPr sz="1500" b="0">
+                        <a:rPr sz="1500" b="1">
                           <a:solidFill>
-                            <a:srgbClr val="1F2A37"/>
+                            <a:srgbClr val="C04A2A"/>
                           </a:solidFill>
                           <a:latin typeface="Calibri"/>
                         </a:rPr>
@@ -10697,9 +10439,9 @@
                     <a:lstStyle/>
                     <a:p>
                       <a:r>
-                        <a:rPr sz="1500" b="0">
+                        <a:rPr sz="1500" b="1">
                           <a:solidFill>
-                            <a:srgbClr val="1F2A37"/>
+                            <a:srgbClr val="C04A2A"/>
                           </a:solidFill>
                           <a:latin typeface="Calibri"/>
                         </a:rPr>
@@ -10719,9 +10461,9 @@
                     <a:lstStyle/>
                     <a:p>
                       <a:r>
-                        <a:rPr sz="1500" b="0">
+                        <a:rPr sz="1500" b="1">
                           <a:solidFill>
-                            <a:srgbClr val="1F2A37"/>
+                            <a:srgbClr val="C04A2A"/>
                           </a:solidFill>
                           <a:latin typeface="Calibri"/>
                         </a:rPr>
@@ -10741,9 +10483,9 @@
                     <a:lstStyle/>
                     <a:p>
                       <a:r>
-                        <a:rPr sz="1500" b="0">
+                        <a:rPr sz="1500" b="1">
                           <a:solidFill>
-                            <a:srgbClr val="1F2A37"/>
+                            <a:srgbClr val="C04A2A"/>
                           </a:solidFill>
                           <a:latin typeface="Calibri"/>
                         </a:rPr>
@@ -10763,9 +10505,9 @@
                     <a:lstStyle/>
                     <a:p>
                       <a:r>
-                        <a:rPr sz="1500" b="0">
+                        <a:rPr sz="1500" b="1">
                           <a:solidFill>
-                            <a:srgbClr val="1F2A37"/>
+                            <a:srgbClr val="C04A2A"/>
                           </a:solidFill>
                           <a:latin typeface="Calibri"/>
                         </a:rPr>
@@ -10814,7 +10556,7 @@
                 </a:solidFill>
                 <a:latin typeface="Calibri"/>
               </a:rPr>
-              <a:t>Run-to-run variation is under a millisecond — any improvement I measure from here is real, not random.</a:t>
+              <a:t>Red cells miss the SLA (TTFT &lt; 15 ms, TPOT &lt; 2.5 ms, e2e &lt; 500 ms). Baseline starts failing at L=512 — exactly the chat-app range.</a:t>
             </a:r>
           </a:p>
         </p:txBody>
@@ -11482,7 +11224,7 @@
                           </a:solidFill>
                           <a:latin typeface="Calibri"/>
                         </a:rPr>
-                        <a:t>What it bought us</a:t>
+                        <a:t>What it bought us (per-request)</a:t>
                       </a:r>
                     </a:p>
                   </a:txBody>
@@ -11550,7 +11292,7 @@
                           </a:solidFill>
                           <a:latin typeface="Calibri"/>
                         </a:rPr>
-                        <a:t>17% faster end-to-end, TPOT 17% faster</a:t>
+                        <a:t>end-to-end 17% faster, TPOT 17% faster</a:t>
                       </a:r>
                     </a:p>
                   </a:txBody>
@@ -11618,7 +11360,7 @@
                           </a:solidFill>
                           <a:latin typeface="Calibri"/>
                         </a:rPr>
-                        <a:t>TTFT 40% faster on shared prompts</a:t>
+                        <a:t>TTFT 40% faster on shared prompts (P=2048)</a:t>
                       </a:r>
                     </a:p>
                   </a:txBody>
@@ -11642,7 +11384,7 @@
                           </a:solidFill>
                           <a:latin typeface="Calibri"/>
                         </a:rPr>
-                        <a:t>Continuous batching</a:t>
+                        <a:t>Tensor parallelism (2 GPUs)</a:t>
                       </a:r>
                     </a:p>
                   </a:txBody>
@@ -11686,7 +11428,7 @@
                           </a:solidFill>
                           <a:latin typeface="Calibri"/>
                         </a:rPr>
-                        <a:t>up to 5676 tokens/sec across in-flight requests</a:t>
+                        <a:t>TPOT 14% faster; TTFT roughly flat at chat-app prompt sizes (L ≥ 512)</a:t>
                       </a:r>
                     </a:p>
                   </a:txBody>
@@ -11710,7 +11452,7 @@
                           </a:solidFill>
                           <a:latin typeface="Calibri"/>
                         </a:rPr>
-                        <a:t>Tensor parallelism (2 GPUs)</a:t>
+                        <a:t>Continuous batching</a:t>
                       </a:r>
                     </a:p>
                   </a:txBody>
@@ -11754,7 +11496,7 @@
                           </a:solidFill>
                           <a:latin typeface="Calibri"/>
                         </a:rPr>
-                        <a:t>TPOT 14% faster; TTFT roughly flat at chat-app prompt sizes (L ≥ 512)</a:t>
+                        <a:t>per-request TPOT 4× worse at B=32; not a latency lever — throughput trade only</a:t>
                       </a:r>
                     </a:p>
                   </a:txBody>
@@ -11957,7 +11699,7 @@
                 </a:solidFill>
                 <a:latin typeface="Calibri"/>
               </a:rPr>
-              <a:t>TTFT — three approaches compared</a:t>
+              <a:t>TTFT — baseline vs two levers</a:t>
             </a:r>
           </a:p>
         </p:txBody>
@@ -12182,7 +11924,7 @@
                 </a:solidFill>
                 <a:latin typeface="Calibri"/>
               </a:rPr>
-              <a:t>TPOT — three approaches compared</a:t>
+              <a:t>TPOT — baseline vs two levers</a:t>
             </a:r>
           </a:p>
         </p:txBody>

--- a/talk/deck.pptx
+++ b/talk/deck.pptx
@@ -25,6 +25,9 @@
     <p:sldId id="273" r:id="rId25"/>
     <p:sldId id="274" r:id="rId26"/>
     <p:sldId id="275" r:id="rId27"/>
+    <p:sldId id="276" r:id="rId28"/>
+    <p:sldId id="277" r:id="rId29"/>
+    <p:sldId id="278" r:id="rId30"/>
   </p:sldIdLst>
   <p:sldSz cx="12191695" cy="6858000" type="screen4x3"/>
   <p:notesSz cx="6858000" cy="9144000"/>
@@ -785,19 +788,25 @@
           <a:lstStyle/>
           <a:p>
             <a:r>
-              <a:t>First of three verdict charts. TTFT p90 vs prompt size, three single-GPU configurations against the 15 ms threshold. Shaded region is FAIL.</a:t>
+              <a:t>Baseline on the left, FP8 + prefix caching on the right. Red cells miss the SLA.</a:t>
             </a:r>
           </a:p>
           <a:p/>
           <a:p>
             <a:r>
-              <a:t>Baseline crosses the line at L=1024 (19.6 ms). FP8 holds through L=1500 with margin (16.7, 17.6 ms — borderline at the longest prompts). TP=2 tracks baseline at chat-app prompt sizes — it doesn't help TTFT here.</a:t>
+              <a:t>Baseline starts going red at L=512 (e2e fails) and is fully red at L=1024 and L=1500 (all three metrics fail).</a:t>
             </a:r>
           </a:p>
           <a:p/>
           <a:p>
             <a:r>
-              <a:t>Prefix caching annotation is the safety net: 40% TTFT cut on shared system prompts (slide 11). Where FP8 is borderline at L=1500, caching closes the gap because the chat app's prompts share a long system-prompt prefix.</a:t>
+              <a:t>FP8 + prefix caching is green across every chat-app input length. TTFT compresses to ~7-8 ms (from 10-25 ms). TPOT trims to 2.0-2.4 ms. End-to-end ranges from 396 ms at L=128 to 486 ms at L=1500 — comfortably under the 500 ms target across the whole grid.</a:t>
+            </a:r>
+          </a:p>
+          <a:p/>
+          <a:p>
+            <a:r>
+              <a:t>Methodology: caching combo measured via HTTP harness, which adds ~20 ms overhead per request. Reconciled per-L against the bf16 cache-off harness baseline. Per-L overhead is consistent at 19-21 ms — subtraction is stable.</a:t>
             </a:r>
           </a:p>
         </p:txBody>
@@ -867,19 +876,19 @@
           <a:lstStyle/>
           <a:p>
             <a:r>
-              <a:t>Second of three verdict charts. TPOT mean vs prompt size, threshold 2.5 ms.</a:t>
+              <a:t>Same data as the previous slide, end-to-end metric only. Bars colored: grey for baseline, green for FP8+caching, red where any bar misses the 500 ms SLA threshold (shaded region above).</a:t>
             </a:r>
           </a:p>
           <a:p/>
           <a:p>
             <a:r>
-              <a:t>Baseline starts inside SLA at L=128 (2.34 ms) but crosses out at L=512 onward (2.47–2.90 ms). FP8 holds through L=1500. TP=2 holds through L=1024, borderline at L=1500 (2.51 ms).</a:t>
+              <a:t>Baseline misses SLA at three of four input lengths. FP8 + prefix caching clears the threshold at every input length with margin — the headline visual is that every green bar sits well below the dashed line.</a:t>
             </a:r>
           </a:p>
           <a:p/>
           <a:p>
             <a:r>
-              <a:t>Prefix caching note: caching only skips prefill, so it doesn't affect TPOT. The TPOT story is FP8 (and to a lesser extent TP=2) carrying the load.</a:t>
+              <a:t>Why this works: FP8 attacks per-token weight-load bandwidth (TPOT). Prefix caching skips prefill on shared system prompts (TTFT). Independent bottlenecks, additive wins. The chat app's long system prompt is exactly the workload where prefix caching earns its place.</a:t>
             </a:r>
           </a:p>
         </p:txBody>
@@ -949,25 +958,19 @@
           <a:lstStyle/>
           <a:p>
             <a:r>
-              <a:t>Third of three verdict charts — the headline. End-to-end latency for a 200-token response, threshold 500 ms.</a:t>
+              <a:t>Same baseline, but the combo column is everything-on: FP8 + prefix caching + TP=2 across both Blackwell GPUs.</a:t>
             </a:r>
           </a:p>
           <a:p/>
           <a:p>
             <a:r>
-              <a:t>Baseline crosses out at L=512 (505 ms — 5 ms over) and misses by ~65 and ~103 ms at L=1024 and L=1500. FP8 holds through L=1024 with 30 ms margin, borderline at L=1500 (501 ms — 1 ms over). TP=2 holds through L=1024, fails at L=1500.</a:t>
+              <a:t>All cells green, same as the previous verdict. TTFT shaves another ~1 ms off the FP8+caching numbers; TPOT trims another ~0.02 ms; end-to-end is ~3-5 ms better. TP=2 buys real but marginal additional latency on top of FP8+caching.</a:t>
             </a:r>
           </a:p>
           <a:p/>
           <a:p>
             <a:r>
-              <a:t>Prefix caching note: shared-prompt traffic gets up to 21 ms TTFT savings on top of any single-GPU configuration, which cleanly closes the L=1500 gap for FP8.</a:t>
-            </a:r>
-          </a:p>
-          <a:p/>
-          <a:p>
-            <a:r>
-              <a:t>The headline: FP8 + prefix caching together rescue the SLA across the chat-app prompt range.</a:t>
+              <a:t>Recommendation stays: FP8 + prefix caching in prod. Evaluate TP=2 if TPOT becomes the bottleneck under higher concurrency — but for the chat-app per-request SLA, the two-lever combo is enough.</a:t>
             </a:r>
           </a:p>
         </p:txBody>
@@ -1037,25 +1040,19 @@
           <a:lstStyle/>
           <a:p>
             <a:r>
-              <a:t>Two stories for the VP. Per-request speed on the left, cost per request on the right.</a:t>
+              <a:t>End-to-end view of the everything-on combo. Bars are essentially indistinguishable from the FP8+caching slide — TP=2 trims a few ms but the picture is the same: all green, all under the threshold.</a:t>
             </a:r>
           </a:p>
           <a:p/>
           <a:p>
             <a:r>
-              <a:t>Speed: FP8 cuts end-to-end latency 17% across the prompt grid — measured. Prefix caching cuts up to 40% off TTFT on long shared prompts — measured. Combined, they roughly halve the wait users feel. The combination wasn't directly measured together; the estimate assumes the two attack independent bottlenecks, which they do (FP8 attacks weight bandwidth, prefix caching skips prefill compute entirely).</a:t>
+              <a:t>What the chart makes clear visually: the incremental contribution of TP=2 on top of FP8+caching is below production noise. TP=2 also doubles the GPU count per pod, which is real ops complexity (pod scheduling, NVLink dependency, harder failure recovery).</a:t>
             </a:r>
           </a:p>
           <a:p/>
           <a:p>
             <a:r>
-              <a:t>Cost: 17% less GPU-time per request from FP8 alone means the same GPU pod serves 17% more requests per hour at the same per-request latency budget — directly translatable to lower cost per request on the EKS GPU node pool.</a:t>
-            </a:r>
-          </a:p>
-          <a:p/>
-          <a:p>
-            <a:r>
-              <a:t>Both are config changes. No model retraining, no new dependencies, no ops change. Break-even on day one. The only ongoing discipline is to re-baseline whenever the model, vLLM version, or hardware moves — the harness is set up to make that cheap.</a:t>
+              <a:t>If asked: this is why the recommendation is FP8+caching, not everything-on.</a:t>
             </a:r>
           </a:p>
         </p:txBody>
@@ -1125,31 +1122,31 @@
           <a:lstStyle/>
           <a:p>
             <a:r>
-              <a:t>Every lever has a price; this is the slide where I name them so neither panelist has to dig them out of me. Walk the table top-to-bottom.</a:t>
+              <a:t>Two stories for the VP. Per-request speed on the left, cost per request on the right. Both backed by directly measured FP8 + prefix caching numbers (verdict slides 12-15).</a:t>
             </a:r>
           </a:p>
           <a:p/>
           <a:p>
             <a:r>
-              <a:t>FP8: the upside is real, the risk is GSM8K-style precision-sensitive tasks taking a measurable hit. The mitigation is to run the eval suite on the customer's actual workload before flipping the flag in production, and to keep bf16 as a fallback if anything regresses.</a:t>
+              <a:t>Speed: end-to-end at L=1024 drops from 565 ms to 455 ms with FP8 + prefix caching — that's 110 ms shaved off every request, 19% faster. Measured directly, not estimated.</a:t>
             </a:r>
           </a:p>
           <a:p/>
           <a:p>
             <a:r>
-              <a:t>Prefix caching: only helps when prompts share prefixes. Sizing the KV cache and monitoring hit rate keeps it honest in production.</a:t>
+              <a:t>Cost math: AWS g7e.12xlarge is $8.29 per hour on-demand. That's the instance with 2× RTX PRO 6000 Blackwell — exactly the GPU this work was measured on, so we're not proxying with a different SKU. $8.29 / hr divided by 3600 seconds is $0.00230 per second of GPU time. A baseline 565 ms request costs about $1.30 per thousand. A 455 ms FP8+caching request costs about $1.05 per thousand. That's 25 cents saved per thousand requests, or about $254 per million. At 1 million requests per day — a reasonable production chat-app rate — that's $254/day, $93,000 per pod per year.</a:t>
             </a:r>
           </a:p>
           <a:p/>
           <a:p>
             <a:r>
-              <a:t>Tensor parallel: I keep flagging this — at single-user batch=1 it doesn't move TTFT. The reason it's still worth it is TPOT and the doubled memory headroom for bigger batches. If someone uses it as a TTFT lever they'll be disappointed.</a:t>
+              <a:t>Both are config changes. No model retraining, no new dependencies, no ops change. Break-even on day one. The only ongoing discipline is to re-baseline whenever the model, vLLM version, or hardware moves — the harness is set up to make that cheap.</a:t>
             </a:r>
           </a:p>
           <a:p/>
           <a:p>
             <a:r>
-              <a:t>Concurrency: throughput goes up, per-user latency goes up. The mitigation is to set max_num_seqs from the p90 TTFT we promised, not from the throughput we want.</a:t>
+              <a:t>If pressed on the dollar number: the rate is AWS public list price; an enterprise deployment with reserved capacity would see smaller dollar savings but the same percentage. The $93K is linear in traffic, so 100K requests/day = $9.3K/year, 10M requests/day = $930K/year.</a:t>
             </a:r>
           </a:p>
         </p:txBody>
@@ -1219,13 +1216,31 @@
           <a:lstStyle/>
           <a:p>
             <a:r>
-              <a:t>Five lines, in priority order. A staff engineer reading this should agree with each one.</a:t>
+              <a:t>Every lever has a price; this is the slide where I name them so neither panelist has to dig them out of me. Walk the table top-to-bottom.</a:t>
             </a:r>
           </a:p>
           <a:p/>
           <a:p>
             <a:r>
-              <a:t>Last bullet matters: every claim here is tied to *this* model, *this* engine version, *this* hardware. Re-baseline whenever any of those move. The repo is set up to make that cheap.</a:t>
+              <a:t>FP8: the upside is real, the risk is GSM8K-style precision-sensitive tasks taking a measurable hit. The mitigation is to run the eval suite on the customer's actual workload before flipping the flag in production, and to keep bf16 as a fallback if anything regresses.</a:t>
+            </a:r>
+          </a:p>
+          <a:p/>
+          <a:p>
+            <a:r>
+              <a:t>Prefix caching: only helps when prompts share prefixes. Sizing the KV cache and monitoring hit rate keeps it honest in production.</a:t>
+            </a:r>
+          </a:p>
+          <a:p/>
+          <a:p>
+            <a:r>
+              <a:t>Tensor parallel: I keep flagging this — at single-user batch=1 it doesn't move TTFT. The reason it's still worth it is TPOT and the doubled memory headroom for bigger batches. If someone uses it as a TTFT lever they'll be disappointed.</a:t>
+            </a:r>
+          </a:p>
+          <a:p/>
+          <a:p>
+            <a:r>
+              <a:t>Concurrency: throughput goes up, per-user latency goes up. The mitigation is to set max_num_seqs from the p90 TTFT we promised, not from the throughput we want.</a:t>
             </a:r>
           </a:p>
         </p:txBody>
@@ -1295,55 +1310,113 @@
           <a:lstStyle/>
           <a:p>
             <a:r>
-              <a:t>Anticipated questions:</a:t>
+              <a:t>Five lines, in priority order. A staff engineer reading this should agree with each one.</a:t>
             </a:r>
           </a:p>
           <a:p/>
           <a:p>
             <a:r>
-              <a:t>Q (Tech): Does FP8 still win on Blackwell when bandwidth is much higher? A: Yes — measured. The win is smaller than on L4 because Blackwell's HBM3e and tensor cores already eat much of the bandwidth bottleneck FP8 attacks.</a:t>
+              <a:t>Last bullet matters: every claim here is tied to *this* model, *this* engine version, *this* hardware. Re-baseline whenever any of those move. The repo is set up to make that cheap.</a:t>
+            </a:r>
+          </a:p>
+        </p:txBody>
+      </p:sp>
+      <p:sp>
+        <p:nvSpPr>
+          <p:cNvPr id="4" name="Slide Number Placeholder 3"/>
+          <p:cNvSpPr>
+            <a:spLocks noGrp="1"/>
+          </p:cNvSpPr>
+          <p:nvPr>
+            <p:ph type="sldNum" idx="5" sz="quarter"/>
+          </p:nvPr>
+        </p:nvSpPr>
+        <p:spPr/>
+      </p:sp>
+    </p:spTree>
+  </p:cSld>
+  <p:clrMapOvr>
+    <a:masterClrMapping/>
+  </p:clrMapOvr>
+</p:notes>
+</file>
+
+<file path=ppt/notesSlides/notesSlide19.xml><?xml version="1.0" encoding="utf-8"?>
+<p:notes xmlns:a="http://schemas.openxmlformats.org/drawingml/2006/main" xmlns:p="http://schemas.openxmlformats.org/presentationml/2006/main" xmlns:r="http://schemas.openxmlformats.org/officeDocument/2006/relationships">
+  <p:cSld>
+    <p:spTree>
+      <p:nvGrpSpPr>
+        <p:cNvPr id="1" name=""/>
+        <p:cNvGrpSpPr/>
+        <p:nvPr/>
+      </p:nvGrpSpPr>
+      <p:grpSpPr>
+        <a:xfrm>
+          <a:off x="0" y="0"/>
+          <a:ext cx="0" cy="0"/>
+          <a:chOff x="0" y="0"/>
+          <a:chExt cx="0" cy="0"/>
+        </a:xfrm>
+      </p:grpSpPr>
+      <p:sp>
+        <p:nvSpPr>
+          <p:cNvPr id="2" name="Slide Image Placeholder 1"/>
+          <p:cNvSpPr>
+            <a:spLocks noGrp="1"/>
+          </p:cNvSpPr>
+          <p:nvPr>
+            <p:ph type="sldImg" idx="2"/>
+          </p:nvPr>
+        </p:nvSpPr>
+        <p:spPr/>
+      </p:sp>
+      <p:sp>
+        <p:nvSpPr>
+          <p:cNvPr id="3" name="Notes Placeholder 2"/>
+          <p:cNvSpPr>
+            <a:spLocks noGrp="1"/>
+          </p:cNvSpPr>
+          <p:nvPr>
+            <p:ph type="body" idx="3" sz="quarter"/>
+          </p:nvPr>
+        </p:nvSpPr>
+        <p:spPr/>
+        <p:txBody>
+          <a:bodyPr/>
+          <a:lstStyle/>
+          <a:p>
+            <a:r>
+              <a:t>One-slide summary of the codebase, right before Q&amp;A and the repo link. Two columns: what the pipeline does on the left, what makes the methodology honest on the right.</a:t>
             </a:r>
           </a:p>
           <a:p/>
           <a:p>
             <a:r>
-              <a:t>Q (Tech): What about FP4? A: Blackwell supports it; vLLM/OLMoE compatibility is the limiter. On the roadmap; not measured here.</a:t>
+              <a:t>Key talking points:</a:t>
             </a:r>
           </a:p>
           <a:p/>
           <a:p>
             <a:r>
-              <a:t>Q (Tech): Does FP8 affect MoE routing — which experts fire? A: vLLM's MoE FP8 quantization keeps the router (gating linear) in higher precision by design; only the expert FFN weights are quantized. So expert selection at any given token is identical between bf16 and FP8 — only the math each selected expert does changes precision. This is consistent with the eval results: broad routing instability would have hit MMLU/HellaSwag/ARC, not just GSM8K. GSM8K's bigger drop is consistent with low-precision arithmetic compounding errors in chain-of-thought math, not with a routing change. Caveat: I haven't directly compared expert-fire patterns trace-by-trace between bf16 and FP8 — the claim is from reading vLLM's quantization code path plus the eval shape.</a:t>
+              <a:t>Reproducibility: every number on every slide came from running one of these scripts. The deck itself reads JSON from results/ via talk/numbers.py — re-running the benchmark refreshes the slides without me touching them. That's the discipline that lets the next person re-baseline when the model or hardware changes.</a:t>
             </a:r>
           </a:p>
           <a:p/>
           <a:p>
             <a:r>
-              <a:t>Q (Tech): Tensor parallel vs expert parallel for MoE? A: Out of scope for this talk. EP is the obvious next experiment — expert parallelism specifically targets the MoE structure.</a:t>
+              <a:t>Engine-agnostic harness: scripts/harness/ wraps the vLLM server lifecycle behind an OpenAI-compatible HTTP client. Swap the server launcher and the same benchmarks run against TRT-LLM, SGLang, or anything else with an OpenAI endpoint. That's deliberate — when the next model arrives, the harness doesn't have to be rewritten.</a:t>
             </a:r>
           </a:p>
           <a:p/>
           <a:p>
             <a:r>
-              <a:t>Q (VP): What's the dollar number on $/M tokens? A: Depends on the instance — roughly the throughput ratio at the batching knee, applied to the EKS GPU node pool's cost. Concrete dollar estimate available in a follow-up.</a:t>
+              <a:t>Seed pinning: every benchmark uses seed=42 for prompt generation. Variance across runs is under 1 ms — that's how we can trust small deltas as signal, not noise.</a:t>
             </a:r>
           </a:p>
           <a:p/>
           <a:p>
             <a:r>
-              <a:t>Q (VP): What's the time horizon? A: FP8 + prefix caching this week. TP=2 next sprint. HPA tuning is ongoing.</a:t>
-            </a:r>
-          </a:p>
-          <a:p/>
-          <a:p>
-            <a:r>
-              <a:t>Q (VP): What if the model changes? A: The harness is engine- and model-agnostic. Re-baseline runs in ~30 minutes.</a:t>
-            </a:r>
-          </a:p>
-          <a:p/>
-          <a:p>
-            <a:r>
-              <a:t>Roadmap if asked 'what would another sprint buy us?': expert-parallel sharding (cross-GPU MoE), FP4 once vLLM/OLMoE wiring lands, speculative decoding with a small draft model for chat workloads, tuning to the actual customer prompt distribution, and continuous-batching policy tuning under bursty real traffic.</a:t>
+              <a:t>If asked: code is on the next slide, scan the QR.</a:t>
             </a:r>
           </a:p>
         </p:txBody>
@@ -1420,6 +1493,226 @@
           <a:p>
             <a:r>
               <a:t>Don't dwell — the rest of the talk is the answer.</a:t>
+            </a:r>
+          </a:p>
+        </p:txBody>
+      </p:sp>
+      <p:sp>
+        <p:nvSpPr>
+          <p:cNvPr id="4" name="Slide Number Placeholder 3"/>
+          <p:cNvSpPr>
+            <a:spLocks noGrp="1"/>
+          </p:cNvSpPr>
+          <p:nvPr>
+            <p:ph type="sldNum" idx="5" sz="quarter"/>
+          </p:nvPr>
+        </p:nvSpPr>
+        <p:spPr/>
+      </p:sp>
+    </p:spTree>
+  </p:cSld>
+  <p:clrMapOvr>
+    <a:masterClrMapping/>
+  </p:clrMapOvr>
+</p:notes>
+</file>
+
+<file path=ppt/notesSlides/notesSlide20.xml><?xml version="1.0" encoding="utf-8"?>
+<p:notes xmlns:a="http://schemas.openxmlformats.org/drawingml/2006/main" xmlns:p="http://schemas.openxmlformats.org/presentationml/2006/main" xmlns:r="http://schemas.openxmlformats.org/officeDocument/2006/relationships">
+  <p:cSld>
+    <p:spTree>
+      <p:nvGrpSpPr>
+        <p:cNvPr id="1" name=""/>
+        <p:cNvGrpSpPr/>
+        <p:nvPr/>
+      </p:nvGrpSpPr>
+      <p:grpSpPr>
+        <a:xfrm>
+          <a:off x="0" y="0"/>
+          <a:ext cx="0" cy="0"/>
+          <a:chOff x="0" y="0"/>
+          <a:chExt cx="0" cy="0"/>
+        </a:xfrm>
+      </p:grpSpPr>
+      <p:sp>
+        <p:nvSpPr>
+          <p:cNvPr id="2" name="Slide Image Placeholder 1"/>
+          <p:cNvSpPr>
+            <a:spLocks noGrp="1"/>
+          </p:cNvSpPr>
+          <p:nvPr>
+            <p:ph type="sldImg" idx="2"/>
+          </p:nvPr>
+        </p:nvSpPr>
+        <p:spPr/>
+      </p:sp>
+      <p:sp>
+        <p:nvSpPr>
+          <p:cNvPr id="3" name="Notes Placeholder 2"/>
+          <p:cNvSpPr>
+            <a:spLocks noGrp="1"/>
+          </p:cNvSpPr>
+          <p:nvPr>
+            <p:ph type="body" idx="3" sz="quarter"/>
+          </p:nvPr>
+        </p:nvSpPr>
+        <p:spPr/>
+        <p:txBody>
+          <a:bodyPr/>
+          <a:lstStyle/>
+          <a:p>
+            <a:r>
+              <a:t>QR slide. Lingers while the panel scans. The repo includes:</a:t>
+            </a:r>
+          </a:p>
+          <a:p/>
+          <a:p>
+            <a:r>
+              <a:t>- Every script that produced every number in the deck</a:t>
+            </a:r>
+          </a:p>
+          <a:p>
+            <a:r>
+              <a:t>- All raw JSON measurements under results/</a:t>
+            </a:r>
+          </a:p>
+          <a:p>
+            <a:r>
+              <a:t>- The deck itself (build_deck.py + talk/numbers.py)</a:t>
+            </a:r>
+          </a:p>
+          <a:p>
+            <a:r>
+              <a:t>- README walks through reproduction step by step</a:t>
+            </a:r>
+          </a:p>
+          <a:p>
+            <a:r>
+              <a:t>- MIT-licensed; clone, fork, send PRs</a:t>
+            </a:r>
+          </a:p>
+          <a:p/>
+          <a:p>
+            <a:r>
+              <a:t>Stay on this slide for ~10 seconds before transitioning to Q&amp;A so anyone scanning has time to capture the link.</a:t>
+            </a:r>
+          </a:p>
+        </p:txBody>
+      </p:sp>
+      <p:sp>
+        <p:nvSpPr>
+          <p:cNvPr id="4" name="Slide Number Placeholder 3"/>
+          <p:cNvSpPr>
+            <a:spLocks noGrp="1"/>
+          </p:cNvSpPr>
+          <p:nvPr>
+            <p:ph type="sldNum" idx="5" sz="quarter"/>
+          </p:nvPr>
+        </p:nvSpPr>
+        <p:spPr/>
+      </p:sp>
+    </p:spTree>
+  </p:cSld>
+  <p:clrMapOvr>
+    <a:masterClrMapping/>
+  </p:clrMapOvr>
+</p:notes>
+</file>
+
+<file path=ppt/notesSlides/notesSlide21.xml><?xml version="1.0" encoding="utf-8"?>
+<p:notes xmlns:a="http://schemas.openxmlformats.org/drawingml/2006/main" xmlns:p="http://schemas.openxmlformats.org/presentationml/2006/main" xmlns:r="http://schemas.openxmlformats.org/officeDocument/2006/relationships">
+  <p:cSld>
+    <p:spTree>
+      <p:nvGrpSpPr>
+        <p:cNvPr id="1" name=""/>
+        <p:cNvGrpSpPr/>
+        <p:nvPr/>
+      </p:nvGrpSpPr>
+      <p:grpSpPr>
+        <a:xfrm>
+          <a:off x="0" y="0"/>
+          <a:ext cx="0" cy="0"/>
+          <a:chOff x="0" y="0"/>
+          <a:chExt cx="0" cy="0"/>
+        </a:xfrm>
+      </p:grpSpPr>
+      <p:sp>
+        <p:nvSpPr>
+          <p:cNvPr id="2" name="Slide Image Placeholder 1"/>
+          <p:cNvSpPr>
+            <a:spLocks noGrp="1"/>
+          </p:cNvSpPr>
+          <p:nvPr>
+            <p:ph type="sldImg" idx="2"/>
+          </p:nvPr>
+        </p:nvSpPr>
+        <p:spPr/>
+      </p:sp>
+      <p:sp>
+        <p:nvSpPr>
+          <p:cNvPr id="3" name="Notes Placeholder 2"/>
+          <p:cNvSpPr>
+            <a:spLocks noGrp="1"/>
+          </p:cNvSpPr>
+          <p:nvPr>
+            <p:ph type="body" idx="3" sz="quarter"/>
+          </p:nvPr>
+        </p:nvSpPr>
+        <p:spPr/>
+        <p:txBody>
+          <a:bodyPr/>
+          <a:lstStyle/>
+          <a:p>
+            <a:r>
+              <a:t>Anticipated questions:</a:t>
+            </a:r>
+          </a:p>
+          <a:p/>
+          <a:p>
+            <a:r>
+              <a:t>Q (Tech): Does FP8 still win on Blackwell when bandwidth is much higher? A: Yes — measured. The win is smaller than on L4 because Blackwell's HBM3e and tensor cores already eat much of the bandwidth bottleneck FP8 attacks.</a:t>
+            </a:r>
+          </a:p>
+          <a:p/>
+          <a:p>
+            <a:r>
+              <a:t>Q (Tech): What about FP4? A: Blackwell supports it; vLLM/OLMoE compatibility is the limiter. On the roadmap; not measured here.</a:t>
+            </a:r>
+          </a:p>
+          <a:p/>
+          <a:p>
+            <a:r>
+              <a:t>Q (Tech): Does FP8 affect MoE routing — which experts fire? A: vLLM's MoE FP8 quantization keeps the router (gating linear) in higher precision by design; only the expert FFN weights are quantized. So expert selection at any given token is identical between bf16 and FP8 — only the math each selected expert does changes precision. This is consistent with the eval results: broad routing instability would have hit MMLU/HellaSwag/ARC, not just GSM8K. GSM8K's bigger drop is consistent with low-precision arithmetic compounding errors in chain-of-thought math, not with a routing change. Caveat: I haven't directly compared expert-fire patterns trace-by-trace between bf16 and FP8 — the claim is from reading vLLM's quantization code path plus the eval shape.</a:t>
+            </a:r>
+          </a:p>
+          <a:p/>
+          <a:p>
+            <a:r>
+              <a:t>Q (Tech): Tensor parallel vs expert parallel for MoE? A: Out of scope for this talk. EP is the obvious next experiment — expert parallelism specifically targets the MoE structure.</a:t>
+            </a:r>
+          </a:p>
+          <a:p/>
+          <a:p>
+            <a:r>
+              <a:t>Q (VP): What's the dollar number on $/M tokens? A: Depends on the instance — roughly the throughput ratio at the batching knee, applied to the EKS GPU node pool's cost. Concrete dollar estimate available in a follow-up.</a:t>
+            </a:r>
+          </a:p>
+          <a:p/>
+          <a:p>
+            <a:r>
+              <a:t>Q (VP): What's the time horizon? A: FP8 + prefix caching this week. TP=2 next sprint. HPA tuning is ongoing.</a:t>
+            </a:r>
+          </a:p>
+          <a:p/>
+          <a:p>
+            <a:r>
+              <a:t>Q (VP): What if the model changes? A: The harness is engine- and model-agnostic. Re-baseline runs in ~30 minutes.</a:t>
+            </a:r>
+          </a:p>
+          <a:p/>
+          <a:p>
+            <a:r>
+              <a:t>Roadmap if asked 'what would another sprint buy us?': expert-parallel sharding (cross-GPU MoE), FP4 once vLLM/OLMoE wiring lands, speculative decoding with a small draft model for chat workloads, tuning to the actual customer prompt distribution, and continuous-batching policy tuning under bursty real traffic.</a:t>
             </a:r>
           </a:p>
         </p:txBody>
@@ -5762,7 +6055,7 @@
                 </a:solidFill>
                 <a:latin typeface="Calibri"/>
               </a:rPr>
-              <a:t>SLA verdict — TTFT</a:t>
+              <a:t>SLA verdict — FP8 + prefix caching</a:t>
             </a:r>
           </a:p>
         </p:txBody>
@@ -5810,30 +6103,963 @@
           </a:p>
         </p:txBody>
       </p:sp>
-      <p:pic>
-        <p:nvPicPr>
-          <p:cNvPr id="5" name="Picture 4" descr="appendix_sla_verdict_ttft.png"/>
-          <p:cNvPicPr>
-            <a:picLocks noChangeAspect="1"/>
-          </p:cNvPicPr>
-          <p:nvPr/>
-        </p:nvPicPr>
-        <p:blipFill>
-          <a:blip r:embed="rId2"/>
-          <a:stretch>
-            <a:fillRect/>
-          </a:stretch>
-        </p:blipFill>
-        <p:spPr>
-          <a:xfrm>
-            <a:off x="1280160" y="1783080"/>
-            <a:ext cx="9601200" cy="4434840"/>
-          </a:xfrm>
-          <a:prstGeom prst="rect">
-            <a:avLst/>
-          </a:prstGeom>
-        </p:spPr>
-      </p:pic>
+      <p:graphicFrame>
+        <p:nvGraphicFramePr>
+          <p:cNvPr id="5" name="Table 4"/>
+          <p:cNvGraphicFramePr>
+            <a:graphicFrameLocks noGrp="1"/>
+          </p:cNvGraphicFramePr>
+          <p:nvPr/>
+        </p:nvGraphicFramePr>
+        <p:xfrm>
+          <a:off x="365760" y="1828800"/>
+          <a:ext cx="11430000" cy="3291840"/>
+        </p:xfrm>
+        <a:graphic>
+          <a:graphicData uri="http://schemas.openxmlformats.org/drawingml/2006/table">
+            <a:tbl>
+              <a:tblPr firstRow="1" bandRow="1">
+                <a:tableStyleId>{5C22544A-7EE6-4342-B048-85BDC9FD1C3A}</a:tableStyleId>
+              </a:tblPr>
+              <a:tblGrid>
+                <a:gridCol w="1463040"/>
+                <a:gridCol w="1463040"/>
+                <a:gridCol w="1280160"/>
+                <a:gridCol w="1554480"/>
+                <a:gridCol w="1463040"/>
+                <a:gridCol w="1280160"/>
+                <a:gridCol w="2926080"/>
+              </a:tblGrid>
+              <a:tr h="548640">
+                <a:tc>
+                  <a:txBody>
+                    <a:bodyPr/>
+                    <a:lstStyle/>
+                    <a:p>
+                      <a:r>
+                        <a:rPr sz="1500" b="1">
+                          <a:solidFill>
+                            <a:srgbClr val="555F6E"/>
+                          </a:solidFill>
+                          <a:latin typeface="Calibri"/>
+                        </a:rPr>
+                        <a:t>Input length</a:t>
+                      </a:r>
+                    </a:p>
+                  </a:txBody>
+                  <a:tcPr marL="60000" marR="60000" marT="40000" marB="40000" anchor="ctr">
+                    <a:solidFill>
+                      <a:srgbClr val="F2F4F7"/>
+                    </a:solidFill>
+                  </a:tcPr>
+                </a:tc>
+                <a:tc>
+                  <a:txBody>
+                    <a:bodyPr/>
+                    <a:lstStyle/>
+                    <a:p>
+                      <a:r>
+                        <a:rPr sz="1500" b="1">
+                          <a:solidFill>
+                            <a:srgbClr val="555F6E"/>
+                          </a:solidFill>
+                          <a:latin typeface="Calibri"/>
+                        </a:rPr>
+                        <a:t>baseline</a:t>
+                      </a:r>
+                    </a:p>
+                  </a:txBody>
+                  <a:tcPr marL="60000" marR="60000" marT="40000" marB="40000" anchor="ctr">
+                    <a:solidFill>
+                      <a:srgbClr val="F2F4F7"/>
+                    </a:solidFill>
+                  </a:tcPr>
+                </a:tc>
+                <a:tc>
+                  <a:txBody>
+                    <a:bodyPr/>
+                    <a:lstStyle/>
+                    <a:p>
+                      <a:r>
+                        <a:rPr sz="1500" b="1">
+                          <a:solidFill>
+                            <a:srgbClr val="555F6E"/>
+                          </a:solidFill>
+                          <a:latin typeface="Calibri"/>
+                        </a:rPr>
+                        <a:t>baseline</a:t>
+                      </a:r>
+                    </a:p>
+                  </a:txBody>
+                  <a:tcPr marL="60000" marR="60000" marT="40000" marB="40000" anchor="ctr">
+                    <a:solidFill>
+                      <a:srgbClr val="F2F4F7"/>
+                    </a:solidFill>
+                  </a:tcPr>
+                </a:tc>
+                <a:tc>
+                  <a:txBody>
+                    <a:bodyPr/>
+                    <a:lstStyle/>
+                    <a:p>
+                      <a:r>
+                        <a:rPr sz="1500" b="1">
+                          <a:solidFill>
+                            <a:srgbClr val="555F6E"/>
+                          </a:solidFill>
+                          <a:latin typeface="Calibri"/>
+                        </a:rPr>
+                        <a:t>baseline</a:t>
+                      </a:r>
+                    </a:p>
+                  </a:txBody>
+                  <a:tcPr marL="60000" marR="60000" marT="40000" marB="40000" anchor="ctr">
+                    <a:solidFill>
+                      <a:srgbClr val="F2F4F7"/>
+                    </a:solidFill>
+                  </a:tcPr>
+                </a:tc>
+                <a:tc>
+                  <a:txBody>
+                    <a:bodyPr/>
+                    <a:lstStyle/>
+                    <a:p>
+                      <a:r>
+                        <a:rPr sz="1500" b="1">
+                          <a:solidFill>
+                            <a:srgbClr val="555F6E"/>
+                          </a:solidFill>
+                          <a:latin typeface="Calibri"/>
+                        </a:rPr>
+                        <a:t>FP8 + prefix caching</a:t>
+                      </a:r>
+                    </a:p>
+                  </a:txBody>
+                  <a:tcPr marL="60000" marR="60000" marT="40000" marB="40000" anchor="ctr">
+                    <a:solidFill>
+                      <a:srgbClr val="F2F4F7"/>
+                    </a:solidFill>
+                  </a:tcPr>
+                </a:tc>
+                <a:tc>
+                  <a:txBody>
+                    <a:bodyPr/>
+                    <a:lstStyle/>
+                    <a:p>
+                      <a:r>
+                        <a:rPr sz="1500" b="1">
+                          <a:solidFill>
+                            <a:srgbClr val="555F6E"/>
+                          </a:solidFill>
+                          <a:latin typeface="Calibri"/>
+                        </a:rPr>
+                        <a:t>FP8 + prefix caching</a:t>
+                      </a:r>
+                    </a:p>
+                  </a:txBody>
+                  <a:tcPr marL="60000" marR="60000" marT="40000" marB="40000" anchor="ctr">
+                    <a:solidFill>
+                      <a:srgbClr val="F2F4F7"/>
+                    </a:solidFill>
+                  </a:tcPr>
+                </a:tc>
+                <a:tc>
+                  <a:txBody>
+                    <a:bodyPr/>
+                    <a:lstStyle/>
+                    <a:p>
+                      <a:r>
+                        <a:rPr sz="1500" b="1">
+                          <a:solidFill>
+                            <a:srgbClr val="555F6E"/>
+                          </a:solidFill>
+                          <a:latin typeface="Calibri"/>
+                        </a:rPr>
+                        <a:t>FP8 + prefix caching</a:t>
+                      </a:r>
+                    </a:p>
+                  </a:txBody>
+                  <a:tcPr marL="60000" marR="60000" marT="40000" marB="40000" anchor="ctr">
+                    <a:solidFill>
+                      <a:srgbClr val="F2F4F7"/>
+                    </a:solidFill>
+                  </a:tcPr>
+                </a:tc>
+              </a:tr>
+              <a:tr h="548640">
+                <a:tc>
+                  <a:txBody>
+                    <a:bodyPr/>
+                    <a:lstStyle/>
+                    <a:p/>
+                  </a:txBody>
+                  <a:tcPr marL="60000" marR="60000" marT="40000" marB="40000" anchor="ctr">
+                    <a:solidFill>
+                      <a:srgbClr val="FFFFFF"/>
+                    </a:solidFill>
+                  </a:tcPr>
+                </a:tc>
+                <a:tc>
+                  <a:txBody>
+                    <a:bodyPr/>
+                    <a:lstStyle/>
+                    <a:p>
+                      <a:r>
+                        <a:rPr sz="1500" b="0">
+                          <a:solidFill>
+                            <a:srgbClr val="1F2A37"/>
+                          </a:solidFill>
+                          <a:latin typeface="Calibri"/>
+                        </a:rPr>
+                        <a:t>TTFT</a:t>
+                      </a:r>
+                    </a:p>
+                  </a:txBody>
+                  <a:tcPr marL="60000" marR="60000" marT="40000" marB="40000" anchor="ctr">
+                    <a:solidFill>
+                      <a:srgbClr val="FFFFFF"/>
+                    </a:solidFill>
+                  </a:tcPr>
+                </a:tc>
+                <a:tc>
+                  <a:txBody>
+                    <a:bodyPr/>
+                    <a:lstStyle/>
+                    <a:p>
+                      <a:r>
+                        <a:rPr sz="1500" b="0">
+                          <a:solidFill>
+                            <a:srgbClr val="1F2A37"/>
+                          </a:solidFill>
+                          <a:latin typeface="Calibri"/>
+                        </a:rPr>
+                        <a:t>TPOT</a:t>
+                      </a:r>
+                    </a:p>
+                  </a:txBody>
+                  <a:tcPr marL="60000" marR="60000" marT="40000" marB="40000" anchor="ctr">
+                    <a:solidFill>
+                      <a:srgbClr val="FFFFFF"/>
+                    </a:solidFill>
+                  </a:tcPr>
+                </a:tc>
+                <a:tc>
+                  <a:txBody>
+                    <a:bodyPr/>
+                    <a:lstStyle/>
+                    <a:p>
+                      <a:r>
+                        <a:rPr sz="1500" b="0">
+                          <a:solidFill>
+                            <a:srgbClr val="1F2A37"/>
+                          </a:solidFill>
+                          <a:latin typeface="Calibri"/>
+                        </a:rPr>
+                        <a:t>e2e</a:t>
+                      </a:r>
+                    </a:p>
+                  </a:txBody>
+                  <a:tcPr marL="60000" marR="60000" marT="40000" marB="40000" anchor="ctr">
+                    <a:solidFill>
+                      <a:srgbClr val="FFFFFF"/>
+                    </a:solidFill>
+                  </a:tcPr>
+                </a:tc>
+                <a:tc>
+                  <a:txBody>
+                    <a:bodyPr/>
+                    <a:lstStyle/>
+                    <a:p>
+                      <a:r>
+                        <a:rPr sz="1500" b="0">
+                          <a:solidFill>
+                            <a:srgbClr val="1F2A37"/>
+                          </a:solidFill>
+                          <a:latin typeface="Calibri"/>
+                        </a:rPr>
+                        <a:t>TTFT</a:t>
+                      </a:r>
+                    </a:p>
+                  </a:txBody>
+                  <a:tcPr marL="60000" marR="60000" marT="40000" marB="40000" anchor="ctr">
+                    <a:solidFill>
+                      <a:srgbClr val="FFFFFF"/>
+                    </a:solidFill>
+                  </a:tcPr>
+                </a:tc>
+                <a:tc>
+                  <a:txBody>
+                    <a:bodyPr/>
+                    <a:lstStyle/>
+                    <a:p>
+                      <a:r>
+                        <a:rPr sz="1500" b="0">
+                          <a:solidFill>
+                            <a:srgbClr val="1F2A37"/>
+                          </a:solidFill>
+                          <a:latin typeface="Calibri"/>
+                        </a:rPr>
+                        <a:t>TPOT</a:t>
+                      </a:r>
+                    </a:p>
+                  </a:txBody>
+                  <a:tcPr marL="60000" marR="60000" marT="40000" marB="40000" anchor="ctr">
+                    <a:solidFill>
+                      <a:srgbClr val="FFFFFF"/>
+                    </a:solidFill>
+                  </a:tcPr>
+                </a:tc>
+                <a:tc>
+                  <a:txBody>
+                    <a:bodyPr/>
+                    <a:lstStyle/>
+                    <a:p>
+                      <a:r>
+                        <a:rPr sz="1500" b="0">
+                          <a:solidFill>
+                            <a:srgbClr val="1F2A37"/>
+                          </a:solidFill>
+                          <a:latin typeface="Calibri"/>
+                        </a:rPr>
+                        <a:t>e2e</a:t>
+                      </a:r>
+                    </a:p>
+                  </a:txBody>
+                  <a:tcPr marL="60000" marR="60000" marT="40000" marB="40000" anchor="ctr">
+                    <a:solidFill>
+                      <a:srgbClr val="FFFFFF"/>
+                    </a:solidFill>
+                  </a:tcPr>
+                </a:tc>
+              </a:tr>
+              <a:tr h="548640">
+                <a:tc>
+                  <a:txBody>
+                    <a:bodyPr/>
+                    <a:lstStyle/>
+                    <a:p>
+                      <a:r>
+                        <a:rPr sz="1500" b="0">
+                          <a:solidFill>
+                            <a:srgbClr val="1F2A37"/>
+                          </a:solidFill>
+                          <a:latin typeface="Calibri"/>
+                        </a:rPr>
+                        <a:t>128</a:t>
+                      </a:r>
+                    </a:p>
+                  </a:txBody>
+                  <a:tcPr marL="60000" marR="60000" marT="40000" marB="40000" anchor="ctr">
+                    <a:solidFill>
+                      <a:srgbClr val="FAFBFC"/>
+                    </a:solidFill>
+                  </a:tcPr>
+                </a:tc>
+                <a:tc>
+                  <a:txBody>
+                    <a:bodyPr/>
+                    <a:lstStyle/>
+                    <a:p>
+                      <a:r>
+                        <a:rPr sz="1500" b="0">
+                          <a:solidFill>
+                            <a:srgbClr val="1F2A37"/>
+                          </a:solidFill>
+                          <a:latin typeface="Calibri"/>
+                        </a:rPr>
+                        <a:t>10.5</a:t>
+                      </a:r>
+                    </a:p>
+                  </a:txBody>
+                  <a:tcPr marL="60000" marR="60000" marT="40000" marB="40000" anchor="ctr">
+                    <a:solidFill>
+                      <a:srgbClr val="FAFBFC"/>
+                    </a:solidFill>
+                  </a:tcPr>
+                </a:tc>
+                <a:tc>
+                  <a:txBody>
+                    <a:bodyPr/>
+                    <a:lstStyle/>
+                    <a:p>
+                      <a:r>
+                        <a:rPr sz="1500" b="0">
+                          <a:solidFill>
+                            <a:srgbClr val="1F2A37"/>
+                          </a:solidFill>
+                          <a:latin typeface="Calibri"/>
+                        </a:rPr>
+                        <a:t>2.34</a:t>
+                      </a:r>
+                    </a:p>
+                  </a:txBody>
+                  <a:tcPr marL="60000" marR="60000" marT="40000" marB="40000" anchor="ctr">
+                    <a:solidFill>
+                      <a:srgbClr val="FAFBFC"/>
+                    </a:solidFill>
+                  </a:tcPr>
+                </a:tc>
+                <a:tc>
+                  <a:txBody>
+                    <a:bodyPr/>
+                    <a:lstStyle/>
+                    <a:p>
+                      <a:r>
+                        <a:rPr sz="1500" b="0">
+                          <a:solidFill>
+                            <a:srgbClr val="1F2A37"/>
+                          </a:solidFill>
+                          <a:latin typeface="Calibri"/>
+                        </a:rPr>
+                        <a:t>476</a:t>
+                      </a:r>
+                    </a:p>
+                  </a:txBody>
+                  <a:tcPr marL="60000" marR="60000" marT="40000" marB="40000" anchor="ctr">
+                    <a:solidFill>
+                      <a:srgbClr val="FAFBFC"/>
+                    </a:solidFill>
+                  </a:tcPr>
+                </a:tc>
+                <a:tc>
+                  <a:txBody>
+                    <a:bodyPr/>
+                    <a:lstStyle/>
+                    <a:p>
+                      <a:r>
+                        <a:rPr sz="1500" b="0">
+                          <a:solidFill>
+                            <a:srgbClr val="1F2A37"/>
+                          </a:solidFill>
+                          <a:latin typeface="Calibri"/>
+                        </a:rPr>
+                        <a:t>7.3</a:t>
+                      </a:r>
+                    </a:p>
+                  </a:txBody>
+                  <a:tcPr marL="60000" marR="60000" marT="40000" marB="40000" anchor="ctr">
+                    <a:solidFill>
+                      <a:srgbClr val="FAFBFC"/>
+                    </a:solidFill>
+                  </a:tcPr>
+                </a:tc>
+                <a:tc>
+                  <a:txBody>
+                    <a:bodyPr/>
+                    <a:lstStyle/>
+                    <a:p>
+                      <a:r>
+                        <a:rPr sz="1500" b="0">
+                          <a:solidFill>
+                            <a:srgbClr val="1F2A37"/>
+                          </a:solidFill>
+                          <a:latin typeface="Calibri"/>
+                        </a:rPr>
+                        <a:t>1.95</a:t>
+                      </a:r>
+                    </a:p>
+                  </a:txBody>
+                  <a:tcPr marL="60000" marR="60000" marT="40000" marB="40000" anchor="ctr">
+                    <a:solidFill>
+                      <a:srgbClr val="FAFBFC"/>
+                    </a:solidFill>
+                  </a:tcPr>
+                </a:tc>
+                <a:tc>
+                  <a:txBody>
+                    <a:bodyPr/>
+                    <a:lstStyle/>
+                    <a:p>
+                      <a:r>
+                        <a:rPr sz="1500" b="0">
+                          <a:solidFill>
+                            <a:srgbClr val="1F2A37"/>
+                          </a:solidFill>
+                          <a:latin typeface="Calibri"/>
+                        </a:rPr>
+                        <a:t>396</a:t>
+                      </a:r>
+                    </a:p>
+                  </a:txBody>
+                  <a:tcPr marL="60000" marR="60000" marT="40000" marB="40000" anchor="ctr">
+                    <a:solidFill>
+                      <a:srgbClr val="FAFBFC"/>
+                    </a:solidFill>
+                  </a:tcPr>
+                </a:tc>
+              </a:tr>
+              <a:tr h="548640">
+                <a:tc>
+                  <a:txBody>
+                    <a:bodyPr/>
+                    <a:lstStyle/>
+                    <a:p>
+                      <a:r>
+                        <a:rPr sz="1500" b="0">
+                          <a:solidFill>
+                            <a:srgbClr val="1F2A37"/>
+                          </a:solidFill>
+                          <a:latin typeface="Calibri"/>
+                        </a:rPr>
+                        <a:t>512</a:t>
+                      </a:r>
+                    </a:p>
+                  </a:txBody>
+                  <a:tcPr marL="60000" marR="60000" marT="40000" marB="40000" anchor="ctr">
+                    <a:solidFill>
+                      <a:srgbClr val="FFFFFF"/>
+                    </a:solidFill>
+                  </a:tcPr>
+                </a:tc>
+                <a:tc>
+                  <a:txBody>
+                    <a:bodyPr/>
+                    <a:lstStyle/>
+                    <a:p>
+                      <a:r>
+                        <a:rPr sz="1500" b="0">
+                          <a:solidFill>
+                            <a:srgbClr val="1F2A37"/>
+                          </a:solidFill>
+                          <a:latin typeface="Calibri"/>
+                        </a:rPr>
+                        <a:t>13.8</a:t>
+                      </a:r>
+                    </a:p>
+                  </a:txBody>
+                  <a:tcPr marL="60000" marR="60000" marT="40000" marB="40000" anchor="ctr">
+                    <a:solidFill>
+                      <a:srgbClr val="FFFFFF"/>
+                    </a:solidFill>
+                  </a:tcPr>
+                </a:tc>
+                <a:tc>
+                  <a:txBody>
+                    <a:bodyPr/>
+                    <a:lstStyle/>
+                    <a:p>
+                      <a:r>
+                        <a:rPr sz="1500" b="0">
+                          <a:solidFill>
+                            <a:srgbClr val="1F2A37"/>
+                          </a:solidFill>
+                          <a:latin typeface="Calibri"/>
+                        </a:rPr>
+                        <a:t>2.47</a:t>
+                      </a:r>
+                    </a:p>
+                  </a:txBody>
+                  <a:tcPr marL="60000" marR="60000" marT="40000" marB="40000" anchor="ctr">
+                    <a:solidFill>
+                      <a:srgbClr val="FFFFFF"/>
+                    </a:solidFill>
+                  </a:tcPr>
+                </a:tc>
+                <a:tc>
+                  <a:txBody>
+                    <a:bodyPr/>
+                    <a:lstStyle/>
+                    <a:p>
+                      <a:r>
+                        <a:rPr sz="1500" b="1">
+                          <a:solidFill>
+                            <a:srgbClr val="C04A2A"/>
+                          </a:solidFill>
+                          <a:latin typeface="Calibri"/>
+                        </a:rPr>
+                        <a:t>505</a:t>
+                      </a:r>
+                    </a:p>
+                  </a:txBody>
+                  <a:tcPr marL="60000" marR="60000" marT="40000" marB="40000" anchor="ctr">
+                    <a:solidFill>
+                      <a:srgbClr val="FFFFFF"/>
+                    </a:solidFill>
+                  </a:tcPr>
+                </a:tc>
+                <a:tc>
+                  <a:txBody>
+                    <a:bodyPr/>
+                    <a:lstStyle/>
+                    <a:p>
+                      <a:r>
+                        <a:rPr sz="1500" b="0">
+                          <a:solidFill>
+                            <a:srgbClr val="1F2A37"/>
+                          </a:solidFill>
+                          <a:latin typeface="Calibri"/>
+                        </a:rPr>
+                        <a:t>7.5</a:t>
+                      </a:r>
+                    </a:p>
+                  </a:txBody>
+                  <a:tcPr marL="60000" marR="60000" marT="40000" marB="40000" anchor="ctr">
+                    <a:solidFill>
+                      <a:srgbClr val="FFFFFF"/>
+                    </a:solidFill>
+                  </a:tcPr>
+                </a:tc>
+                <a:tc>
+                  <a:txBody>
+                    <a:bodyPr/>
+                    <a:lstStyle/>
+                    <a:p>
+                      <a:r>
+                        <a:rPr sz="1500" b="0">
+                          <a:solidFill>
+                            <a:srgbClr val="1F2A37"/>
+                          </a:solidFill>
+                          <a:latin typeface="Calibri"/>
+                        </a:rPr>
+                        <a:t>2.08</a:t>
+                      </a:r>
+                    </a:p>
+                  </a:txBody>
+                  <a:tcPr marL="60000" marR="60000" marT="40000" marB="40000" anchor="ctr">
+                    <a:solidFill>
+                      <a:srgbClr val="FFFFFF"/>
+                    </a:solidFill>
+                  </a:tcPr>
+                </a:tc>
+                <a:tc>
+                  <a:txBody>
+                    <a:bodyPr/>
+                    <a:lstStyle/>
+                    <a:p>
+                      <a:r>
+                        <a:rPr sz="1500" b="0">
+                          <a:solidFill>
+                            <a:srgbClr val="1F2A37"/>
+                          </a:solidFill>
+                          <a:latin typeface="Calibri"/>
+                        </a:rPr>
+                        <a:t>421</a:t>
+                      </a:r>
+                    </a:p>
+                  </a:txBody>
+                  <a:tcPr marL="60000" marR="60000" marT="40000" marB="40000" anchor="ctr">
+                    <a:solidFill>
+                      <a:srgbClr val="FFFFFF"/>
+                    </a:solidFill>
+                  </a:tcPr>
+                </a:tc>
+              </a:tr>
+              <a:tr h="548640">
+                <a:tc>
+                  <a:txBody>
+                    <a:bodyPr/>
+                    <a:lstStyle/>
+                    <a:p>
+                      <a:r>
+                        <a:rPr sz="1500" b="0">
+                          <a:solidFill>
+                            <a:srgbClr val="1F2A37"/>
+                          </a:solidFill>
+                          <a:latin typeface="Calibri"/>
+                        </a:rPr>
+                        <a:t>1024</a:t>
+                      </a:r>
+                    </a:p>
+                  </a:txBody>
+                  <a:tcPr marL="60000" marR="60000" marT="40000" marB="40000" anchor="ctr">
+                    <a:solidFill>
+                      <a:srgbClr val="FAFBFC"/>
+                    </a:solidFill>
+                  </a:tcPr>
+                </a:tc>
+                <a:tc>
+                  <a:txBody>
+                    <a:bodyPr/>
+                    <a:lstStyle/>
+                    <a:p>
+                      <a:r>
+                        <a:rPr sz="1500" b="1">
+                          <a:solidFill>
+                            <a:srgbClr val="C04A2A"/>
+                          </a:solidFill>
+                          <a:latin typeface="Calibri"/>
+                        </a:rPr>
+                        <a:t>19.6</a:t>
+                      </a:r>
+                    </a:p>
+                  </a:txBody>
+                  <a:tcPr marL="60000" marR="60000" marT="40000" marB="40000" anchor="ctr">
+                    <a:solidFill>
+                      <a:srgbClr val="FAFBFC"/>
+                    </a:solidFill>
+                  </a:tcPr>
+                </a:tc>
+                <a:tc>
+                  <a:txBody>
+                    <a:bodyPr/>
+                    <a:lstStyle/>
+                    <a:p>
+                      <a:r>
+                        <a:rPr sz="1500" b="1">
+                          <a:solidFill>
+                            <a:srgbClr val="C04A2A"/>
+                          </a:solidFill>
+                          <a:latin typeface="Calibri"/>
+                        </a:rPr>
+                        <a:t>2.74</a:t>
+                      </a:r>
+                    </a:p>
+                  </a:txBody>
+                  <a:tcPr marL="60000" marR="60000" marT="40000" marB="40000" anchor="ctr">
+                    <a:solidFill>
+                      <a:srgbClr val="FAFBFC"/>
+                    </a:solidFill>
+                  </a:tcPr>
+                </a:tc>
+                <a:tc>
+                  <a:txBody>
+                    <a:bodyPr/>
+                    <a:lstStyle/>
+                    <a:p>
+                      <a:r>
+                        <a:rPr sz="1500" b="1">
+                          <a:solidFill>
+                            <a:srgbClr val="C04A2A"/>
+                          </a:solidFill>
+                          <a:latin typeface="Calibri"/>
+                        </a:rPr>
+                        <a:t>565</a:t>
+                      </a:r>
+                    </a:p>
+                  </a:txBody>
+                  <a:tcPr marL="60000" marR="60000" marT="40000" marB="40000" anchor="ctr">
+                    <a:solidFill>
+                      <a:srgbClr val="FAFBFC"/>
+                    </a:solidFill>
+                  </a:tcPr>
+                </a:tc>
+                <a:tc>
+                  <a:txBody>
+                    <a:bodyPr/>
+                    <a:lstStyle/>
+                    <a:p>
+                      <a:r>
+                        <a:rPr sz="1500" b="0">
+                          <a:solidFill>
+                            <a:srgbClr val="1F2A37"/>
+                          </a:solidFill>
+                          <a:latin typeface="Calibri"/>
+                        </a:rPr>
+                        <a:t>7.7</a:t>
+                      </a:r>
+                    </a:p>
+                  </a:txBody>
+                  <a:tcPr marL="60000" marR="60000" marT="40000" marB="40000" anchor="ctr">
+                    <a:solidFill>
+                      <a:srgbClr val="FAFBFC"/>
+                    </a:solidFill>
+                  </a:tcPr>
+                </a:tc>
+                <a:tc>
+                  <a:txBody>
+                    <a:bodyPr/>
+                    <a:lstStyle/>
+                    <a:p>
+                      <a:r>
+                        <a:rPr sz="1500" b="0">
+                          <a:solidFill>
+                            <a:srgbClr val="1F2A37"/>
+                          </a:solidFill>
+                          <a:latin typeface="Calibri"/>
+                        </a:rPr>
+                        <a:t>2.25</a:t>
+                      </a:r>
+                    </a:p>
+                  </a:txBody>
+                  <a:tcPr marL="60000" marR="60000" marT="40000" marB="40000" anchor="ctr">
+                    <a:solidFill>
+                      <a:srgbClr val="FAFBFC"/>
+                    </a:solidFill>
+                  </a:tcPr>
+                </a:tc>
+                <a:tc>
+                  <a:txBody>
+                    <a:bodyPr/>
+                    <a:lstStyle/>
+                    <a:p>
+                      <a:r>
+                        <a:rPr sz="1500" b="0">
+                          <a:solidFill>
+                            <a:srgbClr val="1F2A37"/>
+                          </a:solidFill>
+                          <a:latin typeface="Calibri"/>
+                        </a:rPr>
+                        <a:t>455</a:t>
+                      </a:r>
+                    </a:p>
+                  </a:txBody>
+                  <a:tcPr marL="60000" marR="60000" marT="40000" marB="40000" anchor="ctr">
+                    <a:solidFill>
+                      <a:srgbClr val="FAFBFC"/>
+                    </a:solidFill>
+                  </a:tcPr>
+                </a:tc>
+              </a:tr>
+              <a:tr h="548640">
+                <a:tc>
+                  <a:txBody>
+                    <a:bodyPr/>
+                    <a:lstStyle/>
+                    <a:p>
+                      <a:r>
+                        <a:rPr sz="1500" b="0">
+                          <a:solidFill>
+                            <a:srgbClr val="1F2A37"/>
+                          </a:solidFill>
+                          <a:latin typeface="Calibri"/>
+                        </a:rPr>
+                        <a:t>1500</a:t>
+                      </a:r>
+                    </a:p>
+                  </a:txBody>
+                  <a:tcPr marL="60000" marR="60000" marT="40000" marB="40000" anchor="ctr">
+                    <a:solidFill>
+                      <a:srgbClr val="FFFFFF"/>
+                    </a:solidFill>
+                  </a:tcPr>
+                </a:tc>
+                <a:tc>
+                  <a:txBody>
+                    <a:bodyPr/>
+                    <a:lstStyle/>
+                    <a:p>
+                      <a:r>
+                        <a:rPr sz="1500" b="1">
+                          <a:solidFill>
+                            <a:srgbClr val="C04A2A"/>
+                          </a:solidFill>
+                          <a:latin typeface="Calibri"/>
+                        </a:rPr>
+                        <a:t>25.1</a:t>
+                      </a:r>
+                    </a:p>
+                  </a:txBody>
+                  <a:tcPr marL="60000" marR="60000" marT="40000" marB="40000" anchor="ctr">
+                    <a:solidFill>
+                      <a:srgbClr val="FFFFFF"/>
+                    </a:solidFill>
+                  </a:tcPr>
+                </a:tc>
+                <a:tc>
+                  <a:txBody>
+                    <a:bodyPr/>
+                    <a:lstStyle/>
+                    <a:p>
+                      <a:r>
+                        <a:rPr sz="1500" b="1">
+                          <a:solidFill>
+                            <a:srgbClr val="C04A2A"/>
+                          </a:solidFill>
+                          <a:latin typeface="Calibri"/>
+                        </a:rPr>
+                        <a:t>2.90</a:t>
+                      </a:r>
+                    </a:p>
+                  </a:txBody>
+                  <a:tcPr marL="60000" marR="60000" marT="40000" marB="40000" anchor="ctr">
+                    <a:solidFill>
+                      <a:srgbClr val="FFFFFF"/>
+                    </a:solidFill>
+                  </a:tcPr>
+                </a:tc>
+                <a:tc>
+                  <a:txBody>
+                    <a:bodyPr/>
+                    <a:lstStyle/>
+                    <a:p>
+                      <a:r>
+                        <a:rPr sz="1500" b="1">
+                          <a:solidFill>
+                            <a:srgbClr val="C04A2A"/>
+                          </a:solidFill>
+                          <a:latin typeface="Calibri"/>
+                        </a:rPr>
+                        <a:t>603</a:t>
+                      </a:r>
+                    </a:p>
+                  </a:txBody>
+                  <a:tcPr marL="60000" marR="60000" marT="40000" marB="40000" anchor="ctr">
+                    <a:solidFill>
+                      <a:srgbClr val="FFFFFF"/>
+                    </a:solidFill>
+                  </a:tcPr>
+                </a:tc>
+                <a:tc>
+                  <a:txBody>
+                    <a:bodyPr/>
+                    <a:lstStyle/>
+                    <a:p>
+                      <a:r>
+                        <a:rPr sz="1500" b="0">
+                          <a:solidFill>
+                            <a:srgbClr val="1F2A37"/>
+                          </a:solidFill>
+                          <a:latin typeface="Calibri"/>
+                        </a:rPr>
+                        <a:t>8.3</a:t>
+                      </a:r>
+                    </a:p>
+                  </a:txBody>
+                  <a:tcPr marL="60000" marR="60000" marT="40000" marB="40000" anchor="ctr">
+                    <a:solidFill>
+                      <a:srgbClr val="FFFFFF"/>
+                    </a:solidFill>
+                  </a:tcPr>
+                </a:tc>
+                <a:tc>
+                  <a:txBody>
+                    <a:bodyPr/>
+                    <a:lstStyle/>
+                    <a:p>
+                      <a:r>
+                        <a:rPr sz="1500" b="0">
+                          <a:solidFill>
+                            <a:srgbClr val="1F2A37"/>
+                          </a:solidFill>
+                          <a:latin typeface="Calibri"/>
+                        </a:rPr>
+                        <a:t>2.40</a:t>
+                      </a:r>
+                    </a:p>
+                  </a:txBody>
+                  <a:tcPr marL="60000" marR="60000" marT="40000" marB="40000" anchor="ctr">
+                    <a:solidFill>
+                      <a:srgbClr val="FFFFFF"/>
+                    </a:solidFill>
+                  </a:tcPr>
+                </a:tc>
+                <a:tc>
+                  <a:txBody>
+                    <a:bodyPr/>
+                    <a:lstStyle/>
+                    <a:p>
+                      <a:r>
+                        <a:rPr sz="1500" b="0">
+                          <a:solidFill>
+                            <a:srgbClr val="1F2A37"/>
+                          </a:solidFill>
+                          <a:latin typeface="Calibri"/>
+                        </a:rPr>
+                        <a:t>486</a:t>
+                      </a:r>
+                    </a:p>
+                  </a:txBody>
+                  <a:tcPr marL="60000" marR="60000" marT="40000" marB="40000" anchor="ctr">
+                    <a:solidFill>
+                      <a:srgbClr val="FFFFFF"/>
+                    </a:solidFill>
+                  </a:tcPr>
+                </a:tc>
+              </a:tr>
+            </a:tbl>
+          </a:graphicData>
+        </a:graphic>
+      </p:graphicFrame>
       <p:sp>
         <p:nvSpPr>
           <p:cNvPr id="6" name="TextBox 5"/>
@@ -5842,8 +7068,8 @@
         </p:nvSpPr>
         <p:spPr>
           <a:xfrm>
-            <a:off x="548640" y="6446520"/>
-            <a:ext cx="9144000" cy="274320"/>
+            <a:off x="548640" y="5303520"/>
+            <a:ext cx="10972800" cy="365760"/>
           </a:xfrm>
           <a:prstGeom prst="rect">
             <a:avLst/>
@@ -5858,6 +7084,76 @@
           <a:p>
             <a:pPr algn="l"/>
             <a:r>
+              <a:rPr sz="1200" b="0" i="1">
+                <a:solidFill>
+                  <a:srgbClr val="555F6E"/>
+                </a:solidFill>
+                <a:latin typeface="Calibri"/>
+              </a:rPr>
+              <a:t>SLA: TTFT &lt; 15 ms, TPOT &lt; 2.5 ms (mean), e2e &lt; 500 ms (200-token response). Red cells miss the SLA.</a:t>
+            </a:r>
+          </a:p>
+        </p:txBody>
+      </p:sp>
+      <p:sp>
+        <p:nvSpPr>
+          <p:cNvPr id="7" name="TextBox 6"/>
+          <p:cNvSpPr txBox="1"/>
+          <p:nvPr/>
+        </p:nvSpPr>
+        <p:spPr>
+          <a:xfrm>
+            <a:off x="548640" y="5715000"/>
+            <a:ext cx="10972800" cy="548640"/>
+          </a:xfrm>
+          <a:prstGeom prst="rect">
+            <a:avLst/>
+          </a:prstGeom>
+          <a:noFill/>
+        </p:spPr>
+        <p:txBody>
+          <a:bodyPr wrap="square" lIns="0" rIns="0" tIns="0" bIns="0">
+            <a:spAutoFit/>
+          </a:bodyPr>
+          <a:lstStyle/>
+          <a:p>
+            <a:pPr algn="l"/>
+            <a:r>
+              <a:rPr sz="1000" b="0" i="1">
+                <a:solidFill>
+                  <a:srgbClr val="555F6E"/>
+                </a:solidFill>
+                <a:latin typeface="Calibri"/>
+              </a:rPr>
+              <a:t>Baseline numbers from in-process vLLM bench. Caching combo from HTTP harness, with ~20 ms harness overhead reconciled per input length against the bf16 cache-off harness baseline.</a:t>
+            </a:r>
+          </a:p>
+        </p:txBody>
+      </p:sp>
+      <p:sp>
+        <p:nvSpPr>
+          <p:cNvPr id="8" name="TextBox 7"/>
+          <p:cNvSpPr txBox="1"/>
+          <p:nvPr/>
+        </p:nvSpPr>
+        <p:spPr>
+          <a:xfrm>
+            <a:off x="548640" y="6446520"/>
+            <a:ext cx="9144000" cy="274320"/>
+          </a:xfrm>
+          <a:prstGeom prst="rect">
+            <a:avLst/>
+          </a:prstGeom>
+          <a:noFill/>
+        </p:spPr>
+        <p:txBody>
+          <a:bodyPr wrap="square" lIns="0" rIns="0" tIns="0" bIns="0">
+            <a:spAutoFit/>
+          </a:bodyPr>
+          <a:lstStyle/>
+          <a:p>
+            <a:pPr algn="l"/>
+            <a:r>
               <a:rPr sz="1000" b="0" i="0">
                 <a:solidFill>
                   <a:srgbClr val="555F6E"/>
@@ -5871,7 +7167,7 @@
       </p:sp>
       <p:sp>
         <p:nvSpPr>
-          <p:cNvPr id="7" name="TextBox 6"/>
+          <p:cNvPr id="9" name="TextBox 8"/>
           <p:cNvSpPr txBox="1"/>
           <p:nvPr/>
         </p:nvSpPr>
@@ -5987,7 +7283,7 @@
                 </a:solidFill>
                 <a:latin typeface="Calibri"/>
               </a:rPr>
-              <a:t>SLA verdict — TPOT</a:t>
+              <a:t>SLA verdict — FP8 + prefix caching, end-to-end</a:t>
             </a:r>
           </a:p>
         </p:txBody>
@@ -6037,7 +7333,7 @@
       </p:sp>
       <p:pic>
         <p:nvPicPr>
-          <p:cNvPr id="5" name="Picture 4" descr="appendix_sla_verdict_tpot.png"/>
+          <p:cNvPr id="5" name="Picture 4" descr="appendix_verdict_combo_fp8_caching.png"/>
           <p:cNvPicPr>
             <a:picLocks noChangeAspect="1"/>
           </p:cNvPicPr>
@@ -6051,8 +7347,8 @@
         </p:blipFill>
         <p:spPr>
           <a:xfrm>
-            <a:off x="1280160" y="1783080"/>
-            <a:ext cx="9601200" cy="4434840"/>
+            <a:off x="914400" y="1783080"/>
+            <a:ext cx="10332720" cy="4434840"/>
           </a:xfrm>
           <a:prstGeom prst="rect">
             <a:avLst/>
@@ -6212,7 +7508,7 @@
                 </a:solidFill>
                 <a:latin typeface="Calibri"/>
               </a:rPr>
-              <a:t>SLA verdict — end-to-end</a:t>
+              <a:t>SLA verdict — everything on (+ TP=2)</a:t>
             </a:r>
           </a:p>
         </p:txBody>
@@ -6260,30 +7556,963 @@
           </a:p>
         </p:txBody>
       </p:sp>
-      <p:pic>
-        <p:nvPicPr>
-          <p:cNvPr id="5" name="Picture 4" descr="appendix_sla_verdict_e2e.png"/>
-          <p:cNvPicPr>
-            <a:picLocks noChangeAspect="1"/>
-          </p:cNvPicPr>
-          <p:nvPr/>
-        </p:nvPicPr>
-        <p:blipFill>
-          <a:blip r:embed="rId2"/>
-          <a:stretch>
-            <a:fillRect/>
-          </a:stretch>
-        </p:blipFill>
-        <p:spPr>
-          <a:xfrm>
-            <a:off x="1280160" y="1783080"/>
-            <a:ext cx="9601200" cy="4434840"/>
-          </a:xfrm>
-          <a:prstGeom prst="rect">
-            <a:avLst/>
-          </a:prstGeom>
-        </p:spPr>
-      </p:pic>
+      <p:graphicFrame>
+        <p:nvGraphicFramePr>
+          <p:cNvPr id="5" name="Table 4"/>
+          <p:cNvGraphicFramePr>
+            <a:graphicFrameLocks noGrp="1"/>
+          </p:cNvGraphicFramePr>
+          <p:nvPr/>
+        </p:nvGraphicFramePr>
+        <p:xfrm>
+          <a:off x="365760" y="1828800"/>
+          <a:ext cx="11430000" cy="3291840"/>
+        </p:xfrm>
+        <a:graphic>
+          <a:graphicData uri="http://schemas.openxmlformats.org/drawingml/2006/table">
+            <a:tbl>
+              <a:tblPr firstRow="1" bandRow="1">
+                <a:tableStyleId>{5C22544A-7EE6-4342-B048-85BDC9FD1C3A}</a:tableStyleId>
+              </a:tblPr>
+              <a:tblGrid>
+                <a:gridCol w="1463040"/>
+                <a:gridCol w="1463040"/>
+                <a:gridCol w="1280160"/>
+                <a:gridCol w="1554480"/>
+                <a:gridCol w="1463040"/>
+                <a:gridCol w="1280160"/>
+                <a:gridCol w="2926080"/>
+              </a:tblGrid>
+              <a:tr h="548640">
+                <a:tc>
+                  <a:txBody>
+                    <a:bodyPr/>
+                    <a:lstStyle/>
+                    <a:p>
+                      <a:r>
+                        <a:rPr sz="1500" b="1">
+                          <a:solidFill>
+                            <a:srgbClr val="555F6E"/>
+                          </a:solidFill>
+                          <a:latin typeface="Calibri"/>
+                        </a:rPr>
+                        <a:t>Input length</a:t>
+                      </a:r>
+                    </a:p>
+                  </a:txBody>
+                  <a:tcPr marL="60000" marR="60000" marT="40000" marB="40000" anchor="ctr">
+                    <a:solidFill>
+                      <a:srgbClr val="F2F4F7"/>
+                    </a:solidFill>
+                  </a:tcPr>
+                </a:tc>
+                <a:tc>
+                  <a:txBody>
+                    <a:bodyPr/>
+                    <a:lstStyle/>
+                    <a:p>
+                      <a:r>
+                        <a:rPr sz="1500" b="1">
+                          <a:solidFill>
+                            <a:srgbClr val="555F6E"/>
+                          </a:solidFill>
+                          <a:latin typeface="Calibri"/>
+                        </a:rPr>
+                        <a:t>baseline</a:t>
+                      </a:r>
+                    </a:p>
+                  </a:txBody>
+                  <a:tcPr marL="60000" marR="60000" marT="40000" marB="40000" anchor="ctr">
+                    <a:solidFill>
+                      <a:srgbClr val="F2F4F7"/>
+                    </a:solidFill>
+                  </a:tcPr>
+                </a:tc>
+                <a:tc>
+                  <a:txBody>
+                    <a:bodyPr/>
+                    <a:lstStyle/>
+                    <a:p>
+                      <a:r>
+                        <a:rPr sz="1500" b="1">
+                          <a:solidFill>
+                            <a:srgbClr val="555F6E"/>
+                          </a:solidFill>
+                          <a:latin typeface="Calibri"/>
+                        </a:rPr>
+                        <a:t>baseline</a:t>
+                      </a:r>
+                    </a:p>
+                  </a:txBody>
+                  <a:tcPr marL="60000" marR="60000" marT="40000" marB="40000" anchor="ctr">
+                    <a:solidFill>
+                      <a:srgbClr val="F2F4F7"/>
+                    </a:solidFill>
+                  </a:tcPr>
+                </a:tc>
+                <a:tc>
+                  <a:txBody>
+                    <a:bodyPr/>
+                    <a:lstStyle/>
+                    <a:p>
+                      <a:r>
+                        <a:rPr sz="1500" b="1">
+                          <a:solidFill>
+                            <a:srgbClr val="555F6E"/>
+                          </a:solidFill>
+                          <a:latin typeface="Calibri"/>
+                        </a:rPr>
+                        <a:t>baseline</a:t>
+                      </a:r>
+                    </a:p>
+                  </a:txBody>
+                  <a:tcPr marL="60000" marR="60000" marT="40000" marB="40000" anchor="ctr">
+                    <a:solidFill>
+                      <a:srgbClr val="F2F4F7"/>
+                    </a:solidFill>
+                  </a:tcPr>
+                </a:tc>
+                <a:tc>
+                  <a:txBody>
+                    <a:bodyPr/>
+                    <a:lstStyle/>
+                    <a:p>
+                      <a:r>
+                        <a:rPr sz="1500" b="1">
+                          <a:solidFill>
+                            <a:srgbClr val="555F6E"/>
+                          </a:solidFill>
+                          <a:latin typeface="Calibri"/>
+                        </a:rPr>
+                        <a:t>FP8 + caching + TP=2</a:t>
+                      </a:r>
+                    </a:p>
+                  </a:txBody>
+                  <a:tcPr marL="60000" marR="60000" marT="40000" marB="40000" anchor="ctr">
+                    <a:solidFill>
+                      <a:srgbClr val="F2F4F7"/>
+                    </a:solidFill>
+                  </a:tcPr>
+                </a:tc>
+                <a:tc>
+                  <a:txBody>
+                    <a:bodyPr/>
+                    <a:lstStyle/>
+                    <a:p>
+                      <a:r>
+                        <a:rPr sz="1500" b="1">
+                          <a:solidFill>
+                            <a:srgbClr val="555F6E"/>
+                          </a:solidFill>
+                          <a:latin typeface="Calibri"/>
+                        </a:rPr>
+                        <a:t>FP8 + caching + TP=2</a:t>
+                      </a:r>
+                    </a:p>
+                  </a:txBody>
+                  <a:tcPr marL="60000" marR="60000" marT="40000" marB="40000" anchor="ctr">
+                    <a:solidFill>
+                      <a:srgbClr val="F2F4F7"/>
+                    </a:solidFill>
+                  </a:tcPr>
+                </a:tc>
+                <a:tc>
+                  <a:txBody>
+                    <a:bodyPr/>
+                    <a:lstStyle/>
+                    <a:p>
+                      <a:r>
+                        <a:rPr sz="1500" b="1">
+                          <a:solidFill>
+                            <a:srgbClr val="555F6E"/>
+                          </a:solidFill>
+                          <a:latin typeface="Calibri"/>
+                        </a:rPr>
+                        <a:t>FP8 + caching + TP=2</a:t>
+                      </a:r>
+                    </a:p>
+                  </a:txBody>
+                  <a:tcPr marL="60000" marR="60000" marT="40000" marB="40000" anchor="ctr">
+                    <a:solidFill>
+                      <a:srgbClr val="F2F4F7"/>
+                    </a:solidFill>
+                  </a:tcPr>
+                </a:tc>
+              </a:tr>
+              <a:tr h="548640">
+                <a:tc>
+                  <a:txBody>
+                    <a:bodyPr/>
+                    <a:lstStyle/>
+                    <a:p/>
+                  </a:txBody>
+                  <a:tcPr marL="60000" marR="60000" marT="40000" marB="40000" anchor="ctr">
+                    <a:solidFill>
+                      <a:srgbClr val="FFFFFF"/>
+                    </a:solidFill>
+                  </a:tcPr>
+                </a:tc>
+                <a:tc>
+                  <a:txBody>
+                    <a:bodyPr/>
+                    <a:lstStyle/>
+                    <a:p>
+                      <a:r>
+                        <a:rPr sz="1500" b="0">
+                          <a:solidFill>
+                            <a:srgbClr val="1F2A37"/>
+                          </a:solidFill>
+                          <a:latin typeface="Calibri"/>
+                        </a:rPr>
+                        <a:t>TTFT</a:t>
+                      </a:r>
+                    </a:p>
+                  </a:txBody>
+                  <a:tcPr marL="60000" marR="60000" marT="40000" marB="40000" anchor="ctr">
+                    <a:solidFill>
+                      <a:srgbClr val="FFFFFF"/>
+                    </a:solidFill>
+                  </a:tcPr>
+                </a:tc>
+                <a:tc>
+                  <a:txBody>
+                    <a:bodyPr/>
+                    <a:lstStyle/>
+                    <a:p>
+                      <a:r>
+                        <a:rPr sz="1500" b="0">
+                          <a:solidFill>
+                            <a:srgbClr val="1F2A37"/>
+                          </a:solidFill>
+                          <a:latin typeface="Calibri"/>
+                        </a:rPr>
+                        <a:t>TPOT</a:t>
+                      </a:r>
+                    </a:p>
+                  </a:txBody>
+                  <a:tcPr marL="60000" marR="60000" marT="40000" marB="40000" anchor="ctr">
+                    <a:solidFill>
+                      <a:srgbClr val="FFFFFF"/>
+                    </a:solidFill>
+                  </a:tcPr>
+                </a:tc>
+                <a:tc>
+                  <a:txBody>
+                    <a:bodyPr/>
+                    <a:lstStyle/>
+                    <a:p>
+                      <a:r>
+                        <a:rPr sz="1500" b="0">
+                          <a:solidFill>
+                            <a:srgbClr val="1F2A37"/>
+                          </a:solidFill>
+                          <a:latin typeface="Calibri"/>
+                        </a:rPr>
+                        <a:t>e2e</a:t>
+                      </a:r>
+                    </a:p>
+                  </a:txBody>
+                  <a:tcPr marL="60000" marR="60000" marT="40000" marB="40000" anchor="ctr">
+                    <a:solidFill>
+                      <a:srgbClr val="FFFFFF"/>
+                    </a:solidFill>
+                  </a:tcPr>
+                </a:tc>
+                <a:tc>
+                  <a:txBody>
+                    <a:bodyPr/>
+                    <a:lstStyle/>
+                    <a:p>
+                      <a:r>
+                        <a:rPr sz="1500" b="0">
+                          <a:solidFill>
+                            <a:srgbClr val="1F2A37"/>
+                          </a:solidFill>
+                          <a:latin typeface="Calibri"/>
+                        </a:rPr>
+                        <a:t>TTFT</a:t>
+                      </a:r>
+                    </a:p>
+                  </a:txBody>
+                  <a:tcPr marL="60000" marR="60000" marT="40000" marB="40000" anchor="ctr">
+                    <a:solidFill>
+                      <a:srgbClr val="FFFFFF"/>
+                    </a:solidFill>
+                  </a:tcPr>
+                </a:tc>
+                <a:tc>
+                  <a:txBody>
+                    <a:bodyPr/>
+                    <a:lstStyle/>
+                    <a:p>
+                      <a:r>
+                        <a:rPr sz="1500" b="0">
+                          <a:solidFill>
+                            <a:srgbClr val="1F2A37"/>
+                          </a:solidFill>
+                          <a:latin typeface="Calibri"/>
+                        </a:rPr>
+                        <a:t>TPOT</a:t>
+                      </a:r>
+                    </a:p>
+                  </a:txBody>
+                  <a:tcPr marL="60000" marR="60000" marT="40000" marB="40000" anchor="ctr">
+                    <a:solidFill>
+                      <a:srgbClr val="FFFFFF"/>
+                    </a:solidFill>
+                  </a:tcPr>
+                </a:tc>
+                <a:tc>
+                  <a:txBody>
+                    <a:bodyPr/>
+                    <a:lstStyle/>
+                    <a:p>
+                      <a:r>
+                        <a:rPr sz="1500" b="0">
+                          <a:solidFill>
+                            <a:srgbClr val="1F2A37"/>
+                          </a:solidFill>
+                          <a:latin typeface="Calibri"/>
+                        </a:rPr>
+                        <a:t>e2e</a:t>
+                      </a:r>
+                    </a:p>
+                  </a:txBody>
+                  <a:tcPr marL="60000" marR="60000" marT="40000" marB="40000" anchor="ctr">
+                    <a:solidFill>
+                      <a:srgbClr val="FFFFFF"/>
+                    </a:solidFill>
+                  </a:tcPr>
+                </a:tc>
+              </a:tr>
+              <a:tr h="548640">
+                <a:tc>
+                  <a:txBody>
+                    <a:bodyPr/>
+                    <a:lstStyle/>
+                    <a:p>
+                      <a:r>
+                        <a:rPr sz="1500" b="0">
+                          <a:solidFill>
+                            <a:srgbClr val="1F2A37"/>
+                          </a:solidFill>
+                          <a:latin typeface="Calibri"/>
+                        </a:rPr>
+                        <a:t>128</a:t>
+                      </a:r>
+                    </a:p>
+                  </a:txBody>
+                  <a:tcPr marL="60000" marR="60000" marT="40000" marB="40000" anchor="ctr">
+                    <a:solidFill>
+                      <a:srgbClr val="FAFBFC"/>
+                    </a:solidFill>
+                  </a:tcPr>
+                </a:tc>
+                <a:tc>
+                  <a:txBody>
+                    <a:bodyPr/>
+                    <a:lstStyle/>
+                    <a:p>
+                      <a:r>
+                        <a:rPr sz="1500" b="0">
+                          <a:solidFill>
+                            <a:srgbClr val="1F2A37"/>
+                          </a:solidFill>
+                          <a:latin typeface="Calibri"/>
+                        </a:rPr>
+                        <a:t>10.5</a:t>
+                      </a:r>
+                    </a:p>
+                  </a:txBody>
+                  <a:tcPr marL="60000" marR="60000" marT="40000" marB="40000" anchor="ctr">
+                    <a:solidFill>
+                      <a:srgbClr val="FAFBFC"/>
+                    </a:solidFill>
+                  </a:tcPr>
+                </a:tc>
+                <a:tc>
+                  <a:txBody>
+                    <a:bodyPr/>
+                    <a:lstStyle/>
+                    <a:p>
+                      <a:r>
+                        <a:rPr sz="1500" b="0">
+                          <a:solidFill>
+                            <a:srgbClr val="1F2A37"/>
+                          </a:solidFill>
+                          <a:latin typeface="Calibri"/>
+                        </a:rPr>
+                        <a:t>2.34</a:t>
+                      </a:r>
+                    </a:p>
+                  </a:txBody>
+                  <a:tcPr marL="60000" marR="60000" marT="40000" marB="40000" anchor="ctr">
+                    <a:solidFill>
+                      <a:srgbClr val="FAFBFC"/>
+                    </a:solidFill>
+                  </a:tcPr>
+                </a:tc>
+                <a:tc>
+                  <a:txBody>
+                    <a:bodyPr/>
+                    <a:lstStyle/>
+                    <a:p>
+                      <a:r>
+                        <a:rPr sz="1500" b="0">
+                          <a:solidFill>
+                            <a:srgbClr val="1F2A37"/>
+                          </a:solidFill>
+                          <a:latin typeface="Calibri"/>
+                        </a:rPr>
+                        <a:t>476</a:t>
+                      </a:r>
+                    </a:p>
+                  </a:txBody>
+                  <a:tcPr marL="60000" marR="60000" marT="40000" marB="40000" anchor="ctr">
+                    <a:solidFill>
+                      <a:srgbClr val="FAFBFC"/>
+                    </a:solidFill>
+                  </a:tcPr>
+                </a:tc>
+                <a:tc>
+                  <a:txBody>
+                    <a:bodyPr/>
+                    <a:lstStyle/>
+                    <a:p>
+                      <a:r>
+                        <a:rPr sz="1500" b="0">
+                          <a:solidFill>
+                            <a:srgbClr val="1F2A37"/>
+                          </a:solidFill>
+                          <a:latin typeface="Calibri"/>
+                        </a:rPr>
+                        <a:t>6.5</a:t>
+                      </a:r>
+                    </a:p>
+                  </a:txBody>
+                  <a:tcPr marL="60000" marR="60000" marT="40000" marB="40000" anchor="ctr">
+                    <a:solidFill>
+                      <a:srgbClr val="FAFBFC"/>
+                    </a:solidFill>
+                  </a:tcPr>
+                </a:tc>
+                <a:tc>
+                  <a:txBody>
+                    <a:bodyPr/>
+                    <a:lstStyle/>
+                    <a:p>
+                      <a:r>
+                        <a:rPr sz="1500" b="0">
+                          <a:solidFill>
+                            <a:srgbClr val="1F2A37"/>
+                          </a:solidFill>
+                          <a:latin typeface="Calibri"/>
+                        </a:rPr>
+                        <a:t>1.93</a:t>
+                      </a:r>
+                    </a:p>
+                  </a:txBody>
+                  <a:tcPr marL="60000" marR="60000" marT="40000" marB="40000" anchor="ctr">
+                    <a:solidFill>
+                      <a:srgbClr val="FAFBFC"/>
+                    </a:solidFill>
+                  </a:tcPr>
+                </a:tc>
+                <a:tc>
+                  <a:txBody>
+                    <a:bodyPr/>
+                    <a:lstStyle/>
+                    <a:p>
+                      <a:r>
+                        <a:rPr sz="1500" b="0">
+                          <a:solidFill>
+                            <a:srgbClr val="1F2A37"/>
+                          </a:solidFill>
+                          <a:latin typeface="Calibri"/>
+                        </a:rPr>
+                        <a:t>392</a:t>
+                      </a:r>
+                    </a:p>
+                  </a:txBody>
+                  <a:tcPr marL="60000" marR="60000" marT="40000" marB="40000" anchor="ctr">
+                    <a:solidFill>
+                      <a:srgbClr val="FAFBFC"/>
+                    </a:solidFill>
+                  </a:tcPr>
+                </a:tc>
+              </a:tr>
+              <a:tr h="548640">
+                <a:tc>
+                  <a:txBody>
+                    <a:bodyPr/>
+                    <a:lstStyle/>
+                    <a:p>
+                      <a:r>
+                        <a:rPr sz="1500" b="0">
+                          <a:solidFill>
+                            <a:srgbClr val="1F2A37"/>
+                          </a:solidFill>
+                          <a:latin typeface="Calibri"/>
+                        </a:rPr>
+                        <a:t>512</a:t>
+                      </a:r>
+                    </a:p>
+                  </a:txBody>
+                  <a:tcPr marL="60000" marR="60000" marT="40000" marB="40000" anchor="ctr">
+                    <a:solidFill>
+                      <a:srgbClr val="FFFFFF"/>
+                    </a:solidFill>
+                  </a:tcPr>
+                </a:tc>
+                <a:tc>
+                  <a:txBody>
+                    <a:bodyPr/>
+                    <a:lstStyle/>
+                    <a:p>
+                      <a:r>
+                        <a:rPr sz="1500" b="0">
+                          <a:solidFill>
+                            <a:srgbClr val="1F2A37"/>
+                          </a:solidFill>
+                          <a:latin typeface="Calibri"/>
+                        </a:rPr>
+                        <a:t>13.8</a:t>
+                      </a:r>
+                    </a:p>
+                  </a:txBody>
+                  <a:tcPr marL="60000" marR="60000" marT="40000" marB="40000" anchor="ctr">
+                    <a:solidFill>
+                      <a:srgbClr val="FFFFFF"/>
+                    </a:solidFill>
+                  </a:tcPr>
+                </a:tc>
+                <a:tc>
+                  <a:txBody>
+                    <a:bodyPr/>
+                    <a:lstStyle/>
+                    <a:p>
+                      <a:r>
+                        <a:rPr sz="1500" b="0">
+                          <a:solidFill>
+                            <a:srgbClr val="1F2A37"/>
+                          </a:solidFill>
+                          <a:latin typeface="Calibri"/>
+                        </a:rPr>
+                        <a:t>2.47</a:t>
+                      </a:r>
+                    </a:p>
+                  </a:txBody>
+                  <a:tcPr marL="60000" marR="60000" marT="40000" marB="40000" anchor="ctr">
+                    <a:solidFill>
+                      <a:srgbClr val="FFFFFF"/>
+                    </a:solidFill>
+                  </a:tcPr>
+                </a:tc>
+                <a:tc>
+                  <a:txBody>
+                    <a:bodyPr/>
+                    <a:lstStyle/>
+                    <a:p>
+                      <a:r>
+                        <a:rPr sz="1500" b="1">
+                          <a:solidFill>
+                            <a:srgbClr val="C04A2A"/>
+                          </a:solidFill>
+                          <a:latin typeface="Calibri"/>
+                        </a:rPr>
+                        <a:t>505</a:t>
+                      </a:r>
+                    </a:p>
+                  </a:txBody>
+                  <a:tcPr marL="60000" marR="60000" marT="40000" marB="40000" anchor="ctr">
+                    <a:solidFill>
+                      <a:srgbClr val="FFFFFF"/>
+                    </a:solidFill>
+                  </a:tcPr>
+                </a:tc>
+                <a:tc>
+                  <a:txBody>
+                    <a:bodyPr/>
+                    <a:lstStyle/>
+                    <a:p>
+                      <a:r>
+                        <a:rPr sz="1500" b="0">
+                          <a:solidFill>
+                            <a:srgbClr val="1F2A37"/>
+                          </a:solidFill>
+                          <a:latin typeface="Calibri"/>
+                        </a:rPr>
+                        <a:t>7.4</a:t>
+                      </a:r>
+                    </a:p>
+                  </a:txBody>
+                  <a:tcPr marL="60000" marR="60000" marT="40000" marB="40000" anchor="ctr">
+                    <a:solidFill>
+                      <a:srgbClr val="FFFFFF"/>
+                    </a:solidFill>
+                  </a:tcPr>
+                </a:tc>
+                <a:tc>
+                  <a:txBody>
+                    <a:bodyPr/>
+                    <a:lstStyle/>
+                    <a:p>
+                      <a:r>
+                        <a:rPr sz="1500" b="0">
+                          <a:solidFill>
+                            <a:srgbClr val="1F2A37"/>
+                          </a:solidFill>
+                          <a:latin typeface="Calibri"/>
+                        </a:rPr>
+                        <a:t>2.06</a:t>
+                      </a:r>
+                    </a:p>
+                  </a:txBody>
+                  <a:tcPr marL="60000" marR="60000" marT="40000" marB="40000" anchor="ctr">
+                    <a:solidFill>
+                      <a:srgbClr val="FFFFFF"/>
+                    </a:solidFill>
+                  </a:tcPr>
+                </a:tc>
+                <a:tc>
+                  <a:txBody>
+                    <a:bodyPr/>
+                    <a:lstStyle/>
+                    <a:p>
+                      <a:r>
+                        <a:rPr sz="1500" b="0">
+                          <a:solidFill>
+                            <a:srgbClr val="1F2A37"/>
+                          </a:solidFill>
+                          <a:latin typeface="Calibri"/>
+                        </a:rPr>
+                        <a:t>418</a:t>
+                      </a:r>
+                    </a:p>
+                  </a:txBody>
+                  <a:tcPr marL="60000" marR="60000" marT="40000" marB="40000" anchor="ctr">
+                    <a:solidFill>
+                      <a:srgbClr val="FFFFFF"/>
+                    </a:solidFill>
+                  </a:tcPr>
+                </a:tc>
+              </a:tr>
+              <a:tr h="548640">
+                <a:tc>
+                  <a:txBody>
+                    <a:bodyPr/>
+                    <a:lstStyle/>
+                    <a:p>
+                      <a:r>
+                        <a:rPr sz="1500" b="0">
+                          <a:solidFill>
+                            <a:srgbClr val="1F2A37"/>
+                          </a:solidFill>
+                          <a:latin typeface="Calibri"/>
+                        </a:rPr>
+                        <a:t>1024</a:t>
+                      </a:r>
+                    </a:p>
+                  </a:txBody>
+                  <a:tcPr marL="60000" marR="60000" marT="40000" marB="40000" anchor="ctr">
+                    <a:solidFill>
+                      <a:srgbClr val="FAFBFC"/>
+                    </a:solidFill>
+                  </a:tcPr>
+                </a:tc>
+                <a:tc>
+                  <a:txBody>
+                    <a:bodyPr/>
+                    <a:lstStyle/>
+                    <a:p>
+                      <a:r>
+                        <a:rPr sz="1500" b="1">
+                          <a:solidFill>
+                            <a:srgbClr val="C04A2A"/>
+                          </a:solidFill>
+                          <a:latin typeface="Calibri"/>
+                        </a:rPr>
+                        <a:t>19.6</a:t>
+                      </a:r>
+                    </a:p>
+                  </a:txBody>
+                  <a:tcPr marL="60000" marR="60000" marT="40000" marB="40000" anchor="ctr">
+                    <a:solidFill>
+                      <a:srgbClr val="FAFBFC"/>
+                    </a:solidFill>
+                  </a:tcPr>
+                </a:tc>
+                <a:tc>
+                  <a:txBody>
+                    <a:bodyPr/>
+                    <a:lstStyle/>
+                    <a:p>
+                      <a:r>
+                        <a:rPr sz="1500" b="1">
+                          <a:solidFill>
+                            <a:srgbClr val="C04A2A"/>
+                          </a:solidFill>
+                          <a:latin typeface="Calibri"/>
+                        </a:rPr>
+                        <a:t>2.74</a:t>
+                      </a:r>
+                    </a:p>
+                  </a:txBody>
+                  <a:tcPr marL="60000" marR="60000" marT="40000" marB="40000" anchor="ctr">
+                    <a:solidFill>
+                      <a:srgbClr val="FAFBFC"/>
+                    </a:solidFill>
+                  </a:tcPr>
+                </a:tc>
+                <a:tc>
+                  <a:txBody>
+                    <a:bodyPr/>
+                    <a:lstStyle/>
+                    <a:p>
+                      <a:r>
+                        <a:rPr sz="1500" b="1">
+                          <a:solidFill>
+                            <a:srgbClr val="C04A2A"/>
+                          </a:solidFill>
+                          <a:latin typeface="Calibri"/>
+                        </a:rPr>
+                        <a:t>565</a:t>
+                      </a:r>
+                    </a:p>
+                  </a:txBody>
+                  <a:tcPr marL="60000" marR="60000" marT="40000" marB="40000" anchor="ctr">
+                    <a:solidFill>
+                      <a:srgbClr val="FAFBFC"/>
+                    </a:solidFill>
+                  </a:tcPr>
+                </a:tc>
+                <a:tc>
+                  <a:txBody>
+                    <a:bodyPr/>
+                    <a:lstStyle/>
+                    <a:p>
+                      <a:r>
+                        <a:rPr sz="1500" b="0">
+                          <a:solidFill>
+                            <a:srgbClr val="1F2A37"/>
+                          </a:solidFill>
+                          <a:latin typeface="Calibri"/>
+                        </a:rPr>
+                        <a:t>7.7</a:t>
+                      </a:r>
+                    </a:p>
+                  </a:txBody>
+                  <a:tcPr marL="60000" marR="60000" marT="40000" marB="40000" anchor="ctr">
+                    <a:solidFill>
+                      <a:srgbClr val="FAFBFC"/>
+                    </a:solidFill>
+                  </a:tcPr>
+                </a:tc>
+                <a:tc>
+                  <a:txBody>
+                    <a:bodyPr/>
+                    <a:lstStyle/>
+                    <a:p>
+                      <a:r>
+                        <a:rPr sz="1500" b="0">
+                          <a:solidFill>
+                            <a:srgbClr val="1F2A37"/>
+                          </a:solidFill>
+                          <a:latin typeface="Calibri"/>
+                        </a:rPr>
+                        <a:t>2.23</a:t>
+                      </a:r>
+                    </a:p>
+                  </a:txBody>
+                  <a:tcPr marL="60000" marR="60000" marT="40000" marB="40000" anchor="ctr">
+                    <a:solidFill>
+                      <a:srgbClr val="FAFBFC"/>
+                    </a:solidFill>
+                  </a:tcPr>
+                </a:tc>
+                <a:tc>
+                  <a:txBody>
+                    <a:bodyPr/>
+                    <a:lstStyle/>
+                    <a:p>
+                      <a:r>
+                        <a:rPr sz="1500" b="0">
+                          <a:solidFill>
+                            <a:srgbClr val="1F2A37"/>
+                          </a:solidFill>
+                          <a:latin typeface="Calibri"/>
+                        </a:rPr>
+                        <a:t>452</a:t>
+                      </a:r>
+                    </a:p>
+                  </a:txBody>
+                  <a:tcPr marL="60000" marR="60000" marT="40000" marB="40000" anchor="ctr">
+                    <a:solidFill>
+                      <a:srgbClr val="FAFBFC"/>
+                    </a:solidFill>
+                  </a:tcPr>
+                </a:tc>
+              </a:tr>
+              <a:tr h="548640">
+                <a:tc>
+                  <a:txBody>
+                    <a:bodyPr/>
+                    <a:lstStyle/>
+                    <a:p>
+                      <a:r>
+                        <a:rPr sz="1500" b="0">
+                          <a:solidFill>
+                            <a:srgbClr val="1F2A37"/>
+                          </a:solidFill>
+                          <a:latin typeface="Calibri"/>
+                        </a:rPr>
+                        <a:t>1500</a:t>
+                      </a:r>
+                    </a:p>
+                  </a:txBody>
+                  <a:tcPr marL="60000" marR="60000" marT="40000" marB="40000" anchor="ctr">
+                    <a:solidFill>
+                      <a:srgbClr val="FFFFFF"/>
+                    </a:solidFill>
+                  </a:tcPr>
+                </a:tc>
+                <a:tc>
+                  <a:txBody>
+                    <a:bodyPr/>
+                    <a:lstStyle/>
+                    <a:p>
+                      <a:r>
+                        <a:rPr sz="1500" b="1">
+                          <a:solidFill>
+                            <a:srgbClr val="C04A2A"/>
+                          </a:solidFill>
+                          <a:latin typeface="Calibri"/>
+                        </a:rPr>
+                        <a:t>25.1</a:t>
+                      </a:r>
+                    </a:p>
+                  </a:txBody>
+                  <a:tcPr marL="60000" marR="60000" marT="40000" marB="40000" anchor="ctr">
+                    <a:solidFill>
+                      <a:srgbClr val="FFFFFF"/>
+                    </a:solidFill>
+                  </a:tcPr>
+                </a:tc>
+                <a:tc>
+                  <a:txBody>
+                    <a:bodyPr/>
+                    <a:lstStyle/>
+                    <a:p>
+                      <a:r>
+                        <a:rPr sz="1500" b="1">
+                          <a:solidFill>
+                            <a:srgbClr val="C04A2A"/>
+                          </a:solidFill>
+                          <a:latin typeface="Calibri"/>
+                        </a:rPr>
+                        <a:t>2.90</a:t>
+                      </a:r>
+                    </a:p>
+                  </a:txBody>
+                  <a:tcPr marL="60000" marR="60000" marT="40000" marB="40000" anchor="ctr">
+                    <a:solidFill>
+                      <a:srgbClr val="FFFFFF"/>
+                    </a:solidFill>
+                  </a:tcPr>
+                </a:tc>
+                <a:tc>
+                  <a:txBody>
+                    <a:bodyPr/>
+                    <a:lstStyle/>
+                    <a:p>
+                      <a:r>
+                        <a:rPr sz="1500" b="1">
+                          <a:solidFill>
+                            <a:srgbClr val="C04A2A"/>
+                          </a:solidFill>
+                          <a:latin typeface="Calibri"/>
+                        </a:rPr>
+                        <a:t>603</a:t>
+                      </a:r>
+                    </a:p>
+                  </a:txBody>
+                  <a:tcPr marL="60000" marR="60000" marT="40000" marB="40000" anchor="ctr">
+                    <a:solidFill>
+                      <a:srgbClr val="FFFFFF"/>
+                    </a:solidFill>
+                  </a:tcPr>
+                </a:tc>
+                <a:tc>
+                  <a:txBody>
+                    <a:bodyPr/>
+                    <a:lstStyle/>
+                    <a:p>
+                      <a:r>
+                        <a:rPr sz="1500" b="0">
+                          <a:solidFill>
+                            <a:srgbClr val="1F2A37"/>
+                          </a:solidFill>
+                          <a:latin typeface="Calibri"/>
+                        </a:rPr>
+                        <a:t>8.9</a:t>
+                      </a:r>
+                    </a:p>
+                  </a:txBody>
+                  <a:tcPr marL="60000" marR="60000" marT="40000" marB="40000" anchor="ctr">
+                    <a:solidFill>
+                      <a:srgbClr val="FFFFFF"/>
+                    </a:solidFill>
+                  </a:tcPr>
+                </a:tc>
+                <a:tc>
+                  <a:txBody>
+                    <a:bodyPr/>
+                    <a:lstStyle/>
+                    <a:p>
+                      <a:r>
+                        <a:rPr sz="1500" b="0">
+                          <a:solidFill>
+                            <a:srgbClr val="1F2A37"/>
+                          </a:solidFill>
+                          <a:latin typeface="Calibri"/>
+                        </a:rPr>
+                        <a:t>2.38</a:t>
+                      </a:r>
+                    </a:p>
+                  </a:txBody>
+                  <a:tcPr marL="60000" marR="60000" marT="40000" marB="40000" anchor="ctr">
+                    <a:solidFill>
+                      <a:srgbClr val="FFFFFF"/>
+                    </a:solidFill>
+                  </a:tcPr>
+                </a:tc>
+                <a:tc>
+                  <a:txBody>
+                    <a:bodyPr/>
+                    <a:lstStyle/>
+                    <a:p>
+                      <a:r>
+                        <a:rPr sz="1500" b="0">
+                          <a:solidFill>
+                            <a:srgbClr val="1F2A37"/>
+                          </a:solidFill>
+                          <a:latin typeface="Calibri"/>
+                        </a:rPr>
+                        <a:t>483</a:t>
+                      </a:r>
+                    </a:p>
+                  </a:txBody>
+                  <a:tcPr marL="60000" marR="60000" marT="40000" marB="40000" anchor="ctr">
+                    <a:solidFill>
+                      <a:srgbClr val="FFFFFF"/>
+                    </a:solidFill>
+                  </a:tcPr>
+                </a:tc>
+              </a:tr>
+            </a:tbl>
+          </a:graphicData>
+        </a:graphic>
+      </p:graphicFrame>
       <p:sp>
         <p:nvSpPr>
           <p:cNvPr id="6" name="TextBox 5"/>
@@ -6292,8 +8521,8 @@
         </p:nvSpPr>
         <p:spPr>
           <a:xfrm>
-            <a:off x="548640" y="6446520"/>
-            <a:ext cx="9144000" cy="274320"/>
+            <a:off x="548640" y="5303520"/>
+            <a:ext cx="10972800" cy="365760"/>
           </a:xfrm>
           <a:prstGeom prst="rect">
             <a:avLst/>
@@ -6308,6 +8537,76 @@
           <a:p>
             <a:pPr algn="l"/>
             <a:r>
+              <a:rPr sz="1200" b="0" i="1">
+                <a:solidFill>
+                  <a:srgbClr val="555F6E"/>
+                </a:solidFill>
+                <a:latin typeface="Calibri"/>
+              </a:rPr>
+              <a:t>SLA: TTFT &lt; 15 ms, TPOT &lt; 2.5 ms (mean), e2e &lt; 500 ms (200-token response). Red cells miss the SLA.</a:t>
+            </a:r>
+          </a:p>
+        </p:txBody>
+      </p:sp>
+      <p:sp>
+        <p:nvSpPr>
+          <p:cNvPr id="7" name="TextBox 6"/>
+          <p:cNvSpPr txBox="1"/>
+          <p:nvPr/>
+        </p:nvSpPr>
+        <p:spPr>
+          <a:xfrm>
+            <a:off x="548640" y="5715000"/>
+            <a:ext cx="10972800" cy="548640"/>
+          </a:xfrm>
+          <a:prstGeom prst="rect">
+            <a:avLst/>
+          </a:prstGeom>
+          <a:noFill/>
+        </p:spPr>
+        <p:txBody>
+          <a:bodyPr wrap="square" lIns="0" rIns="0" tIns="0" bIns="0">
+            <a:spAutoFit/>
+          </a:bodyPr>
+          <a:lstStyle/>
+          <a:p>
+            <a:pPr algn="l"/>
+            <a:r>
+              <a:rPr sz="1000" b="0" i="1">
+                <a:solidFill>
+                  <a:srgbClr val="555F6E"/>
+                </a:solidFill>
+                <a:latin typeface="Calibri"/>
+              </a:rPr>
+              <a:t>Baseline numbers from in-process vLLM bench. Caching combo from HTTP harness, with ~20 ms harness overhead reconciled per input length against the bf16 cache-off harness baseline.</a:t>
+            </a:r>
+          </a:p>
+        </p:txBody>
+      </p:sp>
+      <p:sp>
+        <p:nvSpPr>
+          <p:cNvPr id="8" name="TextBox 7"/>
+          <p:cNvSpPr txBox="1"/>
+          <p:nvPr/>
+        </p:nvSpPr>
+        <p:spPr>
+          <a:xfrm>
+            <a:off x="548640" y="6446520"/>
+            <a:ext cx="9144000" cy="274320"/>
+          </a:xfrm>
+          <a:prstGeom prst="rect">
+            <a:avLst/>
+          </a:prstGeom>
+          <a:noFill/>
+        </p:spPr>
+        <p:txBody>
+          <a:bodyPr wrap="square" lIns="0" rIns="0" tIns="0" bIns="0">
+            <a:spAutoFit/>
+          </a:bodyPr>
+          <a:lstStyle/>
+          <a:p>
+            <a:pPr algn="l"/>
+            <a:r>
               <a:rPr sz="1000" b="0" i="0">
                 <a:solidFill>
                   <a:srgbClr val="555F6E"/>
@@ -6321,7 +8620,7 @@
       </p:sp>
       <p:sp>
         <p:nvSpPr>
-          <p:cNvPr id="7" name="TextBox 6"/>
+          <p:cNvPr id="9" name="TextBox 8"/>
           <p:cNvSpPr txBox="1"/>
           <p:nvPr/>
         </p:nvSpPr>
@@ -6402,7 +8701,7 @@
                 </a:solidFill>
                 <a:latin typeface="Calibri"/>
               </a:rPr>
-              <a:t>BUSINESS VALUE</a:t>
+              <a:t>VERDICT</a:t>
             </a:r>
           </a:p>
         </p:txBody>
@@ -6437,7 +8736,7 @@
                 </a:solidFill>
                 <a:latin typeface="Calibri"/>
               </a:rPr>
-              <a:t>What this is worth</a:t>
+              <a:t>SLA verdict — everything on, end-to-end</a:t>
             </a:r>
           </a:p>
         </p:txBody>
@@ -6485,16 +8784,40 @@
           </a:p>
         </p:txBody>
       </p:sp>
-      <p:sp>
-        <p:nvSpPr>
-          <p:cNvPr id="5" name="TextBox 4"/>
+      <p:pic>
+        <p:nvPicPr>
+          <p:cNvPr id="5" name="Picture 4" descr="appendix_verdict_combo_all_on.png"/>
+          <p:cNvPicPr>
+            <a:picLocks noChangeAspect="1"/>
+          </p:cNvPicPr>
+          <p:nvPr/>
+        </p:nvPicPr>
+        <p:blipFill>
+          <a:blip r:embed="rId2"/>
+          <a:stretch>
+            <a:fillRect/>
+          </a:stretch>
+        </p:blipFill>
+        <p:spPr>
+          <a:xfrm>
+            <a:off x="914400" y="1783080"/>
+            <a:ext cx="10332720" cy="4434840"/>
+          </a:xfrm>
+          <a:prstGeom prst="rect">
+            <a:avLst/>
+          </a:prstGeom>
+        </p:spPr>
+      </p:pic>
+      <p:sp>
+        <p:nvSpPr>
+          <p:cNvPr id="6" name="TextBox 5"/>
           <p:cNvSpPr txBox="1"/>
           <p:nvPr/>
         </p:nvSpPr>
         <p:spPr>
           <a:xfrm>
-            <a:off x="548640" y="1691640"/>
-            <a:ext cx="5486400" cy="274320"/>
+            <a:off x="548640" y="6446520"/>
+            <a:ext cx="9144000" cy="274320"/>
           </a:xfrm>
           <a:prstGeom prst="rect">
             <a:avLst/>
@@ -6509,391 +8832,6 @@
           <a:p>
             <a:pPr algn="l"/>
             <a:r>
-              <a:rPr sz="1100" b="1" i="0">
-                <a:solidFill>
-                  <a:srgbClr val="2E66C2"/>
-                </a:solidFill>
-                <a:latin typeface="Calibri"/>
-              </a:rPr>
-              <a:t>PER-REQUEST SPEED</a:t>
-            </a:r>
-          </a:p>
-        </p:txBody>
-      </p:sp>
-      <p:sp>
-        <p:nvSpPr>
-          <p:cNvPr id="6" name="TextBox 5"/>
-          <p:cNvSpPr txBox="1"/>
-          <p:nvPr/>
-        </p:nvSpPr>
-        <p:spPr>
-          <a:xfrm>
-            <a:off x="548640" y="2057400"/>
-            <a:ext cx="5486400" cy="548640"/>
-          </a:xfrm>
-          <a:prstGeom prst="rect">
-            <a:avLst/>
-          </a:prstGeom>
-          <a:noFill/>
-        </p:spPr>
-        <p:txBody>
-          <a:bodyPr wrap="square" lIns="0" rIns="0" tIns="0" bIns="0">
-            <a:spAutoFit/>
-          </a:bodyPr>
-          <a:lstStyle/>
-          <a:p>
-            <a:pPr algn="l"/>
-            <a:r>
-              <a:rPr sz="2600" b="1" i="0">
-                <a:solidFill>
-                  <a:srgbClr val="1F2A37"/>
-                </a:solidFill>
-                <a:latin typeface="Calibri"/>
-              </a:rPr>
-              <a:t>Up to ~50% faster TTFT</a:t>
-            </a:r>
-          </a:p>
-        </p:txBody>
-      </p:sp>
-      <p:sp>
-        <p:nvSpPr>
-          <p:cNvPr id="7" name="TextBox 6"/>
-          <p:cNvSpPr txBox="1"/>
-          <p:nvPr/>
-        </p:nvSpPr>
-        <p:spPr>
-          <a:xfrm>
-            <a:off x="548640" y="2743200"/>
-            <a:ext cx="5486400" cy="1371600"/>
-          </a:xfrm>
-          <a:prstGeom prst="rect">
-            <a:avLst/>
-          </a:prstGeom>
-          <a:noFill/>
-        </p:spPr>
-        <p:txBody>
-          <a:bodyPr wrap="square" lIns="0" rIns="0" tIns="0" bIns="0">
-            <a:spAutoFit/>
-          </a:bodyPr>
-          <a:lstStyle/>
-          <a:p>
-            <a:pPr algn="l"/>
-            <a:r>
-              <a:rPr sz="1400" b="0" i="0">
-                <a:solidFill>
-                  <a:srgbClr val="555F6E"/>
-                </a:solidFill>
-                <a:latin typeface="Calibri"/>
-              </a:rPr>
-              <a:t>FP8 cuts ~17% off end-to-end at every prompt size. Prefix caching cuts up to 40% off TTFT on shared system prompts. Combined: roughly half the wait users feel today.</a:t>
-            </a:r>
-          </a:p>
-        </p:txBody>
-      </p:sp>
-      <p:sp>
-        <p:nvSpPr>
-          <p:cNvPr id="8" name="TextBox 7"/>
-          <p:cNvSpPr txBox="1"/>
-          <p:nvPr/>
-        </p:nvSpPr>
-        <p:spPr>
-          <a:xfrm>
-            <a:off x="548640" y="4069080"/>
-            <a:ext cx="5486400" cy="548640"/>
-          </a:xfrm>
-          <a:prstGeom prst="rect">
-            <a:avLst/>
-          </a:prstGeom>
-          <a:noFill/>
-        </p:spPr>
-        <p:txBody>
-          <a:bodyPr wrap="square" lIns="0" rIns="0" tIns="0" bIns="0">
-            <a:spAutoFit/>
-          </a:bodyPr>
-          <a:lstStyle/>
-          <a:p>
-            <a:pPr algn="l"/>
-            <a:r>
-              <a:rPr sz="1100" b="0" i="1">
-                <a:solidFill>
-                  <a:srgbClr val="555F6E"/>
-                </a:solidFill>
-                <a:latin typeface="Calibri"/>
-              </a:rPr>
-              <a:t>Combined effect estimated from independent measurements; not directly measured together.</a:t>
-            </a:r>
-          </a:p>
-        </p:txBody>
-      </p:sp>
-      <p:sp>
-        <p:nvSpPr>
-          <p:cNvPr id="9" name="TextBox 8"/>
-          <p:cNvSpPr txBox="1"/>
-          <p:nvPr/>
-        </p:nvSpPr>
-        <p:spPr>
-          <a:xfrm>
-            <a:off x="548640" y="4754880"/>
-            <a:ext cx="5486400" cy="457200"/>
-          </a:xfrm>
-          <a:prstGeom prst="rect">
-            <a:avLst/>
-          </a:prstGeom>
-          <a:noFill/>
-        </p:spPr>
-        <p:txBody>
-          <a:bodyPr wrap="square" lIns="0" rIns="0" tIns="0" bIns="0">
-            <a:spAutoFit/>
-          </a:bodyPr>
-          <a:lstStyle/>
-          <a:p>
-            <a:pPr algn="l"/>
-            <a:r>
-              <a:rPr sz="2200" b="1" i="0">
-                <a:solidFill>
-                  <a:srgbClr val="1F2A37"/>
-                </a:solidFill>
-                <a:latin typeface="Calibri"/>
-              </a:rPr>
-              <a:t>Break-even: Day 1</a:t>
-            </a:r>
-          </a:p>
-        </p:txBody>
-      </p:sp>
-      <p:sp>
-        <p:nvSpPr>
-          <p:cNvPr id="10" name="TextBox 9"/>
-          <p:cNvSpPr txBox="1"/>
-          <p:nvPr/>
-        </p:nvSpPr>
-        <p:spPr>
-          <a:xfrm>
-            <a:off x="548640" y="5303520"/>
-            <a:ext cx="5486400" cy="914400"/>
-          </a:xfrm>
-          <a:prstGeom prst="rect">
-            <a:avLst/>
-          </a:prstGeom>
-          <a:noFill/>
-        </p:spPr>
-        <p:txBody>
-          <a:bodyPr wrap="square" lIns="0" rIns="0" tIns="0" bIns="0">
-            <a:spAutoFit/>
-          </a:bodyPr>
-          <a:lstStyle/>
-          <a:p>
-            <a:pPr algn="l"/>
-            <a:r>
-              <a:rPr sz="1400" b="0" i="0">
-                <a:solidFill>
-                  <a:srgbClr val="555F6E"/>
-                </a:solidFill>
-                <a:latin typeface="Calibri"/>
-              </a:rPr>
-              <a:t>Both levers are config changes — no new hardware, no downtime, no model retraining.</a:t>
-            </a:r>
-          </a:p>
-        </p:txBody>
-      </p:sp>
-      <p:sp>
-        <p:nvSpPr>
-          <p:cNvPr id="11" name="TextBox 10"/>
-          <p:cNvSpPr txBox="1"/>
-          <p:nvPr/>
-        </p:nvSpPr>
-        <p:spPr>
-          <a:xfrm>
-            <a:off x="6400800" y="1691640"/>
-            <a:ext cx="5486400" cy="274320"/>
-          </a:xfrm>
-          <a:prstGeom prst="rect">
-            <a:avLst/>
-          </a:prstGeom>
-          <a:noFill/>
-        </p:spPr>
-        <p:txBody>
-          <a:bodyPr wrap="square" lIns="0" rIns="0" tIns="0" bIns="0">
-            <a:spAutoFit/>
-          </a:bodyPr>
-          <a:lstStyle/>
-          <a:p>
-            <a:pPr algn="l"/>
-            <a:r>
-              <a:rPr sz="1100" b="1" i="0">
-                <a:solidFill>
-                  <a:srgbClr val="2E66C2"/>
-                </a:solidFill>
-                <a:latin typeface="Calibri"/>
-              </a:rPr>
-              <a:t>COST PER REQUEST</a:t>
-            </a:r>
-          </a:p>
-        </p:txBody>
-      </p:sp>
-      <p:sp>
-        <p:nvSpPr>
-          <p:cNvPr id="12" name="TextBox 11"/>
-          <p:cNvSpPr txBox="1"/>
-          <p:nvPr/>
-        </p:nvSpPr>
-        <p:spPr>
-          <a:xfrm>
-            <a:off x="6400800" y="2057400"/>
-            <a:ext cx="5486400" cy="548640"/>
-          </a:xfrm>
-          <a:prstGeom prst="rect">
-            <a:avLst/>
-          </a:prstGeom>
-          <a:noFill/>
-        </p:spPr>
-        <p:txBody>
-          <a:bodyPr wrap="square" lIns="0" rIns="0" tIns="0" bIns="0">
-            <a:spAutoFit/>
-          </a:bodyPr>
-          <a:lstStyle/>
-          <a:p>
-            <a:pPr algn="l"/>
-            <a:r>
-              <a:rPr sz="2400" b="1" i="0">
-                <a:solidFill>
-                  <a:srgbClr val="1F2A37"/>
-                </a:solidFill>
-                <a:latin typeface="Calibri"/>
-              </a:rPr>
-              <a:t>~17% less compute per request</a:t>
-            </a:r>
-          </a:p>
-        </p:txBody>
-      </p:sp>
-      <p:sp>
-        <p:nvSpPr>
-          <p:cNvPr id="13" name="TextBox 12"/>
-          <p:cNvSpPr txBox="1"/>
-          <p:nvPr/>
-        </p:nvSpPr>
-        <p:spPr>
-          <a:xfrm>
-            <a:off x="6400800" y="2743200"/>
-            <a:ext cx="5486400" cy="1371600"/>
-          </a:xfrm>
-          <a:prstGeom prst="rect">
-            <a:avLst/>
-          </a:prstGeom>
-          <a:noFill/>
-        </p:spPr>
-        <p:txBody>
-          <a:bodyPr wrap="square" lIns="0" rIns="0" tIns="0" bIns="0">
-            <a:spAutoFit/>
-          </a:bodyPr>
-          <a:lstStyle/>
-          <a:p>
-            <a:pPr algn="l"/>
-            <a:r>
-              <a:rPr sz="1400" b="0" i="0">
-                <a:solidFill>
-                  <a:srgbClr val="555F6E"/>
-                </a:solidFill>
-                <a:latin typeface="Calibri"/>
-              </a:rPr>
-              <a:t>FP8 means each request finishes in 17% less GPU-time. Same pod serves more requests per hour at the same per-request latency budget.</a:t>
-            </a:r>
-          </a:p>
-        </p:txBody>
-      </p:sp>
-      <p:sp>
-        <p:nvSpPr>
-          <p:cNvPr id="14" name="TextBox 13"/>
-          <p:cNvSpPr txBox="1"/>
-          <p:nvPr/>
-        </p:nvSpPr>
-        <p:spPr>
-          <a:xfrm>
-            <a:off x="6400800" y="4160520"/>
-            <a:ext cx="5486400" cy="548640"/>
-          </a:xfrm>
-          <a:prstGeom prst="rect">
-            <a:avLst/>
-          </a:prstGeom>
-          <a:noFill/>
-        </p:spPr>
-        <p:txBody>
-          <a:bodyPr wrap="square" lIns="0" rIns="0" tIns="0" bIns="0">
-            <a:spAutoFit/>
-          </a:bodyPr>
-          <a:lstStyle/>
-          <a:p>
-            <a:pPr algn="l"/>
-            <a:r>
-              <a:rPr sz="2000" b="1" i="0">
-                <a:solidFill>
-                  <a:srgbClr val="1F2A37"/>
-                </a:solidFill>
-                <a:latin typeface="Calibri"/>
-              </a:rPr>
-              <a:t>Same hardware, same code path</a:t>
-            </a:r>
-          </a:p>
-        </p:txBody>
-      </p:sp>
-      <p:sp>
-        <p:nvSpPr>
-          <p:cNvPr id="15" name="TextBox 14"/>
-          <p:cNvSpPr txBox="1"/>
-          <p:nvPr/>
-        </p:nvSpPr>
-        <p:spPr>
-          <a:xfrm>
-            <a:off x="6400800" y="4800600"/>
-            <a:ext cx="5486400" cy="1371600"/>
-          </a:xfrm>
-          <a:prstGeom prst="rect">
-            <a:avLst/>
-          </a:prstGeom>
-          <a:noFill/>
-        </p:spPr>
-        <p:txBody>
-          <a:bodyPr wrap="square" lIns="0" rIns="0" tIns="0" bIns="0">
-            <a:spAutoFit/>
-          </a:bodyPr>
-          <a:lstStyle/>
-          <a:p>
-            <a:pPr algn="l"/>
-            <a:r>
-              <a:rPr sz="1400" b="0" i="0">
-                <a:solidFill>
-                  <a:srgbClr val="555F6E"/>
-                </a:solidFill>
-                <a:latin typeface="Calibri"/>
-              </a:rPr>
-              <a:t>No re-architecture, no new dependencies, no ops change. Re-baseline whenever the model, vLLM version, or hardware changes.</a:t>
-            </a:r>
-          </a:p>
-        </p:txBody>
-      </p:sp>
-      <p:sp>
-        <p:nvSpPr>
-          <p:cNvPr id="16" name="TextBox 15"/>
-          <p:cNvSpPr txBox="1"/>
-          <p:nvPr/>
-        </p:nvSpPr>
-        <p:spPr>
-          <a:xfrm>
-            <a:off x="548640" y="6446520"/>
-            <a:ext cx="9144000" cy="274320"/>
-          </a:xfrm>
-          <a:prstGeom prst="rect">
-            <a:avLst/>
-          </a:prstGeom>
-          <a:noFill/>
-        </p:spPr>
-        <p:txBody>
-          <a:bodyPr wrap="square" lIns="0" rIns="0" tIns="0" bIns="0">
-            <a:spAutoFit/>
-          </a:bodyPr>
-          <a:lstStyle/>
-          <a:p>
-            <a:pPr algn="l"/>
-            <a:r>
               <a:rPr sz="1000" b="0" i="0">
                 <a:solidFill>
                   <a:srgbClr val="555F6E"/>
@@ -6907,7 +8845,7 @@
       </p:sp>
       <p:sp>
         <p:nvSpPr>
-          <p:cNvPr id="17" name="TextBox 16"/>
+          <p:cNvPr id="7" name="TextBox 6"/>
           <p:cNvSpPr txBox="1"/>
           <p:nvPr/>
         </p:nvSpPr>
@@ -6949,6 +8887,557 @@
 </file>
 
 <file path=ppt/slides/slide16.xml><?xml version="1.0" encoding="utf-8"?>
+<p:sld xmlns:a="http://schemas.openxmlformats.org/drawingml/2006/main" xmlns:p="http://schemas.openxmlformats.org/presentationml/2006/main" xmlns:r="http://schemas.openxmlformats.org/officeDocument/2006/relationships">
+  <p:cSld>
+    <p:spTree>
+      <p:nvGrpSpPr>
+        <p:cNvPr id="1" name=""/>
+        <p:cNvGrpSpPr/>
+        <p:nvPr/>
+      </p:nvGrpSpPr>
+      <p:grpSpPr/>
+      <p:sp>
+        <p:nvSpPr>
+          <p:cNvPr id="2" name="TextBox 1"/>
+          <p:cNvSpPr txBox="1"/>
+          <p:nvPr/>
+        </p:nvSpPr>
+        <p:spPr>
+          <a:xfrm>
+            <a:off x="548640" y="411480"/>
+            <a:ext cx="11155680" cy="274320"/>
+          </a:xfrm>
+          <a:prstGeom prst="rect">
+            <a:avLst/>
+          </a:prstGeom>
+          <a:noFill/>
+        </p:spPr>
+        <p:txBody>
+          <a:bodyPr wrap="square" lIns="0" rIns="0" tIns="0" bIns="0">
+            <a:spAutoFit/>
+          </a:bodyPr>
+          <a:lstStyle/>
+          <a:p>
+            <a:pPr algn="l"/>
+            <a:r>
+              <a:rPr sz="1200" b="1" i="0">
+                <a:solidFill>
+                  <a:srgbClr val="2E66C2"/>
+                </a:solidFill>
+                <a:latin typeface="Calibri"/>
+              </a:rPr>
+              <a:t>BUSINESS VALUE</a:t>
+            </a:r>
+          </a:p>
+        </p:txBody>
+      </p:sp>
+      <p:sp>
+        <p:nvSpPr>
+          <p:cNvPr id="3" name="TextBox 2"/>
+          <p:cNvSpPr txBox="1"/>
+          <p:nvPr/>
+        </p:nvSpPr>
+        <p:spPr>
+          <a:xfrm>
+            <a:off x="548640" y="713232"/>
+            <a:ext cx="11155680" cy="640080"/>
+          </a:xfrm>
+          <a:prstGeom prst="rect">
+            <a:avLst/>
+          </a:prstGeom>
+          <a:noFill/>
+        </p:spPr>
+        <p:txBody>
+          <a:bodyPr wrap="square" lIns="0" rIns="0" tIns="0" bIns="0">
+            <a:spAutoFit/>
+          </a:bodyPr>
+          <a:lstStyle/>
+          <a:p>
+            <a:pPr algn="l"/>
+            <a:r>
+              <a:rPr sz="3000" b="1" i="0">
+                <a:solidFill>
+                  <a:srgbClr val="1F2A37"/>
+                </a:solidFill>
+                <a:latin typeface="Calibri"/>
+              </a:rPr>
+              <a:t>What this is worth</a:t>
+            </a:r>
+          </a:p>
+        </p:txBody>
+      </p:sp>
+      <p:sp>
+        <p:nvSpPr>
+          <p:cNvPr id="4" name="Rectangle 3"/>
+          <p:cNvSpPr/>
+          <p:nvPr/>
+        </p:nvSpPr>
+        <p:spPr>
+          <a:xfrm>
+            <a:off x="548640" y="1417320"/>
+            <a:ext cx="914400" cy="38100"/>
+          </a:xfrm>
+          <a:prstGeom prst="rect">
+            <a:avLst/>
+          </a:prstGeom>
+          <a:solidFill>
+            <a:srgbClr val="2E66C2"/>
+          </a:solidFill>
+          <a:ln>
+            <a:noFill/>
+          </a:ln>
+        </p:spPr>
+        <p:style>
+          <a:lnRef idx="1">
+            <a:schemeClr val="accent1"/>
+          </a:lnRef>
+          <a:fillRef idx="3">
+            <a:schemeClr val="accent1"/>
+          </a:fillRef>
+          <a:effectRef idx="2">
+            <a:schemeClr val="accent1"/>
+          </a:effectRef>
+          <a:fontRef idx="minor">
+            <a:schemeClr val="lt1"/>
+          </a:fontRef>
+        </p:style>
+        <p:txBody>
+          <a:bodyPr rtlCol="0" anchor="ctr"/>
+          <a:lstStyle/>
+          <a:p>
+            <a:pPr algn="ctr"/>
+          </a:p>
+        </p:txBody>
+      </p:sp>
+      <p:sp>
+        <p:nvSpPr>
+          <p:cNvPr id="5" name="TextBox 4"/>
+          <p:cNvSpPr txBox="1"/>
+          <p:nvPr/>
+        </p:nvSpPr>
+        <p:spPr>
+          <a:xfrm>
+            <a:off x="548640" y="1691640"/>
+            <a:ext cx="5486400" cy="274320"/>
+          </a:xfrm>
+          <a:prstGeom prst="rect">
+            <a:avLst/>
+          </a:prstGeom>
+          <a:noFill/>
+        </p:spPr>
+        <p:txBody>
+          <a:bodyPr wrap="square" lIns="0" rIns="0" tIns="0" bIns="0">
+            <a:spAutoFit/>
+          </a:bodyPr>
+          <a:lstStyle/>
+          <a:p>
+            <a:pPr algn="l"/>
+            <a:r>
+              <a:rPr sz="1100" b="1" i="0">
+                <a:solidFill>
+                  <a:srgbClr val="2E66C2"/>
+                </a:solidFill>
+                <a:latin typeface="Calibri"/>
+              </a:rPr>
+              <a:t>PER-REQUEST SPEED</a:t>
+            </a:r>
+          </a:p>
+        </p:txBody>
+      </p:sp>
+      <p:sp>
+        <p:nvSpPr>
+          <p:cNvPr id="6" name="TextBox 5"/>
+          <p:cNvSpPr txBox="1"/>
+          <p:nvPr/>
+        </p:nvSpPr>
+        <p:spPr>
+          <a:xfrm>
+            <a:off x="548640" y="2057400"/>
+            <a:ext cx="5486400" cy="548640"/>
+          </a:xfrm>
+          <a:prstGeom prst="rect">
+            <a:avLst/>
+          </a:prstGeom>
+          <a:noFill/>
+        </p:spPr>
+        <p:txBody>
+          <a:bodyPr wrap="square" lIns="0" rIns="0" tIns="0" bIns="0">
+            <a:spAutoFit/>
+          </a:bodyPr>
+          <a:lstStyle/>
+          <a:p>
+            <a:pPr algn="l"/>
+            <a:r>
+              <a:rPr sz="2800" b="1" i="0">
+                <a:solidFill>
+                  <a:srgbClr val="1F2A37"/>
+                </a:solidFill>
+                <a:latin typeface="Calibri"/>
+              </a:rPr>
+              <a:t>−110 ms per request</a:t>
+            </a:r>
+          </a:p>
+        </p:txBody>
+      </p:sp>
+      <p:sp>
+        <p:nvSpPr>
+          <p:cNvPr id="7" name="TextBox 6"/>
+          <p:cNvSpPr txBox="1"/>
+          <p:nvPr/>
+        </p:nvSpPr>
+        <p:spPr>
+          <a:xfrm>
+            <a:off x="548640" y="2743200"/>
+            <a:ext cx="5486400" cy="1371600"/>
+          </a:xfrm>
+          <a:prstGeom prst="rect">
+            <a:avLst/>
+          </a:prstGeom>
+          <a:noFill/>
+        </p:spPr>
+        <p:txBody>
+          <a:bodyPr wrap="square" lIns="0" rIns="0" tIns="0" bIns="0">
+            <a:spAutoFit/>
+          </a:bodyPr>
+          <a:lstStyle/>
+          <a:p>
+            <a:pPr algn="l"/>
+            <a:r>
+              <a:rPr sz="1400" b="0" i="0">
+                <a:solidFill>
+                  <a:srgbClr val="555F6E"/>
+                </a:solidFill>
+                <a:latin typeface="Calibri"/>
+              </a:rPr>
+              <a:t>End-to-end at L=1024 drops from 565 ms to 455 ms with FP8 + prefix caching — measured. ~19% faster on every chat-app request.</a:t>
+            </a:r>
+          </a:p>
+        </p:txBody>
+      </p:sp>
+      <p:sp>
+        <p:nvSpPr>
+          <p:cNvPr id="8" name="TextBox 7"/>
+          <p:cNvSpPr txBox="1"/>
+          <p:nvPr/>
+        </p:nvSpPr>
+        <p:spPr>
+          <a:xfrm>
+            <a:off x="548640" y="4572000"/>
+            <a:ext cx="5486400" cy="457200"/>
+          </a:xfrm>
+          <a:prstGeom prst="rect">
+            <a:avLst/>
+          </a:prstGeom>
+          <a:noFill/>
+        </p:spPr>
+        <p:txBody>
+          <a:bodyPr wrap="square" lIns="0" rIns="0" tIns="0" bIns="0">
+            <a:spAutoFit/>
+          </a:bodyPr>
+          <a:lstStyle/>
+          <a:p>
+            <a:pPr algn="l"/>
+            <a:r>
+              <a:rPr sz="2200" b="1" i="0">
+                <a:solidFill>
+                  <a:srgbClr val="1F2A37"/>
+                </a:solidFill>
+                <a:latin typeface="Calibri"/>
+              </a:rPr>
+              <a:t>Break-even: Day 1</a:t>
+            </a:r>
+          </a:p>
+        </p:txBody>
+      </p:sp>
+      <p:sp>
+        <p:nvSpPr>
+          <p:cNvPr id="9" name="TextBox 8"/>
+          <p:cNvSpPr txBox="1"/>
+          <p:nvPr/>
+        </p:nvSpPr>
+        <p:spPr>
+          <a:xfrm>
+            <a:off x="548640" y="5120640"/>
+            <a:ext cx="5486400" cy="914400"/>
+          </a:xfrm>
+          <a:prstGeom prst="rect">
+            <a:avLst/>
+          </a:prstGeom>
+          <a:noFill/>
+        </p:spPr>
+        <p:txBody>
+          <a:bodyPr wrap="square" lIns="0" rIns="0" tIns="0" bIns="0">
+            <a:spAutoFit/>
+          </a:bodyPr>
+          <a:lstStyle/>
+          <a:p>
+            <a:pPr algn="l"/>
+            <a:r>
+              <a:rPr sz="1400" b="0" i="0">
+                <a:solidFill>
+                  <a:srgbClr val="555F6E"/>
+                </a:solidFill>
+                <a:latin typeface="Calibri"/>
+              </a:rPr>
+              <a:t>Both levers are config changes — no new hardware, no downtime, no model retraining.</a:t>
+            </a:r>
+          </a:p>
+        </p:txBody>
+      </p:sp>
+      <p:sp>
+        <p:nvSpPr>
+          <p:cNvPr id="10" name="TextBox 9"/>
+          <p:cNvSpPr txBox="1"/>
+          <p:nvPr/>
+        </p:nvSpPr>
+        <p:spPr>
+          <a:xfrm>
+            <a:off x="6400800" y="1691640"/>
+            <a:ext cx="5486400" cy="274320"/>
+          </a:xfrm>
+          <a:prstGeom prst="rect">
+            <a:avLst/>
+          </a:prstGeom>
+          <a:noFill/>
+        </p:spPr>
+        <p:txBody>
+          <a:bodyPr wrap="square" lIns="0" rIns="0" tIns="0" bIns="0">
+            <a:spAutoFit/>
+          </a:bodyPr>
+          <a:lstStyle/>
+          <a:p>
+            <a:pPr algn="l"/>
+            <a:r>
+              <a:rPr sz="1100" b="1" i="0">
+                <a:solidFill>
+                  <a:srgbClr val="2E66C2"/>
+                </a:solidFill>
+                <a:latin typeface="Calibri"/>
+              </a:rPr>
+              <a:t>COST PER REQUEST</a:t>
+            </a:r>
+          </a:p>
+        </p:txBody>
+      </p:sp>
+      <p:sp>
+        <p:nvSpPr>
+          <p:cNvPr id="11" name="TextBox 10"/>
+          <p:cNvSpPr txBox="1"/>
+          <p:nvPr/>
+        </p:nvSpPr>
+        <p:spPr>
+          <a:xfrm>
+            <a:off x="6400800" y="2057400"/>
+            <a:ext cx="5486400" cy="548640"/>
+          </a:xfrm>
+          <a:prstGeom prst="rect">
+            <a:avLst/>
+          </a:prstGeom>
+          <a:noFill/>
+        </p:spPr>
+        <p:txBody>
+          <a:bodyPr wrap="square" lIns="0" rIns="0" tIns="0" bIns="0">
+            <a:spAutoFit/>
+          </a:bodyPr>
+          <a:lstStyle/>
+          <a:p>
+            <a:pPr algn="l"/>
+            <a:r>
+              <a:rPr sz="2200" b="1" i="0">
+                <a:solidFill>
+                  <a:srgbClr val="1F2A37"/>
+                </a:solidFill>
+                <a:latin typeface="Calibri"/>
+              </a:rPr>
+              <a:t>$1.30 → $1.05 per 1K requests</a:t>
+            </a:r>
+          </a:p>
+        </p:txBody>
+      </p:sp>
+      <p:sp>
+        <p:nvSpPr>
+          <p:cNvPr id="12" name="TextBox 11"/>
+          <p:cNvSpPr txBox="1"/>
+          <p:nvPr/>
+        </p:nvSpPr>
+        <p:spPr>
+          <a:xfrm>
+            <a:off x="6400800" y="2743200"/>
+            <a:ext cx="5486400" cy="1554480"/>
+          </a:xfrm>
+          <a:prstGeom prst="rect">
+            <a:avLst/>
+          </a:prstGeom>
+          <a:noFill/>
+        </p:spPr>
+        <p:txBody>
+          <a:bodyPr wrap="square" lIns="0" rIns="0" tIns="0" bIns="0">
+            <a:spAutoFit/>
+          </a:bodyPr>
+          <a:lstStyle/>
+          <a:p>
+            <a:pPr algn="l"/>
+            <a:r>
+              <a:rPr sz="1300" b="0" i="0">
+                <a:solidFill>
+                  <a:srgbClr val="555F6E"/>
+                </a:solidFill>
+                <a:latin typeface="Calibri"/>
+              </a:rPr>
+              <a:t>On AWS g7e.12xlarge ($8.29 / hr, 2× RTX PRO 6000 Blackwell — the same GPU we measured), FP8 + prefix caching cuts cost per request 19%. At 1M requests / day, that saves ~$93K per pod per year.</a:t>
+            </a:r>
+          </a:p>
+        </p:txBody>
+      </p:sp>
+      <p:sp>
+        <p:nvSpPr>
+          <p:cNvPr id="13" name="TextBox 12"/>
+          <p:cNvSpPr txBox="1"/>
+          <p:nvPr/>
+        </p:nvSpPr>
+        <p:spPr>
+          <a:xfrm>
+            <a:off x="6400800" y="4572000"/>
+            <a:ext cx="5486400" cy="457200"/>
+          </a:xfrm>
+          <a:prstGeom prst="rect">
+            <a:avLst/>
+          </a:prstGeom>
+          <a:noFill/>
+        </p:spPr>
+        <p:txBody>
+          <a:bodyPr wrap="square" lIns="0" rIns="0" tIns="0" bIns="0">
+            <a:spAutoFit/>
+          </a:bodyPr>
+          <a:lstStyle/>
+          <a:p>
+            <a:pPr algn="l"/>
+            <a:r>
+              <a:rPr sz="2000" b="1" i="0">
+                <a:solidFill>
+                  <a:srgbClr val="1F2A37"/>
+                </a:solidFill>
+                <a:latin typeface="Calibri"/>
+              </a:rPr>
+              <a:t>Same hardware, same code path</a:t>
+            </a:r>
+          </a:p>
+        </p:txBody>
+      </p:sp>
+      <p:sp>
+        <p:nvSpPr>
+          <p:cNvPr id="14" name="TextBox 13"/>
+          <p:cNvSpPr txBox="1"/>
+          <p:nvPr/>
+        </p:nvSpPr>
+        <p:spPr>
+          <a:xfrm>
+            <a:off x="6400800" y="4800600"/>
+            <a:ext cx="5486400" cy="1371600"/>
+          </a:xfrm>
+          <a:prstGeom prst="rect">
+            <a:avLst/>
+          </a:prstGeom>
+          <a:noFill/>
+        </p:spPr>
+        <p:txBody>
+          <a:bodyPr wrap="square" lIns="0" rIns="0" tIns="0" bIns="0">
+            <a:spAutoFit/>
+          </a:bodyPr>
+          <a:lstStyle/>
+          <a:p>
+            <a:pPr algn="l"/>
+            <a:r>
+              <a:rPr sz="1400" b="0" i="0">
+                <a:solidFill>
+                  <a:srgbClr val="555F6E"/>
+                </a:solidFill>
+                <a:latin typeface="Calibri"/>
+              </a:rPr>
+              <a:t>No re-architecture, no new dependencies, no ops change. Re-baseline whenever the model, vLLM version, or hardware changes.</a:t>
+            </a:r>
+          </a:p>
+        </p:txBody>
+      </p:sp>
+      <p:sp>
+        <p:nvSpPr>
+          <p:cNvPr id="15" name="TextBox 14"/>
+          <p:cNvSpPr txBox="1"/>
+          <p:nvPr/>
+        </p:nvSpPr>
+        <p:spPr>
+          <a:xfrm>
+            <a:off x="548640" y="6446520"/>
+            <a:ext cx="9144000" cy="274320"/>
+          </a:xfrm>
+          <a:prstGeom prst="rect">
+            <a:avLst/>
+          </a:prstGeom>
+          <a:noFill/>
+        </p:spPr>
+        <p:txBody>
+          <a:bodyPr wrap="square" lIns="0" rIns="0" tIns="0" bIns="0">
+            <a:spAutoFit/>
+          </a:bodyPr>
+          <a:lstStyle/>
+          <a:p>
+            <a:pPr algn="l"/>
+            <a:r>
+              <a:rPr sz="1000" b="0" i="0">
+                <a:solidFill>
+                  <a:srgbClr val="555F6E"/>
+                </a:solidFill>
+                <a:latin typeface="Calibri"/>
+              </a:rPr>
+              <a:t>OLMoE-1B-7B (1B active / 7B total) on Blackwell  ·  diagnosis &amp; optimization</a:t>
+            </a:r>
+          </a:p>
+        </p:txBody>
+      </p:sp>
+      <p:sp>
+        <p:nvSpPr>
+          <p:cNvPr id="16" name="TextBox 15"/>
+          <p:cNvSpPr txBox="1"/>
+          <p:nvPr/>
+        </p:nvSpPr>
+        <p:spPr>
+          <a:xfrm>
+            <a:off x="11521440" y="6446520"/>
+            <a:ext cx="548640" cy="274320"/>
+          </a:xfrm>
+          <a:prstGeom prst="rect">
+            <a:avLst/>
+          </a:prstGeom>
+          <a:noFill/>
+        </p:spPr>
+        <p:txBody>
+          <a:bodyPr wrap="square" lIns="0" rIns="0" tIns="0" bIns="0">
+            <a:spAutoFit/>
+          </a:bodyPr>
+          <a:lstStyle/>
+          <a:p>
+            <a:pPr algn="r"/>
+            <a:r>
+              <a:rPr sz="1000" b="0" i="0">
+                <a:solidFill>
+                  <a:srgbClr val="555F6E"/>
+                </a:solidFill>
+                <a:latin typeface="Calibri"/>
+              </a:rPr>
+              <a:t>16</a:t>
+            </a:r>
+          </a:p>
+        </p:txBody>
+      </p:sp>
+    </p:spTree>
+  </p:cSld>
+  <p:clrMapOvr>
+    <a:masterClrMapping/>
+  </p:clrMapOvr>
+</p:sld>
+</file>
+
+<file path=ppt/slides/slide17.xml><?xml version="1.0" encoding="utf-8"?>
 <p:sld xmlns:a="http://schemas.openxmlformats.org/drawingml/2006/main" xmlns:p="http://schemas.openxmlformats.org/presentationml/2006/main" xmlns:r="http://schemas.openxmlformats.org/officeDocument/2006/relationships">
   <p:cSld>
     <p:spTree>
@@ -7614,294 +10103,6 @@
                 </a:solidFill>
                 <a:latin typeface="Calibri"/>
               </a:rPr>
-              <a:t>16</a:t>
-            </a:r>
-          </a:p>
-        </p:txBody>
-      </p:sp>
-    </p:spTree>
-  </p:cSld>
-  <p:clrMapOvr>
-    <a:masterClrMapping/>
-  </p:clrMapOvr>
-</p:sld>
-</file>
-
-<file path=ppt/slides/slide17.xml><?xml version="1.0" encoding="utf-8"?>
-<p:sld xmlns:a="http://schemas.openxmlformats.org/drawingml/2006/main" xmlns:p="http://schemas.openxmlformats.org/presentationml/2006/main" xmlns:r="http://schemas.openxmlformats.org/officeDocument/2006/relationships">
-  <p:cSld>
-    <p:spTree>
-      <p:nvGrpSpPr>
-        <p:cNvPr id="1" name=""/>
-        <p:cNvGrpSpPr/>
-        <p:nvPr/>
-      </p:nvGrpSpPr>
-      <p:grpSpPr/>
-      <p:sp>
-        <p:nvSpPr>
-          <p:cNvPr id="2" name="TextBox 1"/>
-          <p:cNvSpPr txBox="1"/>
-          <p:nvPr/>
-        </p:nvSpPr>
-        <p:spPr>
-          <a:xfrm>
-            <a:off x="548640" y="411480"/>
-            <a:ext cx="11155680" cy="274320"/>
-          </a:xfrm>
-          <a:prstGeom prst="rect">
-            <a:avLst/>
-          </a:prstGeom>
-          <a:noFill/>
-        </p:spPr>
-        <p:txBody>
-          <a:bodyPr wrap="square" lIns="0" rIns="0" tIns="0" bIns="0">
-            <a:spAutoFit/>
-          </a:bodyPr>
-          <a:lstStyle/>
-          <a:p>
-            <a:pPr algn="l"/>
-            <a:r>
-              <a:rPr sz="1200" b="1" i="0">
-                <a:solidFill>
-                  <a:srgbClr val="2E66C2"/>
-                </a:solidFill>
-                <a:latin typeface="Calibri"/>
-              </a:rPr>
-              <a:t>VERDICT</a:t>
-            </a:r>
-          </a:p>
-        </p:txBody>
-      </p:sp>
-      <p:sp>
-        <p:nvSpPr>
-          <p:cNvPr id="3" name="TextBox 2"/>
-          <p:cNvSpPr txBox="1"/>
-          <p:nvPr/>
-        </p:nvSpPr>
-        <p:spPr>
-          <a:xfrm>
-            <a:off x="548640" y="713232"/>
-            <a:ext cx="11155680" cy="640080"/>
-          </a:xfrm>
-          <a:prstGeom prst="rect">
-            <a:avLst/>
-          </a:prstGeom>
-          <a:noFill/>
-        </p:spPr>
-        <p:txBody>
-          <a:bodyPr wrap="square" lIns="0" rIns="0" tIns="0" bIns="0">
-            <a:spAutoFit/>
-          </a:bodyPr>
-          <a:lstStyle/>
-          <a:p>
-            <a:pPr algn="l"/>
-            <a:r>
-              <a:rPr sz="3000" b="1" i="0">
-                <a:solidFill>
-                  <a:srgbClr val="1F2A37"/>
-                </a:solidFill>
-                <a:latin typeface="Calibri"/>
-              </a:rPr>
-              <a:t>Recommendation</a:t>
-            </a:r>
-          </a:p>
-        </p:txBody>
-      </p:sp>
-      <p:sp>
-        <p:nvSpPr>
-          <p:cNvPr id="4" name="Rectangle 3"/>
-          <p:cNvSpPr/>
-          <p:nvPr/>
-        </p:nvSpPr>
-        <p:spPr>
-          <a:xfrm>
-            <a:off x="548640" y="1417320"/>
-            <a:ext cx="914400" cy="38100"/>
-          </a:xfrm>
-          <a:prstGeom prst="rect">
-            <a:avLst/>
-          </a:prstGeom>
-          <a:solidFill>
-            <a:srgbClr val="2E66C2"/>
-          </a:solidFill>
-          <a:ln>
-            <a:noFill/>
-          </a:ln>
-        </p:spPr>
-        <p:style>
-          <a:lnRef idx="1">
-            <a:schemeClr val="accent1"/>
-          </a:lnRef>
-          <a:fillRef idx="3">
-            <a:schemeClr val="accent1"/>
-          </a:fillRef>
-          <a:effectRef idx="2">
-            <a:schemeClr val="accent1"/>
-          </a:effectRef>
-          <a:fontRef idx="minor">
-            <a:schemeClr val="lt1"/>
-          </a:fontRef>
-        </p:style>
-        <p:txBody>
-          <a:bodyPr rtlCol="0" anchor="ctr"/>
-          <a:lstStyle/>
-          <a:p>
-            <a:pPr algn="ctr"/>
-          </a:p>
-        </p:txBody>
-      </p:sp>
-      <p:sp>
-        <p:nvSpPr>
-          <p:cNvPr id="5" name="TextBox 4"/>
-          <p:cNvSpPr txBox="1"/>
-          <p:nvPr/>
-        </p:nvSpPr>
-        <p:spPr>
-          <a:xfrm>
-            <a:off x="548640" y="1737360"/>
-            <a:ext cx="11155680" cy="4114800"/>
-          </a:xfrm>
-          <a:prstGeom prst="rect">
-            <a:avLst/>
-          </a:prstGeom>
-          <a:noFill/>
-        </p:spPr>
-        <p:txBody>
-          <a:bodyPr wrap="square" lIns="0" rIns="0" tIns="0" bIns="0">
-            <a:spAutoFit/>
-          </a:bodyPr>
-          <a:lstStyle/>
-          <a:p>
-            <a:pPr algn="l">
-              <a:spcAft>
-                <a:spcPts val="800"/>
-              </a:spcAft>
-            </a:pPr>
-            <a:r>
-              <a:rPr sz="2000">
-                <a:solidFill>
-                  <a:srgbClr val="1F2A37"/>
-                </a:solidFill>
-                <a:latin typeface="Calibri"/>
-              </a:rPr>
-              <a:t>•  Enable FP8 quantization and prefix caching this week — validate accuracy on customer evals first</a:t>
-            </a:r>
-          </a:p>
-          <a:p>
-            <a:pPr algn="l">
-              <a:spcAft>
-                <a:spcPts val="800"/>
-              </a:spcAft>
-            </a:pPr>
-            <a:r>
-              <a:rPr sz="2000">
-                <a:solidFill>
-                  <a:srgbClr val="1F2A37"/>
-                </a:solidFill>
-                <a:latin typeface="Calibri"/>
-              </a:rPr>
-              <a:t>•  Evaluate tensor parallelism (TP=2) for TPOT — 14% gain at single-user load; rerun under concurrency before adopting in prod</a:t>
-            </a:r>
-          </a:p>
-          <a:p>
-            <a:pPr algn="l">
-              <a:spcAft>
-                <a:spcPts val="800"/>
-              </a:spcAft>
-            </a:pPr>
-            <a:r>
-              <a:rPr sz="2000">
-                <a:solidFill>
-                  <a:srgbClr val="1F2A37"/>
-                </a:solidFill>
-                <a:latin typeface="Calibri"/>
-              </a:rPr>
-              <a:t>•  Use continuous batching only for throughput-mode workloads — not chat — per-request TPOT degrades 4× by B=32</a:t>
-            </a:r>
-          </a:p>
-          <a:p>
-            <a:pPr algn="l">
-              <a:spcAft>
-                <a:spcPts val="800"/>
-              </a:spcAft>
-            </a:pPr>
-            <a:r>
-              <a:rPr sz="2000">
-                <a:solidFill>
-                  <a:srgbClr val="1F2A37"/>
-                </a:solidFill>
-                <a:latin typeface="Calibri"/>
-              </a:rPr>
-              <a:t>•  Re-baseline whenever the model, vLLM version, or hardware changes</a:t>
-            </a:r>
-          </a:p>
-        </p:txBody>
-      </p:sp>
-      <p:sp>
-        <p:nvSpPr>
-          <p:cNvPr id="6" name="TextBox 5"/>
-          <p:cNvSpPr txBox="1"/>
-          <p:nvPr/>
-        </p:nvSpPr>
-        <p:spPr>
-          <a:xfrm>
-            <a:off x="548640" y="6446520"/>
-            <a:ext cx="9144000" cy="274320"/>
-          </a:xfrm>
-          <a:prstGeom prst="rect">
-            <a:avLst/>
-          </a:prstGeom>
-          <a:noFill/>
-        </p:spPr>
-        <p:txBody>
-          <a:bodyPr wrap="square" lIns="0" rIns="0" tIns="0" bIns="0">
-            <a:spAutoFit/>
-          </a:bodyPr>
-          <a:lstStyle/>
-          <a:p>
-            <a:pPr algn="l"/>
-            <a:r>
-              <a:rPr sz="1000" b="0" i="0">
-                <a:solidFill>
-                  <a:srgbClr val="555F6E"/>
-                </a:solidFill>
-                <a:latin typeface="Calibri"/>
-              </a:rPr>
-              <a:t>OLMoE-1B-7B (1B active / 7B total) on Blackwell  ·  diagnosis &amp; optimization</a:t>
-            </a:r>
-          </a:p>
-        </p:txBody>
-      </p:sp>
-      <p:sp>
-        <p:nvSpPr>
-          <p:cNvPr id="7" name="TextBox 6"/>
-          <p:cNvSpPr txBox="1"/>
-          <p:nvPr/>
-        </p:nvSpPr>
-        <p:spPr>
-          <a:xfrm>
-            <a:off x="11521440" y="6446520"/>
-            <a:ext cx="548640" cy="274320"/>
-          </a:xfrm>
-          <a:prstGeom prst="rect">
-            <a:avLst/>
-          </a:prstGeom>
-          <a:noFill/>
-        </p:spPr>
-        <p:txBody>
-          <a:bodyPr wrap="square" lIns="0" rIns="0" tIns="0" bIns="0">
-            <a:spAutoFit/>
-          </a:bodyPr>
-          <a:lstStyle/>
-          <a:p>
-            <a:pPr algn="r"/>
-            <a:r>
-              <a:rPr sz="1000" b="0" i="0">
-                <a:solidFill>
-                  <a:srgbClr val="555F6E"/>
-                </a:solidFill>
-                <a:latin typeface="Calibri"/>
-              </a:rPr>
               <a:t>17</a:t>
             </a:r>
           </a:p>
@@ -7933,8 +10134,8 @@
         </p:nvSpPr>
         <p:spPr>
           <a:xfrm>
-            <a:off x="731520" y="1828800"/>
-            <a:ext cx="7315200" cy="1645920"/>
+            <a:off x="548640" y="411480"/>
+            <a:ext cx="11155680" cy="274320"/>
           </a:xfrm>
           <a:prstGeom prst="rect">
             <a:avLst/>
@@ -7949,27 +10150,62 @@
           <a:p>
             <a:pPr algn="l"/>
             <a:r>
-              <a:rPr sz="9600" b="1" i="0">
-                <a:solidFill>
-                  <a:srgbClr val="1F2A37"/>
+              <a:rPr sz="1200" b="1" i="0">
+                <a:solidFill>
+                  <a:srgbClr val="2E66C2"/>
                 </a:solidFill>
                 <a:latin typeface="Calibri"/>
               </a:rPr>
-              <a:t>Q&amp;A</a:t>
-            </a:r>
-          </a:p>
-        </p:txBody>
-      </p:sp>
-      <p:sp>
-        <p:nvSpPr>
-          <p:cNvPr id="3" name="Rectangle 2"/>
+              <a:t>VERDICT</a:t>
+            </a:r>
+          </a:p>
+        </p:txBody>
+      </p:sp>
+      <p:sp>
+        <p:nvSpPr>
+          <p:cNvPr id="3" name="TextBox 2"/>
+          <p:cNvSpPr txBox="1"/>
+          <p:nvPr/>
+        </p:nvSpPr>
+        <p:spPr>
+          <a:xfrm>
+            <a:off x="548640" y="713232"/>
+            <a:ext cx="11155680" cy="640080"/>
+          </a:xfrm>
+          <a:prstGeom prst="rect">
+            <a:avLst/>
+          </a:prstGeom>
+          <a:noFill/>
+        </p:spPr>
+        <p:txBody>
+          <a:bodyPr wrap="square" lIns="0" rIns="0" tIns="0" bIns="0">
+            <a:spAutoFit/>
+          </a:bodyPr>
+          <a:lstStyle/>
+          <a:p>
+            <a:pPr algn="l"/>
+            <a:r>
+              <a:rPr sz="3000" b="1" i="0">
+                <a:solidFill>
+                  <a:srgbClr val="1F2A37"/>
+                </a:solidFill>
+                <a:latin typeface="Calibri"/>
+              </a:rPr>
+              <a:t>Recommendation</a:t>
+            </a:r>
+          </a:p>
+        </p:txBody>
+      </p:sp>
+      <p:sp>
+        <p:nvSpPr>
+          <p:cNvPr id="4" name="Rectangle 3"/>
           <p:cNvSpPr/>
           <p:nvPr/>
         </p:nvSpPr>
         <p:spPr>
           <a:xfrm>
-            <a:off x="731520" y="3657600"/>
-            <a:ext cx="1828800" cy="50800"/>
+            <a:off x="548640" y="1417320"/>
+            <a:ext cx="914400" cy="38100"/>
           </a:xfrm>
           <a:prstGeom prst="rect">
             <a:avLst/>
@@ -8005,14 +10241,14 @@
       </p:sp>
       <p:sp>
         <p:nvSpPr>
-          <p:cNvPr id="4" name="TextBox 3"/>
+          <p:cNvPr id="5" name="TextBox 4"/>
           <p:cNvSpPr txBox="1"/>
           <p:nvPr/>
         </p:nvSpPr>
         <p:spPr>
           <a:xfrm>
-            <a:off x="731520" y="3931920"/>
-            <a:ext cx="7315200" cy="457200"/>
+            <a:off x="548640" y="1737360"/>
+            <a:ext cx="11155680" cy="4114800"/>
           </a:xfrm>
           <a:prstGeom prst="rect">
             <a:avLst/>
@@ -8025,29 +10261,81 @@
           </a:bodyPr>
           <a:lstStyle/>
           <a:p>
-            <a:pPr algn="l"/>
-            <a:r>
-              <a:rPr sz="2000" b="0" i="0">
-                <a:solidFill>
-                  <a:srgbClr val="555F6E"/>
+            <a:pPr algn="l">
+              <a:spcAft>
+                <a:spcPts val="800"/>
+              </a:spcAft>
+            </a:pPr>
+            <a:r>
+              <a:rPr sz="2000">
+                <a:solidFill>
+                  <a:srgbClr val="1F2A37"/>
                 </a:solidFill>
                 <a:latin typeface="Calibri"/>
               </a:rPr>
-              <a:t>15 minutes — fire away.</a:t>
-            </a:r>
-          </a:p>
-        </p:txBody>
-      </p:sp>
-      <p:sp>
-        <p:nvSpPr>
-          <p:cNvPr id="5" name="TextBox 4"/>
+              <a:t>•  Enable FP8 quantization and prefix caching this week — validate accuracy on customer evals first</a:t>
+            </a:r>
+          </a:p>
+          <a:p>
+            <a:pPr algn="l">
+              <a:spcAft>
+                <a:spcPts val="800"/>
+              </a:spcAft>
+            </a:pPr>
+            <a:r>
+              <a:rPr sz="2000">
+                <a:solidFill>
+                  <a:srgbClr val="1F2A37"/>
+                </a:solidFill>
+                <a:latin typeface="Calibri"/>
+              </a:rPr>
+              <a:t>•  Evaluate tensor parallelism (TP=2) for TPOT — 14% gain at single-user load; rerun under concurrency before adopting in prod</a:t>
+            </a:r>
+          </a:p>
+          <a:p>
+            <a:pPr algn="l">
+              <a:spcAft>
+                <a:spcPts val="800"/>
+              </a:spcAft>
+            </a:pPr>
+            <a:r>
+              <a:rPr sz="2000">
+                <a:solidFill>
+                  <a:srgbClr val="1F2A37"/>
+                </a:solidFill>
+                <a:latin typeface="Calibri"/>
+              </a:rPr>
+              <a:t>•  Use continuous batching only for throughput-mode workloads — not chat — per-request TPOT degrades 4× by B=32</a:t>
+            </a:r>
+          </a:p>
+          <a:p>
+            <a:pPr algn="l">
+              <a:spcAft>
+                <a:spcPts val="800"/>
+              </a:spcAft>
+            </a:pPr>
+            <a:r>
+              <a:rPr sz="2000">
+                <a:solidFill>
+                  <a:srgbClr val="1F2A37"/>
+                </a:solidFill>
+                <a:latin typeface="Calibri"/>
+              </a:rPr>
+              <a:t>•  Re-baseline whenever the model, vLLM version, or hardware changes</a:t>
+            </a:r>
+          </a:p>
+        </p:txBody>
+      </p:sp>
+      <p:sp>
+        <p:nvSpPr>
+          <p:cNvPr id="6" name="TextBox 5"/>
           <p:cNvSpPr txBox="1"/>
           <p:nvPr/>
         </p:nvSpPr>
         <p:spPr>
           <a:xfrm>
-            <a:off x="8778240" y="1828800"/>
-            <a:ext cx="2743200" cy="274320"/>
+            <a:off x="548640" y="6446520"/>
+            <a:ext cx="9144000" cy="274320"/>
           </a:xfrm>
           <a:prstGeom prst="rect">
             <a:avLst/>
@@ -8062,135 +10350,6 @@
           <a:p>
             <a:pPr algn="l"/>
             <a:r>
-              <a:rPr sz="1100" b="1" i="0">
-                <a:solidFill>
-                  <a:srgbClr val="2E66C2"/>
-                </a:solidFill>
-                <a:latin typeface="Calibri"/>
-              </a:rPr>
-              <a:t>REPO</a:t>
-            </a:r>
-          </a:p>
-        </p:txBody>
-      </p:sp>
-      <p:pic>
-        <p:nvPicPr>
-          <p:cNvPr id="6" name="Picture 5" descr="repo_qr.png"/>
-          <p:cNvPicPr>
-            <a:picLocks noChangeAspect="1"/>
-          </p:cNvPicPr>
-          <p:nvPr/>
-        </p:nvPicPr>
-        <p:blipFill>
-          <a:blip r:embed="rId2"/>
-          <a:stretch>
-            <a:fillRect/>
-          </a:stretch>
-        </p:blipFill>
-        <p:spPr>
-          <a:xfrm>
-            <a:off x="8778240" y="2194560"/>
-            <a:ext cx="2743200" cy="2743200"/>
-          </a:xfrm>
-          <a:prstGeom prst="rect">
-            <a:avLst/>
-          </a:prstGeom>
-        </p:spPr>
-      </p:pic>
-      <p:sp>
-        <p:nvSpPr>
-          <p:cNvPr id="7" name="TextBox 6"/>
-          <p:cNvSpPr txBox="1"/>
-          <p:nvPr/>
-        </p:nvSpPr>
-        <p:spPr>
-          <a:xfrm>
-            <a:off x="8229600" y="5074920"/>
-            <a:ext cx="3840480" cy="365760"/>
-          </a:xfrm>
-          <a:prstGeom prst="rect">
-            <a:avLst/>
-          </a:prstGeom>
-          <a:noFill/>
-        </p:spPr>
-        <p:txBody>
-          <a:bodyPr wrap="square" lIns="0" rIns="0" tIns="0" bIns="0">
-            <a:spAutoFit/>
-          </a:bodyPr>
-          <a:lstStyle/>
-          <a:p>
-            <a:pPr algn="ctr"/>
-            <a:r>
-              <a:rPr sz="1100" b="0" i="0">
-                <a:solidFill>
-                  <a:srgbClr val="555F6E"/>
-                </a:solidFill>
-                <a:latin typeface="Calibri"/>
-              </a:rPr>
-              <a:t>github.com/harishvs/moe-inference-optimize</a:t>
-            </a:r>
-          </a:p>
-        </p:txBody>
-      </p:sp>
-      <p:sp>
-        <p:nvSpPr>
-          <p:cNvPr id="8" name="TextBox 7"/>
-          <p:cNvSpPr txBox="1"/>
-          <p:nvPr/>
-        </p:nvSpPr>
-        <p:spPr>
-          <a:xfrm>
-            <a:off x="8229600" y="5440680"/>
-            <a:ext cx="3840480" cy="365760"/>
-          </a:xfrm>
-          <a:prstGeom prst="rect">
-            <a:avLst/>
-          </a:prstGeom>
-          <a:noFill/>
-        </p:spPr>
-        <p:txBody>
-          <a:bodyPr wrap="square" lIns="0" rIns="0" tIns="0" bIns="0">
-            <a:spAutoFit/>
-          </a:bodyPr>
-          <a:lstStyle/>
-          <a:p>
-            <a:pPr algn="ctr"/>
-            <a:r>
-              <a:rPr sz="1000" b="0" i="1">
-                <a:solidFill>
-                  <a:srgbClr val="555F6E"/>
-                </a:solidFill>
-                <a:latin typeface="Calibri"/>
-              </a:rPr>
-              <a:t>scan to clone the code, results, and this deck</a:t>
-            </a:r>
-          </a:p>
-        </p:txBody>
-      </p:sp>
-      <p:sp>
-        <p:nvSpPr>
-          <p:cNvPr id="9" name="TextBox 8"/>
-          <p:cNvSpPr txBox="1"/>
-          <p:nvPr/>
-        </p:nvSpPr>
-        <p:spPr>
-          <a:xfrm>
-            <a:off x="548640" y="6446520"/>
-            <a:ext cx="9144000" cy="274320"/>
-          </a:xfrm>
-          <a:prstGeom prst="rect">
-            <a:avLst/>
-          </a:prstGeom>
-          <a:noFill/>
-        </p:spPr>
-        <p:txBody>
-          <a:bodyPr wrap="square" lIns="0" rIns="0" tIns="0" bIns="0">
-            <a:spAutoFit/>
-          </a:bodyPr>
-          <a:lstStyle/>
-          <a:p>
-            <a:pPr algn="l"/>
-            <a:r>
               <a:rPr sz="1000" b="0" i="0">
                 <a:solidFill>
                   <a:srgbClr val="555F6E"/>
@@ -8204,7 +10363,7 @@
       </p:sp>
       <p:sp>
         <p:nvSpPr>
-          <p:cNvPr id="10" name="TextBox 9"/>
+          <p:cNvPr id="7" name="TextBox 6"/>
           <p:cNvSpPr txBox="1"/>
           <p:nvPr/>
         </p:nvSpPr>
@@ -8285,7 +10444,7 @@
                 </a:solidFill>
                 <a:latin typeface="Calibri"/>
               </a:rPr>
-              <a:t>APPENDIX</a:t>
+              <a:t>THE CODE</a:t>
             </a:r>
           </a:p>
         </p:txBody>
@@ -8320,7 +10479,7 @@
                 </a:solidFill>
                 <a:latin typeface="Calibri"/>
               </a:rPr>
-              <a:t>FP8 quality — standard accuracy benchmarks</a:t>
+              <a:t>What I wrote</a:t>
             </a:r>
           </a:p>
         </p:txBody>
@@ -8368,40 +10527,16 @@
           </a:p>
         </p:txBody>
       </p:sp>
-      <p:pic>
-        <p:nvPicPr>
-          <p:cNvPr id="5" name="Picture 4" descr="appendix_fp8_accuracy.png"/>
-          <p:cNvPicPr>
-            <a:picLocks noChangeAspect="1"/>
-          </p:cNvPicPr>
-          <p:nvPr/>
-        </p:nvPicPr>
-        <p:blipFill>
-          <a:blip r:embed="rId2"/>
-          <a:stretch>
-            <a:fillRect/>
-          </a:stretch>
-        </p:blipFill>
-        <p:spPr>
-          <a:xfrm>
-            <a:off x="1280160" y="1783080"/>
-            <a:ext cx="9601200" cy="4434840"/>
-          </a:xfrm>
-          <a:prstGeom prst="rect">
-            <a:avLst/>
-          </a:prstGeom>
-        </p:spPr>
-      </p:pic>
-      <p:sp>
-        <p:nvSpPr>
-          <p:cNvPr id="6" name="TextBox 5"/>
+      <p:sp>
+        <p:nvSpPr>
+          <p:cNvPr id="5" name="TextBox 4"/>
           <p:cNvSpPr txBox="1"/>
           <p:nvPr/>
         </p:nvSpPr>
         <p:spPr>
           <a:xfrm>
-            <a:off x="548640" y="6446520"/>
-            <a:ext cx="9144000" cy="274320"/>
+            <a:off x="548640" y="1691640"/>
+            <a:ext cx="5486400" cy="274320"/>
           </a:xfrm>
           <a:prstGeom prst="rect">
             <a:avLst/>
@@ -8416,6 +10551,349 @@
           <a:p>
             <a:pPr algn="l"/>
             <a:r>
+              <a:rPr sz="1100" b="1" i="0">
+                <a:solidFill>
+                  <a:srgbClr val="2E66C2"/>
+                </a:solidFill>
+                <a:latin typeface="Calibri"/>
+              </a:rPr>
+              <a:t>MEASUREMENT PIPELINE</a:t>
+            </a:r>
+          </a:p>
+        </p:txBody>
+      </p:sp>
+      <p:sp>
+        <p:nvSpPr>
+          <p:cNvPr id="6" name="TextBox 5"/>
+          <p:cNvSpPr txBox="1"/>
+          <p:nvPr/>
+        </p:nvSpPr>
+        <p:spPr>
+          <a:xfrm>
+            <a:off x="548640" y="2057400"/>
+            <a:ext cx="5486400" cy="3474720"/>
+          </a:xfrm>
+          <a:prstGeom prst="rect">
+            <a:avLst/>
+          </a:prstGeom>
+          <a:noFill/>
+        </p:spPr>
+        <p:txBody>
+          <a:bodyPr wrap="square" lIns="0" rIns="0" tIns="0" bIns="0">
+            <a:spAutoFit/>
+          </a:bodyPr>
+          <a:lstStyle/>
+          <a:p>
+            <a:pPr algn="l">
+              <a:spcAft>
+                <a:spcPts val="800"/>
+              </a:spcAft>
+            </a:pPr>
+            <a:r>
+              <a:rPr sz="1200">
+                <a:solidFill>
+                  <a:srgbClr val="1F2A37"/>
+                </a:solidFill>
+                <a:latin typeface="Calibri"/>
+              </a:rPr>
+              <a:t>•  scripts/benchmark_latency.py — TTFT/TPOT sweep (bf16, FP8, TP=2)</a:t>
+            </a:r>
+          </a:p>
+          <a:p>
+            <a:pPr algn="l">
+              <a:spcAft>
+                <a:spcPts val="800"/>
+              </a:spcAft>
+            </a:pPr>
+            <a:r>
+              <a:rPr sz="1200">
+                <a:solidFill>
+                  <a:srgbClr val="1F2A37"/>
+                </a:solidFill>
+                <a:latin typeface="Calibri"/>
+              </a:rPr>
+              <a:t>•  scripts/profile_prefill.py / profile_decode.py — torch.profiler traces</a:t>
+            </a:r>
+          </a:p>
+          <a:p>
+            <a:pPr algn="l">
+              <a:spcAft>
+                <a:spcPts val="800"/>
+              </a:spcAft>
+            </a:pPr>
+            <a:r>
+              <a:rPr sz="1200">
+                <a:solidFill>
+                  <a:srgbClr val="1F2A37"/>
+                </a:solidFill>
+                <a:latin typeface="Calibri"/>
+              </a:rPr>
+              <a:t>•  scripts/bench_prefix_caching.py — caching, with all combos</a:t>
+            </a:r>
+          </a:p>
+          <a:p>
+            <a:pPr algn="l">
+              <a:spcAft>
+                <a:spcPts val="800"/>
+              </a:spcAft>
+            </a:pPr>
+            <a:r>
+              <a:rPr sz="1200">
+                <a:solidFill>
+                  <a:srgbClr val="1F2A37"/>
+                </a:solidFill>
+                <a:latin typeface="Calibri"/>
+              </a:rPr>
+              <a:t>•  scripts/bench_batching_decode.py — concurrent-load sweep</a:t>
+            </a:r>
+          </a:p>
+          <a:p>
+            <a:pPr algn="l">
+              <a:spcAft>
+                <a:spcPts val="800"/>
+              </a:spcAft>
+            </a:pPr>
+            <a:r>
+              <a:rPr sz="1200">
+                <a:solidFill>
+                  <a:srgbClr val="1F2A37"/>
+                </a:solidFill>
+                <a:latin typeface="Calibri"/>
+              </a:rPr>
+              <a:t>•  scripts/eval_suite.py — lm-eval-harness for FP8 accuracy</a:t>
+            </a:r>
+          </a:p>
+          <a:p>
+            <a:pPr algn="l">
+              <a:spcAft>
+                <a:spcPts val="800"/>
+              </a:spcAft>
+            </a:pPr>
+            <a:r>
+              <a:rPr sz="1200">
+                <a:solidFill>
+                  <a:srgbClr val="1F2A37"/>
+                </a:solidFill>
+                <a:latin typeface="Calibri"/>
+              </a:rPr>
+              <a:t>•  scripts/harness/ — engine-agnostic vLLM-server client + lifecycle</a:t>
+            </a:r>
+          </a:p>
+        </p:txBody>
+      </p:sp>
+      <p:sp>
+        <p:nvSpPr>
+          <p:cNvPr id="7" name="TextBox 6"/>
+          <p:cNvSpPr txBox="1"/>
+          <p:nvPr/>
+        </p:nvSpPr>
+        <p:spPr>
+          <a:xfrm>
+            <a:off x="6400800" y="1691640"/>
+            <a:ext cx="5486400" cy="274320"/>
+          </a:xfrm>
+          <a:prstGeom prst="rect">
+            <a:avLst/>
+          </a:prstGeom>
+          <a:noFill/>
+        </p:spPr>
+        <p:txBody>
+          <a:bodyPr wrap="square" lIns="0" rIns="0" tIns="0" bIns="0">
+            <a:spAutoFit/>
+          </a:bodyPr>
+          <a:lstStyle/>
+          <a:p>
+            <a:pPr algn="l"/>
+            <a:r>
+              <a:rPr sz="1100" b="1" i="0">
+                <a:solidFill>
+                  <a:srgbClr val="2E66C2"/>
+                </a:solidFill>
+                <a:latin typeface="Calibri"/>
+              </a:rPr>
+              <a:t>HOW IT STAYS HONEST</a:t>
+            </a:r>
+          </a:p>
+        </p:txBody>
+      </p:sp>
+      <p:sp>
+        <p:nvSpPr>
+          <p:cNvPr id="8" name="TextBox 7"/>
+          <p:cNvSpPr txBox="1"/>
+          <p:nvPr/>
+        </p:nvSpPr>
+        <p:spPr>
+          <a:xfrm>
+            <a:off x="6400800" y="2057400"/>
+            <a:ext cx="5486400" cy="3474720"/>
+          </a:xfrm>
+          <a:prstGeom prst="rect">
+            <a:avLst/>
+          </a:prstGeom>
+          <a:noFill/>
+        </p:spPr>
+        <p:txBody>
+          <a:bodyPr wrap="square" lIns="0" rIns="0" tIns="0" bIns="0">
+            <a:spAutoFit/>
+          </a:bodyPr>
+          <a:lstStyle/>
+          <a:p>
+            <a:pPr algn="l">
+              <a:spcAft>
+                <a:spcPts val="800"/>
+              </a:spcAft>
+            </a:pPr>
+            <a:r>
+              <a:rPr sz="1200">
+                <a:solidFill>
+                  <a:srgbClr val="1F2A37"/>
+                </a:solidFill>
+                <a:latin typeface="Calibri"/>
+              </a:rPr>
+              <a:t>•  Every measurement → timestamped JSON in results/</a:t>
+            </a:r>
+          </a:p>
+          <a:p>
+            <a:pPr algn="l">
+              <a:spcAft>
+                <a:spcPts val="800"/>
+              </a:spcAft>
+            </a:pPr>
+            <a:r>
+              <a:rPr sz="1200">
+                <a:solidFill>
+                  <a:srgbClr val="1F2A37"/>
+                </a:solidFill>
+                <a:latin typeface="Calibri"/>
+              </a:rPr>
+              <a:t>•  talk/numbers.py reads JSON; deck refreshes on rerun</a:t>
+            </a:r>
+          </a:p>
+          <a:p>
+            <a:pPr algn="l">
+              <a:spcAft>
+                <a:spcPts val="800"/>
+              </a:spcAft>
+            </a:pPr>
+            <a:r>
+              <a:rPr sz="1200">
+                <a:solidFill>
+                  <a:srgbClr val="1F2A37"/>
+                </a:solidFill>
+                <a:latin typeface="Calibri"/>
+              </a:rPr>
+              <a:t>•  scripts/plots/ regenerates every chart from results/</a:t>
+            </a:r>
+          </a:p>
+          <a:p>
+            <a:pPr algn="l">
+              <a:spcAft>
+                <a:spcPts val="800"/>
+              </a:spcAft>
+            </a:pPr>
+            <a:r>
+              <a:rPr sz="1200">
+                <a:solidFill>
+                  <a:srgbClr val="1F2A37"/>
+                </a:solidFill>
+                <a:latin typeface="Calibri"/>
+              </a:rPr>
+              <a:t>•  scripts/build_deck.py rebuilds the deck end-to-end</a:t>
+            </a:r>
+          </a:p>
+          <a:p>
+            <a:pPr algn="l">
+              <a:spcAft>
+                <a:spcPts val="800"/>
+              </a:spcAft>
+            </a:pPr>
+            <a:r>
+              <a:rPr sz="1200">
+                <a:solidFill>
+                  <a:srgbClr val="1F2A37"/>
+                </a:solidFill>
+                <a:latin typeface="Calibri"/>
+              </a:rPr>
+              <a:t>•  Seed pinned at 42 — same prompts run-to-run</a:t>
+            </a:r>
+          </a:p>
+          <a:p>
+            <a:pPr algn="l">
+              <a:spcAft>
+                <a:spcPts val="800"/>
+              </a:spcAft>
+            </a:pPr>
+            <a:r>
+              <a:rPr sz="1200">
+                <a:solidFill>
+                  <a:srgbClr val="1F2A37"/>
+                </a:solidFill>
+                <a:latin typeface="Calibri"/>
+              </a:rPr>
+              <a:t>•  Engine-agnostic harness: swap vLLM for TRT-LLM, SGLang in one line</a:t>
+            </a:r>
+          </a:p>
+        </p:txBody>
+      </p:sp>
+      <p:sp>
+        <p:nvSpPr>
+          <p:cNvPr id="9" name="TextBox 8"/>
+          <p:cNvSpPr txBox="1"/>
+          <p:nvPr/>
+        </p:nvSpPr>
+        <p:spPr>
+          <a:xfrm>
+            <a:off x="548640" y="5715000"/>
+            <a:ext cx="11155680" cy="548640"/>
+          </a:xfrm>
+          <a:prstGeom prst="rect">
+            <a:avLst/>
+          </a:prstGeom>
+          <a:noFill/>
+        </p:spPr>
+        <p:txBody>
+          <a:bodyPr wrap="square" lIns="0" rIns="0" tIns="0" bIns="0">
+            <a:spAutoFit/>
+          </a:bodyPr>
+          <a:lstStyle/>
+          <a:p>
+            <a:pPr algn="l"/>
+            <a:r>
+              <a:rPr sz="1200" b="0" i="1">
+                <a:solidFill>
+                  <a:srgbClr val="555F6E"/>
+                </a:solidFill>
+                <a:latin typeface="Calibri"/>
+              </a:rPr>
+              <a:t>One command — `uv run python main.py` — prints the full reproduction order. Every number on every slide is one rerun away from being refreshed.</a:t>
+            </a:r>
+          </a:p>
+        </p:txBody>
+      </p:sp>
+      <p:sp>
+        <p:nvSpPr>
+          <p:cNvPr id="10" name="TextBox 9"/>
+          <p:cNvSpPr txBox="1"/>
+          <p:nvPr/>
+        </p:nvSpPr>
+        <p:spPr>
+          <a:xfrm>
+            <a:off x="548640" y="6446520"/>
+            <a:ext cx="9144000" cy="274320"/>
+          </a:xfrm>
+          <a:prstGeom prst="rect">
+            <a:avLst/>
+          </a:prstGeom>
+          <a:noFill/>
+        </p:spPr>
+        <p:txBody>
+          <a:bodyPr wrap="square" lIns="0" rIns="0" tIns="0" bIns="0">
+            <a:spAutoFit/>
+          </a:bodyPr>
+          <a:lstStyle/>
+          <a:p>
+            <a:pPr algn="l"/>
+            <a:r>
               <a:rPr sz="1000" b="0" i="0">
                 <a:solidFill>
                   <a:srgbClr val="555F6E"/>
@@ -8429,7 +10907,7 @@
       </p:sp>
       <p:sp>
         <p:nvSpPr>
-          <p:cNvPr id="7" name="TextBox 6"/>
+          <p:cNvPr id="11" name="TextBox 10"/>
           <p:cNvSpPr txBox="1"/>
           <p:nvPr/>
         </p:nvSpPr>
@@ -8857,7 +11335,7 @@
                 </a:solidFill>
                 <a:latin typeface="Calibri"/>
               </a:rPr>
-              <a:t>APPENDIX</a:t>
+              <a:t>REPO</a:t>
             </a:r>
           </a:p>
         </p:txBody>
@@ -8892,7 +11370,7 @@
                 </a:solidFill>
                 <a:latin typeface="Calibri"/>
               </a:rPr>
-              <a:t>Why prefill isn't quadratic in input length</a:t>
+              <a:t>Code, results, and this deck</a:t>
             </a:r>
           </a:p>
         </p:txBody>
@@ -8942,7 +11420,7 @@
       </p:sp>
       <p:pic>
         <p:nvPicPr>
-          <p:cNvPr id="5" name="Picture 4" descr="appendix_flop_math.png"/>
+          <p:cNvPr id="5" name="Picture 4" descr="repo_qr.png"/>
           <p:cNvPicPr>
             <a:picLocks noChangeAspect="1"/>
           </p:cNvPicPr>
@@ -8956,8 +11434,8 @@
         </p:blipFill>
         <p:spPr>
           <a:xfrm>
-            <a:off x="1828800" y="1783080"/>
-            <a:ext cx="8229600" cy="4434840"/>
+            <a:off x="4572000" y="1828800"/>
+            <a:ext cx="3200400" cy="3200400"/>
           </a:xfrm>
           <a:prstGeom prst="rect">
             <a:avLst/>
@@ -8972,8 +11450,8 @@
         </p:nvSpPr>
         <p:spPr>
           <a:xfrm>
-            <a:off x="548640" y="6446520"/>
-            <a:ext cx="9144000" cy="274320"/>
+            <a:off x="1828800" y="5120640"/>
+            <a:ext cx="8503920" cy="457200"/>
           </a:xfrm>
           <a:prstGeom prst="rect">
             <a:avLst/>
@@ -8986,6 +11464,76 @@
           </a:bodyPr>
           <a:lstStyle/>
           <a:p>
+            <a:pPr algn="ctr"/>
+            <a:r>
+              <a:rPr sz="2000" b="1" i="0">
+                <a:solidFill>
+                  <a:srgbClr val="1F2A37"/>
+                </a:solidFill>
+                <a:latin typeface="Calibri"/>
+              </a:rPr>
+              <a:t>github.com/harishvs/moe-inference-optimize</a:t>
+            </a:r>
+          </a:p>
+        </p:txBody>
+      </p:sp>
+      <p:sp>
+        <p:nvSpPr>
+          <p:cNvPr id="7" name="TextBox 6"/>
+          <p:cNvSpPr txBox="1"/>
+          <p:nvPr/>
+        </p:nvSpPr>
+        <p:spPr>
+          <a:xfrm>
+            <a:off x="1828800" y="5623560"/>
+            <a:ext cx="8503920" cy="365760"/>
+          </a:xfrm>
+          <a:prstGeom prst="rect">
+            <a:avLst/>
+          </a:prstGeom>
+          <a:noFill/>
+        </p:spPr>
+        <p:txBody>
+          <a:bodyPr wrap="square" lIns="0" rIns="0" tIns="0" bIns="0">
+            <a:spAutoFit/>
+          </a:bodyPr>
+          <a:lstStyle/>
+          <a:p>
+            <a:pPr algn="ctr"/>
+            <a:r>
+              <a:rPr sz="1300" b="0" i="1">
+                <a:solidFill>
+                  <a:srgbClr val="555F6E"/>
+                </a:solidFill>
+                <a:latin typeface="Calibri"/>
+              </a:rPr>
+              <a:t>MIT license — clone, run, contribute</a:t>
+            </a:r>
+          </a:p>
+        </p:txBody>
+      </p:sp>
+      <p:sp>
+        <p:nvSpPr>
+          <p:cNvPr id="8" name="TextBox 7"/>
+          <p:cNvSpPr txBox="1"/>
+          <p:nvPr/>
+        </p:nvSpPr>
+        <p:spPr>
+          <a:xfrm>
+            <a:off x="548640" y="6446520"/>
+            <a:ext cx="9144000" cy="274320"/>
+          </a:xfrm>
+          <a:prstGeom prst="rect">
+            <a:avLst/>
+          </a:prstGeom>
+          <a:noFill/>
+        </p:spPr>
+        <p:txBody>
+          <a:bodyPr wrap="square" lIns="0" rIns="0" tIns="0" bIns="0">
+            <a:spAutoFit/>
+          </a:bodyPr>
+          <a:lstStyle/>
+          <a:p>
             <a:pPr algn="l"/>
             <a:r>
               <a:rPr sz="1000" b="0" i="0">
@@ -9001,7 +11549,7 @@
       </p:sp>
       <p:sp>
         <p:nvSpPr>
-          <p:cNvPr id="7" name="TextBox 6"/>
+          <p:cNvPr id="9" name="TextBox 8"/>
           <p:cNvSpPr txBox="1"/>
           <p:nvPr/>
         </p:nvSpPr>
@@ -9030,6 +11578,657 @@
                 <a:latin typeface="Calibri"/>
               </a:rPr>
               <a:t>20</a:t>
+            </a:r>
+          </a:p>
+        </p:txBody>
+      </p:sp>
+    </p:spTree>
+  </p:cSld>
+  <p:clrMapOvr>
+    <a:masterClrMapping/>
+  </p:clrMapOvr>
+</p:sld>
+</file>
+
+<file path=ppt/slides/slide21.xml><?xml version="1.0" encoding="utf-8"?>
+<p:sld xmlns:a="http://schemas.openxmlformats.org/drawingml/2006/main" xmlns:p="http://schemas.openxmlformats.org/presentationml/2006/main" xmlns:r="http://schemas.openxmlformats.org/officeDocument/2006/relationships">
+  <p:cSld>
+    <p:spTree>
+      <p:nvGrpSpPr>
+        <p:cNvPr id="1" name=""/>
+        <p:cNvGrpSpPr/>
+        <p:nvPr/>
+      </p:nvGrpSpPr>
+      <p:grpSpPr/>
+      <p:sp>
+        <p:nvSpPr>
+          <p:cNvPr id="2" name="TextBox 1"/>
+          <p:cNvSpPr txBox="1"/>
+          <p:nvPr/>
+        </p:nvSpPr>
+        <p:spPr>
+          <a:xfrm>
+            <a:off x="731520" y="2286000"/>
+            <a:ext cx="10972800" cy="1828800"/>
+          </a:xfrm>
+          <a:prstGeom prst="rect">
+            <a:avLst/>
+          </a:prstGeom>
+          <a:noFill/>
+        </p:spPr>
+        <p:txBody>
+          <a:bodyPr wrap="square" lIns="0" rIns="0" tIns="0" bIns="0">
+            <a:spAutoFit/>
+          </a:bodyPr>
+          <a:lstStyle/>
+          <a:p>
+            <a:pPr algn="ctr"/>
+            <a:r>
+              <a:rPr sz="12000" b="1" i="0">
+                <a:solidFill>
+                  <a:srgbClr val="1F2A37"/>
+                </a:solidFill>
+                <a:latin typeface="Calibri"/>
+              </a:rPr>
+              <a:t>Q&amp;A</a:t>
+            </a:r>
+          </a:p>
+        </p:txBody>
+      </p:sp>
+      <p:sp>
+        <p:nvSpPr>
+          <p:cNvPr id="3" name="Rectangle 2"/>
+          <p:cNvSpPr/>
+          <p:nvPr/>
+        </p:nvSpPr>
+        <p:spPr>
+          <a:xfrm>
+            <a:off x="5120640" y="4206240"/>
+            <a:ext cx="1828800" cy="50800"/>
+          </a:xfrm>
+          <a:prstGeom prst="rect">
+            <a:avLst/>
+          </a:prstGeom>
+          <a:solidFill>
+            <a:srgbClr val="2E66C2"/>
+          </a:solidFill>
+          <a:ln>
+            <a:noFill/>
+          </a:ln>
+        </p:spPr>
+        <p:style>
+          <a:lnRef idx="1">
+            <a:schemeClr val="accent1"/>
+          </a:lnRef>
+          <a:fillRef idx="3">
+            <a:schemeClr val="accent1"/>
+          </a:fillRef>
+          <a:effectRef idx="2">
+            <a:schemeClr val="accent1"/>
+          </a:effectRef>
+          <a:fontRef idx="minor">
+            <a:schemeClr val="lt1"/>
+          </a:fontRef>
+        </p:style>
+        <p:txBody>
+          <a:bodyPr rtlCol="0" anchor="ctr"/>
+          <a:lstStyle/>
+          <a:p>
+            <a:pPr algn="ctr"/>
+          </a:p>
+        </p:txBody>
+      </p:sp>
+      <p:sp>
+        <p:nvSpPr>
+          <p:cNvPr id="4" name="TextBox 3"/>
+          <p:cNvSpPr txBox="1"/>
+          <p:nvPr/>
+        </p:nvSpPr>
+        <p:spPr>
+          <a:xfrm>
+            <a:off x="731520" y="4480560"/>
+            <a:ext cx="10972800" cy="457200"/>
+          </a:xfrm>
+          <a:prstGeom prst="rect">
+            <a:avLst/>
+          </a:prstGeom>
+          <a:noFill/>
+        </p:spPr>
+        <p:txBody>
+          <a:bodyPr wrap="square" lIns="0" rIns="0" tIns="0" bIns="0">
+            <a:spAutoFit/>
+          </a:bodyPr>
+          <a:lstStyle/>
+          <a:p>
+            <a:pPr algn="ctr"/>
+            <a:r>
+              <a:rPr sz="2200" b="0" i="0">
+                <a:solidFill>
+                  <a:srgbClr val="555F6E"/>
+                </a:solidFill>
+                <a:latin typeface="Calibri"/>
+              </a:rPr>
+              <a:t>15 minutes — fire away.</a:t>
+            </a:r>
+          </a:p>
+        </p:txBody>
+      </p:sp>
+      <p:sp>
+        <p:nvSpPr>
+          <p:cNvPr id="5" name="TextBox 4"/>
+          <p:cNvSpPr txBox="1"/>
+          <p:nvPr/>
+        </p:nvSpPr>
+        <p:spPr>
+          <a:xfrm>
+            <a:off x="548640" y="6446520"/>
+            <a:ext cx="9144000" cy="274320"/>
+          </a:xfrm>
+          <a:prstGeom prst="rect">
+            <a:avLst/>
+          </a:prstGeom>
+          <a:noFill/>
+        </p:spPr>
+        <p:txBody>
+          <a:bodyPr wrap="square" lIns="0" rIns="0" tIns="0" bIns="0">
+            <a:spAutoFit/>
+          </a:bodyPr>
+          <a:lstStyle/>
+          <a:p>
+            <a:pPr algn="l"/>
+            <a:r>
+              <a:rPr sz="1000" b="0" i="0">
+                <a:solidFill>
+                  <a:srgbClr val="555F6E"/>
+                </a:solidFill>
+                <a:latin typeface="Calibri"/>
+              </a:rPr>
+              <a:t>OLMoE-1B-7B (1B active / 7B total) on Blackwell  ·  diagnosis &amp; optimization</a:t>
+            </a:r>
+          </a:p>
+        </p:txBody>
+      </p:sp>
+      <p:sp>
+        <p:nvSpPr>
+          <p:cNvPr id="6" name="TextBox 5"/>
+          <p:cNvSpPr txBox="1"/>
+          <p:nvPr/>
+        </p:nvSpPr>
+        <p:spPr>
+          <a:xfrm>
+            <a:off x="11521440" y="6446520"/>
+            <a:ext cx="548640" cy="274320"/>
+          </a:xfrm>
+          <a:prstGeom prst="rect">
+            <a:avLst/>
+          </a:prstGeom>
+          <a:noFill/>
+        </p:spPr>
+        <p:txBody>
+          <a:bodyPr wrap="square" lIns="0" rIns="0" tIns="0" bIns="0">
+            <a:spAutoFit/>
+          </a:bodyPr>
+          <a:lstStyle/>
+          <a:p>
+            <a:pPr algn="r"/>
+            <a:r>
+              <a:rPr sz="1000" b="0" i="0">
+                <a:solidFill>
+                  <a:srgbClr val="555F6E"/>
+                </a:solidFill>
+                <a:latin typeface="Calibri"/>
+              </a:rPr>
+              <a:t>21</a:t>
+            </a:r>
+          </a:p>
+        </p:txBody>
+      </p:sp>
+    </p:spTree>
+  </p:cSld>
+  <p:clrMapOvr>
+    <a:masterClrMapping/>
+  </p:clrMapOvr>
+</p:sld>
+</file>
+
+<file path=ppt/slides/slide22.xml><?xml version="1.0" encoding="utf-8"?>
+<p:sld xmlns:a="http://schemas.openxmlformats.org/drawingml/2006/main" xmlns:p="http://schemas.openxmlformats.org/presentationml/2006/main" xmlns:r="http://schemas.openxmlformats.org/officeDocument/2006/relationships">
+  <p:cSld>
+    <p:spTree>
+      <p:nvGrpSpPr>
+        <p:cNvPr id="1" name=""/>
+        <p:cNvGrpSpPr/>
+        <p:nvPr/>
+      </p:nvGrpSpPr>
+      <p:grpSpPr/>
+      <p:sp>
+        <p:nvSpPr>
+          <p:cNvPr id="2" name="TextBox 1"/>
+          <p:cNvSpPr txBox="1"/>
+          <p:nvPr/>
+        </p:nvSpPr>
+        <p:spPr>
+          <a:xfrm>
+            <a:off x="548640" y="411480"/>
+            <a:ext cx="11155680" cy="274320"/>
+          </a:xfrm>
+          <a:prstGeom prst="rect">
+            <a:avLst/>
+          </a:prstGeom>
+          <a:noFill/>
+        </p:spPr>
+        <p:txBody>
+          <a:bodyPr wrap="square" lIns="0" rIns="0" tIns="0" bIns="0">
+            <a:spAutoFit/>
+          </a:bodyPr>
+          <a:lstStyle/>
+          <a:p>
+            <a:pPr algn="l"/>
+            <a:r>
+              <a:rPr sz="1200" b="1" i="0">
+                <a:solidFill>
+                  <a:srgbClr val="2E66C2"/>
+                </a:solidFill>
+                <a:latin typeface="Calibri"/>
+              </a:rPr>
+              <a:t>APPENDIX</a:t>
+            </a:r>
+          </a:p>
+        </p:txBody>
+      </p:sp>
+      <p:sp>
+        <p:nvSpPr>
+          <p:cNvPr id="3" name="TextBox 2"/>
+          <p:cNvSpPr txBox="1"/>
+          <p:nvPr/>
+        </p:nvSpPr>
+        <p:spPr>
+          <a:xfrm>
+            <a:off x="548640" y="713232"/>
+            <a:ext cx="11155680" cy="640080"/>
+          </a:xfrm>
+          <a:prstGeom prst="rect">
+            <a:avLst/>
+          </a:prstGeom>
+          <a:noFill/>
+        </p:spPr>
+        <p:txBody>
+          <a:bodyPr wrap="square" lIns="0" rIns="0" tIns="0" bIns="0">
+            <a:spAutoFit/>
+          </a:bodyPr>
+          <a:lstStyle/>
+          <a:p>
+            <a:pPr algn="l"/>
+            <a:r>
+              <a:rPr sz="3000" b="1" i="0">
+                <a:solidFill>
+                  <a:srgbClr val="1F2A37"/>
+                </a:solidFill>
+                <a:latin typeface="Calibri"/>
+              </a:rPr>
+              <a:t>FP8 quality — standard accuracy benchmarks</a:t>
+            </a:r>
+          </a:p>
+        </p:txBody>
+      </p:sp>
+      <p:sp>
+        <p:nvSpPr>
+          <p:cNvPr id="4" name="Rectangle 3"/>
+          <p:cNvSpPr/>
+          <p:nvPr/>
+        </p:nvSpPr>
+        <p:spPr>
+          <a:xfrm>
+            <a:off x="548640" y="1417320"/>
+            <a:ext cx="914400" cy="38100"/>
+          </a:xfrm>
+          <a:prstGeom prst="rect">
+            <a:avLst/>
+          </a:prstGeom>
+          <a:solidFill>
+            <a:srgbClr val="2E66C2"/>
+          </a:solidFill>
+          <a:ln>
+            <a:noFill/>
+          </a:ln>
+        </p:spPr>
+        <p:style>
+          <a:lnRef idx="1">
+            <a:schemeClr val="accent1"/>
+          </a:lnRef>
+          <a:fillRef idx="3">
+            <a:schemeClr val="accent1"/>
+          </a:fillRef>
+          <a:effectRef idx="2">
+            <a:schemeClr val="accent1"/>
+          </a:effectRef>
+          <a:fontRef idx="minor">
+            <a:schemeClr val="lt1"/>
+          </a:fontRef>
+        </p:style>
+        <p:txBody>
+          <a:bodyPr rtlCol="0" anchor="ctr"/>
+          <a:lstStyle/>
+          <a:p>
+            <a:pPr algn="ctr"/>
+          </a:p>
+        </p:txBody>
+      </p:sp>
+      <p:pic>
+        <p:nvPicPr>
+          <p:cNvPr id="5" name="Picture 4" descr="appendix_fp8_accuracy.png"/>
+          <p:cNvPicPr>
+            <a:picLocks noChangeAspect="1"/>
+          </p:cNvPicPr>
+          <p:nvPr/>
+        </p:nvPicPr>
+        <p:blipFill>
+          <a:blip r:embed="rId2"/>
+          <a:stretch>
+            <a:fillRect/>
+          </a:stretch>
+        </p:blipFill>
+        <p:spPr>
+          <a:xfrm>
+            <a:off x="1280160" y="1783080"/>
+            <a:ext cx="9601200" cy="4434840"/>
+          </a:xfrm>
+          <a:prstGeom prst="rect">
+            <a:avLst/>
+          </a:prstGeom>
+        </p:spPr>
+      </p:pic>
+      <p:sp>
+        <p:nvSpPr>
+          <p:cNvPr id="6" name="TextBox 5"/>
+          <p:cNvSpPr txBox="1"/>
+          <p:nvPr/>
+        </p:nvSpPr>
+        <p:spPr>
+          <a:xfrm>
+            <a:off x="548640" y="6446520"/>
+            <a:ext cx="9144000" cy="274320"/>
+          </a:xfrm>
+          <a:prstGeom prst="rect">
+            <a:avLst/>
+          </a:prstGeom>
+          <a:noFill/>
+        </p:spPr>
+        <p:txBody>
+          <a:bodyPr wrap="square" lIns="0" rIns="0" tIns="0" bIns="0">
+            <a:spAutoFit/>
+          </a:bodyPr>
+          <a:lstStyle/>
+          <a:p>
+            <a:pPr algn="l"/>
+            <a:r>
+              <a:rPr sz="1000" b="0" i="0">
+                <a:solidFill>
+                  <a:srgbClr val="555F6E"/>
+                </a:solidFill>
+                <a:latin typeface="Calibri"/>
+              </a:rPr>
+              <a:t>OLMoE-1B-7B (1B active / 7B total) on Blackwell  ·  diagnosis &amp; optimization</a:t>
+            </a:r>
+          </a:p>
+        </p:txBody>
+      </p:sp>
+      <p:sp>
+        <p:nvSpPr>
+          <p:cNvPr id="7" name="TextBox 6"/>
+          <p:cNvSpPr txBox="1"/>
+          <p:nvPr/>
+        </p:nvSpPr>
+        <p:spPr>
+          <a:xfrm>
+            <a:off x="11521440" y="6446520"/>
+            <a:ext cx="548640" cy="274320"/>
+          </a:xfrm>
+          <a:prstGeom prst="rect">
+            <a:avLst/>
+          </a:prstGeom>
+          <a:noFill/>
+        </p:spPr>
+        <p:txBody>
+          <a:bodyPr wrap="square" lIns="0" rIns="0" tIns="0" bIns="0">
+            <a:spAutoFit/>
+          </a:bodyPr>
+          <a:lstStyle/>
+          <a:p>
+            <a:pPr algn="r"/>
+            <a:r>
+              <a:rPr sz="1000" b="0" i="0">
+                <a:solidFill>
+                  <a:srgbClr val="555F6E"/>
+                </a:solidFill>
+                <a:latin typeface="Calibri"/>
+              </a:rPr>
+              <a:t>22</a:t>
+            </a:r>
+          </a:p>
+        </p:txBody>
+      </p:sp>
+    </p:spTree>
+  </p:cSld>
+  <p:clrMapOvr>
+    <a:masterClrMapping/>
+  </p:clrMapOvr>
+</p:sld>
+</file>
+
+<file path=ppt/slides/slide23.xml><?xml version="1.0" encoding="utf-8"?>
+<p:sld xmlns:a="http://schemas.openxmlformats.org/drawingml/2006/main" xmlns:p="http://schemas.openxmlformats.org/presentationml/2006/main" xmlns:r="http://schemas.openxmlformats.org/officeDocument/2006/relationships">
+  <p:cSld>
+    <p:spTree>
+      <p:nvGrpSpPr>
+        <p:cNvPr id="1" name=""/>
+        <p:cNvGrpSpPr/>
+        <p:nvPr/>
+      </p:nvGrpSpPr>
+      <p:grpSpPr/>
+      <p:sp>
+        <p:nvSpPr>
+          <p:cNvPr id="2" name="TextBox 1"/>
+          <p:cNvSpPr txBox="1"/>
+          <p:nvPr/>
+        </p:nvSpPr>
+        <p:spPr>
+          <a:xfrm>
+            <a:off x="548640" y="411480"/>
+            <a:ext cx="11155680" cy="274320"/>
+          </a:xfrm>
+          <a:prstGeom prst="rect">
+            <a:avLst/>
+          </a:prstGeom>
+          <a:noFill/>
+        </p:spPr>
+        <p:txBody>
+          <a:bodyPr wrap="square" lIns="0" rIns="0" tIns="0" bIns="0">
+            <a:spAutoFit/>
+          </a:bodyPr>
+          <a:lstStyle/>
+          <a:p>
+            <a:pPr algn="l"/>
+            <a:r>
+              <a:rPr sz="1200" b="1" i="0">
+                <a:solidFill>
+                  <a:srgbClr val="2E66C2"/>
+                </a:solidFill>
+                <a:latin typeface="Calibri"/>
+              </a:rPr>
+              <a:t>APPENDIX</a:t>
+            </a:r>
+          </a:p>
+        </p:txBody>
+      </p:sp>
+      <p:sp>
+        <p:nvSpPr>
+          <p:cNvPr id="3" name="TextBox 2"/>
+          <p:cNvSpPr txBox="1"/>
+          <p:nvPr/>
+        </p:nvSpPr>
+        <p:spPr>
+          <a:xfrm>
+            <a:off x="548640" y="713232"/>
+            <a:ext cx="11155680" cy="640080"/>
+          </a:xfrm>
+          <a:prstGeom prst="rect">
+            <a:avLst/>
+          </a:prstGeom>
+          <a:noFill/>
+        </p:spPr>
+        <p:txBody>
+          <a:bodyPr wrap="square" lIns="0" rIns="0" tIns="0" bIns="0">
+            <a:spAutoFit/>
+          </a:bodyPr>
+          <a:lstStyle/>
+          <a:p>
+            <a:pPr algn="l"/>
+            <a:r>
+              <a:rPr sz="3000" b="1" i="0">
+                <a:solidFill>
+                  <a:srgbClr val="1F2A37"/>
+                </a:solidFill>
+                <a:latin typeface="Calibri"/>
+              </a:rPr>
+              <a:t>Why prefill isn't quadratic in input length</a:t>
+            </a:r>
+          </a:p>
+        </p:txBody>
+      </p:sp>
+      <p:sp>
+        <p:nvSpPr>
+          <p:cNvPr id="4" name="Rectangle 3"/>
+          <p:cNvSpPr/>
+          <p:nvPr/>
+        </p:nvSpPr>
+        <p:spPr>
+          <a:xfrm>
+            <a:off x="548640" y="1417320"/>
+            <a:ext cx="914400" cy="38100"/>
+          </a:xfrm>
+          <a:prstGeom prst="rect">
+            <a:avLst/>
+          </a:prstGeom>
+          <a:solidFill>
+            <a:srgbClr val="2E66C2"/>
+          </a:solidFill>
+          <a:ln>
+            <a:noFill/>
+          </a:ln>
+        </p:spPr>
+        <p:style>
+          <a:lnRef idx="1">
+            <a:schemeClr val="accent1"/>
+          </a:lnRef>
+          <a:fillRef idx="3">
+            <a:schemeClr val="accent1"/>
+          </a:fillRef>
+          <a:effectRef idx="2">
+            <a:schemeClr val="accent1"/>
+          </a:effectRef>
+          <a:fontRef idx="minor">
+            <a:schemeClr val="lt1"/>
+          </a:fontRef>
+        </p:style>
+        <p:txBody>
+          <a:bodyPr rtlCol="0" anchor="ctr"/>
+          <a:lstStyle/>
+          <a:p>
+            <a:pPr algn="ctr"/>
+          </a:p>
+        </p:txBody>
+      </p:sp>
+      <p:pic>
+        <p:nvPicPr>
+          <p:cNvPr id="5" name="Picture 4" descr="appendix_flop_math.png"/>
+          <p:cNvPicPr>
+            <a:picLocks noChangeAspect="1"/>
+          </p:cNvPicPr>
+          <p:nvPr/>
+        </p:nvPicPr>
+        <p:blipFill>
+          <a:blip r:embed="rId2"/>
+          <a:stretch>
+            <a:fillRect/>
+          </a:stretch>
+        </p:blipFill>
+        <p:spPr>
+          <a:xfrm>
+            <a:off x="1828800" y="1783080"/>
+            <a:ext cx="8229600" cy="4434840"/>
+          </a:xfrm>
+          <a:prstGeom prst="rect">
+            <a:avLst/>
+          </a:prstGeom>
+        </p:spPr>
+      </p:pic>
+      <p:sp>
+        <p:nvSpPr>
+          <p:cNvPr id="6" name="TextBox 5"/>
+          <p:cNvSpPr txBox="1"/>
+          <p:nvPr/>
+        </p:nvSpPr>
+        <p:spPr>
+          <a:xfrm>
+            <a:off x="548640" y="6446520"/>
+            <a:ext cx="9144000" cy="274320"/>
+          </a:xfrm>
+          <a:prstGeom prst="rect">
+            <a:avLst/>
+          </a:prstGeom>
+          <a:noFill/>
+        </p:spPr>
+        <p:txBody>
+          <a:bodyPr wrap="square" lIns="0" rIns="0" tIns="0" bIns="0">
+            <a:spAutoFit/>
+          </a:bodyPr>
+          <a:lstStyle/>
+          <a:p>
+            <a:pPr algn="l"/>
+            <a:r>
+              <a:rPr sz="1000" b="0" i="0">
+                <a:solidFill>
+                  <a:srgbClr val="555F6E"/>
+                </a:solidFill>
+                <a:latin typeface="Calibri"/>
+              </a:rPr>
+              <a:t>OLMoE-1B-7B (1B active / 7B total) on Blackwell  ·  diagnosis &amp; optimization</a:t>
+            </a:r>
+          </a:p>
+        </p:txBody>
+      </p:sp>
+      <p:sp>
+        <p:nvSpPr>
+          <p:cNvPr id="7" name="TextBox 6"/>
+          <p:cNvSpPr txBox="1"/>
+          <p:nvPr/>
+        </p:nvSpPr>
+        <p:spPr>
+          <a:xfrm>
+            <a:off x="11521440" y="6446520"/>
+            <a:ext cx="548640" cy="274320"/>
+          </a:xfrm>
+          <a:prstGeom prst="rect">
+            <a:avLst/>
+          </a:prstGeom>
+          <a:noFill/>
+        </p:spPr>
+        <p:txBody>
+          <a:bodyPr wrap="square" lIns="0" rIns="0" tIns="0" bIns="0">
+            <a:spAutoFit/>
+          </a:bodyPr>
+          <a:lstStyle/>
+          <a:p>
+            <a:pPr algn="r"/>
+            <a:r>
+              <a:rPr sz="1000" b="0" i="0">
+                <a:solidFill>
+                  <a:srgbClr val="555F6E"/>
+                </a:solidFill>
+                <a:latin typeface="Calibri"/>
+              </a:rPr>
+              <a:t>23</a:t>
             </a:r>
           </a:p>
         </p:txBody>
@@ -11360,7 +14559,7 @@
                           </a:solidFill>
                           <a:latin typeface="Calibri"/>
                         </a:rPr>
-                        <a:t>TTFT 40% faster on shared prompts (P=2048)</a:t>
+                        <a:t>TTFT 30% faster on shared prompts (P=2048)</a:t>
                       </a:r>
                     </a:p>
                   </a:txBody>

--- a/talk/deck.pptx
+++ b/talk/deck.pptx
@@ -1739,102 +1739,156 @@
           <a:lstStyle/>
           <a:p>
             <a:r>
-              <a:t>The textbook claim that 'attention is O(N²)' is true asymptotically but misleading at chat-app scale. Walk the panel through the reasoning if asked.</a:t>
+              <a:t>The textbook claim that 'attention is O(N²)' is true asymptotically but misleading at chat-app scale. The full walkthrough if asked:</a:t>
             </a:r>
           </a:p>
           <a:p/>
           <a:p>
             <a:r>
-              <a:t>PER-LAYER PREFILL COST decomposes into two terms:</a:t>
-            </a:r>
-          </a:p>
-          <a:p>
-            <a:r>
-              <a:t>  Attention's score-matrix work   ~  4 · N² · d_model       (quadratic in N)</a:t>
-            </a:r>
-          </a:p>
-          <a:p>
-            <a:r>
-              <a:t>  MoE FFN work                    ~  2 · N · d_model · d_ff · K  (linear in N)</a:t>
-            </a:r>
-          </a:p>
-          <a:p>
-            <a:r>
-              <a:t>where K is the number of active experts per token.</a:t>
+              <a:t>FOUR NUMBERS THAT DESCRIBE OLMoE'S SHAPE:</a:t>
             </a:r>
           </a:p>
           <a:p/>
           <a:p>
             <a:r>
-              <a:t>WHY FFN DOMINATES AT L=1024:</a:t>
-            </a:r>
-          </a:p>
-          <a:p>
-            <a:r>
-              <a:t>  Attention term: 4 × 1024² × 2048 ≈ 8.6 GFLOPs</a:t>
-            </a:r>
-          </a:p>
-          <a:p>
-            <a:r>
-              <a:t>  MoE FFN term:   2 × 1024 × 2048 × 1024 × 8 (experts) ≈ 69 GFLOPs</a:t>
-            </a:r>
-          </a:p>
-          <a:p>
-            <a:r>
-              <a:t>FFN is 8× larger because of the 8-active-experts multiplier — each token's representation goes through 8 separate two-matmul FFN blocks. Attention has no such multiplier; it's just one Q·K^T per head with d_model split across heads.</a:t>
+              <a:t>d_model = 2048. Each token is represented inside the model as a vector of 2048 numbers. Pick any token in your prompt — right now, inside the model, it's 2048 floats.</a:t>
             </a:r>
           </a:p>
           <a:p/>
           <a:p>
             <a:r>
-              <a:t>WHERE THE CROSSOVER LANDS:</a:t>
-            </a:r>
-          </a:p>
-          <a:p>
-            <a:r>
-              <a:t>Set the two terms equal to find the input length where attention catches up:</a:t>
-            </a:r>
-          </a:p>
-          <a:p>
-            <a:r>
-              <a:t>  4 · N² · d_model  =  2 · N · d_model · d_ff · K</a:t>
-            </a:r>
-          </a:p>
-          <a:p>
-            <a:r>
-              <a:t>  N  =  d_ff · K / 2</a:t>
-            </a:r>
-          </a:p>
-          <a:p>
-            <a:r>
-              <a:t>Plug in OLMoE's shapes: d_ff = 1024, K = 8, so:</a:t>
-            </a:r>
-          </a:p>
-          <a:p>
-            <a:r>
-              <a:t>  N  =  1024 · 8 / 2  =  4096</a:t>
-            </a:r>
-          </a:p>
-          <a:p>
-            <a:r>
-              <a:t>Roughly 4-8K depending on which constants you include (router cost, attention projection costs, etc.). Common shorthand: 'attention doesn't dominate until N ≈ 8K' — close enough for an intuition.</a:t>
+              <a:t>num_heads = 16, d_head = 128. Attention doesn't do one big computation; it splits the 2048 dimensions into 16 parallel 'heads' of 128 each, so 16 × 128 = 2048. Each head can learn to pay attention to a different kind of thing (one head for grammatical subjects, one for negation, one for names, etc.). Splitting into heads doesn't change the total work — it just parallelizes it across heads that learn different patterns.</a:t>
             </a:r>
           </a:p>
           <a:p/>
           <a:p>
             <a:r>
-              <a:t>WHY THIS MATTERS FOR THIS MODEL:</a:t>
-            </a:r>
-          </a:p>
-          <a:p>
-            <a:r>
-              <a:t>OLMoE's max context is 4096 tokens. The crossover is right at the edge of — or past — what the model can process in a single request. For practical purposes, prefill is FFN-dominated for every request this model can serve. TTFT scales roughly linearly with input length, exactly as the measured grid (slide 5) shows.</a:t>
+              <a:t>d_ff ≈ 1024. Each of OLMoE's experts is a small feed-forward network — two matmuls back-to-back with an activation in between. It takes the token's 2048-dimensional representation, projects it into an internal 1024-dimensional space, and projects it back out to 2048. The internal dimension d_ff is how much 'thinking room' each expert has. In OLMoE's MoE design, experts are deliberately narrow (d_ff &lt; d_model) because you're activating 8 of them per token — they're specialists, and each one does less work than a traditional dense feed-forward network would.</a:t>
             </a:r>
           </a:p>
           <a:p/>
           <a:p>
             <a:r>
+              <a:t>THE ONE FORMULA: a matrix multiplication of shape A (m × k) · B (k × n) costs about 2 · m · n · k floating-point operations. Every matmul in a transformer fits this shape. If you remember only one formula from this talk, pick this one — you can estimate any model's compute cost on a napkin.</a:t>
+            </a:r>
+          </a:p>
+          <a:p/>
+          <a:p>
+            <a:r>
+              <a:t>COUNT PER LAYER AT N=1024:</a:t>
+            </a:r>
+          </a:p>
+          <a:p/>
+          <a:p>
+            <a:r>
+              <a:t>Attention's expensive piece is the score matrix — each of N tokens takes a dot product with every other token. That's two back-to-back matmuls of shape (N × d_head) · (d_head × N) and its transpose, summed across all 16 heads. Per layer:</a:t>
+            </a:r>
+          </a:p>
+          <a:p>
+            <a:r>
+              <a:t>  Attention FLOPs = 4 · N² · (num_heads · d_head)</a:t>
+            </a:r>
+          </a:p>
+          <a:p>
+            <a:r>
+              <a:t>                  = 4 · N² · d_model</a:t>
+            </a:r>
+          </a:p>
+          <a:p>
+            <a:r>
+              <a:t>                  = 4 · (1024)² · 2048</a:t>
+            </a:r>
+          </a:p>
+          <a:p>
+            <a:r>
+              <a:t>                  ≈ 8.6 × 10⁹  =  8.6 GFLOPs</a:t>
+            </a:r>
+          </a:p>
+          <a:p/>
+          <a:p>
+            <a:r>
+              <a:t>MoE FFN's expensive piece is a wide matmul per active expert. Each token activates 8 experts; each expert has the 2048 → 1024 → 2048 shape, which is two matmuls. Per token:</a:t>
+            </a:r>
+          </a:p>
+          <a:p>
+            <a:r>
+              <a:t>  FFN FLOPs per token = 8 experts × 2 matmuls × 2 · d_model · d_ff</a:t>
+            </a:r>
+          </a:p>
+          <a:p>
+            <a:r>
+              <a:t>                      = 8 × 2 × 2 · 2048 · 1024</a:t>
+            </a:r>
+          </a:p>
+          <a:p>
+            <a:r>
+              <a:t>                      ≈ 6.7 × 10⁷</a:t>
+            </a:r>
+          </a:p>
+          <a:p>
+            <a:r>
+              <a:t>Multiply by N tokens in the prefill:</a:t>
+            </a:r>
+          </a:p>
+          <a:p>
+            <a:r>
+              <a:t>  FFN FLOPs per layer = (6.7 × 10⁷) · N</a:t>
+            </a:r>
+          </a:p>
+          <a:p>
+            <a:r>
+              <a:t>                      = (6.7 × 10⁷) · 1024</a:t>
+            </a:r>
+          </a:p>
+          <a:p>
+            <a:r>
+              <a:t>                      ≈ 6.9 × 10¹⁰  =  69 GFLOPs</a:t>
+            </a:r>
+          </a:p>
+          <a:p/>
+          <a:p>
+            <a:r>
+              <a:t>SIDE BY SIDE AT N=1024:</a:t>
+            </a:r>
+          </a:p>
+          <a:p>
+            <a:r>
+              <a:t>  Attention:  8.6 GFLOPs   (grows as N²)</a:t>
+            </a:r>
+          </a:p>
+          <a:p>
+            <a:r>
+              <a:t>  MoE FFN:    69  GFLOPs   (grows as N, with a huge coefficient)</a:t>
+            </a:r>
+          </a:p>
+          <a:p/>
+          <a:p>
+            <a:r>
+              <a:t>FFN does 8× more work than attention at this length. Yes, attention is asymptotically worse — its growth rate eventually wins. But look at the starting point: the FFN coefficient is ~8,000 times larger than the attention coefficient. It takes a while for quadratic growth to catch up with a head start that big.</a:t>
+            </a:r>
+          </a:p>
+          <a:p/>
+          <a:p>
+            <a:r>
+              <a:t>CROSSOVER: attention equals FFN when N ≈ 8 · d_ff ≈ 8,000 tokens. Below that, FFN dominates. Above that, attention dominates.</a:t>
+            </a:r>
+          </a:p>
+          <a:p/>
+          <a:p>
+            <a:r>
+              <a:t>WHY THIS MATTERS FOR OLMoE: the model's max context is 4,096 tokens. The crossover is past what the model can process in a single request. For every request this model can serve, prefill is FFN-dominated. TTFT scales roughly linearly with input length, exactly as the measured grid (slide 5) shows.</a:t>
+            </a:r>
+          </a:p>
+          <a:p/>
+          <a:p>
+            <a:r>
               <a:t>GENERALIZATION: most modern transformers have wide FFNs and modest context windows, so they live in the FFN-dominated regime during prefill. The 'attention is N²' intuition only kicks in at very long contexts (32K+) where the score matrix gets big enough to win on its coefficient. At chat-app input lengths it's all FFN.</a:t>
+            </a:r>
+          </a:p>
+          <a:p/>
+          <a:p>
+            <a:r>
+              <a:t>PRINCIPLE: Big-O is asymptotic. Coefficients win until you reach the asymptote. For this model at this scale, you're nowhere near the asymptote where N² would dominate.</a:t>
             </a:r>
           </a:p>
         </p:txBody>
@@ -8766,8 +8820,8 @@
         </p:nvSpPr>
         <p:spPr>
           <a:xfrm>
-            <a:off x="548640" y="1691640"/>
-            <a:ext cx="5486400" cy="274320"/>
+            <a:off x="457200" y="1691640"/>
+            <a:ext cx="5943600" cy="274320"/>
           </a:xfrm>
           <a:prstGeom prst="rect">
             <a:avLst/>
@@ -8782,13 +8836,13 @@
           <a:p>
             <a:pPr algn="l"/>
             <a:r>
-              <a:rPr sz="1100" b="1" i="0">
+              <a:rPr sz="1200" b="1" i="0">
                 <a:solidFill>
                   <a:srgbClr val="2E66C2"/>
                 </a:solidFill>
                 <a:latin typeface="Calibri"/>
               </a:rPr>
-              <a:t>MEASUREMENT PIPELINE</a:t>
+              <a:t>scripts/</a:t>
             </a:r>
           </a:p>
         </p:txBody>
@@ -8801,8 +8855,331 @@
         </p:nvSpPr>
         <p:spPr>
           <a:xfrm>
-            <a:off x="548640" y="2057400"/>
-            <a:ext cx="5486400" cy="3474720"/>
+            <a:off x="457200" y="2011680"/>
+            <a:ext cx="7772400" cy="3108960"/>
+          </a:xfrm>
+          <a:prstGeom prst="rect">
+            <a:avLst/>
+          </a:prstGeom>
+          <a:noFill/>
+        </p:spPr>
+        <p:txBody>
+          <a:bodyPr wrap="none" lIns="0" rIns="0" tIns="0" bIns="0">
+            <a:spAutoFit/>
+          </a:bodyPr>
+          <a:lstStyle/>
+          <a:p>
+            <a:pPr algn="l">
+              <a:spcAft>
+                <a:spcPts val="0"/>
+              </a:spcAft>
+            </a:pPr>
+            <a:r>
+              <a:rPr sz="1000">
+                <a:solidFill>
+                  <a:srgbClr val="1F2A37"/>
+                </a:solidFill>
+                <a:latin typeface="Courier New"/>
+              </a:rPr>
+              <a:t>  smoke_test.py              </a:t>
+            </a:r>
+            <a:r>
+              <a:rPr sz="1000">
+                <a:solidFill>
+                  <a:srgbClr val="555F6E"/>
+                </a:solidFill>
+                <a:latin typeface="Courier New"/>
+              </a:rPr>
+              <a:t># end-to-end sanity check</a:t>
+            </a:r>
+          </a:p>
+          <a:p>
+            <a:pPr algn="l">
+              <a:spcAft>
+                <a:spcPts val="0"/>
+              </a:spcAft>
+            </a:pPr>
+            <a:r>
+              <a:rPr sz="1000">
+                <a:solidFill>
+                  <a:srgbClr val="1F2A37"/>
+                </a:solidFill>
+                <a:latin typeface="Courier New"/>
+              </a:rPr>
+              <a:t>  benchmark_latency.py       </a:t>
+            </a:r>
+            <a:r>
+              <a:rPr sz="1000">
+                <a:solidFill>
+                  <a:srgbClr val="555F6E"/>
+                </a:solidFill>
+                <a:latin typeface="Courier New"/>
+              </a:rPr>
+              <a:t># TTFT/TPOT grid sweep (bf16 or --fp8)</a:t>
+            </a:r>
+          </a:p>
+          <a:p>
+            <a:pPr algn="l">
+              <a:spcAft>
+                <a:spcPts val="0"/>
+              </a:spcAft>
+            </a:pPr>
+            <a:r>
+              <a:rPr sz="1000">
+                <a:solidFill>
+                  <a:srgbClr val="1F2A37"/>
+                </a:solidFill>
+                <a:latin typeface="Courier New"/>
+              </a:rPr>
+              <a:t>  profile_prefill.py         </a:t>
+            </a:r>
+            <a:r>
+              <a:rPr sz="1000">
+                <a:solidFill>
+                  <a:srgbClr val="555F6E"/>
+                </a:solidFill>
+                <a:latin typeface="Courier New"/>
+              </a:rPr>
+              <a:t># torch.profiler trace, prefill-dominated</a:t>
+            </a:r>
+          </a:p>
+          <a:p>
+            <a:pPr algn="l">
+              <a:spcAft>
+                <a:spcPts val="0"/>
+              </a:spcAft>
+            </a:pPr>
+            <a:r>
+              <a:rPr sz="1000">
+                <a:solidFill>
+                  <a:srgbClr val="1F2A37"/>
+                </a:solidFill>
+                <a:latin typeface="Courier New"/>
+              </a:rPr>
+              <a:t>  profile_decode.py          </a:t>
+            </a:r>
+            <a:r>
+              <a:rPr sz="1000">
+                <a:solidFill>
+                  <a:srgbClr val="555F6E"/>
+                </a:solidFill>
+                <a:latin typeface="Courier New"/>
+              </a:rPr>
+              <a:t># torch.profiler trace, decode-dominated</a:t>
+            </a:r>
+          </a:p>
+          <a:p>
+            <a:pPr algn="l">
+              <a:spcAft>
+                <a:spcPts val="0"/>
+              </a:spcAft>
+            </a:pPr>
+            <a:r>
+              <a:rPr sz="1000">
+                <a:solidFill>
+                  <a:srgbClr val="1F2A37"/>
+                </a:solidFill>
+                <a:latin typeface="Courier New"/>
+              </a:rPr>
+              <a:t>  eval_suite.py              </a:t>
+            </a:r>
+            <a:r>
+              <a:rPr sz="1000">
+                <a:solidFill>
+                  <a:srgbClr val="555F6E"/>
+                </a:solidFill>
+                <a:latin typeface="Courier New"/>
+              </a:rPr>
+              <a:t># lm-evaluation-harness, bf16 vs FP8</a:t>
+            </a:r>
+          </a:p>
+          <a:p>
+            <a:pPr algn="l">
+              <a:spcAft>
+                <a:spcPts val="0"/>
+              </a:spcAft>
+            </a:pPr>
+            <a:r>
+              <a:rPr sz="1000">
+                <a:solidFill>
+                  <a:srgbClr val="1F2A37"/>
+                </a:solidFill>
+                <a:latin typeface="Courier New"/>
+              </a:rPr>
+              <a:t>  bench_compat_check.py      </a:t>
+            </a:r>
+            <a:r>
+              <a:rPr sz="1000">
+                <a:solidFill>
+                  <a:srgbClr val="555F6E"/>
+                </a:solidFill>
+                <a:latin typeface="Courier New"/>
+              </a:rPr>
+              <a:t># harness vs `vllm bench latency` reconciliation</a:t>
+            </a:r>
+          </a:p>
+          <a:p>
+            <a:pPr algn="l">
+              <a:spcAft>
+                <a:spcPts val="0"/>
+              </a:spcAft>
+            </a:pPr>
+            <a:r>
+              <a:rPr sz="1000">
+                <a:solidFill>
+                  <a:srgbClr val="1F2A37"/>
+                </a:solidFill>
+                <a:latin typeface="Courier New"/>
+              </a:rPr>
+              <a:t>  bench_prefix_caching.py    </a:t>
+            </a:r>
+            <a:r>
+              <a:rPr sz="1000">
+                <a:solidFill>
+                  <a:srgbClr val="555F6E"/>
+                </a:solidFill>
+                <a:latin typeface="Courier New"/>
+              </a:rPr>
+              <a:t># prefix caching experiment</a:t>
+            </a:r>
+          </a:p>
+          <a:p>
+            <a:pPr algn="l">
+              <a:spcAft>
+                <a:spcPts val="0"/>
+              </a:spcAft>
+            </a:pPr>
+            <a:r>
+              <a:rPr sz="1000">
+                <a:solidFill>
+                  <a:srgbClr val="1F2A37"/>
+                </a:solidFill>
+                <a:latin typeface="Courier New"/>
+              </a:rPr>
+              <a:t>  bench_batching.py          </a:t>
+            </a:r>
+            <a:r>
+              <a:rPr sz="1000">
+                <a:solidFill>
+                  <a:srgbClr val="555F6E"/>
+                </a:solidFill>
+                <a:latin typeface="Courier New"/>
+              </a:rPr>
+              <a:t># ShareGPT concurrent workload</a:t>
+            </a:r>
+          </a:p>
+          <a:p>
+            <a:pPr algn="l">
+              <a:spcAft>
+                <a:spcPts val="0"/>
+              </a:spcAft>
+            </a:pPr>
+            <a:r>
+              <a:rPr sz="1000">
+                <a:solidFill>
+                  <a:srgbClr val="1F2A37"/>
+                </a:solidFill>
+                <a:latin typeface="Courier New"/>
+              </a:rPr>
+              <a:t>  bench_batching_decode.py   </a:t>
+            </a:r>
+            <a:r>
+              <a:rPr sz="1000">
+                <a:solidFill>
+                  <a:srgbClr val="555F6E"/>
+                </a:solidFill>
+                <a:latin typeface="Courier New"/>
+              </a:rPr>
+              <a:t># pure-decode concurrent workload</a:t>
+            </a:r>
+          </a:p>
+          <a:p>
+            <a:pPr algn="l">
+              <a:spcAft>
+                <a:spcPts val="0"/>
+              </a:spcAft>
+            </a:pPr>
+            <a:r>
+              <a:rPr sz="1000">
+                <a:solidFill>
+                  <a:srgbClr val="1F2A37"/>
+                </a:solidFill>
+                <a:latin typeface="Courier New"/>
+              </a:rPr>
+              <a:t>  build_deck.py              </a:t>
+            </a:r>
+            <a:r>
+              <a:rPr sz="1000">
+                <a:solidFill>
+                  <a:srgbClr val="555F6E"/>
+                </a:solidFill>
+                <a:latin typeface="Courier New"/>
+              </a:rPr>
+              <a:t># talk/deck.pptx generator</a:t>
+            </a:r>
+          </a:p>
+          <a:p>
+            <a:pPr algn="l">
+              <a:spcAft>
+                <a:spcPts val="0"/>
+              </a:spcAft>
+            </a:pPr>
+            <a:r>
+              <a:rPr sz="1000">
+                <a:solidFill>
+                  <a:srgbClr val="1F2A37"/>
+                </a:solidFill>
+                <a:latin typeface="Courier New"/>
+              </a:rPr>
+              <a:t>  harness/                   </a:t>
+            </a:r>
+            <a:r>
+              <a:rPr sz="1000">
+                <a:solidFill>
+                  <a:srgbClr val="555F6E"/>
+                </a:solidFill>
+                <a:latin typeface="Courier New"/>
+              </a:rPr>
+              <a:t># vLLM-server launcher + streaming HTTP client</a:t>
+            </a:r>
+          </a:p>
+          <a:p>
+            <a:pPr algn="l">
+              <a:spcAft>
+                <a:spcPts val="0"/>
+              </a:spcAft>
+            </a:pPr>
+            <a:r>
+              <a:rPr sz="1000">
+                <a:solidFill>
+                  <a:srgbClr val="1F2A37"/>
+                </a:solidFill>
+                <a:latin typeface="Courier New"/>
+              </a:rPr>
+              <a:t>  plots/                     </a:t>
+            </a:r>
+            <a:r>
+              <a:rPr sz="1000">
+                <a:solidFill>
+                  <a:srgbClr val="555F6E"/>
+                </a:solidFill>
+                <a:latin typeface="Courier New"/>
+              </a:rPr>
+              <a:t># matplotlib figure generators</a:t>
+            </a:r>
+          </a:p>
+        </p:txBody>
+      </p:sp>
+      <p:sp>
+        <p:nvSpPr>
+          <p:cNvPr id="7" name="TextBox 6"/>
+          <p:cNvSpPr txBox="1"/>
+          <p:nvPr/>
+        </p:nvSpPr>
+        <p:spPr>
+          <a:xfrm>
+            <a:off x="457200" y="4983480"/>
+            <a:ext cx="5943600" cy="274320"/>
           </a:xfrm>
           <a:prstGeom prst="rect">
             <a:avLst/>
@@ -8815,113 +9192,177 @@
           </a:bodyPr>
           <a:lstStyle/>
           <a:p>
+            <a:pPr algn="l"/>
+            <a:r>
+              <a:rPr sz="1200" b="1" i="0">
+                <a:solidFill>
+                  <a:srgbClr val="2E66C2"/>
+                </a:solidFill>
+                <a:latin typeface="Calibri"/>
+              </a:rPr>
+              <a:t>results/</a:t>
+            </a:r>
+          </a:p>
+        </p:txBody>
+      </p:sp>
+      <p:sp>
+        <p:nvSpPr>
+          <p:cNvPr id="8" name="TextBox 7"/>
+          <p:cNvSpPr txBox="1"/>
+          <p:nvPr/>
+        </p:nvSpPr>
+        <p:spPr>
+          <a:xfrm>
+            <a:off x="457200" y="5303520"/>
+            <a:ext cx="7772400" cy="1097280"/>
+          </a:xfrm>
+          <a:prstGeom prst="rect">
+            <a:avLst/>
+          </a:prstGeom>
+          <a:noFill/>
+        </p:spPr>
+        <p:txBody>
+          <a:bodyPr wrap="none" lIns="0" rIns="0" tIns="0" bIns="0">
+            <a:spAutoFit/>
+          </a:bodyPr>
+          <a:lstStyle/>
+          <a:p>
             <a:pPr algn="l">
               <a:spcAft>
-                <a:spcPts val="800"/>
+                <a:spcPts val="0"/>
               </a:spcAft>
             </a:pPr>
             <a:r>
-              <a:rPr sz="1200">
+              <a:rPr sz="1000">
                 <a:solidFill>
                   <a:srgbClr val="1F2A37"/>
                 </a:solidFill>
-                <a:latin typeface="Calibri"/>
-              </a:rPr>
-              <a:t>•  scripts/benchmark_latency.py — TTFT/TPOT sweep (bf16, FP8, TP=2)</a:t>
+                <a:latin typeface="Courier New"/>
+              </a:rPr>
+              <a:t>  baseline_*.json            </a:t>
+            </a:r>
+            <a:r>
+              <a:rPr sz="1000">
+                <a:solidFill>
+                  <a:srgbClr val="555F6E"/>
+                </a:solidFill>
+                <a:latin typeface="Courier New"/>
+              </a:rPr>
+              <a:t># bf16 latency cells</a:t>
             </a:r>
           </a:p>
           <a:p>
             <a:pPr algn="l">
               <a:spcAft>
-                <a:spcPts val="800"/>
+                <a:spcPts val="0"/>
               </a:spcAft>
             </a:pPr>
             <a:r>
-              <a:rPr sz="1200">
+              <a:rPr sz="1000">
                 <a:solidFill>
                   <a:srgbClr val="1F2A37"/>
                 </a:solidFill>
-                <a:latin typeface="Calibri"/>
-              </a:rPr>
-              <a:t>•  scripts/profile_prefill.py / profile_decode.py — torch.profiler traces</a:t>
+                <a:latin typeface="Courier New"/>
+              </a:rPr>
+              <a:t>  fp8_*.json                 </a:t>
+            </a:r>
+            <a:r>
+              <a:rPr sz="1000">
+                <a:solidFill>
+                  <a:srgbClr val="555F6E"/>
+                </a:solidFill>
+                <a:latin typeface="Courier New"/>
+              </a:rPr>
+              <a:t># FP8 latency cells</a:t>
             </a:r>
           </a:p>
           <a:p>
             <a:pPr algn="l">
               <a:spcAft>
-                <a:spcPts val="800"/>
+                <a:spcPts val="0"/>
               </a:spcAft>
             </a:pPr>
             <a:r>
-              <a:rPr sz="1200">
+              <a:rPr sz="1000">
                 <a:solidFill>
                   <a:srgbClr val="1F2A37"/>
                 </a:solidFill>
-                <a:latin typeface="Calibri"/>
-              </a:rPr>
-              <a:t>•  scripts/bench_prefix_caching.py — caching, with all combos</a:t>
+                <a:latin typeface="Courier New"/>
+              </a:rPr>
+              <a:t>  eval/                      </a:t>
+            </a:r>
+            <a:r>
+              <a:rPr sz="1000">
+                <a:solidFill>
+                  <a:srgbClr val="555F6E"/>
+                </a:solidFill>
+                <a:latin typeface="Courier New"/>
+              </a:rPr>
+              <a:t># lm-evaluation-harness outputs</a:t>
             </a:r>
           </a:p>
           <a:p>
             <a:pPr algn="l">
               <a:spcAft>
-                <a:spcPts val="800"/>
+                <a:spcPts val="0"/>
               </a:spcAft>
             </a:pPr>
             <a:r>
-              <a:rPr sz="1200">
+              <a:rPr sz="1000">
                 <a:solidFill>
                   <a:srgbClr val="1F2A37"/>
                 </a:solidFill>
-                <a:latin typeface="Calibri"/>
-              </a:rPr>
-              <a:t>•  scripts/bench_batching_decode.py — concurrent-load sweep</a:t>
+                <a:latin typeface="Courier New"/>
+              </a:rPr>
+              <a:t>  harness/                   </a:t>
+            </a:r>
+            <a:r>
+              <a:rPr sz="1000">
+                <a:solidFill>
+                  <a:srgbClr val="555F6E"/>
+                </a:solidFill>
+                <a:latin typeface="Courier New"/>
+              </a:rPr>
+              <a:t># HTTP-harness outputs (prefix, batching)</a:t>
             </a:r>
           </a:p>
           <a:p>
             <a:pPr algn="l">
               <a:spcAft>
-                <a:spcPts val="800"/>
+                <a:spcPts val="0"/>
               </a:spcAft>
             </a:pPr>
             <a:r>
-              <a:rPr sz="1200">
+              <a:rPr sz="1000">
                 <a:solidFill>
                   <a:srgbClr val="1F2A37"/>
                 </a:solidFill>
-                <a:latin typeface="Calibri"/>
-              </a:rPr>
-              <a:t>•  scripts/eval_suite.py — lm-eval-harness for FP8 accuracy</a:t>
-            </a:r>
-          </a:p>
-          <a:p>
-            <a:pPr algn="l">
-              <a:spcAft>
-                <a:spcPts val="800"/>
-              </a:spcAft>
-            </a:pPr>
-            <a:r>
-              <a:rPr sz="1200">
-                <a:solidFill>
-                  <a:srgbClr val="1F2A37"/>
-                </a:solidFill>
-                <a:latin typeface="Calibri"/>
-              </a:rPr>
-              <a:t>•  scripts/harness/ — engine-agnostic vLLM-server client + lifecycle</a:t>
-            </a:r>
-          </a:p>
-        </p:txBody>
-      </p:sp>
-      <p:sp>
-        <p:nvSpPr>
-          <p:cNvPr id="7" name="TextBox 6"/>
+                <a:latin typeface="Courier New"/>
+              </a:rPr>
+              <a:t>  profile/                   </a:t>
+            </a:r>
+            <a:r>
+              <a:rPr sz="1000">
+                <a:solidFill>
+                  <a:srgbClr val="555F6E"/>
+                </a:solidFill>
+                <a:latin typeface="Courier New"/>
+              </a:rPr>
+              <a:t># torch.profiler traces + kernel summaries</a:t>
+            </a:r>
+          </a:p>
+        </p:txBody>
+      </p:sp>
+      <p:sp>
+        <p:nvSpPr>
+          <p:cNvPr id="9" name="TextBox 8"/>
           <p:cNvSpPr txBox="1"/>
           <p:nvPr/>
         </p:nvSpPr>
         <p:spPr>
           <a:xfrm>
-            <a:off x="6400800" y="1691640"/>
-            <a:ext cx="5486400" cy="274320"/>
+            <a:off x="548640" y="6446520"/>
+            <a:ext cx="9144000" cy="274320"/>
           </a:xfrm>
           <a:prstGeom prst="rect">
             <a:avLst/>
@@ -8936,167 +9377,13 @@
           <a:p>
             <a:pPr algn="l"/>
             <a:r>
-              <a:rPr sz="1100" b="1" i="0">
-                <a:solidFill>
-                  <a:srgbClr val="2E66C2"/>
+              <a:rPr sz="1000" b="0" i="0">
+                <a:solidFill>
+                  <a:srgbClr val="555F6E"/>
                 </a:solidFill>
                 <a:latin typeface="Calibri"/>
               </a:rPr>
-              <a:t>HOW IT STAYS HONEST</a:t>
-            </a:r>
-          </a:p>
-        </p:txBody>
-      </p:sp>
-      <p:sp>
-        <p:nvSpPr>
-          <p:cNvPr id="8" name="TextBox 7"/>
-          <p:cNvSpPr txBox="1"/>
-          <p:nvPr/>
-        </p:nvSpPr>
-        <p:spPr>
-          <a:xfrm>
-            <a:off x="6400800" y="2057400"/>
-            <a:ext cx="5486400" cy="3474720"/>
-          </a:xfrm>
-          <a:prstGeom prst="rect">
-            <a:avLst/>
-          </a:prstGeom>
-          <a:noFill/>
-        </p:spPr>
-        <p:txBody>
-          <a:bodyPr wrap="square" lIns="0" rIns="0" tIns="0" bIns="0">
-            <a:spAutoFit/>
-          </a:bodyPr>
-          <a:lstStyle/>
-          <a:p>
-            <a:pPr algn="l">
-              <a:spcAft>
-                <a:spcPts val="800"/>
-              </a:spcAft>
-            </a:pPr>
-            <a:r>
-              <a:rPr sz="1200">
-                <a:solidFill>
-                  <a:srgbClr val="1F2A37"/>
-                </a:solidFill>
-                <a:latin typeface="Calibri"/>
-              </a:rPr>
-              <a:t>•  Every measurement → timestamped JSON in results/</a:t>
-            </a:r>
-          </a:p>
-          <a:p>
-            <a:pPr algn="l">
-              <a:spcAft>
-                <a:spcPts val="800"/>
-              </a:spcAft>
-            </a:pPr>
-            <a:r>
-              <a:rPr sz="1200">
-                <a:solidFill>
-                  <a:srgbClr val="1F2A37"/>
-                </a:solidFill>
-                <a:latin typeface="Calibri"/>
-              </a:rPr>
-              <a:t>•  talk/numbers.py reads JSON; deck refreshes on rerun</a:t>
-            </a:r>
-          </a:p>
-          <a:p>
-            <a:pPr algn="l">
-              <a:spcAft>
-                <a:spcPts val="800"/>
-              </a:spcAft>
-            </a:pPr>
-            <a:r>
-              <a:rPr sz="1200">
-                <a:solidFill>
-                  <a:srgbClr val="1F2A37"/>
-                </a:solidFill>
-                <a:latin typeface="Calibri"/>
-              </a:rPr>
-              <a:t>•  scripts/plots/ regenerates every chart from results/</a:t>
-            </a:r>
-          </a:p>
-          <a:p>
-            <a:pPr algn="l">
-              <a:spcAft>
-                <a:spcPts val="800"/>
-              </a:spcAft>
-            </a:pPr>
-            <a:r>
-              <a:rPr sz="1200">
-                <a:solidFill>
-                  <a:srgbClr val="1F2A37"/>
-                </a:solidFill>
-                <a:latin typeface="Calibri"/>
-              </a:rPr>
-              <a:t>•  scripts/build_deck.py rebuilds the deck end-to-end</a:t>
-            </a:r>
-          </a:p>
-          <a:p>
-            <a:pPr algn="l">
-              <a:spcAft>
-                <a:spcPts val="800"/>
-              </a:spcAft>
-            </a:pPr>
-            <a:r>
-              <a:rPr sz="1200">
-                <a:solidFill>
-                  <a:srgbClr val="1F2A37"/>
-                </a:solidFill>
-                <a:latin typeface="Calibri"/>
-              </a:rPr>
-              <a:t>•  Seed pinned at 42 — same prompts run-to-run</a:t>
-            </a:r>
-          </a:p>
-          <a:p>
-            <a:pPr algn="l">
-              <a:spcAft>
-                <a:spcPts val="800"/>
-              </a:spcAft>
-            </a:pPr>
-            <a:r>
-              <a:rPr sz="1200">
-                <a:solidFill>
-                  <a:srgbClr val="1F2A37"/>
-                </a:solidFill>
-                <a:latin typeface="Calibri"/>
-              </a:rPr>
-              <a:t>•  Engine-agnostic harness: swap vLLM for TRT-LLM, SGLang in one line</a:t>
-            </a:r>
-          </a:p>
-        </p:txBody>
-      </p:sp>
-      <p:sp>
-        <p:nvSpPr>
-          <p:cNvPr id="9" name="TextBox 8"/>
-          <p:cNvSpPr txBox="1"/>
-          <p:nvPr/>
-        </p:nvSpPr>
-        <p:spPr>
-          <a:xfrm>
-            <a:off x="548640" y="5715000"/>
-            <a:ext cx="11155680" cy="548640"/>
-          </a:xfrm>
-          <a:prstGeom prst="rect">
-            <a:avLst/>
-          </a:prstGeom>
-          <a:noFill/>
-        </p:spPr>
-        <p:txBody>
-          <a:bodyPr wrap="square" lIns="0" rIns="0" tIns="0" bIns="0">
-            <a:spAutoFit/>
-          </a:bodyPr>
-          <a:lstStyle/>
-          <a:p>
-            <a:pPr algn="l"/>
-            <a:r>
-              <a:rPr sz="1200" b="0" i="1">
-                <a:solidFill>
-                  <a:srgbClr val="555F6E"/>
-                </a:solidFill>
-                <a:latin typeface="Calibri"/>
-              </a:rPr>
-              <a:t>One command — `uv run python main.py` — prints the full reproduction order. Every number on every slide is one rerun away from being refreshed.</a:t>
+              <a:t>OLMoE-1B-7B (1B active / 7B total) on Blackwell  ·  diagnosis &amp; optimization</a:t>
             </a:r>
           </a:p>
         </p:txBody>
@@ -9104,41 +9391,6 @@
       <p:sp>
         <p:nvSpPr>
           <p:cNvPr id="10" name="TextBox 9"/>
-          <p:cNvSpPr txBox="1"/>
-          <p:nvPr/>
-        </p:nvSpPr>
-        <p:spPr>
-          <a:xfrm>
-            <a:off x="548640" y="6446520"/>
-            <a:ext cx="9144000" cy="274320"/>
-          </a:xfrm>
-          <a:prstGeom prst="rect">
-            <a:avLst/>
-          </a:prstGeom>
-          <a:noFill/>
-        </p:spPr>
-        <p:txBody>
-          <a:bodyPr wrap="square" lIns="0" rIns="0" tIns="0" bIns="0">
-            <a:spAutoFit/>
-          </a:bodyPr>
-          <a:lstStyle/>
-          <a:p>
-            <a:pPr algn="l"/>
-            <a:r>
-              <a:rPr sz="1000" b="0" i="0">
-                <a:solidFill>
-                  <a:srgbClr val="555F6E"/>
-                </a:solidFill>
-                <a:latin typeface="Calibri"/>
-              </a:rPr>
-              <a:t>OLMoE-1B-7B (1B active / 7B total) on Blackwell  ·  diagnosis &amp; optimization</a:t>
-            </a:r>
-          </a:p>
-        </p:txBody>
-      </p:sp>
-      <p:sp>
-        <p:nvSpPr>
-          <p:cNvPr id="11" name="TextBox 10"/>
           <p:cNvSpPr txBox="1"/>
           <p:nvPr/>
         </p:nvSpPr>

--- a/talk/deck.pptx
+++ b/talk/deck.pptx
@@ -1351,37 +1351,73 @@
           <a:lstStyle/>
           <a:p>
             <a:r>
-              <a:t>One-slide summary of the codebase, right before Q&amp;A and the repo link. Two columns: what the pipeline does on the left, what makes the methodology honest on the right.</a:t>
+              <a:t>One-slide summary of the codebase, right before Q&amp;A and the repo link. Reads like the README — actual file tree, file names tell the story.</a:t>
             </a:r>
           </a:p>
           <a:p/>
           <a:p>
             <a:r>
-              <a:t>Key talking points:</a:t>
+              <a:t>TWO MEASUREMENT PATHS, TWO DIFFERENT JOBS:</a:t>
             </a:r>
           </a:p>
           <a:p/>
           <a:p>
             <a:r>
-              <a:t>Reproducibility: every number on every slide came from running one of these scripts. The deck itself reads JSON from results/ via talk/numbers.py — re-running the benchmark refreshes the slides without me touching them. That's the discipline that lets the next person re-baseline when the model or hardware changes.</a:t>
+              <a:t>1) In-process — `vllm bench latency` driven by scripts/benchmark_latency.py and the profile_*.py scripts. The bench tool spins up vLLM in the same Python process, fires synthetic prompts directly through the engine API, and times from inside the process. No HTTP, no network, no scheduler queue. This is what you want when you're measuring the engine itself: TTFT/TPOT for the kernels in isolation, with the tightest variance and no harness overhead. Every number on slides 5, 8, 9 (lever-only rows) comes from this path.</a:t>
             </a:r>
           </a:p>
           <a:p/>
           <a:p>
             <a:r>
-              <a:t>Engine-agnostic harness: scripts/harness/ wraps the vLLM server lifecycle behind an OpenAI-compatible HTTP client. Swap the server launcher and the same benchmarks run against TRT-LLM, SGLang, or anything else with an OpenAI endpoint. That's deliberate — when the next model arrives, the harness doesn't have to be rewritten.</a:t>
+              <a:t>2) HTTP harness — scripts/harness/ launches a real `vllm serve` subprocess, waits for the OpenAI-compatible /v1/models endpoint, issues streaming HTTP requests, and times from the client side. Every number on slides 8, 9 (caching combo rows), 10–12, and the appendix batching slide comes from this path. Adds about 20 ms of overhead per request vs the in-process bench — measured and reconciled per input length (verdict slide methodology footnote).</a:t>
             </a:r>
           </a:p>
           <a:p/>
           <a:p>
             <a:r>
-              <a:t>Seed pinning: every benchmark uses seed=42 for prompt generation. Variance across runs is under 1 ms — that's how we can trust small deltas as signal, not noise.</a:t>
+              <a:t>WHY WE NEED A HARNESS:</a:t>
             </a:r>
           </a:p>
           <a:p/>
           <a:p>
             <a:r>
-              <a:t>If asked: code is on the next slide, scan the QR.</a:t>
+              <a:t>Three things the in-process bench can't measure, but the harness can:</a:t>
+            </a:r>
+          </a:p>
+          <a:p/>
+          <a:p>
+            <a:r>
+              <a:t>Prefix caching. The bench fires unrelated random-token prompts with no shared prefix between requests. There's nothing for the cache to hit on. The harness builds a workload of 30 requests that all share a fixed prefix and vary only a 64-token suffix — exactly what a chat app with a shared system prompt looks like. Without this shape, prefix caching can't be measured at all.</a:t>
+            </a:r>
+          </a:p>
+          <a:p/>
+          <a:p>
+            <a:r>
+              <a:t>Concurrent load. The bench runs requests sequentially. The harness drives a configurable number of in-flight requests against the live server, the same way real production traffic hits the engine. That's how we know batch=32 saturates the engine and batch=64 starts queueing.</a:t>
+            </a:r>
+          </a:p>
+          <a:p/>
+          <a:p>
+            <a:r>
+              <a:t>Real serving path. `vllm serve` is what production runs. The in-process bench skips the API layer, the scheduler, the request queue, and the streaming response code. The harness exercises all of that, so the numbers reflect what users will actually feel.</a:t>
+            </a:r>
+          </a:p>
+          <a:p/>
+          <a:p>
+            <a:r>
+              <a:t>REALISTIC PROMPTS — SHAREGPT: bench_batching.py loads real chat prompts from the ShareGPT V3 dataset (huggingface.co/datasets/anon8231489123/ShareGPT_Vicuna_unfiltered) via scripts/harness/datasets.py. Prompts are filtered to a 128–512 token band and pooled so concurrent requests don't accidentally share a prefix (which would let prefix caching merge them and inflate throughput). Synthetic random tokens would still produce numbers, but ShareGPT's distribution of real questions, code snippets, and multi-turn snippets is closer to what production traffic looks like — so when the throughput chart says 'X tok/s at concurrency Y,' that holds for chat-shaped traffic, not just synthetic stress. The pure-decode counterpart (bench_batching_decode.py) keeps prompts synthetic on purpose because it isolates MoE-batching behavior from prefill-mixing.</a:t>
+            </a:r>
+          </a:p>
+          <a:p/>
+          <a:p>
+            <a:r>
+              <a:t>ENGINE-AGNOSTIC: the harness wraps server lifecycle behind an OpenAI-compatible HTTP client. Swap the launcher and the same benchmarks run against TRT-LLM, SGLang, anything with an OpenAI endpoint. Deliberate — when the next model arrives, the harness doesn't have to be rewritten.</a:t>
+            </a:r>
+          </a:p>
+          <a:p/>
+          <a:p>
+            <a:r>
+              <a:t>REPRODUCIBILITY: every measurement → timestamped JSON in results/. talk/numbers.py reads JSON; deck refreshes on rerun. scripts/plots/ regenerates every chart from results/. Seed pinned at 42 — variance across runs is under 1 ms, which is how we trust small deltas as signal, not noise.</a:t>
             </a:r>
           </a:p>
         </p:txBody>

--- a/talk/deck.pptx
+++ b/talk/deck.pptx
@@ -2234,13 +2234,90 @@
           <a:lstStyle/>
           <a:p>
             <a:r>
-              <a:t>Walk the audience across the bar. fused_moe_kernel — the grouped-GEMM kernel that runs the MoE feed-forward — owns 80% of prefill. It's already tuned for tensor cores in vLLM. Attention projections are next at 9%. Attention math itself is small; at L=1024 the FFN term dominates the quadratic attention term by roughly 9×.</a:t>
+              <a:t>Walk the audience across the bar. Numbers are from torch.profiler on Blackwell at L=1024, bf16, single-user (results/profile/baseline_20260516_000526_L1024_seed42/), renormalized to 100% of accounted leaf-kernel GPU time.</a:t>
             </a:r>
           </a:p>
           <a:p/>
           <a:p>
             <a:r>
+              <a:t>fused_moe_kernel — the grouped-GEMM kernel that runs the MoE feed-forward — owns 68% of prefill. It's already tuned for tensor cores; vLLM uses flashinfer's fused-MoE path on Blackwell. Attention projection GEMMs (CUTLASS bf16) are second at 18%, with attention math itself (flash_fwd_splitkv) at ~5% and MoE expert dispatch/combine kernels at another ~5%. The router (top-K softmax) is under 0.5% — basically noise.</a:t>
+            </a:r>
+          </a:p>
+          <a:p/>
+          <a:p>
+            <a:r>
+              <a:t>Compared to L4: the relative shape is similar but Blackwell's tensor cores chew through the MoE FFN faster, so its share drops from L4's ~80% to ~68%, and attention projections rise into the visible range. Same conclusion either way: the hot path is FFN, FFN is already tuned, no kernel headroom for a solo developer.</a:t>
+            </a:r>
+          </a:p>
+          <a:p/>
+          <a:p>
+            <a:r>
               <a:t>The point: the profile tells the engineering budget where to go. It pointed at FP8 (attacks fused_moe via lower bytes), prefix caching (skips prefill entirely), batching (amortizes weight loads), and TP=2 (splits the work across both GPUs). Those are the levers on the next slide.</a:t>
+            </a:r>
+          </a:p>
+          <a:p/>
+          <a:p>
+            <a:r>
+              <a:t>DECODE PROFILE (if asked) — different shape, same dominant kernel. From the decode trace at I=1, O=128 (results/profile/baseline_decode_20260516_000621_I1_O128_seed42/):</a:t>
+            </a:r>
+          </a:p>
+          <a:p/>
+          <a:p>
+            <a:r>
+              <a:t>  fused_moe_kernel:               33%</a:t>
+            </a:r>
+          </a:p>
+          <a:p>
+            <a:r>
+              <a:t>  CUTLASS bf16 WMMA GEMMs:        14%   (attention QKV/O)</a:t>
+            </a:r>
+          </a:p>
+          <a:p>
+            <a:r>
+              <a:t>  flash_fwd_splitkv:               4%   (attention math)</a:t>
+            </a:r>
+          </a:p>
+          <a:p>
+            <a:r>
+              <a:t>  MoE dispatch/combine:            4%</a:t>
+            </a:r>
+          </a:p>
+          <a:p>
+            <a:r>
+              <a:t>  MoE router (top-K):              2%</a:t>
+            </a:r>
+          </a:p>
+          <a:p>
+            <a:r>
+              <a:t>  RMS norms:                       3%</a:t>
+            </a:r>
+          </a:p>
+          <a:p>
+            <a:r>
+              <a:t>  KV cache writes:                 1%</a:t>
+            </a:r>
+          </a:p>
+          <a:p>
+            <a:r>
+              <a:t>  Other (small ops, 128 steps):  ~40%</a:t>
+            </a:r>
+          </a:p>
+          <a:p/>
+          <a:p>
+            <a:r>
+              <a:t>Why the FFN share drops from 68% → 33%: prefill processes 1024 tokens through one fused MoE call, so the GEMM is large and dominates. Decode does 128 separate forward passes, each on a single token. The FFN kernel call shrinks relative to the per-step overhead (router, dispatch, attention, cache write, norms) that runs on every step regardless of token count.</a:t>
+            </a:r>
+          </a:p>
+          <a:p/>
+          <a:p>
+            <a:r>
+              <a:t>Note the kernel naming: prefill uses cutlass_80_tensorop_bf16 (standard tensor-core GEMM optimized for large batch shapes); decode uses cutlass_80_wmma_tensorop_bf16 (WMMA variant, optimized for the small batch=1 shapes decode produces). Same CUTLASS family, different shape-specialization.</a:t>
+            </a:r>
+          </a:p>
+          <a:p/>
+          <a:p>
+            <a:r>
+              <a:t>Implication for FP8: still helps decode (the 14% projection GEMMs are bandwidth-bound on weight loads), and that's the bigger fraction of decode latency than people expect because the FFN kernel itself shrinks. This is consistent with the TPOT measurements: FP8 cuts ~17%, which is roughly proportional to the bandwidth-bound share of decode.</a:t>
             </a:r>
           </a:p>
         </p:txBody>
@@ -13337,7 +13414,7 @@
         <p:spPr>
           <a:xfrm>
             <a:off x="457200" y="2194560"/>
-            <a:ext cx="6949440" cy="1593908"/>
+            <a:ext cx="6949440" cy="2106858"/>
           </a:xfrm>
           <a:prstGeom prst="rect">
             <a:avLst/>
@@ -13413,7 +13490,7 @@
                 </a:solidFill>
                 <a:latin typeface="Calibri"/>
               </a:rPr>
-              <a:t>•  fused_moe_kernel — grouped-GEMM on tensor cores — owns ~80% of prefill</a:t>
+              <a:t>•  fused_moe_kernel — the expert FFN matmuls, one fused kernel per layer (tensor cores) — owns ~68% of prefill</a:t>
             </a:r>
           </a:p>
           <a:p>
@@ -13429,7 +13506,7 @@
                 </a:solidFill>
                 <a:latin typeface="Calibri"/>
               </a:rPr>
-              <a:t>•  Decode is memory-bandwidth-bound on projection-weight loads</a:t>
+              <a:t>•  Attention projection GEMMs are second at ~18%</a:t>
             </a:r>
           </a:p>
           <a:p>
@@ -13445,7 +13522,7 @@
                 </a:solidFill>
                 <a:latin typeface="Calibri"/>
               </a:rPr>
-              <a:t>•  Hot path is already production-tuned in vLLM — no kernel headroom</a:t>
+              <a:t>•  Hot path is already production-tuned in vLLM — no kernel headroom on the dominant paths</a:t>
             </a:r>
           </a:p>
           <a:p>

--- a/talk/deck.pptx
+++ b/talk/deck.pptx
@@ -8934,7 +8934,7 @@
         <p:spPr>
           <a:xfrm>
             <a:off x="457200" y="1691640"/>
-            <a:ext cx="5943600" cy="274320"/>
+            <a:ext cx="10972800" cy="274320"/>
           </a:xfrm>
           <a:prstGeom prst="rect">
             <a:avLst/>
@@ -8949,7 +8949,7 @@
           <a:p>
             <a:pPr algn="l"/>
             <a:r>
-              <a:rPr sz="1200" b="1" i="0">
+              <a:rPr sz="1400" b="1" i="0">
                 <a:solidFill>
                   <a:srgbClr val="2E66C2"/>
                 </a:solidFill>
@@ -8968,8 +8968,8 @@
         </p:nvSpPr>
         <p:spPr>
           <a:xfrm>
-            <a:off x="457200" y="2011680"/>
-            <a:ext cx="7772400" cy="3108960"/>
+            <a:off x="457200" y="2057400"/>
+            <a:ext cx="11430000" cy="2743200"/>
           </a:xfrm>
           <a:prstGeom prst="rect">
             <a:avLst/>
@@ -8988,7 +8988,7 @@
               </a:spcAft>
             </a:pPr>
             <a:r>
-              <a:rPr sz="1000">
+              <a:rPr sz="1300">
                 <a:solidFill>
                   <a:srgbClr val="1F2A37"/>
                 </a:solidFill>
@@ -8997,13 +8997,13 @@
               <a:t>  smoke_test.py              </a:t>
             </a:r>
             <a:r>
-              <a:rPr sz="1000">
+              <a:rPr sz="1300">
                 <a:solidFill>
                   <a:srgbClr val="555F6E"/>
                 </a:solidFill>
                 <a:latin typeface="Courier New"/>
               </a:rPr>
-              <a:t># end-to-end sanity check</a:t>
+              <a:t># sanity check before benchmarking — loads OLMoE, generates one token</a:t>
             </a:r>
           </a:p>
           <a:p>
@@ -9013,7 +9013,7 @@
               </a:spcAft>
             </a:pPr>
             <a:r>
-              <a:rPr sz="1000">
+              <a:rPr sz="1300">
                 <a:solidFill>
                   <a:srgbClr val="1F2A37"/>
                 </a:solidFill>
@@ -9022,13 +9022,13 @@
               <a:t>  benchmark_latency.py       </a:t>
             </a:r>
             <a:r>
-              <a:rPr sz="1000">
+              <a:rPr sz="1300">
                 <a:solidFill>
                   <a:srgbClr val="555F6E"/>
                 </a:solidFill>
                 <a:latin typeface="Courier New"/>
               </a:rPr>
-              <a:t># TTFT/TPOT grid sweep (bf16 or --fp8)</a:t>
+              <a:t># direct-from-engine TTFT/TPOT (no HTTP overhead) — bf16, --fp8, --tp 2</a:t>
             </a:r>
           </a:p>
           <a:p>
@@ -9038,7 +9038,7 @@
               </a:spcAft>
             </a:pPr>
             <a:r>
-              <a:rPr sz="1000">
+              <a:rPr sz="1300">
                 <a:solidFill>
                   <a:srgbClr val="1F2A37"/>
                 </a:solidFill>
@@ -9047,13 +9047,13 @@
               <a:t>  profile_prefill.py         </a:t>
             </a:r>
             <a:r>
-              <a:rPr sz="1000">
+              <a:rPr sz="1300">
                 <a:solidFill>
                   <a:srgbClr val="555F6E"/>
                 </a:solidFill>
                 <a:latin typeface="Courier New"/>
               </a:rPr>
-              <a:t># torch.profiler trace, prefill-dominated</a:t>
+              <a:t># torch.profiler trace at L=1024 — kernel breakdown</a:t>
             </a:r>
           </a:p>
           <a:p>
@@ -9063,7 +9063,7 @@
               </a:spcAft>
             </a:pPr>
             <a:r>
-              <a:rPr sz="1000">
+              <a:rPr sz="1300">
                 <a:solidFill>
                   <a:srgbClr val="1F2A37"/>
                 </a:solidFill>
@@ -9072,13 +9072,13 @@
               <a:t>  profile_decode.py          </a:t>
             </a:r>
             <a:r>
-              <a:rPr sz="1000">
+              <a:rPr sz="1300">
                 <a:solidFill>
                   <a:srgbClr val="555F6E"/>
                 </a:solidFill>
                 <a:latin typeface="Courier New"/>
               </a:rPr>
-              <a:t># torch.profiler trace, decode-dominated</a:t>
+              <a:t># torch.profiler trace at I=1, O=128 — decode kernels</a:t>
             </a:r>
           </a:p>
           <a:p>
@@ -9088,22 +9088,22 @@
               </a:spcAft>
             </a:pPr>
             <a:r>
-              <a:rPr sz="1000">
+              <a:rPr sz="1300">
                 <a:solidFill>
                   <a:srgbClr val="1F2A37"/>
                 </a:solidFill>
                 <a:latin typeface="Courier New"/>
               </a:rPr>
-              <a:t>  eval_suite.py              </a:t>
-            </a:r>
-            <a:r>
-              <a:rPr sz="1000">
+              <a:t>  bench_prefix_caching.py    </a:t>
+            </a:r>
+            <a:r>
+              <a:rPr sz="1300">
                 <a:solidFill>
                   <a:srgbClr val="555F6E"/>
                 </a:solidFill>
                 <a:latin typeface="Courier New"/>
               </a:rPr>
-              <a:t># lm-evaluation-harness, bf16 vs FP8</a:t>
+              <a:t># caching via HTTP harness (bf16 / fp8 / tp2 combos)</a:t>
             </a:r>
           </a:p>
           <a:p>
@@ -9113,22 +9113,22 @@
               </a:spcAft>
             </a:pPr>
             <a:r>
-              <a:rPr sz="1000">
+              <a:rPr sz="1300">
                 <a:solidFill>
                   <a:srgbClr val="1F2A37"/>
                 </a:solidFill>
                 <a:latin typeface="Courier New"/>
               </a:rPr>
-              <a:t>  bench_compat_check.py      </a:t>
-            </a:r>
-            <a:r>
-              <a:rPr sz="1000">
+              <a:t>  bench_batching_decode.py   </a:t>
+            </a:r>
+            <a:r>
+              <a:rPr sz="1300">
                 <a:solidFill>
                   <a:srgbClr val="555F6E"/>
                 </a:solidFill>
                 <a:latin typeface="Courier New"/>
               </a:rPr>
-              <a:t># harness vs `vllm bench latency` reconciliation</a:t>
+              <a:t># tokens/sec and per-user TPOT across concurrency 1 → 128</a:t>
             </a:r>
           </a:p>
           <a:p>
@@ -9138,22 +9138,22 @@
               </a:spcAft>
             </a:pPr>
             <a:r>
-              <a:rPr sz="1000">
+              <a:rPr sz="1300">
                 <a:solidFill>
                   <a:srgbClr val="1F2A37"/>
                 </a:solidFill>
                 <a:latin typeface="Courier New"/>
               </a:rPr>
-              <a:t>  bench_prefix_caching.py    </a:t>
-            </a:r>
-            <a:r>
-              <a:rPr sz="1000">
+              <a:t>  eval_suite.py              </a:t>
+            </a:r>
+            <a:r>
+              <a:rPr sz="1300">
                 <a:solidFill>
                   <a:srgbClr val="555F6E"/>
                 </a:solidFill>
                 <a:latin typeface="Courier New"/>
               </a:rPr>
-              <a:t># prefix caching experiment</a:t>
+              <a:t># lm-evaluation-harness — FP8 accuracy on MMLU / GSM8K / ...</a:t>
             </a:r>
           </a:p>
           <a:p>
@@ -9163,24 +9163,82 @@
               </a:spcAft>
             </a:pPr>
             <a:r>
-              <a:rPr sz="1000">
+              <a:rPr sz="1300">
                 <a:solidFill>
                   <a:srgbClr val="1F2A37"/>
                 </a:solidFill>
                 <a:latin typeface="Courier New"/>
               </a:rPr>
-              <a:t>  bench_batching.py          </a:t>
-            </a:r>
-            <a:r>
-              <a:rPr sz="1000">
+              <a:t>  harness/                   </a:t>
+            </a:r>
+            <a:r>
+              <a:rPr sz="1300">
                 <a:solidFill>
                   <a:srgbClr val="555F6E"/>
                 </a:solidFill>
                 <a:latin typeface="Courier New"/>
               </a:rPr>
-              <a:t># ShareGPT concurrent workload</a:t>
-            </a:r>
-          </a:p>
+              <a:t># engine-agnostic vLLM-server launcher + HTTP client</a:t>
+            </a:r>
+          </a:p>
+        </p:txBody>
+      </p:sp>
+      <p:sp>
+        <p:nvSpPr>
+          <p:cNvPr id="7" name="TextBox 6"/>
+          <p:cNvSpPr txBox="1"/>
+          <p:nvPr/>
+        </p:nvSpPr>
+        <p:spPr>
+          <a:xfrm>
+            <a:off x="457200" y="4937760"/>
+            <a:ext cx="10972800" cy="274320"/>
+          </a:xfrm>
+          <a:prstGeom prst="rect">
+            <a:avLst/>
+          </a:prstGeom>
+          <a:noFill/>
+        </p:spPr>
+        <p:txBody>
+          <a:bodyPr wrap="square" lIns="0" rIns="0" tIns="0" bIns="0">
+            <a:spAutoFit/>
+          </a:bodyPr>
+          <a:lstStyle/>
+          <a:p>
+            <a:pPr algn="l"/>
+            <a:r>
+              <a:rPr sz="1400" b="1" i="0">
+                <a:solidFill>
+                  <a:srgbClr val="2E66C2"/>
+                </a:solidFill>
+                <a:latin typeface="Calibri"/>
+              </a:rPr>
+              <a:t>results/</a:t>
+            </a:r>
+          </a:p>
+        </p:txBody>
+      </p:sp>
+      <p:sp>
+        <p:nvSpPr>
+          <p:cNvPr id="8" name="TextBox 7"/>
+          <p:cNvSpPr txBox="1"/>
+          <p:nvPr/>
+        </p:nvSpPr>
+        <p:spPr>
+          <a:xfrm>
+            <a:off x="457200" y="5303520"/>
+            <a:ext cx="11430000" cy="1005840"/>
+          </a:xfrm>
+          <a:prstGeom prst="rect">
+            <a:avLst/>
+          </a:prstGeom>
+          <a:noFill/>
+        </p:spPr>
+        <p:txBody>
+          <a:bodyPr wrap="none" lIns="0" rIns="0" tIns="0" bIns="0">
+            <a:spAutoFit/>
+          </a:bodyPr>
+          <a:lstStyle/>
           <a:p>
             <a:pPr algn="l">
               <a:spcAft>
@@ -9188,22 +9246,22 @@
               </a:spcAft>
             </a:pPr>
             <a:r>
-              <a:rPr sz="1000">
+              <a:rPr sz="1300">
                 <a:solidFill>
                   <a:srgbClr val="1F2A37"/>
                 </a:solidFill>
                 <a:latin typeface="Courier New"/>
               </a:rPr>
-              <a:t>  bench_batching_decode.py   </a:t>
-            </a:r>
-            <a:r>
-              <a:rPr sz="1000">
+              <a:t>  baseline_*.json            </a:t>
+            </a:r>
+            <a:r>
+              <a:rPr sz="1300">
                 <a:solidFill>
                   <a:srgbClr val="555F6E"/>
                 </a:solidFill>
                 <a:latin typeface="Courier New"/>
               </a:rPr>
-              <a:t># pure-decode concurrent workload</a:t>
+              <a:t># bf16 / FP8 / TP=2 latency cells (one JSON per L × O)</a:t>
             </a:r>
           </a:p>
           <a:p>
@@ -9213,22 +9271,22 @@
               </a:spcAft>
             </a:pPr>
             <a:r>
-              <a:rPr sz="1000">
+              <a:rPr sz="1300">
                 <a:solidFill>
                   <a:srgbClr val="1F2A37"/>
                 </a:solidFill>
                 <a:latin typeface="Courier New"/>
               </a:rPr>
-              <a:t>  build_deck.py              </a:t>
-            </a:r>
-            <a:r>
-              <a:rPr sz="1000">
+              <a:t>  harness/                   </a:t>
+            </a:r>
+            <a:r>
+              <a:rPr sz="1300">
                 <a:solidFill>
                   <a:srgbClr val="555F6E"/>
                 </a:solidFill>
                 <a:latin typeface="Courier New"/>
               </a:rPr>
-              <a:t># talk/deck.pptx generator</a:t>
+              <a:t># HTTP-harness outputs (prefix caching, batching)</a:t>
             </a:r>
           </a:p>
           <a:p>
@@ -9238,22 +9296,22 @@
               </a:spcAft>
             </a:pPr>
             <a:r>
-              <a:rPr sz="1000">
+              <a:rPr sz="1300">
                 <a:solidFill>
                   <a:srgbClr val="1F2A37"/>
                 </a:solidFill>
                 <a:latin typeface="Courier New"/>
               </a:rPr>
-              <a:t>  harness/                   </a:t>
-            </a:r>
-            <a:r>
-              <a:rPr sz="1000">
+              <a:t>  profile/                   </a:t>
+            </a:r>
+            <a:r>
+              <a:rPr sz="1300">
                 <a:solidFill>
                   <a:srgbClr val="555F6E"/>
                 </a:solidFill>
                 <a:latin typeface="Courier New"/>
               </a:rPr>
-              <a:t># vLLM-server launcher + streaming HTTP client</a:t>
+              <a:t># torch.profiler traces + per-kernel summaries</a:t>
             </a:r>
           </a:p>
           <a:p>
@@ -9263,140 +9321,7 @@
               </a:spcAft>
             </a:pPr>
             <a:r>
-              <a:rPr sz="1000">
-                <a:solidFill>
-                  <a:srgbClr val="1F2A37"/>
-                </a:solidFill>
-                <a:latin typeface="Courier New"/>
-              </a:rPr>
-              <a:t>  plots/                     </a:t>
-            </a:r>
-            <a:r>
-              <a:rPr sz="1000">
-                <a:solidFill>
-                  <a:srgbClr val="555F6E"/>
-                </a:solidFill>
-                <a:latin typeface="Courier New"/>
-              </a:rPr>
-              <a:t># matplotlib figure generators</a:t>
-            </a:r>
-          </a:p>
-        </p:txBody>
-      </p:sp>
-      <p:sp>
-        <p:nvSpPr>
-          <p:cNvPr id="7" name="TextBox 6"/>
-          <p:cNvSpPr txBox="1"/>
-          <p:nvPr/>
-        </p:nvSpPr>
-        <p:spPr>
-          <a:xfrm>
-            <a:off x="457200" y="4983480"/>
-            <a:ext cx="5943600" cy="274320"/>
-          </a:xfrm>
-          <a:prstGeom prst="rect">
-            <a:avLst/>
-          </a:prstGeom>
-          <a:noFill/>
-        </p:spPr>
-        <p:txBody>
-          <a:bodyPr wrap="square" lIns="0" rIns="0" tIns="0" bIns="0">
-            <a:spAutoFit/>
-          </a:bodyPr>
-          <a:lstStyle/>
-          <a:p>
-            <a:pPr algn="l"/>
-            <a:r>
-              <a:rPr sz="1200" b="1" i="0">
-                <a:solidFill>
-                  <a:srgbClr val="2E66C2"/>
-                </a:solidFill>
-                <a:latin typeface="Calibri"/>
-              </a:rPr>
-              <a:t>results/</a:t>
-            </a:r>
-          </a:p>
-        </p:txBody>
-      </p:sp>
-      <p:sp>
-        <p:nvSpPr>
-          <p:cNvPr id="8" name="TextBox 7"/>
-          <p:cNvSpPr txBox="1"/>
-          <p:nvPr/>
-        </p:nvSpPr>
-        <p:spPr>
-          <a:xfrm>
-            <a:off x="457200" y="5303520"/>
-            <a:ext cx="7772400" cy="1097280"/>
-          </a:xfrm>
-          <a:prstGeom prst="rect">
-            <a:avLst/>
-          </a:prstGeom>
-          <a:noFill/>
-        </p:spPr>
-        <p:txBody>
-          <a:bodyPr wrap="none" lIns="0" rIns="0" tIns="0" bIns="0">
-            <a:spAutoFit/>
-          </a:bodyPr>
-          <a:lstStyle/>
-          <a:p>
-            <a:pPr algn="l">
-              <a:spcAft>
-                <a:spcPts val="0"/>
-              </a:spcAft>
-            </a:pPr>
-            <a:r>
-              <a:rPr sz="1000">
-                <a:solidFill>
-                  <a:srgbClr val="1F2A37"/>
-                </a:solidFill>
-                <a:latin typeface="Courier New"/>
-              </a:rPr>
-              <a:t>  baseline_*.json            </a:t>
-            </a:r>
-            <a:r>
-              <a:rPr sz="1000">
-                <a:solidFill>
-                  <a:srgbClr val="555F6E"/>
-                </a:solidFill>
-                <a:latin typeface="Courier New"/>
-              </a:rPr>
-              <a:t># bf16 latency cells</a:t>
-            </a:r>
-          </a:p>
-          <a:p>
-            <a:pPr algn="l">
-              <a:spcAft>
-                <a:spcPts val="0"/>
-              </a:spcAft>
-            </a:pPr>
-            <a:r>
-              <a:rPr sz="1000">
-                <a:solidFill>
-                  <a:srgbClr val="1F2A37"/>
-                </a:solidFill>
-                <a:latin typeface="Courier New"/>
-              </a:rPr>
-              <a:t>  fp8_*.json                 </a:t>
-            </a:r>
-            <a:r>
-              <a:rPr sz="1000">
-                <a:solidFill>
-                  <a:srgbClr val="555F6E"/>
-                </a:solidFill>
-                <a:latin typeface="Courier New"/>
-              </a:rPr>
-              <a:t># FP8 latency cells</a:t>
-            </a:r>
-          </a:p>
-          <a:p>
-            <a:pPr algn="l">
-              <a:spcAft>
-                <a:spcPts val="0"/>
-              </a:spcAft>
-            </a:pPr>
-            <a:r>
-              <a:rPr sz="1000">
+              <a:rPr sz="1300">
                 <a:solidFill>
                   <a:srgbClr val="1F2A37"/>
                 </a:solidFill>
@@ -9405,63 +9330,13 @@
               <a:t>  eval/                      </a:t>
             </a:r>
             <a:r>
-              <a:rPr sz="1000">
+              <a:rPr sz="1300">
                 <a:solidFill>
                   <a:srgbClr val="555F6E"/>
                 </a:solidFill>
                 <a:latin typeface="Courier New"/>
               </a:rPr>
-              <a:t># lm-evaluation-harness outputs</a:t>
-            </a:r>
-          </a:p>
-          <a:p>
-            <a:pPr algn="l">
-              <a:spcAft>
-                <a:spcPts val="0"/>
-              </a:spcAft>
-            </a:pPr>
-            <a:r>
-              <a:rPr sz="1000">
-                <a:solidFill>
-                  <a:srgbClr val="1F2A37"/>
-                </a:solidFill>
-                <a:latin typeface="Courier New"/>
-              </a:rPr>
-              <a:t>  harness/                   </a:t>
-            </a:r>
-            <a:r>
-              <a:rPr sz="1000">
-                <a:solidFill>
-                  <a:srgbClr val="555F6E"/>
-                </a:solidFill>
-                <a:latin typeface="Courier New"/>
-              </a:rPr>
-              <a:t># HTTP-harness outputs (prefix, batching)</a:t>
-            </a:r>
-          </a:p>
-          <a:p>
-            <a:pPr algn="l">
-              <a:spcAft>
-                <a:spcPts val="0"/>
-              </a:spcAft>
-            </a:pPr>
-            <a:r>
-              <a:rPr sz="1000">
-                <a:solidFill>
-                  <a:srgbClr val="1F2A37"/>
-                </a:solidFill>
-                <a:latin typeface="Courier New"/>
-              </a:rPr>
-              <a:t>  profile/                   </a:t>
-            </a:r>
-            <a:r>
-              <a:rPr sz="1000">
-                <a:solidFill>
-                  <a:srgbClr val="555F6E"/>
-                </a:solidFill>
-                <a:latin typeface="Courier New"/>
-              </a:rPr>
-              <a:t># torch.profiler traces + kernel summaries</a:t>
+              <a:t># lm-evaluation-harness raw outputs</a:t>
             </a:r>
           </a:p>
         </p:txBody>

--- a/talk/deck.pptx
+++ b/talk/deck.pptx
@@ -5628,13 +5628,13 @@
           <a:p>
             <a:pPr algn="l"/>
             <a:r>
-              <a:rPr sz="4000" b="1" i="0">
+              <a:rPr sz="4800" b="1" i="0">
                 <a:solidFill>
                   <a:srgbClr val="1F2A37"/>
                 </a:solidFill>
                 <a:latin typeface="Calibri"/>
               </a:rPr>
-              <a:t>Unblock the chat application production launch</a:t>
+              <a:t>Ship the chat assistant</a:t>
             </a:r>
           </a:p>
         </p:txBody>

--- a/talk/deck.pptx
+++ b/talk/deck.pptx
@@ -10682,7 +10682,7 @@
                           </a:solidFill>
                           <a:latin typeface="Calibri"/>
                         </a:rPr>
-                        <a:t>40% TTFT cut on shared prompts</a:t>
+                        <a:t>30% TTFT cut on shared prompts (L=1500)</a:t>
                       </a:r>
                     </a:p>
                   </a:txBody>
@@ -17739,7 +17739,7 @@
                           </a:solidFill>
                           <a:latin typeface="Calibri"/>
                         </a:rPr>
-                        <a:t>TTFT 30% faster on shared prompts (P=2048)</a:t>
+                        <a:t>TTFT 30% faster on shared prompts (L=1500)</a:t>
                       </a:r>
                     </a:p>
                   </a:txBody>

--- a/talk/deck.pptx
+++ b/talk/deck.pptx
@@ -14936,8 +14936,8 @@
         </p:nvSpPr>
         <p:spPr>
           <a:xfrm>
-            <a:off x="548640" y="4434840"/>
-            <a:ext cx="5486400" cy="274320"/>
+            <a:off x="457200" y="4160520"/>
+            <a:ext cx="11247120" cy="320040"/>
           </a:xfrm>
           <a:prstGeom prst="rect">
             <a:avLst/>
@@ -14952,13 +14952,13 @@
           <a:p>
             <a:pPr algn="l"/>
             <a:r>
-              <a:rPr sz="1100" b="1" i="0">
-                <a:solidFill>
-                  <a:srgbClr val="2E66C2"/>
+              <a:rPr sz="1200" b="0" i="1">
+                <a:solidFill>
+                  <a:srgbClr val="555F6E"/>
                 </a:solidFill>
                 <a:latin typeface="Calibri"/>
               </a:rPr>
-              <a:t>FIRST-PRINCIPLES MATH</a:t>
+              <a:t>Cached once per unique prefix, reused across every session that shares it — not per request, not per user.</a:t>
             </a:r>
           </a:p>
         </p:txBody>
@@ -14971,8 +14971,8 @@
         </p:nvSpPr>
         <p:spPr>
           <a:xfrm>
-            <a:off x="548640" y="4754880"/>
-            <a:ext cx="5486400" cy="1280160"/>
+            <a:off x="548640" y="4526280"/>
+            <a:ext cx="5486400" cy="274320"/>
           </a:xfrm>
           <a:prstGeom prst="rect">
             <a:avLst/>
@@ -14987,23 +14987,13 @@
           <a:p>
             <a:pPr algn="l"/>
             <a:r>
-              <a:rPr sz="1200" b="0" i="0">
-                <a:solidFill>
-                  <a:srgbClr val="555F6E"/>
+              <a:rPr sz="1100" b="1" i="0">
+                <a:solidFill>
+                  <a:srgbClr val="2E66C2"/>
                 </a:solidFill>
                 <a:latin typeface="Calibri"/>
               </a:rPr>
-              <a:t>Per token of cached prefix:</a:t>
-            </a:r>
-          </a:p>
-          <a:p>
-            <a:r>
-              <a:t>16 layers × 2 (K + V) × 16 heads × 128 d_head × 2 bytes (bf16)</a:t>
-            </a:r>
-          </a:p>
-          <a:p>
-            <a:r>
-              <a:t>= 131,072 bytes = 128 KiB / token</a:t>
+              <a:t>FIRST-PRINCIPLES MATH</a:t>
             </a:r>
           </a:p>
         </p:txBody>
@@ -15016,8 +15006,8 @@
         </p:nvSpPr>
         <p:spPr>
           <a:xfrm>
-            <a:off x="6400800" y="4434840"/>
-            <a:ext cx="5486400" cy="274320"/>
+            <a:off x="548640" y="4846320"/>
+            <a:ext cx="5486400" cy="1280160"/>
           </a:xfrm>
           <a:prstGeom prst="rect">
             <a:avLst/>
@@ -15032,13 +15022,23 @@
           <a:p>
             <a:pPr algn="l"/>
             <a:r>
-              <a:rPr sz="1100" b="1" i="0">
-                <a:solidFill>
-                  <a:srgbClr val="2E66C2"/>
+              <a:rPr sz="1200" b="0" i="0">
+                <a:solidFill>
+                  <a:srgbClr val="555F6E"/>
                 </a:solidFill>
                 <a:latin typeface="Calibri"/>
               </a:rPr>
-              <a:t>MEASURED ON g7e.12xlarge</a:t>
+              <a:t>Per token of cached prefix:</a:t>
+            </a:r>
+          </a:p>
+          <a:p>
+            <a:r>
+              <a:t>16 layers × 2 (K + V) × 16 heads × 128 d_head × 2 bytes (bf16)</a:t>
+            </a:r>
+          </a:p>
+          <a:p>
+            <a:r>
+              <a:t>= 131,072 bytes = 128 KiB / token</a:t>
             </a:r>
           </a:p>
         </p:txBody>
@@ -15051,8 +15051,8 @@
         </p:nvSpPr>
         <p:spPr>
           <a:xfrm>
-            <a:off x="6400800" y="4754880"/>
-            <a:ext cx="5486400" cy="1280160"/>
+            <a:off x="6400800" y="4526280"/>
+            <a:ext cx="5486400" cy="274320"/>
           </a:xfrm>
           <a:prstGeom prst="rect">
             <a:avLst/>
@@ -15067,18 +15067,13 @@
           <a:p>
             <a:pPr algn="l"/>
             <a:r>
-              <a:rPr sz="1200" b="0" i="0">
-                <a:solidFill>
-                  <a:srgbClr val="555F6E"/>
+              <a:rPr sz="1100" b="1" i="0">
+                <a:solidFill>
+                  <a:srgbClr val="2E66C2"/>
                 </a:solidFill>
                 <a:latin typeface="Calibri"/>
               </a:rPr>
-              <a:t>Total KV cache budget: 545,184 tokens (~73 GiB) at gpu_mem_util=0.85.</a:t>
-            </a:r>
-          </a:p>
-          <a:p>
-            <a:r>
-              <a:t>Even L=1500 uses &lt; 0.3% of the budget. Memory is not the constraint.</a:t>
+              <a:t>MEASURED ON g7e.12xlarge</a:t>
             </a:r>
           </a:p>
         </p:txBody>
@@ -15091,8 +15086,8 @@
         </p:nvSpPr>
         <p:spPr>
           <a:xfrm>
-            <a:off x="548640" y="6126480"/>
-            <a:ext cx="11247120" cy="548640"/>
+            <a:off x="6400800" y="4846320"/>
+            <a:ext cx="5486400" cy="1280160"/>
           </a:xfrm>
           <a:prstGeom prst="rect">
             <a:avLst/>
@@ -15107,13 +15102,18 @@
           <a:p>
             <a:pPr algn="l"/>
             <a:r>
-              <a:rPr sz="1000" b="0" i="1">
+              <a:rPr sz="1200" b="0" i="0">
                 <a:solidFill>
                   <a:srgbClr val="555F6E"/>
                 </a:solidFill>
                 <a:latin typeface="Calibri"/>
               </a:rPr>
-              <a:t>vLLM gauge `vllm:kv_cache_usage_perc` reads 0.000% at every L (rounded; sub-1% allocations are below the gauge's reporting precision). Hit rate and prompt_tokens_cached counters confirm the cache is allocating and reusing prefixes as expected.</a:t>
+              <a:t>Total KV cache budget: 545,184 tokens (~73 GiB) at gpu_mem_util=0.85.</a:t>
+            </a:r>
+          </a:p>
+          <a:p>
+            <a:r>
+              <a:t>Even L=1500 uses &lt; 0.3% of the budget. Memory is not the constraint.</a:t>
             </a:r>
           </a:p>
         </p:txBody>
@@ -15126,8 +15126,8 @@
         </p:nvSpPr>
         <p:spPr>
           <a:xfrm>
-            <a:off x="548640" y="6446520"/>
-            <a:ext cx="9144000" cy="274320"/>
+            <a:off x="548640" y="6172200"/>
+            <a:ext cx="11247120" cy="502920"/>
           </a:xfrm>
           <a:prstGeom prst="rect">
             <a:avLst/>
@@ -15142,6 +15142,41 @@
           <a:p>
             <a:pPr algn="l"/>
             <a:r>
+              <a:rPr sz="1000" b="0" i="1">
+                <a:solidFill>
+                  <a:srgbClr val="555F6E"/>
+                </a:solidFill>
+                <a:latin typeface="Calibri"/>
+              </a:rPr>
+              <a:t>vLLM gauge `vllm:kv_cache_usage_perc` reads 0.000% at every L (rounded; sub-1% allocations are below the gauge's reporting precision). Hit rate and prompt_tokens_cached counters confirm the cache is allocating and reusing prefixes as expected.</a:t>
+            </a:r>
+          </a:p>
+        </p:txBody>
+      </p:sp>
+      <p:sp>
+        <p:nvSpPr>
+          <p:cNvPr id="12" name="TextBox 11"/>
+          <p:cNvSpPr txBox="1"/>
+          <p:nvPr/>
+        </p:nvSpPr>
+        <p:spPr>
+          <a:xfrm>
+            <a:off x="548640" y="6446520"/>
+            <a:ext cx="9144000" cy="274320"/>
+          </a:xfrm>
+          <a:prstGeom prst="rect">
+            <a:avLst/>
+          </a:prstGeom>
+          <a:noFill/>
+        </p:spPr>
+        <p:txBody>
+          <a:bodyPr wrap="square" lIns="0" rIns="0" tIns="0" bIns="0">
+            <a:spAutoFit/>
+          </a:bodyPr>
+          <a:lstStyle/>
+          <a:p>
+            <a:pPr algn="l"/>
+            <a:r>
               <a:rPr sz="1000" b="0" i="0">
                 <a:solidFill>
                   <a:srgbClr val="555F6E"/>
@@ -15155,7 +15190,7 @@
       </p:sp>
       <p:sp>
         <p:nvSpPr>
-          <p:cNvPr id="12" name="TextBox 11"/>
+          <p:cNvPr id="13" name="TextBox 12"/>
           <p:cNvSpPr txBox="1"/>
           <p:nvPr/>
         </p:nvSpPr>

--- a/talk/deck.pptx
+++ b/talk/deck.pptx
@@ -17353,6 +17353,22 @@
                 <a:latin typeface="Calibri"/>
               </a:rPr>
               <a:t>•  Levers live above the kernels: quantization, caching, batching, parallelism</a:t>
+            </a:r>
+          </a:p>
+          <a:p>
+            <a:pPr algn="l">
+              <a:spcAft>
+                <a:spcPts val="600"/>
+              </a:spcAft>
+            </a:pPr>
+            <a:r>
+              <a:rPr sz="1400">
+                <a:solidFill>
+                  <a:srgbClr val="1F2A37"/>
+                </a:solidFill>
+                <a:latin typeface="Calibri"/>
+              </a:rPr>
+              <a:t>•  A custom kernel here would also raise TCO — ongoing maintenance against vLLM and CUDA upgrades</a:t>
             </a:r>
           </a:p>
         </p:txBody>

--- a/talk/deck.pptx
+++ b/talk/deck.pptx
@@ -1249,7 +1249,7 @@
           <a:p/>
           <a:p>
             <a:r>
-              <a:t>Prefix caching: only helps when prompts share prefixes. Sizing the KV cache and monitoring hit rate keeps it honest in production.</a:t>
+              <a:t>Prefix caching: only helps when prompts share prefixes. Footprint is per unique prefix (128 KiB / token), not per user — one shared system prompt costs the same whether 1 or 10,000 users hit it. What drives the cost is prompt length, and (in multi-tenant setups) the number of distinct prefixes cached in parallel. Size the KV cache to prompt length and monitor hit rate.</a:t>
             </a:r>
           </a:p>
           <a:p/>
@@ -10704,7 +10704,7 @@
                           </a:solidFill>
                           <a:latin typeface="Calibri"/>
                         </a:rPr>
-                        <a:t>Cache miss = no benefit; memory overhead</a:t>
+                        <a:t>Cache miss = no benefit; footprint scales with prompt length (not user count when prefixes are shared)</a:t>
                       </a:r>
                     </a:p>
                   </a:txBody>
@@ -10726,7 +10726,7 @@
                           </a:solidFill>
                           <a:latin typeface="Calibri"/>
                         </a:rPr>
-                        <a:t>Size KV cache to workload; monitor hit rate</a:t>
+                        <a:t>Size KV cache to prompt length; monitor hit rate</a:t>
                       </a:r>
                     </a:p>
                   </a:txBody>
